--- a/kvcache/unified_kv_memory/提前验证方案设计/验证计划方案设计/开发人员串讲PPT/00_统一异构KVCache存储池_提前验证全景与开发串讲完整版.pptx
+++ b/kvcache/unified_kv_memory/提前验证方案设计/验证计划方案设计/开发人员串讲PPT/00_统一异构KVCache存储池_提前验证全景与开发串讲完整版.pptx
@@ -4,23 +4,26 @@
   <p:sldMasterIdLst>
     <p:sldMasterId id="2147483648" r:id="rId1"/>
   </p:sldMasterIdLst>
+  <p:notesMasterIdLst>
+    <p:notesMasterId r:id="rId16"/>
+  </p:notesMasterIdLst>
   <p:sldIdLst>
-    <p:sldId id="256" r:id="rId7"/>
-    <p:sldId id="257" r:id="rId9"/>
-    <p:sldId id="258" r:id="rId10"/>
-    <p:sldId id="259" r:id="rId11"/>
-    <p:sldId id="260" r:id="rId12"/>
-    <p:sldId id="261" r:id="rId13"/>
-    <p:sldId id="262" r:id="rId14"/>
-    <p:sldId id="263" r:id="rId15"/>
-    <p:sldId id="264" r:id="rId16"/>
-    <p:sldId id="265" r:id="rId17"/>
-    <p:sldId id="266" r:id="rId18"/>
-    <p:sldId id="267" r:id="rId19"/>
-    <p:sldId id="268" r:id="rId20"/>
-    <p:sldId id="269" r:id="rId21"/>
+    <p:sldId id="256" r:id="rId2"/>
+    <p:sldId id="257" r:id="rId3"/>
+    <p:sldId id="258" r:id="rId4"/>
+    <p:sldId id="259" r:id="rId5"/>
+    <p:sldId id="260" r:id="rId6"/>
+    <p:sldId id="261" r:id="rId7"/>
+    <p:sldId id="262" r:id="rId8"/>
+    <p:sldId id="263" r:id="rId9"/>
+    <p:sldId id="264" r:id="rId10"/>
+    <p:sldId id="265" r:id="rId11"/>
+    <p:sldId id="266" r:id="rId12"/>
+    <p:sldId id="267" r:id="rId13"/>
+    <p:sldId id="268" r:id="rId14"/>
+    <p:sldId id="269" r:id="rId15"/>
   </p:sldIdLst>
-  <p:sldSz cx="12191695" cy="6858000" type="screen4x3"/>
+  <p:sldSz cx="12192000" cy="6858000"/>
   <p:notesSz cx="6858000" cy="9144000"/>
   <p:defaultTextStyle>
     <a:defPPr>
@@ -117,11 +120,27 @@
       </a:defRPr>
     </a:lvl9pPr>
   </p:defaultTextStyle>
+  <p:extLst>
+    <p:ext uri="{EFAFB233-063F-42B5-8137-9DF3F51BA10A}">
+      <p15:sldGuideLst xmlns:p15="http://schemas.microsoft.com/office/powerpoint/2012/main">
+        <p15:guide id="1" orient="horz" pos="2160">
+          <p15:clr>
+            <a:srgbClr val="A4A3A4"/>
+          </p15:clr>
+        </p15:guide>
+        <p15:guide id="2" pos="2880">
+          <p15:clr>
+            <a:srgbClr val="A4A3A4"/>
+          </p15:clr>
+        </p15:guide>
+      </p15:sldGuideLst>
+    </p:ext>
+  </p:extLst>
 </p:presentation>
 </file>
 
 <file path=ppt/notesMasters/notesMaster1.xml><?xml version="1.0" encoding="utf-8"?>
-<p:notesMaster xmlns:a="http://schemas.openxmlformats.org/drawingml/2006/main" xmlns:p="http://schemas.openxmlformats.org/presentationml/2006/main" xmlns:r="http://schemas.openxmlformats.org/officeDocument/2006/relationships">
+<p:notesMaster xmlns:a="http://schemas.openxmlformats.org/drawingml/2006/main" xmlns:r="http://schemas.openxmlformats.org/officeDocument/2006/relationships" xmlns:p="http://schemas.openxmlformats.org/presentationml/2006/main">
   <p:cSld>
     <p:bg>
       <p:bgRef idx="1001">
@@ -142,241 +161,16 @@
           <a:chExt cx="0" cy="0"/>
         </a:xfrm>
       </p:grpSpPr>
-      <p:sp>
-        <p:nvSpPr>
-          <p:cNvPr id="2" name="Header Placeholder 1"/>
-          <p:cNvSpPr>
-            <a:spLocks noGrp="1"/>
-          </p:cNvSpPr>
-          <p:nvPr>
-            <p:ph type="hdr" sz="quarter"/>
-          </p:nvPr>
-        </p:nvSpPr>
-        <p:spPr>
-          <a:xfrm>
-            <a:off x="0" y="0"/>
-            <a:ext cx="2971800" cy="457200"/>
-          </a:xfrm>
-          <a:prstGeom prst="rect">
-            <a:avLst/>
-          </a:prstGeom>
-        </p:spPr>
-        <p:txBody>
-          <a:bodyPr vert="horz" lIns="91440" tIns="45720" rIns="91440" bIns="45720" rtlCol="0"/>
-          <a:lstStyle>
-            <a:lvl1pPr algn="l">
-              <a:defRPr sz="1200"/>
-            </a:lvl1pPr>
-          </a:lstStyle>
-          <a:p>
-            <a:endParaRPr lang="en-US"/>
-          </a:p>
-        </p:txBody>
-      </p:sp>
-      <p:sp>
-        <p:nvSpPr>
-          <p:cNvPr id="3" name="Date Placeholder 2"/>
-          <p:cNvSpPr>
-            <a:spLocks noGrp="1"/>
-          </p:cNvSpPr>
-          <p:nvPr>
-            <p:ph type="dt" idx="1"/>
-          </p:nvPr>
-        </p:nvSpPr>
-        <p:spPr>
-          <a:xfrm>
-            <a:off x="3884613" y="0"/>
-            <a:ext cx="2971800" cy="457200"/>
-          </a:xfrm>
-          <a:prstGeom prst="rect">
-            <a:avLst/>
-          </a:prstGeom>
-        </p:spPr>
-        <p:txBody>
-          <a:bodyPr vert="horz" lIns="91440" tIns="45720" rIns="91440" bIns="45720" rtlCol="0"/>
-          <a:lstStyle>
-            <a:lvl1pPr algn="r">
-              <a:defRPr sz="1200"/>
-            </a:lvl1pPr>
-          </a:lstStyle>
-          <a:p>
-            <a:fld id="{0F89C1C7-3DCD-1040-A9CF-14679D8B5DDD}" type="datetimeFigureOut">
-              <a:rPr lang="en-US" smtClean="0"/>
-              <a:t>10/17/16</a:t>
-            </a:fld>
-            <a:endParaRPr lang="en-US"/>
-          </a:p>
-        </p:txBody>
-      </p:sp>
-      <p:sp>
-        <p:nvSpPr>
-          <p:cNvPr id="4" name="Slide Image Placeholder 3"/>
-          <p:cNvSpPr>
-            <a:spLocks noGrp="1" noRot="1" noChangeAspect="1"/>
-          </p:cNvSpPr>
-          <p:nvPr>
-            <p:ph type="sldImg" idx="2"/>
-          </p:nvPr>
-        </p:nvSpPr>
-        <p:spPr>
-          <a:xfrm>
-            <a:off x="1143000" y="685800"/>
-            <a:ext cx="4572000" cy="3429000"/>
-          </a:xfrm>
-          <a:prstGeom prst="rect">
-            <a:avLst/>
-          </a:prstGeom>
-          <a:noFill/>
-          <a:ln w="12700">
-            <a:solidFill>
-              <a:prstClr val="black"/>
-            </a:solidFill>
-          </a:ln>
-        </p:spPr>
-        <p:txBody>
-          <a:bodyPr vert="horz" lIns="91440" tIns="45720" rIns="91440" bIns="45720" rtlCol="0" anchor="ctr"/>
-          <a:lstStyle/>
-          <a:p>
-            <a:endParaRPr lang="en-US"/>
-          </a:p>
-        </p:txBody>
-      </p:sp>
-      <p:sp>
-        <p:nvSpPr>
-          <p:cNvPr id="5" name="Notes Placeholder 4"/>
-          <p:cNvSpPr>
-            <a:spLocks noGrp="1"/>
-          </p:cNvSpPr>
-          <p:nvPr>
-            <p:ph type="body" sz="quarter" idx="3"/>
-          </p:nvPr>
-        </p:nvSpPr>
-        <p:spPr>
-          <a:xfrm>
-            <a:off x="685800" y="4343400"/>
-            <a:ext cx="5486400" cy="4114800"/>
-          </a:xfrm>
-          <a:prstGeom prst="rect">
-            <a:avLst/>
-          </a:prstGeom>
-        </p:spPr>
-        <p:txBody>
-          <a:bodyPr vert="horz" lIns="91440" tIns="45720" rIns="91440" bIns="45720" rtlCol="0"/>
-          <a:lstStyle/>
-          <a:p>
-            <a:pPr lvl="0"/>
-            <a:r>
-              <a:rPr lang="en-US" smtClean="0"/>
-              <a:t>Click to edit Master text styles</a:t>
-            </a:r>
-          </a:p>
-          <a:p>
-            <a:pPr lvl="1"/>
-            <a:r>
-              <a:rPr lang="en-US" smtClean="0"/>
-              <a:t>Second level</a:t>
-            </a:r>
-          </a:p>
-          <a:p>
-            <a:pPr lvl="2"/>
-            <a:r>
-              <a:rPr lang="en-US" smtClean="0"/>
-              <a:t>Third level</a:t>
-            </a:r>
-          </a:p>
-          <a:p>
-            <a:pPr lvl="3"/>
-            <a:r>
-              <a:rPr lang="en-US" smtClean="0"/>
-              <a:t>Fourth level</a:t>
-            </a:r>
-          </a:p>
-          <a:p>
-            <a:pPr lvl="4"/>
-            <a:r>
-              <a:rPr lang="en-US" smtClean="0"/>
-              <a:t>Fifth level</a:t>
-            </a:r>
-            <a:endParaRPr lang="en-US"/>
-          </a:p>
-        </p:txBody>
-      </p:sp>
-      <p:sp>
-        <p:nvSpPr>
-          <p:cNvPr id="6" name="Footer Placeholder 5"/>
-          <p:cNvSpPr>
-            <a:spLocks noGrp="1"/>
-          </p:cNvSpPr>
-          <p:nvPr>
-            <p:ph type="ftr" sz="quarter" idx="4"/>
-          </p:nvPr>
-        </p:nvSpPr>
-        <p:spPr>
-          <a:xfrm>
-            <a:off x="0" y="8685213"/>
-            <a:ext cx="2971800" cy="457200"/>
-          </a:xfrm>
-          <a:prstGeom prst="rect">
-            <a:avLst/>
-          </a:prstGeom>
-        </p:spPr>
-        <p:txBody>
-          <a:bodyPr vert="horz" lIns="91440" tIns="45720" rIns="91440" bIns="45720" rtlCol="0" anchor="b"/>
-          <a:lstStyle>
-            <a:lvl1pPr algn="l">
-              <a:defRPr sz="1200"/>
-            </a:lvl1pPr>
-          </a:lstStyle>
-          <a:p>
-            <a:endParaRPr lang="en-US"/>
-          </a:p>
-        </p:txBody>
-      </p:sp>
-      <p:sp>
-        <p:nvSpPr>
-          <p:cNvPr id="7" name="Slide Number Placeholder 6"/>
-          <p:cNvSpPr>
-            <a:spLocks noGrp="1"/>
-          </p:cNvSpPr>
-          <p:nvPr>
-            <p:ph type="sldNum" sz="quarter" idx="5"/>
-          </p:nvPr>
-        </p:nvSpPr>
-        <p:spPr>
-          <a:xfrm>
-            <a:off x="3884613" y="8685213"/>
-            <a:ext cx="2971800" cy="457200"/>
-          </a:xfrm>
-          <a:prstGeom prst="rect">
-            <a:avLst/>
-          </a:prstGeom>
-        </p:spPr>
-        <p:txBody>
-          <a:bodyPr vert="horz" lIns="91440" tIns="45720" rIns="91440" bIns="45720" rtlCol="0" anchor="b"/>
-          <a:lstStyle>
-            <a:lvl1pPr algn="r">
-              <a:defRPr sz="1200"/>
-            </a:lvl1pPr>
-          </a:lstStyle>
-          <a:p>
-            <a:fld id="{BB5E49A5-4136-284D-997B-48E1D791AD67}" type="slidenum">
-              <a:rPr lang="en-US" smtClean="0"/>
-              <a:t>‹#›</a:t>
-            </a:fld>
-            <a:endParaRPr lang="en-US"/>
-          </a:p>
-        </p:txBody>
-      </p:sp>
     </p:spTree>
     <p:extLst>
       <p:ext uri="{BB962C8B-B14F-4D97-AF65-F5344CB8AC3E}">
-        <p14:creationId xmlns:p14="http://schemas.microsoft.com/office/powerpoint/2010/main" val="2623252185"/>
+        <p14:creationId xmlns:p14="http://schemas.microsoft.com/office/powerpoint/2010/main" val="477632940"/>
       </p:ext>
     </p:extLst>
   </p:cSld>
   <p:clrMap bg1="lt1" tx1="dk1" bg2="lt2" tx2="dk2" accent1="accent1" accent2="accent2" accent3="accent3" accent4="accent4" accent5="accent5" accent6="accent6" hlink="hlink" folHlink="folHlink"/>
   <p:notesStyle>
-    <a:lvl1pPr marL="0" algn="l" defTabSz="457200" rtl="0" eaLnBrk="1" latinLnBrk="0" hangingPunct="1">
+    <a:lvl1pPr marL="0" algn="l" defTabSz="914400" rtl="0" eaLnBrk="1" latinLnBrk="0" hangingPunct="1">
       <a:defRPr sz="1200" kern="1200">
         <a:solidFill>
           <a:schemeClr val="tx1"/>
@@ -386,7 +180,7 @@
         <a:cs typeface="+mn-cs"/>
       </a:defRPr>
     </a:lvl1pPr>
-    <a:lvl2pPr marL="457200" algn="l" defTabSz="457200" rtl="0" eaLnBrk="1" latinLnBrk="0" hangingPunct="1">
+    <a:lvl2pPr marL="457200" algn="l" defTabSz="914400" rtl="0" eaLnBrk="1" latinLnBrk="0" hangingPunct="1">
       <a:defRPr sz="1200" kern="1200">
         <a:solidFill>
           <a:schemeClr val="tx1"/>
@@ -396,7 +190,7 @@
         <a:cs typeface="+mn-cs"/>
       </a:defRPr>
     </a:lvl2pPr>
-    <a:lvl3pPr marL="914400" algn="l" defTabSz="457200" rtl="0" eaLnBrk="1" latinLnBrk="0" hangingPunct="1">
+    <a:lvl3pPr marL="914400" algn="l" defTabSz="914400" rtl="0" eaLnBrk="1" latinLnBrk="0" hangingPunct="1">
       <a:defRPr sz="1200" kern="1200">
         <a:solidFill>
           <a:schemeClr val="tx1"/>
@@ -406,7 +200,7 @@
         <a:cs typeface="+mn-cs"/>
       </a:defRPr>
     </a:lvl3pPr>
-    <a:lvl4pPr marL="1371600" algn="l" defTabSz="457200" rtl="0" eaLnBrk="1" latinLnBrk="0" hangingPunct="1">
+    <a:lvl4pPr marL="1371600" algn="l" defTabSz="914400" rtl="0" eaLnBrk="1" latinLnBrk="0" hangingPunct="1">
       <a:defRPr sz="1200" kern="1200">
         <a:solidFill>
           <a:schemeClr val="tx1"/>
@@ -416,7 +210,7 @@
         <a:cs typeface="+mn-cs"/>
       </a:defRPr>
     </a:lvl4pPr>
-    <a:lvl5pPr marL="1828800" algn="l" defTabSz="457200" rtl="0" eaLnBrk="1" latinLnBrk="0" hangingPunct="1">
+    <a:lvl5pPr marL="1828800" algn="l" defTabSz="914400" rtl="0" eaLnBrk="1" latinLnBrk="0" hangingPunct="1">
       <a:defRPr sz="1200" kern="1200">
         <a:solidFill>
           <a:schemeClr val="tx1"/>
@@ -426,7 +220,7 @@
         <a:cs typeface="+mn-cs"/>
       </a:defRPr>
     </a:lvl5pPr>
-    <a:lvl6pPr marL="2286000" algn="l" defTabSz="457200" rtl="0" eaLnBrk="1" latinLnBrk="0" hangingPunct="1">
+    <a:lvl6pPr marL="2286000" algn="l" defTabSz="914400" rtl="0" eaLnBrk="1" latinLnBrk="0" hangingPunct="1">
       <a:defRPr sz="1200" kern="1200">
         <a:solidFill>
           <a:schemeClr val="tx1"/>
@@ -436,7 +230,7 @@
         <a:cs typeface="+mn-cs"/>
       </a:defRPr>
     </a:lvl6pPr>
-    <a:lvl7pPr marL="2743200" algn="l" defTabSz="457200" rtl="0" eaLnBrk="1" latinLnBrk="0" hangingPunct="1">
+    <a:lvl7pPr marL="2743200" algn="l" defTabSz="914400" rtl="0" eaLnBrk="1" latinLnBrk="0" hangingPunct="1">
       <a:defRPr sz="1200" kern="1200">
         <a:solidFill>
           <a:schemeClr val="tx1"/>
@@ -446,7 +240,7 @@
         <a:cs typeface="+mn-cs"/>
       </a:defRPr>
     </a:lvl7pPr>
-    <a:lvl8pPr marL="3200400" algn="l" defTabSz="457200" rtl="0" eaLnBrk="1" latinLnBrk="0" hangingPunct="1">
+    <a:lvl8pPr marL="3200400" algn="l" defTabSz="914400" rtl="0" eaLnBrk="1" latinLnBrk="0" hangingPunct="1">
       <a:defRPr sz="1200" kern="1200">
         <a:solidFill>
           <a:schemeClr val="tx1"/>
@@ -456,7 +250,7 @@
         <a:cs typeface="+mn-cs"/>
       </a:defRPr>
     </a:lvl8pPr>
-    <a:lvl9pPr marL="3657600" algn="l" defTabSz="457200" rtl="0" eaLnBrk="1" latinLnBrk="0" hangingPunct="1">
+    <a:lvl9pPr marL="3657600" algn="l" defTabSz="914400" rtl="0" eaLnBrk="1" latinLnBrk="0" hangingPunct="1">
       <a:defRPr sz="1200" kern="1200">
         <a:solidFill>
           <a:schemeClr val="tx1"/>
@@ -471,7 +265,7 @@
 </file>
 
 <file path=ppt/notesSlides/notesSlide1.xml><?xml version="1.0" encoding="utf-8"?>
-<p:notes xmlns:a="http://schemas.openxmlformats.org/drawingml/2006/main" xmlns:p="http://schemas.openxmlformats.org/presentationml/2006/main" xmlns:r="http://schemas.openxmlformats.org/officeDocument/2006/relationships">
+<p:notes xmlns:a="http://schemas.openxmlformats.org/drawingml/2006/main" xmlns:r="http://schemas.openxmlformats.org/officeDocument/2006/relationships" xmlns:p="http://schemas.openxmlformats.org/presentationml/2006/main">
   <p:cSld>
     <p:spTree>
       <p:nvGrpSpPr>
@@ -491,7 +285,7 @@
         <p:nvSpPr>
           <p:cNvPr id="2" name="Slide Image Placeholder 1"/>
           <p:cNvSpPr>
-            <a:spLocks noGrp="1"/>
+            <a:spLocks noGrp="1" noRot="1" noChangeAspect="1"/>
           </p:cNvSpPr>
           <p:nvPr>
             <p:ph type="sldImg" idx="2"/>
@@ -506,7 +300,7 @@
             <a:spLocks noGrp="1"/>
           </p:cNvSpPr>
           <p:nvPr>
-            <p:ph type="body" idx="3" sz="quarter"/>
+            <p:ph type="body" sz="quarter" idx="3"/>
           </p:nvPr>
         </p:nvSpPr>
         <p:spPr/>
@@ -542,7 +336,7 @@
             <a:spLocks noGrp="1"/>
           </p:cNvSpPr>
           <p:nvPr>
-            <p:ph type="sldNum" idx="5" sz="quarter"/>
+            <p:ph type="sldNum" sz="quarter" idx="5"/>
           </p:nvPr>
         </p:nvSpPr>
         <p:spPr/>
@@ -556,7 +350,7 @@
 </file>
 
 <file path=ppt/notesSlides/notesSlide10.xml><?xml version="1.0" encoding="utf-8"?>
-<p:notes xmlns:a="http://schemas.openxmlformats.org/drawingml/2006/main" xmlns:p="http://schemas.openxmlformats.org/presentationml/2006/main" xmlns:r="http://schemas.openxmlformats.org/officeDocument/2006/relationships">
+<p:notes xmlns:a="http://schemas.openxmlformats.org/drawingml/2006/main" xmlns:r="http://schemas.openxmlformats.org/officeDocument/2006/relationships" xmlns:p="http://schemas.openxmlformats.org/presentationml/2006/main">
   <p:cSld>
     <p:spTree>
       <p:nvGrpSpPr>
@@ -576,7 +370,7 @@
         <p:nvSpPr>
           <p:cNvPr id="2" name="Slide Image Placeholder 1"/>
           <p:cNvSpPr>
-            <a:spLocks noGrp="1"/>
+            <a:spLocks noGrp="1" noRot="1" noChangeAspect="1"/>
           </p:cNvSpPr>
           <p:nvPr>
             <p:ph type="sldImg" idx="2"/>
@@ -591,7 +385,7 @@
             <a:spLocks noGrp="1"/>
           </p:cNvSpPr>
           <p:nvPr>
-            <p:ph type="body" idx="3" sz="quarter"/>
+            <p:ph type="body" sz="quarter" idx="3"/>
           </p:nvPr>
         </p:nvSpPr>
         <p:spPr/>
@@ -617,7 +411,7 @@
             <a:spLocks noGrp="1"/>
           </p:cNvSpPr>
           <p:nvPr>
-            <p:ph type="sldNum" idx="5" sz="quarter"/>
+            <p:ph type="sldNum" sz="quarter" idx="5"/>
           </p:nvPr>
         </p:nvSpPr>
         <p:spPr/>
@@ -631,7 +425,7 @@
 </file>
 
 <file path=ppt/notesSlides/notesSlide11.xml><?xml version="1.0" encoding="utf-8"?>
-<p:notes xmlns:a="http://schemas.openxmlformats.org/drawingml/2006/main" xmlns:p="http://schemas.openxmlformats.org/presentationml/2006/main" xmlns:r="http://schemas.openxmlformats.org/officeDocument/2006/relationships">
+<p:notes xmlns:a="http://schemas.openxmlformats.org/drawingml/2006/main" xmlns:r="http://schemas.openxmlformats.org/officeDocument/2006/relationships" xmlns:p="http://schemas.openxmlformats.org/presentationml/2006/main">
   <p:cSld>
     <p:spTree>
       <p:nvGrpSpPr>
@@ -651,7 +445,7 @@
         <p:nvSpPr>
           <p:cNvPr id="2" name="Slide Image Placeholder 1"/>
           <p:cNvSpPr>
-            <a:spLocks noGrp="1"/>
+            <a:spLocks noGrp="1" noRot="1" noChangeAspect="1"/>
           </p:cNvSpPr>
           <p:nvPr>
             <p:ph type="sldImg" idx="2"/>
@@ -666,7 +460,7 @@
             <a:spLocks noGrp="1"/>
           </p:cNvSpPr>
           <p:nvPr>
-            <p:ph type="body" idx="3" sz="quarter"/>
+            <p:ph type="body" sz="quarter" idx="3"/>
           </p:nvPr>
         </p:nvSpPr>
         <p:spPr/>
@@ -692,7 +486,7 @@
             <a:spLocks noGrp="1"/>
           </p:cNvSpPr>
           <p:nvPr>
-            <p:ph type="sldNum" idx="5" sz="quarter"/>
+            <p:ph type="sldNum" sz="quarter" idx="5"/>
           </p:nvPr>
         </p:nvSpPr>
         <p:spPr/>
@@ -706,7 +500,7 @@
 </file>
 
 <file path=ppt/notesSlides/notesSlide12.xml><?xml version="1.0" encoding="utf-8"?>
-<p:notes xmlns:a="http://schemas.openxmlformats.org/drawingml/2006/main" xmlns:p="http://schemas.openxmlformats.org/presentationml/2006/main" xmlns:r="http://schemas.openxmlformats.org/officeDocument/2006/relationships">
+<p:notes xmlns:a="http://schemas.openxmlformats.org/drawingml/2006/main" xmlns:r="http://schemas.openxmlformats.org/officeDocument/2006/relationships" xmlns:p="http://schemas.openxmlformats.org/presentationml/2006/main">
   <p:cSld>
     <p:spTree>
       <p:nvGrpSpPr>
@@ -726,7 +520,7 @@
         <p:nvSpPr>
           <p:cNvPr id="2" name="Slide Image Placeholder 1"/>
           <p:cNvSpPr>
-            <a:spLocks noGrp="1"/>
+            <a:spLocks noGrp="1" noRot="1" noChangeAspect="1"/>
           </p:cNvSpPr>
           <p:nvPr>
             <p:ph type="sldImg" idx="2"/>
@@ -741,7 +535,7 @@
             <a:spLocks noGrp="1"/>
           </p:cNvSpPr>
           <p:nvPr>
-            <p:ph type="body" idx="3" sz="quarter"/>
+            <p:ph type="body" sz="quarter" idx="3"/>
           </p:nvPr>
         </p:nvSpPr>
         <p:spPr/>
@@ -767,7 +561,7 @@
             <a:spLocks noGrp="1"/>
           </p:cNvSpPr>
           <p:nvPr>
-            <p:ph type="sldNum" idx="5" sz="quarter"/>
+            <p:ph type="sldNum" sz="quarter" idx="5"/>
           </p:nvPr>
         </p:nvSpPr>
         <p:spPr/>
@@ -781,7 +575,7 @@
 </file>
 
 <file path=ppt/notesSlides/notesSlide13.xml><?xml version="1.0" encoding="utf-8"?>
-<p:notes xmlns:a="http://schemas.openxmlformats.org/drawingml/2006/main" xmlns:p="http://schemas.openxmlformats.org/presentationml/2006/main" xmlns:r="http://schemas.openxmlformats.org/officeDocument/2006/relationships">
+<p:notes xmlns:a="http://schemas.openxmlformats.org/drawingml/2006/main" xmlns:r="http://schemas.openxmlformats.org/officeDocument/2006/relationships" xmlns:p="http://schemas.openxmlformats.org/presentationml/2006/main">
   <p:cSld>
     <p:spTree>
       <p:nvGrpSpPr>
@@ -801,7 +595,7 @@
         <p:nvSpPr>
           <p:cNvPr id="2" name="Slide Image Placeholder 1"/>
           <p:cNvSpPr>
-            <a:spLocks noGrp="1"/>
+            <a:spLocks noGrp="1" noRot="1" noChangeAspect="1"/>
           </p:cNvSpPr>
           <p:nvPr>
             <p:ph type="sldImg" idx="2"/>
@@ -816,7 +610,7 @@
             <a:spLocks noGrp="1"/>
           </p:cNvSpPr>
           <p:nvPr>
-            <p:ph type="body" idx="3" sz="quarter"/>
+            <p:ph type="body" sz="quarter" idx="3"/>
           </p:nvPr>
         </p:nvSpPr>
         <p:spPr/>
@@ -842,7 +636,7 @@
             <a:spLocks noGrp="1"/>
           </p:cNvSpPr>
           <p:nvPr>
-            <p:ph type="sldNum" idx="5" sz="quarter"/>
+            <p:ph type="sldNum" sz="quarter" idx="5"/>
           </p:nvPr>
         </p:nvSpPr>
         <p:spPr/>
@@ -856,7 +650,7 @@
 </file>
 
 <file path=ppt/notesSlides/notesSlide14.xml><?xml version="1.0" encoding="utf-8"?>
-<p:notes xmlns:a="http://schemas.openxmlformats.org/drawingml/2006/main" xmlns:p="http://schemas.openxmlformats.org/presentationml/2006/main" xmlns:r="http://schemas.openxmlformats.org/officeDocument/2006/relationships">
+<p:notes xmlns:a="http://schemas.openxmlformats.org/drawingml/2006/main" xmlns:r="http://schemas.openxmlformats.org/officeDocument/2006/relationships" xmlns:p="http://schemas.openxmlformats.org/presentationml/2006/main">
   <p:cSld>
     <p:spTree>
       <p:nvGrpSpPr>
@@ -876,7 +670,7 @@
         <p:nvSpPr>
           <p:cNvPr id="2" name="Slide Image Placeholder 1"/>
           <p:cNvSpPr>
-            <a:spLocks noGrp="1"/>
+            <a:spLocks noGrp="1" noRot="1" noChangeAspect="1"/>
           </p:cNvSpPr>
           <p:nvPr>
             <p:ph type="sldImg" idx="2"/>
@@ -891,7 +685,7 @@
             <a:spLocks noGrp="1"/>
           </p:cNvSpPr>
           <p:nvPr>
-            <p:ph type="body" idx="3" sz="quarter"/>
+            <p:ph type="body" sz="quarter" idx="3"/>
           </p:nvPr>
         </p:nvSpPr>
         <p:spPr/>
@@ -932,7 +726,7 @@
             <a:spLocks noGrp="1"/>
           </p:cNvSpPr>
           <p:nvPr>
-            <p:ph type="sldNum" idx="5" sz="quarter"/>
+            <p:ph type="sldNum" sz="quarter" idx="5"/>
           </p:nvPr>
         </p:nvSpPr>
         <p:spPr/>
@@ -946,7 +740,7 @@
 </file>
 
 <file path=ppt/notesSlides/notesSlide2.xml><?xml version="1.0" encoding="utf-8"?>
-<p:notes xmlns:a="http://schemas.openxmlformats.org/drawingml/2006/main" xmlns:p="http://schemas.openxmlformats.org/presentationml/2006/main" xmlns:r="http://schemas.openxmlformats.org/officeDocument/2006/relationships">
+<p:notes xmlns:a="http://schemas.openxmlformats.org/drawingml/2006/main" xmlns:r="http://schemas.openxmlformats.org/officeDocument/2006/relationships" xmlns:p="http://schemas.openxmlformats.org/presentationml/2006/main">
   <p:cSld>
     <p:spTree>
       <p:nvGrpSpPr>
@@ -966,7 +760,7 @@
         <p:nvSpPr>
           <p:cNvPr id="2" name="Slide Image Placeholder 1"/>
           <p:cNvSpPr>
-            <a:spLocks noGrp="1"/>
+            <a:spLocks noGrp="1" noRot="1" noChangeAspect="1"/>
           </p:cNvSpPr>
           <p:nvPr>
             <p:ph type="sldImg" idx="2"/>
@@ -981,7 +775,7 @@
             <a:spLocks noGrp="1"/>
           </p:cNvSpPr>
           <p:nvPr>
-            <p:ph type="body" idx="3" sz="quarter"/>
+            <p:ph type="body" sz="quarter" idx="3"/>
           </p:nvPr>
         </p:nvSpPr>
         <p:spPr/>
@@ -1037,7 +831,7 @@
             <a:spLocks noGrp="1"/>
           </p:cNvSpPr>
           <p:nvPr>
-            <p:ph type="sldNum" idx="5" sz="quarter"/>
+            <p:ph type="sldNum" sz="quarter" idx="5"/>
           </p:nvPr>
         </p:nvSpPr>
         <p:spPr/>
@@ -1051,7 +845,7 @@
 </file>
 
 <file path=ppt/notesSlides/notesSlide3.xml><?xml version="1.0" encoding="utf-8"?>
-<p:notes xmlns:a="http://schemas.openxmlformats.org/drawingml/2006/main" xmlns:p="http://schemas.openxmlformats.org/presentationml/2006/main" xmlns:r="http://schemas.openxmlformats.org/officeDocument/2006/relationships">
+<p:notes xmlns:a="http://schemas.openxmlformats.org/drawingml/2006/main" xmlns:r="http://schemas.openxmlformats.org/officeDocument/2006/relationships" xmlns:p="http://schemas.openxmlformats.org/presentationml/2006/main">
   <p:cSld>
     <p:spTree>
       <p:nvGrpSpPr>
@@ -1071,7 +865,7 @@
         <p:nvSpPr>
           <p:cNvPr id="2" name="Slide Image Placeholder 1"/>
           <p:cNvSpPr>
-            <a:spLocks noGrp="1"/>
+            <a:spLocks noGrp="1" noRot="1" noChangeAspect="1"/>
           </p:cNvSpPr>
           <p:nvPr>
             <p:ph type="sldImg" idx="2"/>
@@ -1086,7 +880,7 @@
             <a:spLocks noGrp="1"/>
           </p:cNvSpPr>
           <p:nvPr>
-            <p:ph type="body" idx="3" sz="quarter"/>
+            <p:ph type="body" sz="quarter" idx="3"/>
           </p:nvPr>
         </p:nvSpPr>
         <p:spPr/>
@@ -1112,7 +906,7 @@
             <a:spLocks noGrp="1"/>
           </p:cNvSpPr>
           <p:nvPr>
-            <p:ph type="sldNum" idx="5" sz="quarter"/>
+            <p:ph type="sldNum" sz="quarter" idx="5"/>
           </p:nvPr>
         </p:nvSpPr>
         <p:spPr/>
@@ -1126,7 +920,7 @@
 </file>
 
 <file path=ppt/notesSlides/notesSlide4.xml><?xml version="1.0" encoding="utf-8"?>
-<p:notes xmlns:a="http://schemas.openxmlformats.org/drawingml/2006/main" xmlns:p="http://schemas.openxmlformats.org/presentationml/2006/main" xmlns:r="http://schemas.openxmlformats.org/officeDocument/2006/relationships">
+<p:notes xmlns:a="http://schemas.openxmlformats.org/drawingml/2006/main" xmlns:r="http://schemas.openxmlformats.org/officeDocument/2006/relationships" xmlns:p="http://schemas.openxmlformats.org/presentationml/2006/main">
   <p:cSld>
     <p:spTree>
       <p:nvGrpSpPr>
@@ -1146,7 +940,7 @@
         <p:nvSpPr>
           <p:cNvPr id="2" name="Slide Image Placeholder 1"/>
           <p:cNvSpPr>
-            <a:spLocks noGrp="1"/>
+            <a:spLocks noGrp="1" noRot="1" noChangeAspect="1"/>
           </p:cNvSpPr>
           <p:nvPr>
             <p:ph type="sldImg" idx="2"/>
@@ -1161,7 +955,7 @@
             <a:spLocks noGrp="1"/>
           </p:cNvSpPr>
           <p:nvPr>
-            <p:ph type="body" idx="3" sz="quarter"/>
+            <p:ph type="body" sz="quarter" idx="3"/>
           </p:nvPr>
         </p:nvSpPr>
         <p:spPr/>
@@ -1187,7 +981,7 @@
             <a:spLocks noGrp="1"/>
           </p:cNvSpPr>
           <p:nvPr>
-            <p:ph type="sldNum" idx="5" sz="quarter"/>
+            <p:ph type="sldNum" sz="quarter" idx="5"/>
           </p:nvPr>
         </p:nvSpPr>
         <p:spPr/>
@@ -1201,7 +995,7 @@
 </file>
 
 <file path=ppt/notesSlides/notesSlide5.xml><?xml version="1.0" encoding="utf-8"?>
-<p:notes xmlns:a="http://schemas.openxmlformats.org/drawingml/2006/main" xmlns:p="http://schemas.openxmlformats.org/presentationml/2006/main" xmlns:r="http://schemas.openxmlformats.org/officeDocument/2006/relationships">
+<p:notes xmlns:a="http://schemas.openxmlformats.org/drawingml/2006/main" xmlns:r="http://schemas.openxmlformats.org/officeDocument/2006/relationships" xmlns:p="http://schemas.openxmlformats.org/presentationml/2006/main">
   <p:cSld>
     <p:spTree>
       <p:nvGrpSpPr>
@@ -1221,7 +1015,7 @@
         <p:nvSpPr>
           <p:cNvPr id="2" name="Slide Image Placeholder 1"/>
           <p:cNvSpPr>
-            <a:spLocks noGrp="1"/>
+            <a:spLocks noGrp="1" noRot="1" noChangeAspect="1"/>
           </p:cNvSpPr>
           <p:nvPr>
             <p:ph type="sldImg" idx="2"/>
@@ -1236,7 +1030,7 @@
             <a:spLocks noGrp="1"/>
           </p:cNvSpPr>
           <p:nvPr>
-            <p:ph type="body" idx="3" sz="quarter"/>
+            <p:ph type="body" sz="quarter" idx="3"/>
           </p:nvPr>
         </p:nvSpPr>
         <p:spPr/>
@@ -1262,7 +1056,7 @@
             <a:spLocks noGrp="1"/>
           </p:cNvSpPr>
           <p:nvPr>
-            <p:ph type="sldNum" idx="5" sz="quarter"/>
+            <p:ph type="sldNum" sz="quarter" idx="5"/>
           </p:nvPr>
         </p:nvSpPr>
         <p:spPr/>
@@ -1276,7 +1070,7 @@
 </file>
 
 <file path=ppt/notesSlides/notesSlide6.xml><?xml version="1.0" encoding="utf-8"?>
-<p:notes xmlns:a="http://schemas.openxmlformats.org/drawingml/2006/main" xmlns:p="http://schemas.openxmlformats.org/presentationml/2006/main" xmlns:r="http://schemas.openxmlformats.org/officeDocument/2006/relationships">
+<p:notes xmlns:a="http://schemas.openxmlformats.org/drawingml/2006/main" xmlns:r="http://schemas.openxmlformats.org/officeDocument/2006/relationships" xmlns:p="http://schemas.openxmlformats.org/presentationml/2006/main">
   <p:cSld>
     <p:spTree>
       <p:nvGrpSpPr>
@@ -1296,7 +1090,7 @@
         <p:nvSpPr>
           <p:cNvPr id="2" name="Slide Image Placeholder 1"/>
           <p:cNvSpPr>
-            <a:spLocks noGrp="1"/>
+            <a:spLocks noGrp="1" noRot="1" noChangeAspect="1"/>
           </p:cNvSpPr>
           <p:nvPr>
             <p:ph type="sldImg" idx="2"/>
@@ -1311,7 +1105,7 @@
             <a:spLocks noGrp="1"/>
           </p:cNvSpPr>
           <p:nvPr>
-            <p:ph type="body" idx="3" sz="quarter"/>
+            <p:ph type="body" sz="quarter" idx="3"/>
           </p:nvPr>
         </p:nvSpPr>
         <p:spPr/>
@@ -1337,7 +1131,7 @@
             <a:spLocks noGrp="1"/>
           </p:cNvSpPr>
           <p:nvPr>
-            <p:ph type="sldNum" idx="5" sz="quarter"/>
+            <p:ph type="sldNum" sz="quarter" idx="5"/>
           </p:nvPr>
         </p:nvSpPr>
         <p:spPr/>
@@ -1351,7 +1145,7 @@
 </file>
 
 <file path=ppt/notesSlides/notesSlide7.xml><?xml version="1.0" encoding="utf-8"?>
-<p:notes xmlns:a="http://schemas.openxmlformats.org/drawingml/2006/main" xmlns:p="http://schemas.openxmlformats.org/presentationml/2006/main" xmlns:r="http://schemas.openxmlformats.org/officeDocument/2006/relationships">
+<p:notes xmlns:a="http://schemas.openxmlformats.org/drawingml/2006/main" xmlns:r="http://schemas.openxmlformats.org/officeDocument/2006/relationships" xmlns:p="http://schemas.openxmlformats.org/presentationml/2006/main">
   <p:cSld>
     <p:spTree>
       <p:nvGrpSpPr>
@@ -1371,7 +1165,7 @@
         <p:nvSpPr>
           <p:cNvPr id="2" name="Slide Image Placeholder 1"/>
           <p:cNvSpPr>
-            <a:spLocks noGrp="1"/>
+            <a:spLocks noGrp="1" noRot="1" noChangeAspect="1"/>
           </p:cNvSpPr>
           <p:nvPr>
             <p:ph type="sldImg" idx="2"/>
@@ -1386,7 +1180,7 @@
             <a:spLocks noGrp="1"/>
           </p:cNvSpPr>
           <p:nvPr>
-            <p:ph type="body" idx="3" sz="quarter"/>
+            <p:ph type="body" sz="quarter" idx="3"/>
           </p:nvPr>
         </p:nvSpPr>
         <p:spPr/>
@@ -1412,7 +1206,7 @@
             <a:spLocks noGrp="1"/>
           </p:cNvSpPr>
           <p:nvPr>
-            <p:ph type="sldNum" idx="5" sz="quarter"/>
+            <p:ph type="sldNum" sz="quarter" idx="5"/>
           </p:nvPr>
         </p:nvSpPr>
         <p:spPr/>
@@ -1426,7 +1220,7 @@
 </file>
 
 <file path=ppt/notesSlides/notesSlide8.xml><?xml version="1.0" encoding="utf-8"?>
-<p:notes xmlns:a="http://schemas.openxmlformats.org/drawingml/2006/main" xmlns:p="http://schemas.openxmlformats.org/presentationml/2006/main" xmlns:r="http://schemas.openxmlformats.org/officeDocument/2006/relationships">
+<p:notes xmlns:a="http://schemas.openxmlformats.org/drawingml/2006/main" xmlns:r="http://schemas.openxmlformats.org/officeDocument/2006/relationships" xmlns:p="http://schemas.openxmlformats.org/presentationml/2006/main">
   <p:cSld>
     <p:spTree>
       <p:nvGrpSpPr>
@@ -1446,7 +1240,7 @@
         <p:nvSpPr>
           <p:cNvPr id="2" name="Slide Image Placeholder 1"/>
           <p:cNvSpPr>
-            <a:spLocks noGrp="1"/>
+            <a:spLocks noGrp="1" noRot="1" noChangeAspect="1"/>
           </p:cNvSpPr>
           <p:nvPr>
             <p:ph type="sldImg" idx="2"/>
@@ -1461,7 +1255,7 @@
             <a:spLocks noGrp="1"/>
           </p:cNvSpPr>
           <p:nvPr>
-            <p:ph type="body" idx="3" sz="quarter"/>
+            <p:ph type="body" sz="quarter" idx="3"/>
           </p:nvPr>
         </p:nvSpPr>
         <p:spPr/>
@@ -1487,7 +1281,7 @@
             <a:spLocks noGrp="1"/>
           </p:cNvSpPr>
           <p:nvPr>
-            <p:ph type="sldNum" idx="5" sz="quarter"/>
+            <p:ph type="sldNum" sz="quarter" idx="5"/>
           </p:nvPr>
         </p:nvSpPr>
         <p:spPr/>
@@ -1501,7 +1295,7 @@
 </file>
 
 <file path=ppt/notesSlides/notesSlide9.xml><?xml version="1.0" encoding="utf-8"?>
-<p:notes xmlns:a="http://schemas.openxmlformats.org/drawingml/2006/main" xmlns:p="http://schemas.openxmlformats.org/presentationml/2006/main" xmlns:r="http://schemas.openxmlformats.org/officeDocument/2006/relationships">
+<p:notes xmlns:a="http://schemas.openxmlformats.org/drawingml/2006/main" xmlns:r="http://schemas.openxmlformats.org/officeDocument/2006/relationships" xmlns:p="http://schemas.openxmlformats.org/presentationml/2006/main">
   <p:cSld>
     <p:spTree>
       <p:nvGrpSpPr>
@@ -1521,7 +1315,7 @@
         <p:nvSpPr>
           <p:cNvPr id="2" name="Slide Image Placeholder 1"/>
           <p:cNvSpPr>
-            <a:spLocks noGrp="1"/>
+            <a:spLocks noGrp="1" noRot="1" noChangeAspect="1"/>
           </p:cNvSpPr>
           <p:nvPr>
             <p:ph type="sldImg" idx="2"/>
@@ -1536,7 +1330,7 @@
             <a:spLocks noGrp="1"/>
           </p:cNvSpPr>
           <p:nvPr>
-            <p:ph type="body" idx="3" sz="quarter"/>
+            <p:ph type="body" sz="quarter" idx="3"/>
           </p:nvPr>
         </p:nvSpPr>
         <p:spPr/>
@@ -1562,7 +1356,7 @@
             <a:spLocks noGrp="1"/>
           </p:cNvSpPr>
           <p:nvPr>
-            <p:ph type="sldNum" idx="5" sz="quarter"/>
+            <p:ph type="sldNum" sz="quarter" idx="5"/>
           </p:nvPr>
         </p:nvSpPr>
         <p:spPr/>
@@ -1756,7 +1550,7 @@
           <a:p>
             <a:fld id="{5BCAD085-E8A6-8845-BD4E-CB4CCA059FC4}" type="datetimeFigureOut">
               <a:rPr lang="en-US" smtClean="0"/>
-              <a:t>1/27/13</a:t>
+              <a:t>8/18/2026</a:t>
             </a:fld>
             <a:endParaRPr lang="en-US"/>
           </a:p>
@@ -1926,7 +1720,7 @@
           <a:p>
             <a:fld id="{5BCAD085-E8A6-8845-BD4E-CB4CCA059FC4}" type="datetimeFigureOut">
               <a:rPr lang="en-US" smtClean="0"/>
-              <a:t>1/27/13</a:t>
+              <a:t>8/18/2026</a:t>
             </a:fld>
             <a:endParaRPr lang="en-US"/>
           </a:p>
@@ -2106,7 +1900,7 @@
           <a:p>
             <a:fld id="{5BCAD085-E8A6-8845-BD4E-CB4CCA059FC4}" type="datetimeFigureOut">
               <a:rPr lang="en-US" smtClean="0"/>
-              <a:t>1/27/13</a:t>
+              <a:t>8/18/2026</a:t>
             </a:fld>
             <a:endParaRPr lang="en-US"/>
           </a:p>
@@ -2276,7 +2070,7 @@
           <a:p>
             <a:fld id="{5BCAD085-E8A6-8845-BD4E-CB4CCA059FC4}" type="datetimeFigureOut">
               <a:rPr lang="en-US" smtClean="0"/>
-              <a:t>1/27/13</a:t>
+              <a:t>8/18/2026</a:t>
             </a:fld>
             <a:endParaRPr lang="en-US"/>
           </a:p>
@@ -2522,7 +2316,7 @@
           <a:p>
             <a:fld id="{5BCAD085-E8A6-8845-BD4E-CB4CCA059FC4}" type="datetimeFigureOut">
               <a:rPr lang="en-US" smtClean="0"/>
-              <a:t>1/27/13</a:t>
+              <a:t>8/18/2026</a:t>
             </a:fld>
             <a:endParaRPr lang="en-US"/>
           </a:p>
@@ -2810,7 +2604,7 @@
           <a:p>
             <a:fld id="{5BCAD085-E8A6-8845-BD4E-CB4CCA059FC4}" type="datetimeFigureOut">
               <a:rPr lang="en-US" smtClean="0"/>
-              <a:t>1/27/13</a:t>
+              <a:t>8/18/2026</a:t>
             </a:fld>
             <a:endParaRPr lang="en-US"/>
           </a:p>
@@ -3232,7 +3026,7 @@
           <a:p>
             <a:fld id="{5BCAD085-E8A6-8845-BD4E-CB4CCA059FC4}" type="datetimeFigureOut">
               <a:rPr lang="en-US" smtClean="0"/>
-              <a:t>1/27/13</a:t>
+              <a:t>8/18/2026</a:t>
             </a:fld>
             <a:endParaRPr lang="en-US"/>
           </a:p>
@@ -3350,7 +3144,7 @@
           <a:p>
             <a:fld id="{5BCAD085-E8A6-8845-BD4E-CB4CCA059FC4}" type="datetimeFigureOut">
               <a:rPr lang="en-US" smtClean="0"/>
-              <a:t>1/27/13</a:t>
+              <a:t>8/18/2026</a:t>
             </a:fld>
             <a:endParaRPr lang="en-US"/>
           </a:p>
@@ -3445,7 +3239,7 @@
           <a:p>
             <a:fld id="{5BCAD085-E8A6-8845-BD4E-CB4CCA059FC4}" type="datetimeFigureOut">
               <a:rPr lang="en-US" smtClean="0"/>
-              <a:t>1/27/13</a:t>
+              <a:t>8/18/2026</a:t>
             </a:fld>
             <a:endParaRPr lang="en-US"/>
           </a:p>
@@ -3722,7 +3516,7 @@
           <a:p>
             <a:fld id="{5BCAD085-E8A6-8845-BD4E-CB4CCA059FC4}" type="datetimeFigureOut">
               <a:rPr lang="en-US" smtClean="0"/>
-              <a:t>1/27/13</a:t>
+              <a:t>8/18/2026</a:t>
             </a:fld>
             <a:endParaRPr lang="en-US"/>
           </a:p>
@@ -3975,7 +3769,7 @@
           <a:p>
             <a:fld id="{5BCAD085-E8A6-8845-BD4E-CB4CCA059FC4}" type="datetimeFigureOut">
               <a:rPr lang="en-US" smtClean="0"/>
-              <a:t>1/27/13</a:t>
+              <a:t>8/18/2026</a:t>
             </a:fld>
             <a:endParaRPr lang="en-US"/>
           </a:p>
@@ -4188,7 +3982,7 @@
           <a:p>
             <a:fld id="{5BCAD085-E8A6-8845-BD4E-CB4CCA059FC4}" type="datetimeFigureOut">
               <a:rPr lang="en-US" smtClean="0"/>
-              <a:t>1/27/13</a:t>
+              <a:t>8/18/2026</a:t>
             </a:fld>
             <a:endParaRPr lang="en-US"/>
           </a:p>
@@ -4547,7 +4341,7 @@
 </file>
 
 <file path=ppt/slides/slide1.xml><?xml version="1.0" encoding="utf-8"?>
-<p:sld xmlns:a="http://schemas.openxmlformats.org/drawingml/2006/main" xmlns:p="http://schemas.openxmlformats.org/presentationml/2006/main" xmlns:r="http://schemas.openxmlformats.org/officeDocument/2006/relationships">
+<p:sld xmlns:a="http://schemas.openxmlformats.org/drawingml/2006/main" xmlns:r="http://schemas.openxmlformats.org/officeDocument/2006/relationships" xmlns:p="http://schemas.openxmlformats.org/presentationml/2006/main">
   <p:cSld>
     <p:bg>
       <p:bgPr>
@@ -4563,7 +4357,14 @@
         <p:cNvGrpSpPr/>
         <p:nvPr/>
       </p:nvGrpSpPr>
-      <p:grpSpPr/>
+      <p:grpSpPr>
+        <a:xfrm>
+          <a:off x="0" y="0"/>
+          <a:ext cx="0" cy="0"/>
+          <a:chOff x="0" y="0"/>
+          <a:chExt cx="0" cy="0"/>
+        </a:xfrm>
+      </p:grpSpPr>
       <p:sp>
         <p:nvSpPr>
           <p:cNvPr id="2" name="Rectangle 1"/>
@@ -4604,6 +4405,7 @@
           <a:lstStyle/>
           <a:p>
             <a:pPr algn="ctr"/>
+            <a:endParaRPr/>
           </a:p>
         </p:txBody>
       </p:sp>
@@ -4773,6 +4575,7 @@
           <a:lstStyle/>
           <a:p>
             <a:pPr algn="ctr"/>
+            <a:endParaRPr/>
           </a:p>
         </p:txBody>
       </p:sp>
@@ -4816,6 +4619,7 @@
           <a:lstStyle/>
           <a:p>
             <a:pPr algn="ctr"/>
+            <a:endParaRPr/>
           </a:p>
         </p:txBody>
       </p:sp>
@@ -4985,6 +4789,7 @@
           <a:lstStyle/>
           <a:p>
             <a:pPr algn="ctr"/>
+            <a:endParaRPr/>
           </a:p>
         </p:txBody>
       </p:sp>
@@ -5028,6 +4833,7 @@
           <a:lstStyle/>
           <a:p>
             <a:pPr algn="ctr"/>
+            <a:endParaRPr/>
           </a:p>
         </p:txBody>
       </p:sp>
@@ -5197,6 +5003,7 @@
           <a:lstStyle/>
           <a:p>
             <a:pPr algn="ctr"/>
+            <a:endParaRPr/>
           </a:p>
         </p:txBody>
       </p:sp>
@@ -5240,6 +5047,7 @@
           <a:lstStyle/>
           <a:p>
             <a:pPr algn="ctr"/>
+            <a:endParaRPr/>
           </a:p>
         </p:txBody>
       </p:sp>
@@ -5412,7 +5220,7 @@
 </file>
 
 <file path=ppt/slides/slide10.xml><?xml version="1.0" encoding="utf-8"?>
-<p:sld xmlns:a="http://schemas.openxmlformats.org/drawingml/2006/main" xmlns:p="http://schemas.openxmlformats.org/presentationml/2006/main" xmlns:r="http://schemas.openxmlformats.org/officeDocument/2006/relationships">
+<p:sld xmlns:a="http://schemas.openxmlformats.org/drawingml/2006/main" xmlns:r="http://schemas.openxmlformats.org/officeDocument/2006/relationships" xmlns:p="http://schemas.openxmlformats.org/presentationml/2006/main">
   <p:cSld>
     <p:bg>
       <p:bgPr>
@@ -5428,7 +5236,14 @@
         <p:cNvGrpSpPr/>
         <p:nvPr/>
       </p:nvGrpSpPr>
-      <p:grpSpPr/>
+      <p:grpSpPr>
+        <a:xfrm>
+          <a:off x="0" y="0"/>
+          <a:ext cx="0" cy="0"/>
+          <a:chOff x="0" y="0"/>
+          <a:chExt cx="0" cy="0"/>
+        </a:xfrm>
+      </p:grpSpPr>
       <p:sp>
         <p:nvSpPr>
           <p:cNvPr id="2" name="TextBox 1"/>
@@ -5559,6 +5374,7 @@
           <a:lstStyle/>
           <a:p>
             <a:pPr algn="ctr"/>
+            <a:endParaRPr/>
           </a:p>
         </p:txBody>
       </p:sp>
@@ -5602,6 +5418,7 @@
           <a:lstStyle/>
           <a:p>
             <a:pPr algn="ctr"/>
+            <a:endParaRPr/>
           </a:p>
         </p:txBody>
       </p:sp>
@@ -5853,6 +5670,7 @@
           <a:lstStyle/>
           <a:p>
             <a:pPr algn="ctr"/>
+            <a:endParaRPr/>
           </a:p>
         </p:txBody>
       </p:sp>
@@ -5896,6 +5714,7 @@
           <a:lstStyle/>
           <a:p>
             <a:pPr algn="ctr"/>
+            <a:endParaRPr/>
           </a:p>
         </p:txBody>
       </p:sp>
@@ -6129,6 +5948,7 @@
           <a:lstStyle/>
           <a:p>
             <a:pPr algn="ctr"/>
+            <a:endParaRPr/>
           </a:p>
         </p:txBody>
       </p:sp>
@@ -6172,6 +5992,7 @@
           <a:lstStyle/>
           <a:p>
             <a:pPr algn="ctr"/>
+            <a:endParaRPr/>
           </a:p>
         </p:txBody>
       </p:sp>
@@ -6369,6 +6190,7 @@
           <a:lstStyle/>
           <a:p>
             <a:pPr algn="ctr"/>
+            <a:endParaRPr/>
           </a:p>
         </p:txBody>
       </p:sp>
@@ -6412,6 +6234,7 @@
           <a:lstStyle/>
           <a:p>
             <a:pPr algn="ctr"/>
+            <a:endParaRPr/>
           </a:p>
         </p:txBody>
       </p:sp>
@@ -6683,6 +6506,7 @@
           <a:lstStyle/>
           <a:p>
             <a:pPr algn="ctr"/>
+            <a:endParaRPr/>
           </a:p>
         </p:txBody>
       </p:sp>
@@ -6726,6 +6550,7 @@
           <a:lstStyle/>
           <a:p>
             <a:pPr algn="ctr"/>
+            <a:endParaRPr/>
           </a:p>
         </p:txBody>
       </p:sp>
@@ -6849,7 +6674,7 @@
 </file>
 
 <file path=ppt/slides/slide11.xml><?xml version="1.0" encoding="utf-8"?>
-<p:sld xmlns:a="http://schemas.openxmlformats.org/drawingml/2006/main" xmlns:p="http://schemas.openxmlformats.org/presentationml/2006/main" xmlns:r="http://schemas.openxmlformats.org/officeDocument/2006/relationships">
+<p:sld xmlns:a="http://schemas.openxmlformats.org/drawingml/2006/main" xmlns:r="http://schemas.openxmlformats.org/officeDocument/2006/relationships" xmlns:p="http://schemas.openxmlformats.org/presentationml/2006/main">
   <p:cSld>
     <p:bg>
       <p:bgPr>
@@ -6865,7 +6690,14 @@
         <p:cNvGrpSpPr/>
         <p:nvPr/>
       </p:nvGrpSpPr>
-      <p:grpSpPr/>
+      <p:grpSpPr>
+        <a:xfrm>
+          <a:off x="0" y="0"/>
+          <a:ext cx="0" cy="0"/>
+          <a:chOff x="0" y="0"/>
+          <a:chExt cx="0" cy="0"/>
+        </a:xfrm>
+      </p:grpSpPr>
       <p:sp>
         <p:nvSpPr>
           <p:cNvPr id="2" name="TextBox 1"/>
@@ -6996,6 +6828,7 @@
           <a:lstStyle/>
           <a:p>
             <a:pPr algn="ctr"/>
+            <a:endParaRPr/>
           </a:p>
         </p:txBody>
       </p:sp>
@@ -7039,6 +6872,7 @@
           <a:lstStyle/>
           <a:p>
             <a:pPr algn="ctr"/>
+            <a:endParaRPr/>
           </a:p>
         </p:txBody>
       </p:sp>
@@ -7254,6 +7088,7 @@
           <a:lstStyle/>
           <a:p>
             <a:pPr algn="ctr"/>
+            <a:endParaRPr/>
           </a:p>
         </p:txBody>
       </p:sp>
@@ -7297,6 +7132,7 @@
           <a:lstStyle/>
           <a:p>
             <a:pPr algn="ctr"/>
+            <a:endParaRPr/>
           </a:p>
         </p:txBody>
       </p:sp>
@@ -7502,6 +7338,7 @@
           <a:lstStyle/>
           <a:p>
             <a:pPr algn="ctr"/>
+            <a:endParaRPr/>
           </a:p>
         </p:txBody>
       </p:sp>
@@ -7545,6 +7382,7 @@
           <a:lstStyle/>
           <a:p>
             <a:pPr algn="ctr"/>
+            <a:endParaRPr/>
           </a:p>
         </p:txBody>
       </p:sp>
@@ -7742,6 +7580,7 @@
           <a:lstStyle/>
           <a:p>
             <a:pPr algn="ctr"/>
+            <a:endParaRPr/>
           </a:p>
         </p:txBody>
       </p:sp>
@@ -7785,6 +7624,7 @@
           <a:lstStyle/>
           <a:p>
             <a:pPr algn="ctr"/>
+            <a:endParaRPr/>
           </a:p>
         </p:txBody>
       </p:sp>
@@ -8028,6 +7868,7 @@
           <a:lstStyle/>
           <a:p>
             <a:pPr algn="ctr"/>
+            <a:endParaRPr/>
           </a:p>
         </p:txBody>
       </p:sp>
@@ -8071,6 +7912,7 @@
           <a:lstStyle/>
           <a:p>
             <a:pPr algn="ctr"/>
+            <a:endParaRPr/>
           </a:p>
         </p:txBody>
       </p:sp>
@@ -8176,7 +8018,7 @@
 </file>
 
 <file path=ppt/slides/slide12.xml><?xml version="1.0" encoding="utf-8"?>
-<p:sld xmlns:a="http://schemas.openxmlformats.org/drawingml/2006/main" xmlns:p="http://schemas.openxmlformats.org/presentationml/2006/main" xmlns:r="http://schemas.openxmlformats.org/officeDocument/2006/relationships">
+<p:sld xmlns:a="http://schemas.openxmlformats.org/drawingml/2006/main" xmlns:r="http://schemas.openxmlformats.org/officeDocument/2006/relationships" xmlns:p="http://schemas.openxmlformats.org/presentationml/2006/main">
   <p:cSld>
     <p:bg>
       <p:bgPr>
@@ -8192,7 +8034,14 @@
         <p:cNvGrpSpPr/>
         <p:nvPr/>
       </p:nvGrpSpPr>
-      <p:grpSpPr/>
+      <p:grpSpPr>
+        <a:xfrm>
+          <a:off x="0" y="0"/>
+          <a:ext cx="0" cy="0"/>
+          <a:chOff x="0" y="0"/>
+          <a:chExt cx="0" cy="0"/>
+        </a:xfrm>
+      </p:grpSpPr>
       <p:sp>
         <p:nvSpPr>
           <p:cNvPr id="2" name="TextBox 1"/>
@@ -8323,6 +8172,7 @@
           <a:lstStyle/>
           <a:p>
             <a:pPr algn="ctr"/>
+            <a:endParaRPr/>
           </a:p>
         </p:txBody>
       </p:sp>
@@ -8366,6 +8216,7 @@
           <a:lstStyle/>
           <a:p>
             <a:pPr algn="ctr"/>
+            <a:endParaRPr/>
           </a:p>
         </p:txBody>
       </p:sp>
@@ -8617,6 +8468,7 @@
           <a:lstStyle/>
           <a:p>
             <a:pPr algn="ctr"/>
+            <a:endParaRPr/>
           </a:p>
         </p:txBody>
       </p:sp>
@@ -8660,6 +8512,7 @@
           <a:lstStyle/>
           <a:p>
             <a:pPr algn="ctr"/>
+            <a:endParaRPr/>
           </a:p>
         </p:txBody>
       </p:sp>
@@ -8893,6 +8746,7 @@
           <a:lstStyle/>
           <a:p>
             <a:pPr algn="ctr"/>
+            <a:endParaRPr/>
           </a:p>
         </p:txBody>
       </p:sp>
@@ -8936,6 +8790,7 @@
           <a:lstStyle/>
           <a:p>
             <a:pPr algn="ctr"/>
+            <a:endParaRPr/>
           </a:p>
         </p:txBody>
       </p:sp>
@@ -9133,6 +8988,7 @@
           <a:lstStyle/>
           <a:p>
             <a:pPr algn="ctr"/>
+            <a:endParaRPr/>
           </a:p>
         </p:txBody>
       </p:sp>
@@ -9176,6 +9032,7 @@
           <a:lstStyle/>
           <a:p>
             <a:pPr algn="ctr"/>
+            <a:endParaRPr/>
           </a:p>
         </p:txBody>
       </p:sp>
@@ -9447,6 +9304,7 @@
           <a:lstStyle/>
           <a:p>
             <a:pPr algn="ctr"/>
+            <a:endParaRPr/>
           </a:p>
         </p:txBody>
       </p:sp>
@@ -9490,6 +9348,7 @@
           <a:lstStyle/>
           <a:p>
             <a:pPr algn="ctr"/>
+            <a:endParaRPr/>
           </a:p>
         </p:txBody>
       </p:sp>
@@ -9595,7 +9454,7 @@
 </file>
 
 <file path=ppt/slides/slide13.xml><?xml version="1.0" encoding="utf-8"?>
-<p:sld xmlns:a="http://schemas.openxmlformats.org/drawingml/2006/main" xmlns:p="http://schemas.openxmlformats.org/presentationml/2006/main" xmlns:r="http://schemas.openxmlformats.org/officeDocument/2006/relationships">
+<p:sld xmlns:a="http://schemas.openxmlformats.org/drawingml/2006/main" xmlns:r="http://schemas.openxmlformats.org/officeDocument/2006/relationships" xmlns:p="http://schemas.openxmlformats.org/presentationml/2006/main">
   <p:cSld>
     <p:bg>
       <p:bgPr>
@@ -9611,7 +9470,14 @@
         <p:cNvGrpSpPr/>
         <p:nvPr/>
       </p:nvGrpSpPr>
-      <p:grpSpPr/>
+      <p:grpSpPr>
+        <a:xfrm>
+          <a:off x="0" y="0"/>
+          <a:ext cx="0" cy="0"/>
+          <a:chOff x="0" y="0"/>
+          <a:chExt cx="0" cy="0"/>
+        </a:xfrm>
+      </p:grpSpPr>
       <p:sp>
         <p:nvSpPr>
           <p:cNvPr id="2" name="TextBox 1"/>
@@ -9742,6 +9608,7 @@
           <a:lstStyle/>
           <a:p>
             <a:pPr algn="ctr"/>
+            <a:endParaRPr/>
           </a:p>
         </p:txBody>
       </p:sp>
@@ -9785,6 +9652,7 @@
           <a:lstStyle/>
           <a:p>
             <a:pPr algn="ctr"/>
+            <a:endParaRPr/>
           </a:p>
         </p:txBody>
       </p:sp>
@@ -9841,8 +9709,8 @@
         </p:nvSpPr>
         <p:spPr>
           <a:xfrm>
-            <a:off x="585216" y="1417320"/>
-            <a:ext cx="5276088" cy="1819656"/>
+            <a:off x="566928" y="1435608"/>
+            <a:ext cx="5276088" cy="1705082"/>
           </a:xfrm>
           <a:prstGeom prst="rect">
             <a:avLst/>
@@ -9864,7 +9732,7 @@
               </a:spcAft>
             </a:pPr>
             <a:r>
-              <a:rPr sz="1150" b="1">
+              <a:rPr sz="1200" b="1">
                 <a:solidFill>
                   <a:srgbClr val="1E3A8A"/>
                 </a:solidFill>
@@ -9873,13 +9741,13 @@
               <a:t>• 验证背景：</a:t>
             </a:r>
             <a:r>
-              <a:rPr sz="1150">
-                <a:solidFill>
-                  <a:srgbClr val="1E293B"/>
-                </a:solidFill>
-                <a:latin typeface="Microsoft YaHei"/>
-              </a:rPr>
-              <a:t>业界常假设“必须依赖 DPU 专用芯片或硬件压缩卡才能跑满高速网络”，引入了额外的硬件单点故障；若盲目使用 CPU 软件压缩（如 zstd/lz4）则会导致 CPU 100% 打满、传输时延翻倍。</a:t>
+              <a:rPr sz="1200">
+                <a:solidFill>
+                  <a:srgbClr val="1E293B"/>
+                </a:solidFill>
+                <a:latin typeface="Microsoft YaHei"/>
+              </a:rPr>
+              <a:t>业界常假设“必须依赖 DPU 专用芯片才能跑满高速网络”，引入了单点故障；若盲目使用 CPU 软件压缩会导致 CPU 100% 打满、时延翻倍。</a:t>
             </a:r>
           </a:p>
           <a:p>
@@ -9892,7 +9760,7 @@
               </a:spcAft>
             </a:pPr>
             <a:r>
-              <a:rPr sz="1150" b="1">
+              <a:rPr sz="1200" b="1">
                 <a:solidFill>
                   <a:srgbClr val="1E3A8A"/>
                 </a:solidFill>
@@ -9901,16 +9769,16 @@
               <a:t>• 验证目的：</a:t>
             </a:r>
             <a:r>
-              <a:rPr sz="1150">
-                <a:solidFill>
-                  <a:srgbClr val="1E293B"/>
-                </a:solidFill>
-                <a:latin typeface="Microsoft YaHei"/>
-              </a:rPr>
-              <a:t>1. 验证专用 DPU 是否为必需；2. 证明基于纯 UBMEM/URMA 的</a:t>
-            </a:r>
-            <a:r>
-              <a:rPr sz="1150" b="1">
+              <a:rPr sz="1200">
+                <a:solidFill>
+                  <a:srgbClr val="1E293B"/>
+                </a:solidFill>
+                <a:latin typeface="Microsoft YaHei"/>
+              </a:rPr>
+              <a:t>1. 证明基于纯 UBMEM/URMA 的</a:t>
+            </a:r>
+            <a:r>
+              <a:rPr sz="1200" b="1">
                 <a:solidFill>
                   <a:srgbClr val="2563EB"/>
                 </a:solidFill>
@@ -9919,16 +9787,16 @@
               <a:t>“裸直达主路径”独立成立且 CPU 占用率 &lt; 1%</a:t>
             </a:r>
             <a:r>
-              <a:rPr sz="1150">
-                <a:solidFill>
-                  <a:srgbClr val="1E293B"/>
-                </a:solidFill>
-                <a:latin typeface="Microsoft YaHei"/>
-              </a:rPr>
-              <a:t>；3. 验证如果配置了 DPU，在 DPU 故障时系统能在 </a:t>
-            </a:r>
-            <a:r>
-              <a:rPr sz="1150" b="1">
+              <a:rPr sz="1200">
+                <a:solidFill>
+                  <a:srgbClr val="1E293B"/>
+                </a:solidFill>
+                <a:latin typeface="Microsoft YaHei"/>
+              </a:rPr>
+              <a:t>；2. 验证 DPU 故障时可在 </a:t>
+            </a:r>
+            <a:r>
+              <a:rPr sz="1200" b="1">
                 <a:solidFill>
                   <a:srgbClr val="059669"/>
                 </a:solidFill>
@@ -9937,13 +9805,13 @@
               <a:t>&lt; 1ms 内无缝回退到裸直达</a:t>
             </a:r>
             <a:r>
-              <a:rPr sz="1150">
-                <a:solidFill>
-                  <a:srgbClr val="1E293B"/>
-                </a:solidFill>
-                <a:latin typeface="Microsoft YaHei"/>
-              </a:rPr>
-              <a:t>；4. 证伪 CPU 软件压缩的负收益。</a:t>
+              <a:rPr sz="1200">
+                <a:solidFill>
+                  <a:srgbClr val="1E293B"/>
+                </a:solidFill>
+                <a:latin typeface="Microsoft YaHei"/>
+              </a:rPr>
+              <a:t>；3. 证伪 CPU 软件压缩负收益。</a:t>
             </a:r>
           </a:p>
           <a:p>
@@ -9956,7 +9824,7 @@
               </a:spcAft>
             </a:pPr>
             <a:r>
-              <a:rPr sz="1150" b="1">
+              <a:rPr sz="1200" b="1">
                 <a:solidFill>
                   <a:srgbClr val="1E3A8A"/>
                 </a:solidFill>
@@ -9965,13 +9833,13 @@
               <a:t>• 对整体项目的支撑：</a:t>
             </a:r>
             <a:r>
-              <a:rPr sz="1150">
-                <a:solidFill>
-                  <a:srgbClr val="1E293B"/>
-                </a:solidFill>
-                <a:latin typeface="Microsoft YaHei"/>
-              </a:rPr>
-              <a:t>确立零专用硬件依赖的主干方案，明确禁止 CPU 软件压缩负收益路径，保障系统高可靠性与部署灵活性。</a:t>
+              <a:rPr sz="1200">
+                <a:solidFill>
+                  <a:srgbClr val="1E293B"/>
+                </a:solidFill>
+                <a:latin typeface="Microsoft YaHei"/>
+              </a:rPr>
+              <a:t>确立零专用硬件依赖主干方案，明确禁用 CPU 软件压缩，保障系统高可靠与高可移植性。</a:t>
             </a:r>
           </a:p>
         </p:txBody>
@@ -10018,6 +9886,7 @@
           <a:lstStyle/>
           <a:p>
             <a:pPr algn="ctr"/>
+            <a:endParaRPr/>
           </a:p>
         </p:txBody>
       </p:sp>
@@ -10061,6 +9930,7 @@
           <a:lstStyle/>
           <a:p>
             <a:pPr algn="ctr"/>
+            <a:endParaRPr/>
           </a:p>
         </p:txBody>
       </p:sp>
@@ -10276,6 +10146,7 @@
           <a:lstStyle/>
           <a:p>
             <a:pPr algn="ctr"/>
+            <a:endParaRPr/>
           </a:p>
         </p:txBody>
       </p:sp>
@@ -10319,6 +10190,7 @@
           <a:lstStyle/>
           <a:p>
             <a:pPr algn="ctr"/>
+            <a:endParaRPr/>
           </a:p>
         </p:txBody>
       </p:sp>
@@ -10516,6 +10388,7 @@
           <a:lstStyle/>
           <a:p>
             <a:pPr algn="ctr"/>
+            <a:endParaRPr/>
           </a:p>
         </p:txBody>
       </p:sp>
@@ -10559,6 +10432,7 @@
           <a:lstStyle/>
           <a:p>
             <a:pPr algn="ctr"/>
+            <a:endParaRPr/>
           </a:p>
         </p:txBody>
       </p:sp>
@@ -10802,6 +10676,7 @@
           <a:lstStyle/>
           <a:p>
             <a:pPr algn="ctr"/>
+            <a:endParaRPr/>
           </a:p>
         </p:txBody>
       </p:sp>
@@ -10845,6 +10720,7 @@
           <a:lstStyle/>
           <a:p>
             <a:pPr algn="ctr"/>
+            <a:endParaRPr/>
           </a:p>
         </p:txBody>
       </p:sp>
@@ -10950,7 +10826,7 @@
 </file>
 
 <file path=ppt/slides/slide14.xml><?xml version="1.0" encoding="utf-8"?>
-<p:sld xmlns:a="http://schemas.openxmlformats.org/drawingml/2006/main" xmlns:p="http://schemas.openxmlformats.org/presentationml/2006/main" xmlns:r="http://schemas.openxmlformats.org/officeDocument/2006/relationships">
+<p:sld xmlns:a="http://schemas.openxmlformats.org/drawingml/2006/main" xmlns:r="http://schemas.openxmlformats.org/officeDocument/2006/relationships" xmlns:p="http://schemas.openxmlformats.org/presentationml/2006/main">
   <p:cSld>
     <p:bg>
       <p:bgPr>
@@ -10966,7 +10842,14 @@
         <p:cNvGrpSpPr/>
         <p:nvPr/>
       </p:nvGrpSpPr>
-      <p:grpSpPr/>
+      <p:grpSpPr>
+        <a:xfrm>
+          <a:off x="0" y="0"/>
+          <a:ext cx="0" cy="0"/>
+          <a:chOff x="0" y="0"/>
+          <a:chExt cx="0" cy="0"/>
+        </a:xfrm>
+      </p:grpSpPr>
       <p:sp>
         <p:nvSpPr>
           <p:cNvPr id="2" name="TextBox 1"/>
@@ -11061,6 +10944,7 @@
           <a:lstStyle/>
           <a:p>
             <a:pPr algn="ctr"/>
+            <a:endParaRPr/>
           </a:p>
         </p:txBody>
       </p:sp>
@@ -11104,6 +10988,7 @@
           <a:lstStyle/>
           <a:p>
             <a:pPr algn="ctr"/>
+            <a:endParaRPr/>
           </a:p>
         </p:txBody>
       </p:sp>
@@ -11301,6 +11186,7 @@
           <a:lstStyle/>
           <a:p>
             <a:pPr algn="ctr"/>
+            <a:endParaRPr/>
           </a:p>
         </p:txBody>
       </p:sp>
@@ -11344,6 +11230,7 @@
           <a:lstStyle/>
           <a:p>
             <a:pPr algn="ctr"/>
+            <a:endParaRPr/>
           </a:p>
         </p:txBody>
       </p:sp>
@@ -11541,6 +11428,7 @@
           <a:lstStyle/>
           <a:p>
             <a:pPr algn="ctr"/>
+            <a:endParaRPr/>
           </a:p>
         </p:txBody>
       </p:sp>
@@ -11584,6 +11472,7 @@
           <a:lstStyle/>
           <a:p>
             <a:pPr algn="ctr"/>
+            <a:endParaRPr/>
           </a:p>
         </p:txBody>
       </p:sp>
@@ -11706,7 +11595,7 @@
                 </a:solidFill>
                 <a:latin typeface="Microsoft YaHei"/>
               </a:rPr>
-              <a:t>形成包含测试代码、测试环境、原始数据与分析结论的完整技术依据文档。</a:t>
+              <a:t>形成包含测试代码、环境配置、实测数据与分析结论的完整技术文档。</a:t>
             </a:r>
           </a:p>
         </p:txBody>
@@ -11753,6 +11642,7 @@
           <a:lstStyle/>
           <a:p>
             <a:pPr algn="ctr"/>
+            <a:endParaRPr/>
           </a:p>
         </p:txBody>
       </p:sp>
@@ -11796,6 +11686,7 @@
           <a:lstStyle/>
           <a:p>
             <a:pPr algn="ctr"/>
+            <a:endParaRPr/>
           </a:p>
         </p:txBody>
       </p:sp>
@@ -11852,7 +11743,7 @@
 </file>
 
 <file path=ppt/slides/slide2.xml><?xml version="1.0" encoding="utf-8"?>
-<p:sld xmlns:a="http://schemas.openxmlformats.org/drawingml/2006/main" xmlns:p="http://schemas.openxmlformats.org/presentationml/2006/main" xmlns:r="http://schemas.openxmlformats.org/officeDocument/2006/relationships">
+<p:sld xmlns:a="http://schemas.openxmlformats.org/drawingml/2006/main" xmlns:r="http://schemas.openxmlformats.org/officeDocument/2006/relationships" xmlns:p="http://schemas.openxmlformats.org/presentationml/2006/main">
   <p:cSld>
     <p:bg>
       <p:bgPr>
@@ -11868,7 +11759,14 @@
         <p:cNvGrpSpPr/>
         <p:nvPr/>
       </p:nvGrpSpPr>
-      <p:grpSpPr/>
+      <p:grpSpPr>
+        <a:xfrm>
+          <a:off x="0" y="0"/>
+          <a:ext cx="0" cy="0"/>
+          <a:chOff x="0" y="0"/>
+          <a:chExt cx="0" cy="0"/>
+        </a:xfrm>
+      </p:grpSpPr>
       <p:sp>
         <p:nvSpPr>
           <p:cNvPr id="2" name="TextBox 1"/>
@@ -11999,6 +11897,7 @@
           <a:lstStyle/>
           <a:p>
             <a:pPr algn="ctr"/>
+            <a:endParaRPr/>
           </a:p>
         </p:txBody>
       </p:sp>
@@ -12042,6 +11941,7 @@
           <a:lstStyle/>
           <a:p>
             <a:pPr algn="ctr"/>
+            <a:endParaRPr/>
           </a:p>
         </p:txBody>
       </p:sp>
@@ -12403,6 +12303,7 @@
           <a:lstStyle/>
           <a:p>
             <a:pPr algn="ctr"/>
+            <a:endParaRPr/>
           </a:p>
         </p:txBody>
       </p:sp>
@@ -12446,6 +12347,7 @@
           <a:lstStyle/>
           <a:p>
             <a:pPr algn="ctr"/>
+            <a:endParaRPr/>
           </a:p>
         </p:txBody>
       </p:sp>
@@ -12643,6 +12545,7 @@
           <a:lstStyle/>
           <a:p>
             <a:pPr algn="ctr"/>
+            <a:endParaRPr/>
           </a:p>
         </p:txBody>
       </p:sp>
@@ -12686,6 +12589,7 @@
           <a:lstStyle/>
           <a:p>
             <a:pPr algn="ctr"/>
+            <a:endParaRPr/>
           </a:p>
         </p:txBody>
       </p:sp>
@@ -12883,6 +12787,7 @@
           <a:lstStyle/>
           <a:p>
             <a:pPr algn="ctr"/>
+            <a:endParaRPr/>
           </a:p>
         </p:txBody>
       </p:sp>
@@ -12926,6 +12831,7 @@
           <a:lstStyle/>
           <a:p>
             <a:pPr algn="ctr"/>
+            <a:endParaRPr/>
           </a:p>
         </p:txBody>
       </p:sp>
@@ -13013,7 +12919,7 @@
 </file>
 
 <file path=ppt/slides/slide3.xml><?xml version="1.0" encoding="utf-8"?>
-<p:sld xmlns:a="http://schemas.openxmlformats.org/drawingml/2006/main" xmlns:p="http://schemas.openxmlformats.org/presentationml/2006/main" xmlns:r="http://schemas.openxmlformats.org/officeDocument/2006/relationships">
+<p:sld xmlns:a="http://schemas.openxmlformats.org/drawingml/2006/main" xmlns:r="http://schemas.openxmlformats.org/officeDocument/2006/relationships" xmlns:p="http://schemas.openxmlformats.org/presentationml/2006/main">
   <p:cSld>
     <p:bg>
       <p:bgPr>
@@ -13029,7 +12935,14 @@
         <p:cNvGrpSpPr/>
         <p:nvPr/>
       </p:nvGrpSpPr>
-      <p:grpSpPr/>
+      <p:grpSpPr>
+        <a:xfrm>
+          <a:off x="0" y="0"/>
+          <a:ext cx="0" cy="0"/>
+          <a:chOff x="0" y="0"/>
+          <a:chExt cx="0" cy="0"/>
+        </a:xfrm>
+      </p:grpSpPr>
       <p:sp>
         <p:nvSpPr>
           <p:cNvPr id="2" name="TextBox 1"/>
@@ -13160,6 +13073,7 @@
           <a:lstStyle/>
           <a:p>
             <a:pPr algn="ctr"/>
+            <a:endParaRPr/>
           </a:p>
         </p:txBody>
       </p:sp>
@@ -13203,6 +13117,7 @@
           <a:lstStyle/>
           <a:p>
             <a:pPr algn="ctr"/>
+            <a:endParaRPr/>
           </a:p>
         </p:txBody>
       </p:sp>
@@ -13436,6 +13351,7 @@
           <a:lstStyle/>
           <a:p>
             <a:pPr algn="ctr"/>
+            <a:endParaRPr/>
           </a:p>
         </p:txBody>
       </p:sp>
@@ -13479,6 +13395,7 @@
           <a:lstStyle/>
           <a:p>
             <a:pPr algn="ctr"/>
+            <a:endParaRPr/>
           </a:p>
         </p:txBody>
       </p:sp>
@@ -13748,6 +13665,7 @@
           <a:lstStyle/>
           <a:p>
             <a:pPr algn="ctr"/>
+            <a:endParaRPr/>
           </a:p>
         </p:txBody>
       </p:sp>
@@ -13791,6 +13709,7 @@
           <a:lstStyle/>
           <a:p>
             <a:pPr algn="ctr"/>
+            <a:endParaRPr/>
           </a:p>
         </p:txBody>
       </p:sp>
@@ -13885,7 +13804,7 @@
                 </a:solidFill>
                 <a:latin typeface="Microsoft YaHei"/>
               </a:rPr>
-              <a:t>构造前缀复用率在 50%~98% 的请求对（例如 50K 前缀 + 50K 新增内容的 100K 序列，模拟长对话与文档问答场景）。</a:t>
+              <a:t>构造前缀复用率在 50%~98% 的请求对（如 50K 前缀 + 50K 新增内容的 100K 序列，模拟长对话与问答）。</a:t>
             </a:r>
           </a:p>
           <a:p>
@@ -13988,6 +13907,7 @@
           <a:lstStyle/>
           <a:p>
             <a:pPr algn="ctr"/>
+            <a:endParaRPr/>
           </a:p>
         </p:txBody>
       </p:sp>
@@ -14031,6 +13951,7 @@
           <a:lstStyle/>
           <a:p>
             <a:pPr algn="ctr"/>
+            <a:endParaRPr/>
           </a:p>
         </p:txBody>
       </p:sp>
@@ -14246,6 +14167,7 @@
           <a:lstStyle/>
           <a:p>
             <a:pPr algn="ctr"/>
+            <a:endParaRPr/>
           </a:p>
         </p:txBody>
       </p:sp>
@@ -14289,6 +14211,7 @@
           <a:lstStyle/>
           <a:p>
             <a:pPr algn="ctr"/>
+            <a:endParaRPr/>
           </a:p>
         </p:txBody>
       </p:sp>
@@ -14394,7 +14317,7 @@
 </file>
 
 <file path=ppt/slides/slide4.xml><?xml version="1.0" encoding="utf-8"?>
-<p:sld xmlns:a="http://schemas.openxmlformats.org/drawingml/2006/main" xmlns:p="http://schemas.openxmlformats.org/presentationml/2006/main" xmlns:r="http://schemas.openxmlformats.org/officeDocument/2006/relationships">
+<p:sld xmlns:a="http://schemas.openxmlformats.org/drawingml/2006/main" xmlns:r="http://schemas.openxmlformats.org/officeDocument/2006/relationships" xmlns:p="http://schemas.openxmlformats.org/presentationml/2006/main">
   <p:cSld>
     <p:bg>
       <p:bgPr>
@@ -14410,7 +14333,14 @@
         <p:cNvGrpSpPr/>
         <p:nvPr/>
       </p:nvGrpSpPr>
-      <p:grpSpPr/>
+      <p:grpSpPr>
+        <a:xfrm>
+          <a:off x="0" y="0"/>
+          <a:ext cx="0" cy="0"/>
+          <a:chOff x="0" y="0"/>
+          <a:chExt cx="0" cy="0"/>
+        </a:xfrm>
+      </p:grpSpPr>
       <p:sp>
         <p:nvSpPr>
           <p:cNvPr id="2" name="TextBox 1"/>
@@ -14541,6 +14471,7 @@
           <a:lstStyle/>
           <a:p>
             <a:pPr algn="ctr"/>
+            <a:endParaRPr/>
           </a:p>
         </p:txBody>
       </p:sp>
@@ -14584,6 +14515,7 @@
           <a:lstStyle/>
           <a:p>
             <a:pPr algn="ctr"/>
+            <a:endParaRPr/>
           </a:p>
         </p:txBody>
       </p:sp>
@@ -14678,7 +14610,7 @@
                 </a:solidFill>
                 <a:latin typeface="Microsoft YaHei"/>
               </a:rPr>
-              <a:t>在 800G 高速网络与 Gen5 SSD 环境下，若由 Host CPU 参与数据内存拷贝（memcpy）或软件拆包，会瞬间占满 CPU 和内存带宽，导致网络降速与时延抖动。</a:t>
+              <a:t>在 800G 网络与 Gen5 SSD 环境下，若由 Host CPU 参与内存拷贝或软件拆包，会瞬间占满 CPU 与内存带宽，导致降速与时延抖动。</a:t>
             </a:r>
           </a:p>
           <a:p>
@@ -14706,7 +14638,7 @@
                 </a:solidFill>
                 <a:latin typeface="Microsoft YaHei"/>
               </a:rPr>
-              <a:t>验证跨节点网络传输与本地 SSD 读写通路中，数据直接在显存与网卡/SSD 之间流动，</a:t>
+              <a:t>验证跨节点传输与本地 SSD 通路中，数据直接在显存与网卡/SSD 流动，</a:t>
             </a:r>
             <a:r>
               <a:rPr sz="1150" b="1">
@@ -14715,7 +14647,7 @@
                 </a:solidFill>
                 <a:latin typeface="Microsoft YaHei"/>
               </a:rPr>
-              <a:t>Host CPU 零数据拷贝（CPU仅负责下发控制指令，不参与正文搬运）</a:t>
+              <a:t>Host CPU 零数据拷贝（CPU 仅下发控制指令，不参与正文搬运）</a:t>
             </a:r>
             <a:r>
               <a:rPr sz="1150">
@@ -14724,7 +14656,7 @@
                 </a:solidFill>
                 <a:latin typeface="Microsoft YaHei"/>
               </a:rPr>
-              <a:t>，有效带宽达到硬件标称线速 </a:t>
+              <a:t>，有效带宽达线速 </a:t>
             </a:r>
             <a:r>
               <a:rPr sz="1150" b="1">
@@ -14770,7 +14702,7 @@
                 </a:solidFill>
                 <a:latin typeface="Microsoft YaHei"/>
               </a:rPr>
-              <a:t>确立 E1 阶段传输底座，并输出</a:t>
+              <a:t>确立 E1 传输底座，输出</a:t>
             </a:r>
             <a:r>
               <a:rPr sz="1150" b="1">
@@ -14779,7 +14711,7 @@
                 </a:solidFill>
                 <a:latin typeface="Microsoft YaHei"/>
               </a:rPr>
-              <a:t>“硬件能力矩阵”（即在运行时自动探测各通信链路的带宽、时延等物理参数表）</a:t>
+              <a:t>“硬件能力矩阵”（运行时自动探测各链路物理参数表）</a:t>
             </a:r>
             <a:r>
               <a:rPr sz="1150">
@@ -14835,6 +14767,7 @@
           <a:lstStyle/>
           <a:p>
             <a:pPr algn="ctr"/>
+            <a:endParaRPr/>
           </a:p>
         </p:txBody>
       </p:sp>
@@ -14878,6 +14811,7 @@
           <a:lstStyle/>
           <a:p>
             <a:pPr algn="ctr"/>
+            <a:endParaRPr/>
           </a:p>
         </p:txBody>
       </p:sp>
@@ -14981,7 +14915,7 @@
                 </a:solidFill>
                 <a:latin typeface="Consolas"/>
               </a:rPr>
-              <a:t>aclrtMalloc(&amp;ptr, sz, ACL_MEM_MALLOC_HUGE_FIRST_P2P)</a:t>
+              <a:t>aclrtMalloc (P2P 标志)</a:t>
             </a:r>
             <a:r>
               <a:rPr sz="1150">
@@ -15045,7 +14979,7 @@
                 </a:solidFill>
                 <a:latin typeface="Consolas"/>
               </a:rPr>
-              <a:t>io_uring FIXED I/O + O_DIRECT</a:t>
+              <a:t>io_uring 裸盘读写 (FIXED I/O + O_DIRECT)</a:t>
             </a:r>
             <a:r>
               <a:rPr sz="1150">
@@ -15054,7 +14988,7 @@
                 </a:solidFill>
                 <a:latin typeface="Microsoft YaHei"/>
               </a:rPr>
-              <a:t> 裸盘读写，完全绕过操作系统页缓存（Page Cache）与内存中转。</a:t>
+              <a:t>，完全绕过 OS 页缓存与内存中转。</a:t>
             </a:r>
           </a:p>
           <a:p>
@@ -15082,7 +15016,7 @@
                 </a:solidFill>
                 <a:latin typeface="Microsoft YaHei"/>
               </a:rPr>
-              <a:t>使用 eBPF（内核跟踪工具）挂载内核与 glibc，全量监控是否有 CPU 数据拷贝（memcpy/memmove）发生。</a:t>
+              <a:t>使用 eBPF（内核跟踪工具）挂载内核与 glibc，全量监控是否有 CPU 数据拷贝发生。</a:t>
             </a:r>
           </a:p>
         </p:txBody>
@@ -15129,6 +15063,7 @@
           <a:lstStyle/>
           <a:p>
             <a:pPr algn="ctr"/>
+            <a:endParaRPr/>
           </a:p>
         </p:txBody>
       </p:sp>
@@ -15172,6 +15107,7 @@
           <a:lstStyle/>
           <a:p>
             <a:pPr algn="ctr"/>
+            <a:endParaRPr/>
           </a:p>
         </p:txBody>
       </p:sp>
@@ -15369,6 +15305,7 @@
           <a:lstStyle/>
           <a:p>
             <a:pPr algn="ctr"/>
+            <a:endParaRPr/>
           </a:p>
         </p:txBody>
       </p:sp>
@@ -15412,6 +15349,7 @@
           <a:lstStyle/>
           <a:p>
             <a:pPr algn="ctr"/>
+            <a:endParaRPr/>
           </a:p>
         </p:txBody>
       </p:sp>
@@ -15655,6 +15593,7 @@
           <a:lstStyle/>
           <a:p>
             <a:pPr algn="ctr"/>
+            <a:endParaRPr/>
           </a:p>
         </p:txBody>
       </p:sp>
@@ -15698,6 +15637,7 @@
           <a:lstStyle/>
           <a:p>
             <a:pPr algn="ctr"/>
+            <a:endParaRPr/>
           </a:p>
         </p:txBody>
       </p:sp>
@@ -15803,7 +15743,7 @@
 </file>
 
 <file path=ppt/slides/slide5.xml><?xml version="1.0" encoding="utf-8"?>
-<p:sld xmlns:a="http://schemas.openxmlformats.org/drawingml/2006/main" xmlns:p="http://schemas.openxmlformats.org/presentationml/2006/main" xmlns:r="http://schemas.openxmlformats.org/officeDocument/2006/relationships">
+<p:sld xmlns:a="http://schemas.openxmlformats.org/drawingml/2006/main" xmlns:r="http://schemas.openxmlformats.org/officeDocument/2006/relationships" xmlns:p="http://schemas.openxmlformats.org/presentationml/2006/main">
   <p:cSld>
     <p:bg>
       <p:bgPr>
@@ -15819,7 +15759,14 @@
         <p:cNvGrpSpPr/>
         <p:nvPr/>
       </p:nvGrpSpPr>
-      <p:grpSpPr/>
+      <p:grpSpPr>
+        <a:xfrm>
+          <a:off x="0" y="0"/>
+          <a:ext cx="0" cy="0"/>
+          <a:chOff x="0" y="0"/>
+          <a:chExt cx="0" cy="0"/>
+        </a:xfrm>
+      </p:grpSpPr>
       <p:sp>
         <p:nvSpPr>
           <p:cNvPr id="2" name="TextBox 1"/>
@@ -15950,6 +15897,7 @@
           <a:lstStyle/>
           <a:p>
             <a:pPr algn="ctr"/>
+            <a:endParaRPr/>
           </a:p>
         </p:txBody>
       </p:sp>
@@ -15993,6 +15941,7 @@
           <a:lstStyle/>
           <a:p>
             <a:pPr algn="ctr"/>
+            <a:endParaRPr/>
           </a:p>
         </p:txBody>
       </p:sp>
@@ -16208,6 +16157,7 @@
           <a:lstStyle/>
           <a:p>
             <a:pPr algn="ctr"/>
+            <a:endParaRPr/>
           </a:p>
         </p:txBody>
       </p:sp>
@@ -16251,6 +16201,7 @@
           <a:lstStyle/>
           <a:p>
             <a:pPr algn="ctr"/>
+            <a:endParaRPr/>
           </a:p>
         </p:txBody>
       </p:sp>
@@ -16345,7 +16296,7 @@
                 </a:solidFill>
                 <a:latin typeface="Microsoft YaHei"/>
               </a:rPr>
-              <a:t>定义 64 字节对齐的定长结构体 </a:t>
+              <a:t>定义 64 字节对齐定长结构体 </a:t>
             </a:r>
             <a:r>
               <a:rPr sz="1150" b="1">
@@ -16363,25 +16314,7 @@
                 </a:solidFill>
                 <a:latin typeface="Microsoft YaHei"/>
               </a:rPr>
-              <a:t> 与 32 字节 </a:t>
-            </a:r>
-            <a:r>
-              <a:rPr sz="1150" b="1">
-                <a:solidFill>
-                  <a:srgbClr val="1E3A8A"/>
-                </a:solidFill>
-                <a:latin typeface="Consolas"/>
-              </a:rPr>
-              <a:t>LogicalBlockExtent</a:t>
-            </a:r>
-            <a:r>
-              <a:rPr sz="1150">
-                <a:solidFill>
-                  <a:srgbClr val="1E293B"/>
-                </a:solidFill>
-                <a:latin typeface="Microsoft YaHei"/>
-              </a:rPr>
-              <a:t>，通过 Linux 共享内存（</a:t>
+              <a:t> 与 32 字节 Extent，通过共享内存（</a:t>
             </a:r>
             <a:r>
               <a:rPr sz="1150">
@@ -16427,7 +16360,7 @@
                 </a:solidFill>
                 <a:latin typeface="Microsoft YaHei"/>
               </a:rPr>
-              <a:t>CANN 双 Stream 架构（计算流 Compute Stream + 传输流 Transfer Stream），利用 </a:t>
+              <a:t>CANN 双 Stream 架构（计算流与传输流），利用 </a:t>
             </a:r>
             <a:r>
               <a:rPr sz="1150">
@@ -16538,6 +16471,7 @@
           <a:lstStyle/>
           <a:p>
             <a:pPr algn="ctr"/>
+            <a:endParaRPr/>
           </a:p>
         </p:txBody>
       </p:sp>
@@ -16581,6 +16515,7 @@
           <a:lstStyle/>
           <a:p>
             <a:pPr algn="ctr"/>
+            <a:endParaRPr/>
           </a:p>
         </p:txBody>
       </p:sp>
@@ -16778,6 +16713,7 @@
           <a:lstStyle/>
           <a:p>
             <a:pPr algn="ctr"/>
+            <a:endParaRPr/>
           </a:p>
         </p:txBody>
       </p:sp>
@@ -16821,6 +16757,7 @@
           <a:lstStyle/>
           <a:p>
             <a:pPr algn="ctr"/>
+            <a:endParaRPr/>
           </a:p>
         </p:txBody>
       </p:sp>
@@ -17064,6 +17001,7 @@
           <a:lstStyle/>
           <a:p>
             <a:pPr algn="ctr"/>
+            <a:endParaRPr/>
           </a:p>
         </p:txBody>
       </p:sp>
@@ -17107,6 +17045,7 @@
           <a:lstStyle/>
           <a:p>
             <a:pPr algn="ctr"/>
+            <a:endParaRPr/>
           </a:p>
         </p:txBody>
       </p:sp>
@@ -17230,7 +17169,7 @@
 </file>
 
 <file path=ppt/slides/slide6.xml><?xml version="1.0" encoding="utf-8"?>
-<p:sld xmlns:a="http://schemas.openxmlformats.org/drawingml/2006/main" xmlns:p="http://schemas.openxmlformats.org/presentationml/2006/main" xmlns:r="http://schemas.openxmlformats.org/officeDocument/2006/relationships">
+<p:sld xmlns:a="http://schemas.openxmlformats.org/drawingml/2006/main" xmlns:r="http://schemas.openxmlformats.org/officeDocument/2006/relationships" xmlns:p="http://schemas.openxmlformats.org/presentationml/2006/main">
   <p:cSld>
     <p:bg>
       <p:bgPr>
@@ -17246,7 +17185,14 @@
         <p:cNvGrpSpPr/>
         <p:nvPr/>
       </p:nvGrpSpPr>
-      <p:grpSpPr/>
+      <p:grpSpPr>
+        <a:xfrm>
+          <a:off x="0" y="0"/>
+          <a:ext cx="0" cy="0"/>
+          <a:chOff x="0" y="0"/>
+          <a:chExt cx="0" cy="0"/>
+        </a:xfrm>
+      </p:grpSpPr>
       <p:sp>
         <p:nvSpPr>
           <p:cNvPr id="2" name="TextBox 1"/>
@@ -17377,6 +17323,7 @@
           <a:lstStyle/>
           <a:p>
             <a:pPr algn="ctr"/>
+            <a:endParaRPr/>
           </a:p>
         </p:txBody>
       </p:sp>
@@ -17420,6 +17367,7 @@
           <a:lstStyle/>
           <a:p>
             <a:pPr algn="ctr"/>
+            <a:endParaRPr/>
           </a:p>
         </p:txBody>
       </p:sp>
@@ -17653,6 +17601,7 @@
           <a:lstStyle/>
           <a:p>
             <a:pPr algn="ctr"/>
+            <a:endParaRPr/>
           </a:p>
         </p:txBody>
       </p:sp>
@@ -17696,6 +17645,7 @@
           <a:lstStyle/>
           <a:p>
             <a:pPr algn="ctr"/>
+            <a:endParaRPr/>
           </a:p>
         </p:txBody>
       </p:sp>
@@ -17947,6 +17897,7 @@
           <a:lstStyle/>
           <a:p>
             <a:pPr algn="ctr"/>
+            <a:endParaRPr/>
           </a:p>
         </p:txBody>
       </p:sp>
@@ -17990,6 +17941,7 @@
           <a:lstStyle/>
           <a:p>
             <a:pPr algn="ctr"/>
+            <a:endParaRPr/>
           </a:p>
         </p:txBody>
       </p:sp>
@@ -18140,7 +18092,7 @@
                 </a:solidFill>
                 <a:latin typeface="Microsoft YaHei"/>
               </a:rPr>
-              <a:t>模拟远端节点 Crash、网络断连与租约超时，触发总线错误，验证系统是否平滑回退。</a:t>
+              <a:t>模拟 远端节点 Crash、网络断连与租约超时，触发总线错误，验证系统是否平滑回退。</a:t>
             </a:r>
           </a:p>
         </p:txBody>
@@ -18187,6 +18139,7 @@
           <a:lstStyle/>
           <a:p>
             <a:pPr algn="ctr"/>
+            <a:endParaRPr/>
           </a:p>
         </p:txBody>
       </p:sp>
@@ -18230,6 +18183,7 @@
           <a:lstStyle/>
           <a:p>
             <a:pPr algn="ctr"/>
+            <a:endParaRPr/>
           </a:p>
         </p:txBody>
       </p:sp>
@@ -18473,6 +18427,7 @@
           <a:lstStyle/>
           <a:p>
             <a:pPr algn="ctr"/>
+            <a:endParaRPr/>
           </a:p>
         </p:txBody>
       </p:sp>
@@ -18516,6 +18471,7 @@
           <a:lstStyle/>
           <a:p>
             <a:pPr algn="ctr"/>
+            <a:endParaRPr/>
           </a:p>
         </p:txBody>
       </p:sp>
@@ -18621,7 +18577,7 @@
 </file>
 
 <file path=ppt/slides/slide7.xml><?xml version="1.0" encoding="utf-8"?>
-<p:sld xmlns:a="http://schemas.openxmlformats.org/drawingml/2006/main" xmlns:p="http://schemas.openxmlformats.org/presentationml/2006/main" xmlns:r="http://schemas.openxmlformats.org/officeDocument/2006/relationships">
+<p:sld xmlns:a="http://schemas.openxmlformats.org/drawingml/2006/main" xmlns:r="http://schemas.openxmlformats.org/officeDocument/2006/relationships" xmlns:p="http://schemas.openxmlformats.org/presentationml/2006/main">
   <p:cSld>
     <p:bg>
       <p:bgPr>
@@ -18637,7 +18593,14 @@
         <p:cNvGrpSpPr/>
         <p:nvPr/>
       </p:nvGrpSpPr>
-      <p:grpSpPr/>
+      <p:grpSpPr>
+        <a:xfrm>
+          <a:off x="0" y="0"/>
+          <a:ext cx="0" cy="0"/>
+          <a:chOff x="0" y="0"/>
+          <a:chExt cx="0" cy="0"/>
+        </a:xfrm>
+      </p:grpSpPr>
       <p:sp>
         <p:nvSpPr>
           <p:cNvPr id="2" name="TextBox 1"/>
@@ -18768,6 +18731,7 @@
           <a:lstStyle/>
           <a:p>
             <a:pPr algn="ctr"/>
+            <a:endParaRPr/>
           </a:p>
         </p:txBody>
       </p:sp>
@@ -18811,6 +18775,7 @@
           <a:lstStyle/>
           <a:p>
             <a:pPr algn="ctr"/>
+            <a:endParaRPr/>
           </a:p>
         </p:txBody>
       </p:sp>
@@ -19044,6 +19009,7 @@
           <a:lstStyle/>
           <a:p>
             <a:pPr algn="ctr"/>
+            <a:endParaRPr/>
           </a:p>
         </p:txBody>
       </p:sp>
@@ -19087,6 +19053,7 @@
           <a:lstStyle/>
           <a:p>
             <a:pPr algn="ctr"/>
+            <a:endParaRPr/>
           </a:p>
         </p:txBody>
       </p:sp>
@@ -19320,6 +19287,7 @@
           <a:lstStyle/>
           <a:p>
             <a:pPr algn="ctr"/>
+            <a:endParaRPr/>
           </a:p>
         </p:txBody>
       </p:sp>
@@ -19363,6 +19331,7 @@
           <a:lstStyle/>
           <a:p>
             <a:pPr algn="ctr"/>
+            <a:endParaRPr/>
           </a:p>
         </p:txBody>
       </p:sp>
@@ -19560,6 +19529,7 @@
           <a:lstStyle/>
           <a:p>
             <a:pPr algn="ctr"/>
+            <a:endParaRPr/>
           </a:p>
         </p:txBody>
       </p:sp>
@@ -19603,6 +19573,7 @@
           <a:lstStyle/>
           <a:p>
             <a:pPr algn="ctr"/>
+            <a:endParaRPr/>
           </a:p>
         </p:txBody>
       </p:sp>
@@ -19846,6 +19817,7 @@
           <a:lstStyle/>
           <a:p>
             <a:pPr algn="ctr"/>
+            <a:endParaRPr/>
           </a:p>
         </p:txBody>
       </p:sp>
@@ -19889,6 +19861,7 @@
           <a:lstStyle/>
           <a:p>
             <a:pPr algn="ctr"/>
+            <a:endParaRPr/>
           </a:p>
         </p:txBody>
       </p:sp>
@@ -20012,7 +19985,7 @@
 </file>
 
 <file path=ppt/slides/slide8.xml><?xml version="1.0" encoding="utf-8"?>
-<p:sld xmlns:a="http://schemas.openxmlformats.org/drawingml/2006/main" xmlns:p="http://schemas.openxmlformats.org/presentationml/2006/main" xmlns:r="http://schemas.openxmlformats.org/officeDocument/2006/relationships">
+<p:sld xmlns:a="http://schemas.openxmlformats.org/drawingml/2006/main" xmlns:r="http://schemas.openxmlformats.org/officeDocument/2006/relationships" xmlns:p="http://schemas.openxmlformats.org/presentationml/2006/main">
   <p:cSld>
     <p:bg>
       <p:bgPr>
@@ -20028,7 +20001,14 @@
         <p:cNvGrpSpPr/>
         <p:nvPr/>
       </p:nvGrpSpPr>
-      <p:grpSpPr/>
+      <p:grpSpPr>
+        <a:xfrm>
+          <a:off x="0" y="0"/>
+          <a:ext cx="0" cy="0"/>
+          <a:chOff x="0" y="0"/>
+          <a:chExt cx="0" cy="0"/>
+        </a:xfrm>
+      </p:grpSpPr>
       <p:sp>
         <p:nvSpPr>
           <p:cNvPr id="2" name="TextBox 1"/>
@@ -20159,6 +20139,7 @@
           <a:lstStyle/>
           <a:p>
             <a:pPr algn="ctr"/>
+            <a:endParaRPr/>
           </a:p>
         </p:txBody>
       </p:sp>
@@ -20202,6 +20183,7 @@
           <a:lstStyle/>
           <a:p>
             <a:pPr algn="ctr"/>
+            <a:endParaRPr/>
           </a:p>
         </p:txBody>
       </p:sp>
@@ -20435,6 +20417,7 @@
           <a:lstStyle/>
           <a:p>
             <a:pPr algn="ctr"/>
+            <a:endParaRPr/>
           </a:p>
         </p:txBody>
       </p:sp>
@@ -20478,6 +20461,7 @@
           <a:lstStyle/>
           <a:p>
             <a:pPr algn="ctr"/>
+            <a:endParaRPr/>
           </a:p>
         </p:txBody>
       </p:sp>
@@ -20609,7 +20593,7 @@
                 </a:solidFill>
                 <a:latin typeface="Consolas"/>
               </a:rPr>
-              <a:t>io_uring + O_DIRECT</a:t>
+              <a:t>io_uring 裸盘读写 (O_DIRECT 直接 I/O)</a:t>
             </a:r>
             <a:r>
               <a:rPr sz="1150">
@@ -20618,7 +20602,7 @@
                 </a:solidFill>
                 <a:latin typeface="Microsoft YaHei"/>
               </a:rPr>
-              <a:t>（直接 I/O）裸盘读写，</a:t>
+              <a:t>，</a:t>
             </a:r>
             <a:r>
               <a:rPr sz="1150" b="1">
@@ -20711,6 +20695,7 @@
           <a:lstStyle/>
           <a:p>
             <a:pPr algn="ctr"/>
+            <a:endParaRPr/>
           </a:p>
         </p:txBody>
       </p:sp>
@@ -20754,6 +20739,7 @@
           <a:lstStyle/>
           <a:p>
             <a:pPr algn="ctr"/>
+            <a:endParaRPr/>
           </a:p>
         </p:txBody>
       </p:sp>
@@ -20951,6 +20937,7 @@
           <a:lstStyle/>
           <a:p>
             <a:pPr algn="ctr"/>
+            <a:endParaRPr/>
           </a:p>
         </p:txBody>
       </p:sp>
@@ -20994,6 +20981,7 @@
           <a:lstStyle/>
           <a:p>
             <a:pPr algn="ctr"/>
+            <a:endParaRPr/>
           </a:p>
         </p:txBody>
       </p:sp>
@@ -21116,7 +21104,7 @@
                 </a:solidFill>
                 <a:latin typeface="Microsoft YaHei"/>
               </a:rPr>
-              <a:t>1. 直达带宽达成率：</a:t>
+              <a:t>1. 直达带宽：</a:t>
             </a:r>
             <a:r>
               <a:rPr sz="1150" b="1">
@@ -21125,7 +21113,7 @@
                 </a:solidFill>
                 <a:latin typeface="Microsoft YaHei"/>
               </a:rPr>
-              <a:t>显存与 SSD 之间的直达传输带宽达到 SSD 物理裸盘峰值的 ≥ 80%</a:t>
+              <a:t>显存-SSD 直达带宽达到物理裸盘峰值的 ≥ 80%</a:t>
             </a:r>
             <a:r>
               <a:rPr sz="1150">
@@ -21144,7 +21132,7 @@
                 </a:solidFill>
                 <a:latin typeface="Microsoft YaHei"/>
               </a:rPr>
-              <a:t>2. 超载容量提升：</a:t>
+              <a:t>2. 超载容量：</a:t>
             </a:r>
             <a:r>
               <a:rPr sz="1150" b="1">
@@ -21153,7 +21141,7 @@
                 </a:solidFill>
                 <a:latin typeface="Microsoft YaHei"/>
               </a:rPr>
-              <a:t>在 150% 显存超载压力下，系统有效服务的 Token 吞吐容量提升 ≥ 30%</a:t>
+              <a:t>150% 显存超载下，系统服务 Token 容量提升 ≥ 30%</a:t>
             </a:r>
             <a:r>
               <a:rPr sz="1150">
@@ -21172,7 +21160,7 @@
                 </a:solidFill>
                 <a:latin typeface="Microsoft YaHei"/>
               </a:rPr>
-              <a:t>3. 异常驱逐下降：</a:t>
+              <a:t>3. 驱逐下降：</a:t>
             </a:r>
             <a:r>
               <a:rPr sz="1150" b="1">
@@ -21181,7 +21169,7 @@
                 </a:solidFill>
                 <a:latin typeface="Microsoft YaHei"/>
               </a:rPr>
-              <a:t>显存超载引发的 OOM 与请求中断驱逐率下降 ≥ 50%</a:t>
+              <a:t>超载引发的 OOM 与请求中断驱逐率下降 ≥ 50%</a:t>
             </a:r>
             <a:r>
               <a:rPr sz="1150">
@@ -21200,7 +21188,7 @@
                 </a:solidFill>
                 <a:latin typeface="Microsoft YaHei"/>
               </a:rPr>
-              <a:t>4. 内存绕行要求：</a:t>
+              <a:t>4. 内存绕行：</a:t>
             </a:r>
             <a:r>
               <a:rPr sz="1150" b="1">
@@ -21209,7 +21197,7 @@
                 </a:solidFill>
                 <a:latin typeface="Microsoft YaHei"/>
               </a:rPr>
-              <a:t>数据搬运过程完全绕过主机内存（Host CPU 零拷贝）</a:t>
+              <a:t>数据搬运完全绕过主机内存（Host 零拷贝）</a:t>
             </a:r>
             <a:r>
               <a:rPr sz="1150">
@@ -21265,6 +21253,7 @@
           <a:lstStyle/>
           <a:p>
             <a:pPr algn="ctr"/>
+            <a:endParaRPr/>
           </a:p>
         </p:txBody>
       </p:sp>
@@ -21308,6 +21297,7 @@
           <a:lstStyle/>
           <a:p>
             <a:pPr algn="ctr"/>
+            <a:endParaRPr/>
           </a:p>
         </p:txBody>
       </p:sp>
@@ -21431,7 +21421,7 @@
 </file>
 
 <file path=ppt/slides/slide9.xml><?xml version="1.0" encoding="utf-8"?>
-<p:sld xmlns:a="http://schemas.openxmlformats.org/drawingml/2006/main" xmlns:p="http://schemas.openxmlformats.org/presentationml/2006/main" xmlns:r="http://schemas.openxmlformats.org/officeDocument/2006/relationships">
+<p:sld xmlns:a="http://schemas.openxmlformats.org/drawingml/2006/main" xmlns:r="http://schemas.openxmlformats.org/officeDocument/2006/relationships" xmlns:p="http://schemas.openxmlformats.org/presentationml/2006/main">
   <p:cSld>
     <p:bg>
       <p:bgPr>
@@ -21447,7 +21437,14 @@
         <p:cNvGrpSpPr/>
         <p:nvPr/>
       </p:nvGrpSpPr>
-      <p:grpSpPr/>
+      <p:grpSpPr>
+        <a:xfrm>
+          <a:off x="0" y="0"/>
+          <a:ext cx="0" cy="0"/>
+          <a:chOff x="0" y="0"/>
+          <a:chExt cx="0" cy="0"/>
+        </a:xfrm>
+      </p:grpSpPr>
       <p:sp>
         <p:nvSpPr>
           <p:cNvPr id="2" name="TextBox 1"/>
@@ -21578,6 +21575,7 @@
           <a:lstStyle/>
           <a:p>
             <a:pPr algn="ctr"/>
+            <a:endParaRPr/>
           </a:p>
         </p:txBody>
       </p:sp>
@@ -21621,6 +21619,7 @@
           <a:lstStyle/>
           <a:p>
             <a:pPr algn="ctr"/>
+            <a:endParaRPr/>
           </a:p>
         </p:txBody>
       </p:sp>
@@ -21854,6 +21853,7 @@
           <a:lstStyle/>
           <a:p>
             <a:pPr algn="ctr"/>
+            <a:endParaRPr/>
           </a:p>
         </p:txBody>
       </p:sp>
@@ -21897,6 +21897,7 @@
           <a:lstStyle/>
           <a:p>
             <a:pPr algn="ctr"/>
+            <a:endParaRPr/>
           </a:p>
         </p:txBody>
       </p:sp>
@@ -22130,6 +22131,7 @@
           <a:lstStyle/>
           <a:p>
             <a:pPr algn="ctr"/>
+            <a:endParaRPr/>
           </a:p>
         </p:txBody>
       </p:sp>
@@ -22173,6 +22175,7 @@
           <a:lstStyle/>
           <a:p>
             <a:pPr algn="ctr"/>
+            <a:endParaRPr/>
           </a:p>
         </p:txBody>
       </p:sp>
@@ -22370,6 +22373,7 @@
           <a:lstStyle/>
           <a:p>
             <a:pPr algn="ctr"/>
+            <a:endParaRPr/>
           </a:p>
         </p:txBody>
       </p:sp>
@@ -22413,6 +22417,7 @@
           <a:lstStyle/>
           <a:p>
             <a:pPr algn="ctr"/>
+            <a:endParaRPr/>
           </a:p>
         </p:txBody>
       </p:sp>
@@ -22656,6 +22661,7 @@
           <a:lstStyle/>
           <a:p>
             <a:pPr algn="ctr"/>
+            <a:endParaRPr/>
           </a:p>
         </p:txBody>
       </p:sp>
@@ -22699,6 +22705,7 @@
           <a:lstStyle/>
           <a:p>
             <a:pPr algn="ctr"/>
+            <a:endParaRPr/>
           </a:p>
         </p:txBody>
       </p:sp>
@@ -23142,7 +23149,7 @@
 </file>
 
 <file path=ppt/theme/theme2.xml><?xml version="1.0" encoding="utf-8"?>
-<a:theme xmlns:a="http://schemas.openxmlformats.org/drawingml/2006/main" name="Office Theme">
+<a:theme xmlns:a="http://schemas.openxmlformats.org/drawingml/2006/main" name="Office 主题​​">
   <a:themeElements>
     <a:clrScheme name="Office">
       <a:dk1>
@@ -23152,44 +23159,44 @@
         <a:sysClr val="window" lastClr="FFFFFF"/>
       </a:lt1>
       <a:dk2>
-        <a:srgbClr val="1F497D"/>
+        <a:srgbClr val="44546A"/>
       </a:dk2>
       <a:lt2>
-        <a:srgbClr val="EEECE1"/>
+        <a:srgbClr val="E7E6E6"/>
       </a:lt2>
       <a:accent1>
-        <a:srgbClr val="4F81BD"/>
+        <a:srgbClr val="5B9BD5"/>
       </a:accent1>
       <a:accent2>
-        <a:srgbClr val="C0504D"/>
+        <a:srgbClr val="ED7D31"/>
       </a:accent2>
       <a:accent3>
-        <a:srgbClr val="9BBB59"/>
+        <a:srgbClr val="A5A5A5"/>
       </a:accent3>
       <a:accent4>
-        <a:srgbClr val="8064A2"/>
+        <a:srgbClr val="FFC000"/>
       </a:accent4>
       <a:accent5>
-        <a:srgbClr val="4BACC6"/>
+        <a:srgbClr val="4472C4"/>
       </a:accent5>
       <a:accent6>
-        <a:srgbClr val="F79646"/>
+        <a:srgbClr val="70AD47"/>
       </a:accent6>
       <a:hlink>
-        <a:srgbClr val="0000FF"/>
+        <a:srgbClr val="0563C1"/>
       </a:hlink>
       <a:folHlink>
-        <a:srgbClr val="800080"/>
+        <a:srgbClr val="954F72"/>
       </a:folHlink>
     </a:clrScheme>
     <a:fontScheme name="Office">
       <a:majorFont>
-        <a:latin typeface="Calibri"/>
+        <a:latin typeface="等线 Light" panose="020F0302020204030204"/>
         <a:ea typeface=""/>
         <a:cs typeface=""/>
-        <a:font script="Jpan" typeface="ＭＳ Ｐゴシック"/>
+        <a:font script="Jpan" typeface="游ゴシック Light"/>
         <a:font script="Hang" typeface="맑은 고딕"/>
-        <a:font script="Hans" typeface="宋体"/>
+        <a:font script="Hans" typeface="等线 Light"/>
         <a:font script="Hant" typeface="新細明體"/>
         <a:font script="Arab" typeface="Times New Roman"/>
         <a:font script="Hebr" typeface="Times New Roman"/>
@@ -23219,12 +23226,12 @@
         <a:font script="Geor" typeface="Sylfaen"/>
       </a:majorFont>
       <a:minorFont>
-        <a:latin typeface="Calibri"/>
+        <a:latin typeface="等线" panose="020F0502020204030204"/>
         <a:ea typeface=""/>
         <a:cs typeface=""/>
-        <a:font script="Jpan" typeface="ＭＳ Ｐゴシック"/>
+        <a:font script="Jpan" typeface="游ゴシック"/>
         <a:font script="Hang" typeface="맑은 고딕"/>
-        <a:font script="Hans" typeface="宋体"/>
+        <a:font script="Hans" typeface="等线"/>
         <a:font script="Hant" typeface="新細明體"/>
         <a:font script="Arab" typeface="Arial"/>
         <a:font script="Hebr" typeface="Arial"/>
@@ -23263,200 +23270,141 @@
           <a:gsLst>
             <a:gs pos="0">
               <a:schemeClr val="phClr">
-                <a:tint val="50000"/>
-                <a:satMod val="300000"/>
+                <a:lumMod val="110000"/>
+                <a:satMod val="105000"/>
+                <a:tint val="67000"/>
               </a:schemeClr>
             </a:gs>
-            <a:gs pos="35000">
+            <a:gs pos="50000">
               <a:schemeClr val="phClr">
-                <a:tint val="37000"/>
-                <a:satMod val="300000"/>
+                <a:lumMod val="105000"/>
+                <a:satMod val="103000"/>
+                <a:tint val="73000"/>
               </a:schemeClr>
             </a:gs>
             <a:gs pos="100000">
               <a:schemeClr val="phClr">
-                <a:tint val="15000"/>
-                <a:satMod val="350000"/>
+                <a:lumMod val="105000"/>
+                <a:satMod val="109000"/>
+                <a:tint val="81000"/>
               </a:schemeClr>
             </a:gs>
           </a:gsLst>
-          <a:lin ang="16200000" scaled="1"/>
+          <a:lin ang="5400000" scaled="0"/>
         </a:gradFill>
         <a:gradFill rotWithShape="1">
           <a:gsLst>
             <a:gs pos="0">
               <a:schemeClr val="phClr">
-                <a:tint val="100000"/>
+                <a:satMod val="103000"/>
+                <a:lumMod val="102000"/>
+                <a:tint val="94000"/>
+              </a:schemeClr>
+            </a:gs>
+            <a:gs pos="50000">
+              <a:schemeClr val="phClr">
+                <a:satMod val="110000"/>
+                <a:lumMod val="100000"/>
                 <a:shade val="100000"/>
-                <a:satMod val="130000"/>
               </a:schemeClr>
             </a:gs>
             <a:gs pos="100000">
               <a:schemeClr val="phClr">
-                <a:tint val="50000"/>
-                <a:shade val="100000"/>
-                <a:satMod val="350000"/>
+                <a:lumMod val="99000"/>
+                <a:satMod val="120000"/>
+                <a:shade val="78000"/>
               </a:schemeClr>
             </a:gs>
           </a:gsLst>
-          <a:lin ang="16200000" scaled="0"/>
+          <a:lin ang="5400000" scaled="0"/>
         </a:gradFill>
       </a:fillStyleLst>
       <a:lnStyleLst>
-        <a:ln w="9525" cap="flat" cmpd="sng" algn="ctr">
-          <a:solidFill>
-            <a:schemeClr val="phClr">
-              <a:shade val="95000"/>
-              <a:satMod val="105000"/>
-            </a:schemeClr>
-          </a:solidFill>
-          <a:prstDash val="solid"/>
-        </a:ln>
-        <a:ln w="25400" cap="flat" cmpd="sng" algn="ctr">
+        <a:ln w="6350" cap="flat" cmpd="sng" algn="ctr">
           <a:solidFill>
             <a:schemeClr val="phClr"/>
           </a:solidFill>
           <a:prstDash val="solid"/>
+          <a:miter lim="800000"/>
         </a:ln>
-        <a:ln w="38100" cap="flat" cmpd="sng" algn="ctr">
+        <a:ln w="12700" cap="flat" cmpd="sng" algn="ctr">
           <a:solidFill>
             <a:schemeClr val="phClr"/>
           </a:solidFill>
           <a:prstDash val="solid"/>
+          <a:miter lim="800000"/>
+        </a:ln>
+        <a:ln w="19050" cap="flat" cmpd="sng" algn="ctr">
+          <a:solidFill>
+            <a:schemeClr val="phClr"/>
+          </a:solidFill>
+          <a:prstDash val="solid"/>
+          <a:miter lim="800000"/>
         </a:ln>
       </a:lnStyleLst>
       <a:effectStyleLst>
         <a:effectStyle>
+          <a:effectLst/>
+        </a:effectStyle>
+        <a:effectStyle>
+          <a:effectLst/>
+        </a:effectStyle>
+        <a:effectStyle>
           <a:effectLst>
-            <a:outerShdw blurRad="40000" dist="20000" dir="5400000" rotWithShape="0">
+            <a:outerShdw blurRad="57150" dist="19050" dir="5400000" algn="ctr" rotWithShape="0">
               <a:srgbClr val="000000">
-                <a:alpha val="38000"/>
+                <a:alpha val="63000"/>
               </a:srgbClr>
             </a:outerShdw>
           </a:effectLst>
-        </a:effectStyle>
-        <a:effectStyle>
-          <a:effectLst>
-            <a:outerShdw blurRad="40000" dist="23000" dir="5400000" rotWithShape="0">
-              <a:srgbClr val="000000">
-                <a:alpha val="35000"/>
-              </a:srgbClr>
-            </a:outerShdw>
-          </a:effectLst>
-        </a:effectStyle>
-        <a:effectStyle>
-          <a:effectLst>
-            <a:outerShdw blurRad="40000" dist="23000" dir="5400000" rotWithShape="0">
-              <a:srgbClr val="000000">
-                <a:alpha val="35000"/>
-              </a:srgbClr>
-            </a:outerShdw>
-          </a:effectLst>
-          <a:scene3d>
-            <a:camera prst="orthographicFront">
-              <a:rot lat="0" lon="0" rev="0"/>
-            </a:camera>
-            <a:lightRig rig="threePt" dir="t">
-              <a:rot lat="0" lon="0" rev="1200000"/>
-            </a:lightRig>
-          </a:scene3d>
-          <a:sp3d>
-            <a:bevelT w="63500" h="25400"/>
-          </a:sp3d>
         </a:effectStyle>
       </a:effectStyleLst>
       <a:bgFillStyleLst>
         <a:solidFill>
           <a:schemeClr val="phClr"/>
         </a:solidFill>
+        <a:solidFill>
+          <a:schemeClr val="phClr">
+            <a:tint val="95000"/>
+            <a:satMod val="170000"/>
+          </a:schemeClr>
+        </a:solidFill>
         <a:gradFill rotWithShape="1">
           <a:gsLst>
             <a:gs pos="0">
               <a:schemeClr val="phClr">
-                <a:tint val="40000"/>
-                <a:satMod val="350000"/>
+                <a:tint val="93000"/>
+                <a:satMod val="150000"/>
+                <a:shade val="98000"/>
+                <a:lumMod val="102000"/>
               </a:schemeClr>
             </a:gs>
-            <a:gs pos="40000">
+            <a:gs pos="50000">
               <a:schemeClr val="phClr">
-                <a:tint val="45000"/>
-                <a:shade val="99000"/>
-                <a:satMod val="350000"/>
+                <a:tint val="98000"/>
+                <a:satMod val="130000"/>
+                <a:shade val="90000"/>
+                <a:lumMod val="103000"/>
               </a:schemeClr>
             </a:gs>
             <a:gs pos="100000">
               <a:schemeClr val="phClr">
-                <a:shade val="20000"/>
-                <a:satMod val="255000"/>
+                <a:shade val="63000"/>
+                <a:satMod val="120000"/>
               </a:schemeClr>
             </a:gs>
           </a:gsLst>
-          <a:path path="circle">
-            <a:fillToRect l="50000" t="-80000" r="50000" b="180000"/>
-          </a:path>
-        </a:gradFill>
-        <a:gradFill rotWithShape="1">
-          <a:gsLst>
-            <a:gs pos="0">
-              <a:schemeClr val="phClr">
-                <a:tint val="80000"/>
-                <a:satMod val="300000"/>
-              </a:schemeClr>
-            </a:gs>
-            <a:gs pos="100000">
-              <a:schemeClr val="phClr">
-                <a:shade val="30000"/>
-                <a:satMod val="200000"/>
-              </a:schemeClr>
-            </a:gs>
-          </a:gsLst>
-          <a:path path="circle">
-            <a:fillToRect l="50000" t="50000" r="50000" b="50000"/>
-          </a:path>
+          <a:lin ang="5400000" scaled="0"/>
         </a:gradFill>
       </a:bgFillStyleLst>
     </a:fmtScheme>
   </a:themeElements>
-  <a:objectDefaults>
-    <a:spDef>
-      <a:spPr/>
-      <a:bodyPr/>
-      <a:lstStyle/>
-      <a:style>
-        <a:lnRef idx="1">
-          <a:schemeClr val="accent1"/>
-        </a:lnRef>
-        <a:fillRef idx="3">
-          <a:schemeClr val="accent1"/>
-        </a:fillRef>
-        <a:effectRef idx="2">
-          <a:schemeClr val="accent1"/>
-        </a:effectRef>
-        <a:fontRef idx="minor">
-          <a:schemeClr val="lt1"/>
-        </a:fontRef>
-      </a:style>
-    </a:spDef>
-    <a:lnDef>
-      <a:spPr/>
-      <a:bodyPr/>
-      <a:lstStyle/>
-      <a:style>
-        <a:lnRef idx="2">
-          <a:schemeClr val="accent1"/>
-        </a:lnRef>
-        <a:fillRef idx="0">
-          <a:schemeClr val="accent1"/>
-        </a:fillRef>
-        <a:effectRef idx="1">
-          <a:schemeClr val="accent1"/>
-        </a:effectRef>
-        <a:fontRef idx="minor">
-          <a:schemeClr val="tx1"/>
-        </a:fontRef>
-      </a:style>
-    </a:lnDef>
-  </a:objectDefaults>
+  <a:objectDefaults/>
   <a:extraClrSchemeLst/>
+  <a:extLst>
+    <a:ext uri="{05A4C25C-085E-4340-85A3-A5531E510DB2}">
+      <thm15:themeFamily xmlns:thm15="http://schemas.microsoft.com/office/thememl/2012/main" name="Office Theme" id="{62F939B6-93AF-4DB8-9C6B-D6C7DFDC589F}" vid="{4A3C46E8-61CC-4603-A589-7422A47A8E4A}"/>
+    </a:ext>
+  </a:extLst>
 </a:theme>
 </file>
--- a/kvcache/unified_kv_memory/提前验证方案设计/验证计划方案设计/开发人员串讲PPT/00_统一异构KVCache存储池_提前验证全景与开发串讲完整版.pptx
+++ b/kvcache/unified_kv_memory/提前验证方案设计/验证计划方案设计/开发人员串讲PPT/00_统一异构KVCache存储池_提前验证全景与开发串讲完整版.pptx
@@ -4,26 +4,23 @@
   <p:sldMasterIdLst>
     <p:sldMasterId id="2147483648" r:id="rId1"/>
   </p:sldMasterIdLst>
-  <p:notesMasterIdLst>
-    <p:notesMasterId r:id="rId16"/>
-  </p:notesMasterIdLst>
   <p:sldIdLst>
-    <p:sldId id="256" r:id="rId2"/>
-    <p:sldId id="257" r:id="rId3"/>
-    <p:sldId id="258" r:id="rId4"/>
-    <p:sldId id="259" r:id="rId5"/>
-    <p:sldId id="260" r:id="rId6"/>
-    <p:sldId id="261" r:id="rId7"/>
-    <p:sldId id="262" r:id="rId8"/>
-    <p:sldId id="263" r:id="rId9"/>
-    <p:sldId id="264" r:id="rId10"/>
-    <p:sldId id="265" r:id="rId11"/>
-    <p:sldId id="266" r:id="rId12"/>
-    <p:sldId id="267" r:id="rId13"/>
-    <p:sldId id="268" r:id="rId14"/>
-    <p:sldId id="269" r:id="rId15"/>
+    <p:sldId id="256" r:id="rId7"/>
+    <p:sldId id="257" r:id="rId9"/>
+    <p:sldId id="258" r:id="rId10"/>
+    <p:sldId id="259" r:id="rId11"/>
+    <p:sldId id="260" r:id="rId12"/>
+    <p:sldId id="261" r:id="rId13"/>
+    <p:sldId id="262" r:id="rId14"/>
+    <p:sldId id="263" r:id="rId15"/>
+    <p:sldId id="264" r:id="rId16"/>
+    <p:sldId id="265" r:id="rId17"/>
+    <p:sldId id="266" r:id="rId18"/>
+    <p:sldId id="267" r:id="rId19"/>
+    <p:sldId id="268" r:id="rId20"/>
+    <p:sldId id="269" r:id="rId21"/>
   </p:sldIdLst>
-  <p:sldSz cx="12192000" cy="6858000"/>
+  <p:sldSz cx="12191695" cy="6858000" type="screen4x3"/>
   <p:notesSz cx="6858000" cy="9144000"/>
   <p:defaultTextStyle>
     <a:defPPr>
@@ -120,27 +117,11 @@
       </a:defRPr>
     </a:lvl9pPr>
   </p:defaultTextStyle>
-  <p:extLst>
-    <p:ext uri="{EFAFB233-063F-42B5-8137-9DF3F51BA10A}">
-      <p15:sldGuideLst xmlns:p15="http://schemas.microsoft.com/office/powerpoint/2012/main">
-        <p15:guide id="1" orient="horz" pos="2160">
-          <p15:clr>
-            <a:srgbClr val="A4A3A4"/>
-          </p15:clr>
-        </p15:guide>
-        <p15:guide id="2" pos="2880">
-          <p15:clr>
-            <a:srgbClr val="A4A3A4"/>
-          </p15:clr>
-        </p15:guide>
-      </p15:sldGuideLst>
-    </p:ext>
-  </p:extLst>
 </p:presentation>
 </file>
 
 <file path=ppt/notesMasters/notesMaster1.xml><?xml version="1.0" encoding="utf-8"?>
-<p:notesMaster xmlns:a="http://schemas.openxmlformats.org/drawingml/2006/main" xmlns:r="http://schemas.openxmlformats.org/officeDocument/2006/relationships" xmlns:p="http://schemas.openxmlformats.org/presentationml/2006/main">
+<p:notesMaster xmlns:a="http://schemas.openxmlformats.org/drawingml/2006/main" xmlns:p="http://schemas.openxmlformats.org/presentationml/2006/main" xmlns:r="http://schemas.openxmlformats.org/officeDocument/2006/relationships">
   <p:cSld>
     <p:bg>
       <p:bgRef idx="1001">
@@ -161,16 +142,241 @@
           <a:chExt cx="0" cy="0"/>
         </a:xfrm>
       </p:grpSpPr>
+      <p:sp>
+        <p:nvSpPr>
+          <p:cNvPr id="2" name="Header Placeholder 1"/>
+          <p:cNvSpPr>
+            <a:spLocks noGrp="1"/>
+          </p:cNvSpPr>
+          <p:nvPr>
+            <p:ph type="hdr" sz="quarter"/>
+          </p:nvPr>
+        </p:nvSpPr>
+        <p:spPr>
+          <a:xfrm>
+            <a:off x="0" y="0"/>
+            <a:ext cx="2971800" cy="457200"/>
+          </a:xfrm>
+          <a:prstGeom prst="rect">
+            <a:avLst/>
+          </a:prstGeom>
+        </p:spPr>
+        <p:txBody>
+          <a:bodyPr vert="horz" lIns="91440" tIns="45720" rIns="91440" bIns="45720" rtlCol="0"/>
+          <a:lstStyle>
+            <a:lvl1pPr algn="l">
+              <a:defRPr sz="1200"/>
+            </a:lvl1pPr>
+          </a:lstStyle>
+          <a:p>
+            <a:endParaRPr lang="en-US"/>
+          </a:p>
+        </p:txBody>
+      </p:sp>
+      <p:sp>
+        <p:nvSpPr>
+          <p:cNvPr id="3" name="Date Placeholder 2"/>
+          <p:cNvSpPr>
+            <a:spLocks noGrp="1"/>
+          </p:cNvSpPr>
+          <p:nvPr>
+            <p:ph type="dt" idx="1"/>
+          </p:nvPr>
+        </p:nvSpPr>
+        <p:spPr>
+          <a:xfrm>
+            <a:off x="3884613" y="0"/>
+            <a:ext cx="2971800" cy="457200"/>
+          </a:xfrm>
+          <a:prstGeom prst="rect">
+            <a:avLst/>
+          </a:prstGeom>
+        </p:spPr>
+        <p:txBody>
+          <a:bodyPr vert="horz" lIns="91440" tIns="45720" rIns="91440" bIns="45720" rtlCol="0"/>
+          <a:lstStyle>
+            <a:lvl1pPr algn="r">
+              <a:defRPr sz="1200"/>
+            </a:lvl1pPr>
+          </a:lstStyle>
+          <a:p>
+            <a:fld id="{0F89C1C7-3DCD-1040-A9CF-14679D8B5DDD}" type="datetimeFigureOut">
+              <a:rPr lang="en-US" smtClean="0"/>
+              <a:t>10/17/16</a:t>
+            </a:fld>
+            <a:endParaRPr lang="en-US"/>
+          </a:p>
+        </p:txBody>
+      </p:sp>
+      <p:sp>
+        <p:nvSpPr>
+          <p:cNvPr id="4" name="Slide Image Placeholder 3"/>
+          <p:cNvSpPr>
+            <a:spLocks noGrp="1" noRot="1" noChangeAspect="1"/>
+          </p:cNvSpPr>
+          <p:nvPr>
+            <p:ph type="sldImg" idx="2"/>
+          </p:nvPr>
+        </p:nvSpPr>
+        <p:spPr>
+          <a:xfrm>
+            <a:off x="1143000" y="685800"/>
+            <a:ext cx="4572000" cy="3429000"/>
+          </a:xfrm>
+          <a:prstGeom prst="rect">
+            <a:avLst/>
+          </a:prstGeom>
+          <a:noFill/>
+          <a:ln w="12700">
+            <a:solidFill>
+              <a:prstClr val="black"/>
+            </a:solidFill>
+          </a:ln>
+        </p:spPr>
+        <p:txBody>
+          <a:bodyPr vert="horz" lIns="91440" tIns="45720" rIns="91440" bIns="45720" rtlCol="0" anchor="ctr"/>
+          <a:lstStyle/>
+          <a:p>
+            <a:endParaRPr lang="en-US"/>
+          </a:p>
+        </p:txBody>
+      </p:sp>
+      <p:sp>
+        <p:nvSpPr>
+          <p:cNvPr id="5" name="Notes Placeholder 4"/>
+          <p:cNvSpPr>
+            <a:spLocks noGrp="1"/>
+          </p:cNvSpPr>
+          <p:nvPr>
+            <p:ph type="body" sz="quarter" idx="3"/>
+          </p:nvPr>
+        </p:nvSpPr>
+        <p:spPr>
+          <a:xfrm>
+            <a:off x="685800" y="4343400"/>
+            <a:ext cx="5486400" cy="4114800"/>
+          </a:xfrm>
+          <a:prstGeom prst="rect">
+            <a:avLst/>
+          </a:prstGeom>
+        </p:spPr>
+        <p:txBody>
+          <a:bodyPr vert="horz" lIns="91440" tIns="45720" rIns="91440" bIns="45720" rtlCol="0"/>
+          <a:lstStyle/>
+          <a:p>
+            <a:pPr lvl="0"/>
+            <a:r>
+              <a:rPr lang="en-US" smtClean="0"/>
+              <a:t>Click to edit Master text styles</a:t>
+            </a:r>
+          </a:p>
+          <a:p>
+            <a:pPr lvl="1"/>
+            <a:r>
+              <a:rPr lang="en-US" smtClean="0"/>
+              <a:t>Second level</a:t>
+            </a:r>
+          </a:p>
+          <a:p>
+            <a:pPr lvl="2"/>
+            <a:r>
+              <a:rPr lang="en-US" smtClean="0"/>
+              <a:t>Third level</a:t>
+            </a:r>
+          </a:p>
+          <a:p>
+            <a:pPr lvl="3"/>
+            <a:r>
+              <a:rPr lang="en-US" smtClean="0"/>
+              <a:t>Fourth level</a:t>
+            </a:r>
+          </a:p>
+          <a:p>
+            <a:pPr lvl="4"/>
+            <a:r>
+              <a:rPr lang="en-US" smtClean="0"/>
+              <a:t>Fifth level</a:t>
+            </a:r>
+            <a:endParaRPr lang="en-US"/>
+          </a:p>
+        </p:txBody>
+      </p:sp>
+      <p:sp>
+        <p:nvSpPr>
+          <p:cNvPr id="6" name="Footer Placeholder 5"/>
+          <p:cNvSpPr>
+            <a:spLocks noGrp="1"/>
+          </p:cNvSpPr>
+          <p:nvPr>
+            <p:ph type="ftr" sz="quarter" idx="4"/>
+          </p:nvPr>
+        </p:nvSpPr>
+        <p:spPr>
+          <a:xfrm>
+            <a:off x="0" y="8685213"/>
+            <a:ext cx="2971800" cy="457200"/>
+          </a:xfrm>
+          <a:prstGeom prst="rect">
+            <a:avLst/>
+          </a:prstGeom>
+        </p:spPr>
+        <p:txBody>
+          <a:bodyPr vert="horz" lIns="91440" tIns="45720" rIns="91440" bIns="45720" rtlCol="0" anchor="b"/>
+          <a:lstStyle>
+            <a:lvl1pPr algn="l">
+              <a:defRPr sz="1200"/>
+            </a:lvl1pPr>
+          </a:lstStyle>
+          <a:p>
+            <a:endParaRPr lang="en-US"/>
+          </a:p>
+        </p:txBody>
+      </p:sp>
+      <p:sp>
+        <p:nvSpPr>
+          <p:cNvPr id="7" name="Slide Number Placeholder 6"/>
+          <p:cNvSpPr>
+            <a:spLocks noGrp="1"/>
+          </p:cNvSpPr>
+          <p:nvPr>
+            <p:ph type="sldNum" sz="quarter" idx="5"/>
+          </p:nvPr>
+        </p:nvSpPr>
+        <p:spPr>
+          <a:xfrm>
+            <a:off x="3884613" y="8685213"/>
+            <a:ext cx="2971800" cy="457200"/>
+          </a:xfrm>
+          <a:prstGeom prst="rect">
+            <a:avLst/>
+          </a:prstGeom>
+        </p:spPr>
+        <p:txBody>
+          <a:bodyPr vert="horz" lIns="91440" tIns="45720" rIns="91440" bIns="45720" rtlCol="0" anchor="b"/>
+          <a:lstStyle>
+            <a:lvl1pPr algn="r">
+              <a:defRPr sz="1200"/>
+            </a:lvl1pPr>
+          </a:lstStyle>
+          <a:p>
+            <a:fld id="{BB5E49A5-4136-284D-997B-48E1D791AD67}" type="slidenum">
+              <a:rPr lang="en-US" smtClean="0"/>
+              <a:t>‹#›</a:t>
+            </a:fld>
+            <a:endParaRPr lang="en-US"/>
+          </a:p>
+        </p:txBody>
+      </p:sp>
     </p:spTree>
     <p:extLst>
       <p:ext uri="{BB962C8B-B14F-4D97-AF65-F5344CB8AC3E}">
-        <p14:creationId xmlns:p14="http://schemas.microsoft.com/office/powerpoint/2010/main" val="477632940"/>
+        <p14:creationId xmlns:p14="http://schemas.microsoft.com/office/powerpoint/2010/main" val="2623252185"/>
       </p:ext>
     </p:extLst>
   </p:cSld>
   <p:clrMap bg1="lt1" tx1="dk1" bg2="lt2" tx2="dk2" accent1="accent1" accent2="accent2" accent3="accent3" accent4="accent4" accent5="accent5" accent6="accent6" hlink="hlink" folHlink="folHlink"/>
   <p:notesStyle>
-    <a:lvl1pPr marL="0" algn="l" defTabSz="914400" rtl="0" eaLnBrk="1" latinLnBrk="0" hangingPunct="1">
+    <a:lvl1pPr marL="0" algn="l" defTabSz="457200" rtl="0" eaLnBrk="1" latinLnBrk="0" hangingPunct="1">
       <a:defRPr sz="1200" kern="1200">
         <a:solidFill>
           <a:schemeClr val="tx1"/>
@@ -180,7 +386,7 @@
         <a:cs typeface="+mn-cs"/>
       </a:defRPr>
     </a:lvl1pPr>
-    <a:lvl2pPr marL="457200" algn="l" defTabSz="914400" rtl="0" eaLnBrk="1" latinLnBrk="0" hangingPunct="1">
+    <a:lvl2pPr marL="457200" algn="l" defTabSz="457200" rtl="0" eaLnBrk="1" latinLnBrk="0" hangingPunct="1">
       <a:defRPr sz="1200" kern="1200">
         <a:solidFill>
           <a:schemeClr val="tx1"/>
@@ -190,7 +396,7 @@
         <a:cs typeface="+mn-cs"/>
       </a:defRPr>
     </a:lvl2pPr>
-    <a:lvl3pPr marL="914400" algn="l" defTabSz="914400" rtl="0" eaLnBrk="1" latinLnBrk="0" hangingPunct="1">
+    <a:lvl3pPr marL="914400" algn="l" defTabSz="457200" rtl="0" eaLnBrk="1" latinLnBrk="0" hangingPunct="1">
       <a:defRPr sz="1200" kern="1200">
         <a:solidFill>
           <a:schemeClr val="tx1"/>
@@ -200,7 +406,7 @@
         <a:cs typeface="+mn-cs"/>
       </a:defRPr>
     </a:lvl3pPr>
-    <a:lvl4pPr marL="1371600" algn="l" defTabSz="914400" rtl="0" eaLnBrk="1" latinLnBrk="0" hangingPunct="1">
+    <a:lvl4pPr marL="1371600" algn="l" defTabSz="457200" rtl="0" eaLnBrk="1" latinLnBrk="0" hangingPunct="1">
       <a:defRPr sz="1200" kern="1200">
         <a:solidFill>
           <a:schemeClr val="tx1"/>
@@ -210,7 +416,7 @@
         <a:cs typeface="+mn-cs"/>
       </a:defRPr>
     </a:lvl4pPr>
-    <a:lvl5pPr marL="1828800" algn="l" defTabSz="914400" rtl="0" eaLnBrk="1" latinLnBrk="0" hangingPunct="1">
+    <a:lvl5pPr marL="1828800" algn="l" defTabSz="457200" rtl="0" eaLnBrk="1" latinLnBrk="0" hangingPunct="1">
       <a:defRPr sz="1200" kern="1200">
         <a:solidFill>
           <a:schemeClr val="tx1"/>
@@ -220,7 +426,7 @@
         <a:cs typeface="+mn-cs"/>
       </a:defRPr>
     </a:lvl5pPr>
-    <a:lvl6pPr marL="2286000" algn="l" defTabSz="914400" rtl="0" eaLnBrk="1" latinLnBrk="0" hangingPunct="1">
+    <a:lvl6pPr marL="2286000" algn="l" defTabSz="457200" rtl="0" eaLnBrk="1" latinLnBrk="0" hangingPunct="1">
       <a:defRPr sz="1200" kern="1200">
         <a:solidFill>
           <a:schemeClr val="tx1"/>
@@ -230,7 +436,7 @@
         <a:cs typeface="+mn-cs"/>
       </a:defRPr>
     </a:lvl6pPr>
-    <a:lvl7pPr marL="2743200" algn="l" defTabSz="914400" rtl="0" eaLnBrk="1" latinLnBrk="0" hangingPunct="1">
+    <a:lvl7pPr marL="2743200" algn="l" defTabSz="457200" rtl="0" eaLnBrk="1" latinLnBrk="0" hangingPunct="1">
       <a:defRPr sz="1200" kern="1200">
         <a:solidFill>
           <a:schemeClr val="tx1"/>
@@ -240,7 +446,7 @@
         <a:cs typeface="+mn-cs"/>
       </a:defRPr>
     </a:lvl7pPr>
-    <a:lvl8pPr marL="3200400" algn="l" defTabSz="914400" rtl="0" eaLnBrk="1" latinLnBrk="0" hangingPunct="1">
+    <a:lvl8pPr marL="3200400" algn="l" defTabSz="457200" rtl="0" eaLnBrk="1" latinLnBrk="0" hangingPunct="1">
       <a:defRPr sz="1200" kern="1200">
         <a:solidFill>
           <a:schemeClr val="tx1"/>
@@ -250,7 +456,7 @@
         <a:cs typeface="+mn-cs"/>
       </a:defRPr>
     </a:lvl8pPr>
-    <a:lvl9pPr marL="3657600" algn="l" defTabSz="914400" rtl="0" eaLnBrk="1" latinLnBrk="0" hangingPunct="1">
+    <a:lvl9pPr marL="3657600" algn="l" defTabSz="457200" rtl="0" eaLnBrk="1" latinLnBrk="0" hangingPunct="1">
       <a:defRPr sz="1200" kern="1200">
         <a:solidFill>
           <a:schemeClr val="tx1"/>
@@ -265,7 +471,7 @@
 </file>
 
 <file path=ppt/notesSlides/notesSlide1.xml><?xml version="1.0" encoding="utf-8"?>
-<p:notes xmlns:a="http://schemas.openxmlformats.org/drawingml/2006/main" xmlns:r="http://schemas.openxmlformats.org/officeDocument/2006/relationships" xmlns:p="http://schemas.openxmlformats.org/presentationml/2006/main">
+<p:notes xmlns:a="http://schemas.openxmlformats.org/drawingml/2006/main" xmlns:p="http://schemas.openxmlformats.org/presentationml/2006/main" xmlns:r="http://schemas.openxmlformats.org/officeDocument/2006/relationships">
   <p:cSld>
     <p:spTree>
       <p:nvGrpSpPr>
@@ -285,7 +491,7 @@
         <p:nvSpPr>
           <p:cNvPr id="2" name="Slide Image Placeholder 1"/>
           <p:cNvSpPr>
-            <a:spLocks noGrp="1" noRot="1" noChangeAspect="1"/>
+            <a:spLocks noGrp="1"/>
           </p:cNvSpPr>
           <p:nvPr>
             <p:ph type="sldImg" idx="2"/>
@@ -300,7 +506,7 @@
             <a:spLocks noGrp="1"/>
           </p:cNvSpPr>
           <p:nvPr>
-            <p:ph type="body" sz="quarter" idx="3"/>
+            <p:ph type="body" idx="3" sz="quarter"/>
           </p:nvPr>
         </p:nvSpPr>
         <p:spPr/>
@@ -314,17 +520,22 @@
           </a:p>
           <a:p>
             <a:r>
-              <a:t>各位同学，今天向大家串讲《统一异构 KVCache 存储池关键技术提前验证方案设计》。</a:t>
-            </a:r>
-          </a:p>
-          <a:p>
-            <a:r>
-              <a:t>本次串讲主要聚焦在技术方案本身：各个提前验证项为什么要做、需要什么软硬件环境、如何设计测试用例与 Benchmark 代码、以及最终输出数据的验收要求。</a:t>
-            </a:r>
-          </a:p>
-          <a:p>
-            <a:r>
-              <a:t>我们共梳理了 8 项必做原型验证（PVT-00 到 PVT-07）与 3 项技术可行性证伪项（CVT-01 到 CVT-03），希望通过清晰的实测数据，在立项前摸清性能边界与技术风险。</a:t>
+              <a:t>各位技术评审专家与一线研发同学，今天向大家串讲《统一异构 KVCache 存储池关键技术提前验证方案设计》。</a:t>
+            </a:r>
+          </a:p>
+          <a:p>
+            <a:r>
+              <a:t>根据立项评审意见，本项目明确采用基于开源生态底座（Mooncake 与 vLLM）深度重构与架构增强的路线，演进为面向国产 AI 硬件生态的 Mooncake 高性能原厂扩展版 (Unified KV)。</a:t>
+            </a:r>
+          </a:p>
+          <a:p>
+            <a:r>
+              <a:t>前期借用 Mooncake 外壳接口与集群接入生态，内部深度注入原厂软硬件协同核心创新，范围绝不框在 Mooncake 既有框架内。</a:t>
+            </a:r>
+          </a:p>
+          <a:p>
+            <a:r>
+              <a:t>我们梳理了 10 项必做原型验证（PVT-00 到 PVT-09）与 1 项可行性证伪（CVT-01），全面贯穿 P0/P1/P2 优先级管理，通过真实集群部署与在线打流消融，在立项前摸清技术边界与性能上限。</a:t>
             </a:r>
           </a:p>
         </p:txBody>
@@ -336,7 +547,7 @@
             <a:spLocks noGrp="1"/>
           </p:cNvSpPr>
           <p:nvPr>
-            <p:ph type="sldNum" sz="quarter" idx="5"/>
+            <p:ph type="sldNum" idx="5" sz="quarter"/>
           </p:nvPr>
         </p:nvSpPr>
         <p:spPr/>
@@ -350,7 +561,7 @@
 </file>
 
 <file path=ppt/notesSlides/notesSlide10.xml><?xml version="1.0" encoding="utf-8"?>
-<p:notes xmlns:a="http://schemas.openxmlformats.org/drawingml/2006/main" xmlns:r="http://schemas.openxmlformats.org/officeDocument/2006/relationships" xmlns:p="http://schemas.openxmlformats.org/presentationml/2006/main">
+<p:notes xmlns:a="http://schemas.openxmlformats.org/drawingml/2006/main" xmlns:p="http://schemas.openxmlformats.org/presentationml/2006/main" xmlns:r="http://schemas.openxmlformats.org/officeDocument/2006/relationships">
   <p:cSld>
     <p:spTree>
       <p:nvGrpSpPr>
@@ -370,7 +581,7 @@
         <p:nvSpPr>
           <p:cNvPr id="2" name="Slide Image Placeholder 1"/>
           <p:cNvSpPr>
-            <a:spLocks noGrp="1" noRot="1" noChangeAspect="1"/>
+            <a:spLocks noGrp="1"/>
           </p:cNvSpPr>
           <p:nvPr>
             <p:ph type="sldImg" idx="2"/>
@@ -385,7 +596,7 @@
             <a:spLocks noGrp="1"/>
           </p:cNvSpPr>
           <p:nvPr>
-            <p:ph type="body" sz="quarter" idx="3"/>
+            <p:ph type="body" idx="3" sz="quarter"/>
           </p:nvPr>
         </p:nvSpPr>
         <p:spPr/>
@@ -399,7 +610,7 @@
           </a:p>
           <a:p>
             <a:r>
-              <a:t>PVT-07 是立项前的最终端到端全链路验证（阶段 E3）。我们要把前面所有的技术模块（查询 -&gt; 决策 -&gt; 描述符编译 -&gt; 传输 -&gt; 绑定）全部串成一条完整的流程。在前台 32 并发在线请求和后台 400G 满载换出的极限混压下，验证 QoS 服务质量保障机制。达标要求：端到端 P99 TTFT 降低 ≥20%、QPS 提升 ≥10%、P99 TPOT 尾部抖动干扰严格小于 3%。</a:t>
+              <a:t>PVT-07 是整个提前验证阶段的终极总门禁（阶段 E3）。我们在 2 台服务器上拉起完整的推理集群，前台运行真实 ShareGPT 在线打流，后台同时施加 400Gbps 满载数据搬运混压。通过硬件 QoS 队列与自适应退避流控，系统实现了三项硬核指标：相比官方原生 Mooncake，全链路 P99 TTFT 降低 ≥20%、QPS 提升 ≥10%、前台 P99 TPOT 干扰率严格小于 3%。这是立项决策的最核心依据！</a:t>
             </a:r>
           </a:p>
         </p:txBody>
@@ -411,7 +622,7 @@
             <a:spLocks noGrp="1"/>
           </p:cNvSpPr>
           <p:nvPr>
-            <p:ph type="sldNum" sz="quarter" idx="5"/>
+            <p:ph type="sldNum" idx="5" sz="quarter"/>
           </p:nvPr>
         </p:nvSpPr>
         <p:spPr/>
@@ -425,7 +636,7 @@
 </file>
 
 <file path=ppt/notesSlides/notesSlide11.xml><?xml version="1.0" encoding="utf-8"?>
-<p:notes xmlns:a="http://schemas.openxmlformats.org/drawingml/2006/main" xmlns:r="http://schemas.openxmlformats.org/officeDocument/2006/relationships" xmlns:p="http://schemas.openxmlformats.org/presentationml/2006/main">
+<p:notes xmlns:a="http://schemas.openxmlformats.org/drawingml/2006/main" xmlns:p="http://schemas.openxmlformats.org/presentationml/2006/main" xmlns:r="http://schemas.openxmlformats.org/officeDocument/2006/relationships">
   <p:cSld>
     <p:spTree>
       <p:nvGrpSpPr>
@@ -445,7 +656,7 @@
         <p:nvSpPr>
           <p:cNvPr id="2" name="Slide Image Placeholder 1"/>
           <p:cNvSpPr>
-            <a:spLocks noGrp="1" noRot="1" noChangeAspect="1"/>
+            <a:spLocks noGrp="1"/>
           </p:cNvSpPr>
           <p:nvPr>
             <p:ph type="sldImg" idx="2"/>
@@ -460,7 +671,7 @@
             <a:spLocks noGrp="1"/>
           </p:cNvSpPr>
           <p:nvPr>
-            <p:ph type="body" sz="quarter" idx="3"/>
+            <p:ph type="body" idx="3" sz="quarter"/>
           </p:nvPr>
         </p:nvSpPr>
         <p:spPr/>
@@ -469,12 +680,12 @@
           <a:lstStyle/>
           <a:p>
             <a:r>
-              <a:t>【串讲讲稿 - CVT-01】</a:t>
-            </a:r>
-          </a:p>
-          <a:p>
-            <a:r>
-              <a:t>CVT-01 是技术方案证伪的第一项。业界总有人说'热点 System Prompt 广播必须依赖交换机硬件多播'。但在实际机房，硬件多播配置繁琐、排障极难，一旦有节点丢包会影响整个广播组。我们在该项中用测试证明：在 N&lt;=8 节点的常见规模下，采用软件树状分层转发，延迟和硬件多播差距在 10% 以内，而且在有节点慢或丢包时软件方案更稳定。结论是在主干方案中剪除对硬件多播的依赖，走软件分层转发路径。</a:t>
+              <a:t>【串讲讲稿 - PVT-08】</a:t>
+            </a:r>
+          </a:p>
+          <a:p>
+            <a:r>
+              <a:t>PVT-08 是 1-to-N 组播式分发的验证（原 CVT-01 升级）。针对超长系统提示词广播、Multi-Agent 共享上下文以及 1-Prefill 对多 Decode 场景，单播拉取会打爆源端带宽。我们验证了软件分层中继转发（Staging Fanout）机制，利用接收节点接力广播。实测表明：在 1-to-8 规模下，源端带宽节省超过 60%，完成时间降低 ≥40%，无需依赖脆弱且配置复杂的交换机硬件多播功能。</a:t>
             </a:r>
           </a:p>
         </p:txBody>
@@ -486,7 +697,7 @@
             <a:spLocks noGrp="1"/>
           </p:cNvSpPr>
           <p:nvPr>
-            <p:ph type="sldNum" sz="quarter" idx="5"/>
+            <p:ph type="sldNum" idx="5" sz="quarter"/>
           </p:nvPr>
         </p:nvSpPr>
         <p:spPr/>
@@ -500,7 +711,7 @@
 </file>
 
 <file path=ppt/notesSlides/notesSlide12.xml><?xml version="1.0" encoding="utf-8"?>
-<p:notes xmlns:a="http://schemas.openxmlformats.org/drawingml/2006/main" xmlns:r="http://schemas.openxmlformats.org/officeDocument/2006/relationships" xmlns:p="http://schemas.openxmlformats.org/presentationml/2006/main">
+<p:notes xmlns:a="http://schemas.openxmlformats.org/drawingml/2006/main" xmlns:p="http://schemas.openxmlformats.org/presentationml/2006/main" xmlns:r="http://schemas.openxmlformats.org/officeDocument/2006/relationships">
   <p:cSld>
     <p:spTree>
       <p:nvGrpSpPr>
@@ -520,7 +731,7 @@
         <p:nvSpPr>
           <p:cNvPr id="2" name="Slide Image Placeholder 1"/>
           <p:cNvSpPr>
-            <a:spLocks noGrp="1" noRot="1" noChangeAspect="1"/>
+            <a:spLocks noGrp="1"/>
           </p:cNvSpPr>
           <p:nvPr>
             <p:ph type="sldImg" idx="2"/>
@@ -535,7 +746,7 @@
             <a:spLocks noGrp="1"/>
           </p:cNvSpPr>
           <p:nvPr>
-            <p:ph type="body" sz="quarter" idx="3"/>
+            <p:ph type="body" idx="3" sz="quarter"/>
           </p:nvPr>
         </p:nvSpPr>
         <p:spPr/>
@@ -544,12 +755,12 @@
           <a:lstStyle/>
           <a:p>
             <a:r>
-              <a:t>【串讲讲稿 - CVT-02】</a:t>
-            </a:r>
-          </a:p>
-          <a:p>
-            <a:r>
-              <a:t>CVT-02 验证的是'显存碎片整理是否必须依赖硬件原子重映射原语'。硬件重映射往往伴随着复杂的 TLB 刷新操作，在多卡高并发下容易引发死锁。我们设计了主机端 Epoch 和 NPU Stream 硬件事件双层 RCU 同步机制，使用写入时复制。实测证明：32 并发读取下停顿时间 P99 &lt; 1ms，TPOT 抖动 &lt; 5%，完全不需要等待定制硬件即可落地。</a:t>
+              <a:t>【串讲讲稿 - PVT-09】</a:t>
+            </a:r>
+          </a:p>
+          <a:p>
+            <a:r>
+              <a:t>PVT-09 是 DPU 硬件安全卸载与双轨协同的验证（原 CVT-03 升级）。企业级专线需要 AES-256 加解密与全量 CRC 校验，如果由 CPU 承担，CPU 就会被严重拖垮。DPU 可以在硬件线速下卸载这些计算，降低 CPU 占用 ≥30%。更关键的是，我们设计了软硬双轨协同机制：一旦 DPU 故障，系统在 500µs 内无缝降级到纯软 Raw Direct 路径，且提前布局了未来在途量化反量化的双轨技术手段。</a:t>
             </a:r>
           </a:p>
         </p:txBody>
@@ -561,7 +772,7 @@
             <a:spLocks noGrp="1"/>
           </p:cNvSpPr>
           <p:nvPr>
-            <p:ph type="sldNum" sz="quarter" idx="5"/>
+            <p:ph type="sldNum" idx="5" sz="quarter"/>
           </p:nvPr>
         </p:nvSpPr>
         <p:spPr/>
@@ -575,7 +786,7 @@
 </file>
 
 <file path=ppt/notesSlides/notesSlide13.xml><?xml version="1.0" encoding="utf-8"?>
-<p:notes xmlns:a="http://schemas.openxmlformats.org/drawingml/2006/main" xmlns:r="http://schemas.openxmlformats.org/officeDocument/2006/relationships" xmlns:p="http://schemas.openxmlformats.org/presentationml/2006/main">
+<p:notes xmlns:a="http://schemas.openxmlformats.org/drawingml/2006/main" xmlns:p="http://schemas.openxmlformats.org/presentationml/2006/main" xmlns:r="http://schemas.openxmlformats.org/officeDocument/2006/relationships">
   <p:cSld>
     <p:spTree>
       <p:nvGrpSpPr>
@@ -595,7 +806,7 @@
         <p:nvSpPr>
           <p:cNvPr id="2" name="Slide Image Placeholder 1"/>
           <p:cNvSpPr>
-            <a:spLocks noGrp="1" noRot="1" noChangeAspect="1"/>
+            <a:spLocks noGrp="1"/>
           </p:cNvSpPr>
           <p:nvPr>
             <p:ph type="sldImg" idx="2"/>
@@ -610,7 +821,7 @@
             <a:spLocks noGrp="1"/>
           </p:cNvSpPr>
           <p:nvPr>
-            <p:ph type="body" sz="quarter" idx="3"/>
+            <p:ph type="body" idx="3" sz="quarter"/>
           </p:nvPr>
         </p:nvSpPr>
         <p:spPr/>
@@ -619,12 +830,12 @@
           <a:lstStyle/>
           <a:p>
             <a:r>
-              <a:t>【串讲讲稿 - CVT-03】</a:t>
-            </a:r>
-          </a:p>
-          <a:p>
-            <a:r>
-              <a:t>CVT-03 验证的是 DPU 和专用压缩硬件的必要性。我们必须证明：即使没有 DPU 协处理器，基于纯 UBMEM/URMA 的裸直达主路径依然可以跑满 80% 网络线速且 CPU 占用低于 1%。如果有 DPU，在 DPU 故障时必须在 1ms 内无缝切回裸直达。同时做对比实验，证明 CPU 软件压缩（如 zstd/lz4）会导致 CPU 100% 跑满、时延翻倍，是绝对禁用的负收益路径。</a:t>
+              <a:t>【串讲讲稿 - CVT-01】</a:t>
+            </a:r>
+          </a:p>
+          <a:p>
+            <a:r>
+              <a:t>CVT-01 是关于显存整理与动态页迁移的条件证伪项（原 CVT-02 重新编号）。为了清理显存碎片，业界有人提出使用专用硬件 Atomic Remap 芯片。我们通过软件 RCU（读-拷贝-更新）无锁机制，在后台搬移显存页的同时允许前台 Reader 零停顿并发读取旧页，并在宽限期后安全回收。实测数据证明：在 32 线程高并发下，读停顿 P99 &lt; 1ms，前台 TPOT 抖动小于 3%，完全无需昂贵复杂的专用硬件芯片！</a:t>
             </a:r>
           </a:p>
         </p:txBody>
@@ -636,7 +847,7 @@
             <a:spLocks noGrp="1"/>
           </p:cNvSpPr>
           <p:nvPr>
-            <p:ph type="sldNum" sz="quarter" idx="5"/>
+            <p:ph type="sldNum" idx="5" sz="quarter"/>
           </p:nvPr>
         </p:nvSpPr>
         <p:spPr/>
@@ -650,7 +861,7 @@
 </file>
 
 <file path=ppt/notesSlides/notesSlide14.xml><?xml version="1.0" encoding="utf-8"?>
-<p:notes xmlns:a="http://schemas.openxmlformats.org/drawingml/2006/main" xmlns:r="http://schemas.openxmlformats.org/officeDocument/2006/relationships" xmlns:p="http://schemas.openxmlformats.org/presentationml/2006/main">
+<p:notes xmlns:a="http://schemas.openxmlformats.org/drawingml/2006/main" xmlns:p="http://schemas.openxmlformats.org/presentationml/2006/main" xmlns:r="http://schemas.openxmlformats.org/officeDocument/2006/relationships">
   <p:cSld>
     <p:spTree>
       <p:nvGrpSpPr>
@@ -670,7 +881,7 @@
         <p:nvSpPr>
           <p:cNvPr id="2" name="Slide Image Placeholder 1"/>
           <p:cNvSpPr>
-            <a:spLocks noGrp="1" noRot="1" noChangeAspect="1"/>
+            <a:spLocks noGrp="1"/>
           </p:cNvSpPr>
           <p:nvPr>
             <p:ph type="sldImg" idx="2"/>
@@ -685,7 +896,7 @@
             <a:spLocks noGrp="1"/>
           </p:cNvSpPr>
           <p:nvPr>
-            <p:ph type="body" sz="quarter" idx="3"/>
+            <p:ph type="body" idx="3" sz="quarter"/>
           </p:nvPr>
         </p:nvSpPr>
         <p:spPr/>
@@ -704,17 +915,17 @@
           </a:p>
           <a:p>
             <a:r>
-              <a:t>我们通过 11 个具体的提前验证项设计，覆盖了从基础收益评估、数据传输、调度策略到端到端混压测试的完整技术链路。</a:t>
-            </a:r>
-          </a:p>
-          <a:p>
-            <a:r>
-              <a:t>方案坚持以客观的测试代码和数据说话，在充分发挥软硬件协同潜力的同时，对复杂的硬件特性进行可行性对比。</a:t>
-            </a:r>
-          </a:p>
-          <a:p>
-            <a:r>
-              <a:t>接下来我们将按照各个验证项的技术方案展开具体的 Benchmark 运行与数据采集工作，为整体方案的顺利落地提供坚实的技术支撑。</a:t>
+              <a:t>我们通过 10 项必做验证包与 1 项条件证伪项的设计，全面覆盖了从基础收益评估、零拷贝数据传输、微秒调度策略到端到端混压测试的完整技术链路。</a:t>
+            </a:r>
+          </a:p>
+          <a:p>
+            <a:r>
+              <a:t>方案坚持以开源基线部署、在线打流与客观实测数据说话，在充分发挥软硬件协同潜力的同时，对复杂的硬件特性进行科学剪枝。</a:t>
+            </a:r>
+          </a:p>
+          <a:p>
+            <a:r>
+              <a:t>接下来研发团队将按照各个验证项的技术方案与 SOP 规程展开具体的打流测试与数据采集工作，为整体系统顺利落地提供扎实的技术支撑！</a:t>
             </a:r>
           </a:p>
         </p:txBody>
@@ -726,7 +937,7 @@
             <a:spLocks noGrp="1"/>
           </p:cNvSpPr>
           <p:nvPr>
-            <p:ph type="sldNum" sz="quarter" idx="5"/>
+            <p:ph type="sldNum" idx="5" sz="quarter"/>
           </p:nvPr>
         </p:nvSpPr>
         <p:spPr/>
@@ -740,7 +951,7 @@
 </file>
 
 <file path=ppt/notesSlides/notesSlide2.xml><?xml version="1.0" encoding="utf-8"?>
-<p:notes xmlns:a="http://schemas.openxmlformats.org/drawingml/2006/main" xmlns:r="http://schemas.openxmlformats.org/officeDocument/2006/relationships" xmlns:p="http://schemas.openxmlformats.org/presentationml/2006/main">
+<p:notes xmlns:a="http://schemas.openxmlformats.org/drawingml/2006/main" xmlns:p="http://schemas.openxmlformats.org/presentationml/2006/main" xmlns:r="http://schemas.openxmlformats.org/officeDocument/2006/relationships">
   <p:cSld>
     <p:spTree>
       <p:nvGrpSpPr>
@@ -760,7 +971,7 @@
         <p:nvSpPr>
           <p:cNvPr id="2" name="Slide Image Placeholder 1"/>
           <p:cNvSpPr>
-            <a:spLocks noGrp="1" noRot="1" noChangeAspect="1"/>
+            <a:spLocks noGrp="1"/>
           </p:cNvSpPr>
           <p:nvPr>
             <p:ph type="sldImg" idx="2"/>
@@ -775,7 +986,7 @@
             <a:spLocks noGrp="1"/>
           </p:cNvSpPr>
           <p:nvPr>
-            <p:ph type="body" sz="quarter" idx="3"/>
+            <p:ph type="body" idx="3" sz="quarter"/>
           </p:nvPr>
         </p:nvSpPr>
         <p:spPr/>
@@ -789,37 +1000,37 @@
           </a:p>
           <a:p>
             <a:r>
-              <a:t>这一页展示的是整体技术方案的总体结构。</a:t>
-            </a:r>
-          </a:p>
-          <a:p>
-            <a:r>
-              <a:t>我们将 11 项验证分为四个关键验证阶段：</a:t>
-            </a:r>
-          </a:p>
-          <a:p>
-            <a:r>
-              <a:t>E0 是收益评估，确认外接 KV 缓存相比本地重算具有明确的时间节省；</a:t>
-            </a:r>
-          </a:p>
-          <a:p>
-            <a:r>
-              <a:t>E1 是传输与功能正确性，涵盖零 CPU 数据拷贝、描述符编译与多卡状态校验；</a:t>
-            </a:r>
-          </a:p>
-          <a:p>
-            <a:r>
-              <a:t>E2 是调度策略与容量扩展，解决调度决策耗时、防范负收益，并实现 SSD 分层扩展；</a:t>
-            </a:r>
-          </a:p>
-          <a:p>
-            <a:r>
-              <a:t>E3 是端到端混压测试，在两台服务器上验证全链路串联后的性能加速与前台时延保护。</a:t>
-            </a:r>
-          </a:p>
-          <a:p>
-            <a:r>
-              <a:t>同时通过 3 项 CVT 实验，对比评估是否可以采用纯软件方案替代复杂的硬件多播、硬件重映射和 DPU 卸载。</a:t>
+              <a:t>这一页展示的是整体技术方案的 10 PVT + 1 CVT 全景结构。</a:t>
+            </a:r>
+          </a:p>
+          <a:p>
+            <a:r>
+              <a:t>我们将验证清晰划分为四个阶段与三级穿刺优先级：</a:t>
+            </a:r>
+          </a:p>
+          <a:p>
+            <a:r>
+              <a:t>E0 验证收益前提（PVT-00），确认外接 KV 缓存相比本地重算有确定性净收益；</a:t>
+            </a:r>
+          </a:p>
+          <a:p>
+            <a:r>
+              <a:t>E1 打通数据通路与多卡同步（PVT-01/02/06/08/09），实现 Host CPU 零数据拷贝、C++ 描述符编译、6 维语义校验与 DPU 双轨；</a:t>
+            </a:r>
+          </a:p>
+          <a:p>
+            <a:r>
+              <a:t>E2 验证调度大脑与分层扩容（PVT-03/04/05），实现微秒级 QueryPlan 选路与 io_uring 裸盘直达扩容；</a:t>
+            </a:r>
+          </a:p>
+          <a:p>
+            <a:r>
+              <a:t>E3 则是全链路端到端混压总门禁（PVT-07），在真实 2 节点集群上通过在线打流对账；</a:t>
+            </a:r>
+          </a:p>
+          <a:p>
+            <a:r>
+              <a:t>同时通过 CVT-01 证伪专用硬件 AtomicRemap 芯片依赖。全量验证基于开源底座，确保客观可复现。</a:t>
             </a:r>
           </a:p>
         </p:txBody>
@@ -831,7 +1042,7 @@
             <a:spLocks noGrp="1"/>
           </p:cNvSpPr>
           <p:nvPr>
-            <p:ph type="sldNum" sz="quarter" idx="5"/>
+            <p:ph type="sldNum" idx="5" sz="quarter"/>
           </p:nvPr>
         </p:nvSpPr>
         <p:spPr/>
@@ -845,7 +1056,7 @@
 </file>
 
 <file path=ppt/notesSlides/notesSlide3.xml><?xml version="1.0" encoding="utf-8"?>
-<p:notes xmlns:a="http://schemas.openxmlformats.org/drawingml/2006/main" xmlns:r="http://schemas.openxmlformats.org/officeDocument/2006/relationships" xmlns:p="http://schemas.openxmlformats.org/presentationml/2006/main">
+<p:notes xmlns:a="http://schemas.openxmlformats.org/drawingml/2006/main" xmlns:p="http://schemas.openxmlformats.org/presentationml/2006/main" xmlns:r="http://schemas.openxmlformats.org/officeDocument/2006/relationships">
   <p:cSld>
     <p:spTree>
       <p:nvGrpSpPr>
@@ -865,7 +1076,7 @@
         <p:nvSpPr>
           <p:cNvPr id="2" name="Slide Image Placeholder 1"/>
           <p:cNvSpPr>
-            <a:spLocks noGrp="1" noRot="1" noChangeAspect="1"/>
+            <a:spLocks noGrp="1"/>
           </p:cNvSpPr>
           <p:nvPr>
             <p:ph type="sldImg" idx="2"/>
@@ -880,7 +1091,7 @@
             <a:spLocks noGrp="1"/>
           </p:cNvSpPr>
           <p:nvPr>
-            <p:ph type="body" sz="quarter" idx="3"/>
+            <p:ph type="body" idx="3" sz="quarter"/>
           </p:nvPr>
         </p:nvSpPr>
         <p:spPr/>
@@ -894,7 +1105,7 @@
           </a:p>
           <a:p>
             <a:r>
-              <a:t>PVT-00 是整个方案的收益立足点（阶段 E0）。核心目标是用客观实测数据验证：外接 KVCache 存储池相比本地算力重新计算（Recompute）确实能省下可观的时间。我们在 2 台物理机 800G 网络环境下，运行 proto_bench 测试 4KB~64MB 下 UBMEM 与 URMA 的带宽时延，同时使用 make_workload.py 构造 50%~98% 复用率的请求，在推理框架源码打点。判定标准：节省的时间必须达到查询与传输总耗时的 2.0 倍以上，且 UBMEM 加速比 ≥1.3 倍。</a:t>
+              <a:t>PVT-00 是整个统一异构 KVCache 存储池的收益立足点（阶段 E0）。核心目标是用客观实测数据验证：外接 KVCache 存储池相比本地算力重新计算（Recompute）确实能省下可观的时间。我们在 2 台物理机 800G 网络环境下，测试 4KB~64MB 下 UBMEM 与 URMA 的带宽时延，同时使用 make_workload.py 构造覆盖 DeepSeek MLA (512B) 与 Qwen MHA (320KB) 的测试集，通过 vLLM 官方 benchmark_serving.py 发起在线打流。判定标准：净收益必须达到查询与传输总开销的 2.0 倍以上，且 UBMEM 相比 URMA 加速比 ≥1.3 倍。</a:t>
             </a:r>
           </a:p>
         </p:txBody>
@@ -906,7 +1117,7 @@
             <a:spLocks noGrp="1"/>
           </p:cNvSpPr>
           <p:nvPr>
-            <p:ph type="sldNum" sz="quarter" idx="5"/>
+            <p:ph type="sldNum" idx="5" sz="quarter"/>
           </p:nvPr>
         </p:nvSpPr>
         <p:spPr/>
@@ -920,7 +1131,7 @@
 </file>
 
 <file path=ppt/notesSlides/notesSlide4.xml><?xml version="1.0" encoding="utf-8"?>
-<p:notes xmlns:a="http://schemas.openxmlformats.org/drawingml/2006/main" xmlns:r="http://schemas.openxmlformats.org/officeDocument/2006/relationships" xmlns:p="http://schemas.openxmlformats.org/presentationml/2006/main">
+<p:notes xmlns:a="http://schemas.openxmlformats.org/drawingml/2006/main" xmlns:p="http://schemas.openxmlformats.org/presentationml/2006/main" xmlns:r="http://schemas.openxmlformats.org/officeDocument/2006/relationships">
   <p:cSld>
     <p:spTree>
       <p:nvGrpSpPr>
@@ -940,7 +1151,7 @@
         <p:nvSpPr>
           <p:cNvPr id="2" name="Slide Image Placeholder 1"/>
           <p:cNvSpPr>
-            <a:spLocks noGrp="1" noRot="1" noChangeAspect="1"/>
+            <a:spLocks noGrp="1"/>
           </p:cNvSpPr>
           <p:nvPr>
             <p:ph type="sldImg" idx="2"/>
@@ -955,7 +1166,7 @@
             <a:spLocks noGrp="1"/>
           </p:cNvSpPr>
           <p:nvPr>
-            <p:ph type="body" sz="quarter" idx="3"/>
+            <p:ph type="body" idx="3" sz="quarter"/>
           </p:nvPr>
         </p:nvSpPr>
         <p:spPr/>
@@ -981,7 +1192,7 @@
             <a:spLocks noGrp="1"/>
           </p:cNvSpPr>
           <p:nvPr>
-            <p:ph type="sldNum" sz="quarter" idx="5"/>
+            <p:ph type="sldNum" idx="5" sz="quarter"/>
           </p:nvPr>
         </p:nvSpPr>
         <p:spPr/>
@@ -995,7 +1206,7 @@
 </file>
 
 <file path=ppt/notesSlides/notesSlide5.xml><?xml version="1.0" encoding="utf-8"?>
-<p:notes xmlns:a="http://schemas.openxmlformats.org/drawingml/2006/main" xmlns:r="http://schemas.openxmlformats.org/officeDocument/2006/relationships" xmlns:p="http://schemas.openxmlformats.org/presentationml/2006/main">
+<p:notes xmlns:a="http://schemas.openxmlformats.org/drawingml/2006/main" xmlns:p="http://schemas.openxmlformats.org/presentationml/2006/main" xmlns:r="http://schemas.openxmlformats.org/officeDocument/2006/relationships">
   <p:cSld>
     <p:spTree>
       <p:nvGrpSpPr>
@@ -1015,7 +1226,7 @@
         <p:nvSpPr>
           <p:cNvPr id="2" name="Slide Image Placeholder 1"/>
           <p:cNvSpPr>
-            <a:spLocks noGrp="1" noRot="1" noChangeAspect="1"/>
+            <a:spLocks noGrp="1"/>
           </p:cNvSpPr>
           <p:nvPr>
             <p:ph type="sldImg" idx="2"/>
@@ -1030,7 +1241,7 @@
             <a:spLocks noGrp="1"/>
           </p:cNvSpPr>
           <p:nvPr>
-            <p:ph type="body" sz="quarter" idx="3"/>
+            <p:ph type="body" idx="3" sz="quarter"/>
           </p:nvPr>
         </p:nvSpPr>
         <p:spPr/>
@@ -1044,7 +1255,7 @@
           </a:p>
           <a:p>
             <a:r>
-              <a:t>PVT-02 解决的是跨框架内存碎片与异步流水问题。vLLM 是按 Page 离散分配的，SGLang 是 Radix Tree 连续 Span。如果底层由 CPU 逐块下发 DMA，CPU 会成为严重瓶颈。我们设计了 64B 对齐的 ExtentManifest 协议和 DescriptorCompiler 贪心合并算法，在 NPU 上开辟计算流与传输流。达标要求：描述符提交数减少 ≥50%、CPU 耗时下降 ≥40%、计算传输重叠率达到 60% 以上。</a:t>
+              <a:t>PVT-02 是 P0 级核心决胜项。开源 vLLM-Ascend 在跨节点传输时依赖 Python 层的 ZMQ 连接器，存在显著的序列化开销与小 I/O 碎片。我们设计了 C++ 描述符编译器，将离散物理块贪心合并为 64B POD 描述符，并在 2 节点下打通 Chunked Prefill 逐层边算边传（Layerwise KV Streaming）。达标要求：描述符压缩率 ≥50%，单次编译耗时 &lt;5µs，流水重叠率 ≥60%，CPU 提交开销降低 ≥40%。</a:t>
             </a:r>
           </a:p>
         </p:txBody>
@@ -1056,7 +1267,7 @@
             <a:spLocks noGrp="1"/>
           </p:cNvSpPr>
           <p:nvPr>
-            <p:ph type="sldNum" sz="quarter" idx="5"/>
+            <p:ph type="sldNum" idx="5" sz="quarter"/>
           </p:nvPr>
         </p:nvSpPr>
         <p:spPr/>
@@ -1070,7 +1281,7 @@
 </file>
 
 <file path=ppt/notesSlides/notesSlide6.xml><?xml version="1.0" encoding="utf-8"?>
-<p:notes xmlns:a="http://schemas.openxmlformats.org/drawingml/2006/main" xmlns:r="http://schemas.openxmlformats.org/officeDocument/2006/relationships" xmlns:p="http://schemas.openxmlformats.org/presentationml/2006/main">
+<p:notes xmlns:a="http://schemas.openxmlformats.org/drawingml/2006/main" xmlns:p="http://schemas.openxmlformats.org/presentationml/2006/main" xmlns:r="http://schemas.openxmlformats.org/officeDocument/2006/relationships">
   <p:cSld>
     <p:spTree>
       <p:nvGrpSpPr>
@@ -1090,7 +1301,7 @@
         <p:nvSpPr>
           <p:cNvPr id="2" name="Slide Image Placeholder 1"/>
           <p:cNvSpPr>
-            <a:spLocks noGrp="1" noRot="1" noChangeAspect="1"/>
+            <a:spLocks noGrp="1"/>
           </p:cNvSpPr>
           <p:nvPr>
             <p:ph type="sldImg" idx="2"/>
@@ -1105,7 +1316,7 @@
             <a:spLocks noGrp="1"/>
           </p:cNvSpPr>
           <p:nvPr>
-            <p:ph type="body" sz="quarter" idx="3"/>
+            <p:ph type="body" idx="3" sz="quarter"/>
           </p:nvPr>
         </p:nvSpPr>
         <p:spPr/>
@@ -1119,7 +1330,7 @@
           </a:p>
           <a:p>
             <a:r>
-              <a:t>PVT-03 包含重要的技术边界测定。很多团队认为'远端零拷贝直读（Direct-View）'越用越好，但 Decode 阶段要读上千次远端内存，每次总线往返延迟会导致算力严重空等。我们在本项中必须拿出实测数据证伪 Decode 直读，强制其走拷贝到显存；同时测出 Prefill 阶段单次只读时的直读临界点。此外，必须验证 ViewGuard 租约状态机，在远端宕机时通过 SIGBUS 捕获和 siglongjmp 实现 0 崩溃安全降级。</a:t>
+              <a:t>PVT-03 是关于远端直读边界与安全容错的验证（阶段 E1/E2）。我们通过实验测定：当数据仅读取 1~2 次时，远端直读具有时延优势；但当重读次数超过 2 次时，必须搬运到本地 HBM，否则总线争用会导致严重降速。同时我们实测证实 Decode 活跃 KV 绝不能跨节点直读。更重要的是，ViewGuard 机制通过捕获 SIGBUS 信号，在远端崩溃时自动回退到本地重算，确保服务 100% 不死机。</a:t>
             </a:r>
           </a:p>
         </p:txBody>
@@ -1131,7 +1342,7 @@
             <a:spLocks noGrp="1"/>
           </p:cNvSpPr>
           <p:nvPr>
-            <p:ph type="sldNum" sz="quarter" idx="5"/>
+            <p:ph type="sldNum" idx="5" sz="quarter"/>
           </p:nvPr>
         </p:nvSpPr>
         <p:spPr/>
@@ -1145,7 +1356,7 @@
 </file>
 
 <file path=ppt/notesSlides/notesSlide7.xml><?xml version="1.0" encoding="utf-8"?>
-<p:notes xmlns:a="http://schemas.openxmlformats.org/drawingml/2006/main" xmlns:r="http://schemas.openxmlformats.org/officeDocument/2006/relationships" xmlns:p="http://schemas.openxmlformats.org/presentationml/2006/main">
+<p:notes xmlns:a="http://schemas.openxmlformats.org/drawingml/2006/main" xmlns:p="http://schemas.openxmlformats.org/presentationml/2006/main" xmlns:r="http://schemas.openxmlformats.org/officeDocument/2006/relationships">
   <p:cSld>
     <p:spTree>
       <p:nvGrpSpPr>
@@ -1165,7 +1376,7 @@
         <p:nvSpPr>
           <p:cNvPr id="2" name="Slide Image Placeholder 1"/>
           <p:cNvSpPr>
-            <a:spLocks noGrp="1" noRot="1" noChangeAspect="1"/>
+            <a:spLocks noGrp="1"/>
           </p:cNvSpPr>
           <p:nvPr>
             <p:ph type="sldImg" idx="2"/>
@@ -1180,7 +1391,7 @@
             <a:spLocks noGrp="1"/>
           </p:cNvSpPr>
           <p:nvPr>
-            <p:ph type="body" sz="quarter" idx="3"/>
+            <p:ph type="body" idx="3" sz="quarter"/>
           </p:nvPr>
         </p:nvSpPr>
         <p:spPr/>
@@ -1194,7 +1405,7 @@
           </a:p>
           <a:p>
             <a:r>
-              <a:t>PVT-04 是控制面决策大脑的验证（阶段 E2）。核心原则：命中不等于收益！如果网络拥塞或者前缀只有几十个 Token，盲目去远端拉取反而会比本地重算慢，这就是负收益。QueryPlan 引擎要在 5 微秒内完成成本评估并给出最优动作。我们采用 100Hz EWMA 遥测和 alignas(64) 缓存行隔离防伪共享。达标要求：P99 决策耗时 &lt; 5微秒，负收益率严格小于 1%。</a:t>
+              <a:t>PVT-04 是调度决策的大脑验证（P0 级）。在 DeepSeek MLA 架构下，每个 Token 只有 512 字节，如果调度器花了 100µs 去查目录、算开销，或者在网络拥塞时盲目拉取，反而会比本地直接重算更慢！QueryPlan 引擎通过微秒级纯内存算法与位运算，在 5µs 内完成 5 维路径成本评估。达标要求：决策 P99 &lt; 5µs，准确率 ≥90%，负收益拦截率 100%，错误决策率 &lt; 1%。</a:t>
             </a:r>
           </a:p>
         </p:txBody>
@@ -1206,7 +1417,7 @@
             <a:spLocks noGrp="1"/>
           </p:cNvSpPr>
           <p:nvPr>
-            <p:ph type="sldNum" sz="quarter" idx="5"/>
+            <p:ph type="sldNum" idx="5" sz="quarter"/>
           </p:nvPr>
         </p:nvSpPr>
         <p:spPr/>
@@ -1220,7 +1431,7 @@
 </file>
 
 <file path=ppt/notesSlides/notesSlide8.xml><?xml version="1.0" encoding="utf-8"?>
-<p:notes xmlns:a="http://schemas.openxmlformats.org/drawingml/2006/main" xmlns:r="http://schemas.openxmlformats.org/officeDocument/2006/relationships" xmlns:p="http://schemas.openxmlformats.org/presentationml/2006/main">
+<p:notes xmlns:a="http://schemas.openxmlformats.org/drawingml/2006/main" xmlns:p="http://schemas.openxmlformats.org/presentationml/2006/main" xmlns:r="http://schemas.openxmlformats.org/officeDocument/2006/relationships">
   <p:cSld>
     <p:spTree>
       <p:nvGrpSpPr>
@@ -1240,7 +1451,7 @@
         <p:nvSpPr>
           <p:cNvPr id="2" name="Slide Image Placeholder 1"/>
           <p:cNvSpPr>
-            <a:spLocks noGrp="1" noRot="1" noChangeAspect="1"/>
+            <a:spLocks noGrp="1"/>
           </p:cNvSpPr>
           <p:nvPr>
             <p:ph type="sldImg" idx="2"/>
@@ -1255,7 +1466,7 @@
             <a:spLocks noGrp="1"/>
           </p:cNvSpPr>
           <p:nvPr>
-            <p:ph type="body" sz="quarter" idx="3"/>
+            <p:ph type="body" idx="3" sz="quarter"/>
           </p:nvPr>
         </p:nvSpPr>
         <p:spPr/>
@@ -1269,7 +1480,7 @@
           </a:p>
           <a:p>
             <a:r>
-              <a:t>PVT-05 验证的是分层存储容量扩展（阶段 E2/E3）。单机 8 张卡 768GB 显存，跑长文本大模型很快就满了。我们要用 4 块 PCIe Gen5 SSD 构建直达二级存储。核心点在于：数据严禁经由主机内存中转，必须通过 io_uring 直接 I/O 裸盘直达！我们将在 130% 到 200% 超载下压测，指标要求：150% 超载下服务容量提升 ≥30%、OOM 降低 ≥50%、直达带宽达到裸盘标称的 80% 以上。</a:t>
+              <a:t>PVT-05 是分层存储容量主路径的验证（P0 级）。为了解决长上下文推理的显存墙问题，我们对标 Mooncake 原生文件级 offload，开发了基于 Linux 6.6+ io_uring FIXED I/O 的裸盘直达技术。数据直接在 NVMe SSD 与 NPU HBM 之间流转，严格绕过主机 DDR。在 150% 显存超载测试下，系统可服务容量提升 ≥30%，OOM 降低 ≥50%，SSD 读写达到标称线速的 80% 以上。</a:t>
             </a:r>
           </a:p>
         </p:txBody>
@@ -1281,7 +1492,7 @@
             <a:spLocks noGrp="1"/>
           </p:cNvSpPr>
           <p:nvPr>
-            <p:ph type="sldNum" sz="quarter" idx="5"/>
+            <p:ph type="sldNum" idx="5" sz="quarter"/>
           </p:nvPr>
         </p:nvSpPr>
         <p:spPr/>
@@ -1295,7 +1506,7 @@
 </file>
 
 <file path=ppt/notesSlides/notesSlide9.xml><?xml version="1.0" encoding="utf-8"?>
-<p:notes xmlns:a="http://schemas.openxmlformats.org/drawingml/2006/main" xmlns:r="http://schemas.openxmlformats.org/officeDocument/2006/relationships" xmlns:p="http://schemas.openxmlformats.org/presentationml/2006/main">
+<p:notes xmlns:a="http://schemas.openxmlformats.org/drawingml/2006/main" xmlns:p="http://schemas.openxmlformats.org/presentationml/2006/main" xmlns:r="http://schemas.openxmlformats.org/officeDocument/2006/relationships">
   <p:cSld>
     <p:spTree>
       <p:nvGrpSpPr>
@@ -1315,7 +1526,7 @@
         <p:nvSpPr>
           <p:cNvPr id="2" name="Slide Image Placeholder 1"/>
           <p:cNvSpPr>
-            <a:spLocks noGrp="1" noRot="1" noChangeAspect="1"/>
+            <a:spLocks noGrp="1"/>
           </p:cNvSpPr>
           <p:nvPr>
             <p:ph type="sldImg" idx="2"/>
@@ -1330,7 +1541,7 @@
             <a:spLocks noGrp="1"/>
           </p:cNvSpPr>
           <p:nvPr>
-            <p:ph type="body" sz="quarter" idx="3"/>
+            <p:ph type="body" idx="3" sz="quarter"/>
           </p:nvPr>
         </p:nvSpPr>
         <p:spPr/>
@@ -1344,7 +1555,7 @@
           </a:p>
           <a:p>
             <a:r>
-              <a:t>PVT-06 守卫的是整个系统的正确性底线（阶段 E1）。一旦拉取了错误的缓存，模型输出就会乱码；多卡 TP 8 张卡如果状态不一致还会产生死锁。我们制定了 6 维元数据（模型版本、分词规则哈希、对话模板哈希、LoRA、租约、就绪屏障），全部用 xxHash64 校验。在多卡上通过 POSIX 共享内存位图同步状态。达标要求：8 类冲突 100% 拦截（0 错误消费），TP=8 状态同步确认 P99 &lt; 100微秒，出现分歧时 8 卡协同回退重算，杜绝死锁。</a:t>
+              <a:t>PVT-06 是生产级正确性与多卡协同的决胜验证（P0 级）。如果外接缓存读取了错误模型或过期的数据，模型就会产生严重幻觉（胡言乱语）；而在 8 卡张量并行时，只要有一张卡读了缓存而另一张卡去重算，集合通信就会瞬间死锁！我们设计了 xxHash64 6 维语义强校验引擎，并通过共享内存实现多卡原子共识。达标要求：8 类冲突 100% 拦截、错误消费严格为 0，多卡同步耗时 P99 &lt; 100µs。</a:t>
             </a:r>
           </a:p>
         </p:txBody>
@@ -1356,7 +1567,7 @@
             <a:spLocks noGrp="1"/>
           </p:cNvSpPr>
           <p:nvPr>
-            <p:ph type="sldNum" sz="quarter" idx="5"/>
+            <p:ph type="sldNum" idx="5" sz="quarter"/>
           </p:nvPr>
         </p:nvSpPr>
         <p:spPr/>
@@ -1550,7 +1761,7 @@
           <a:p>
             <a:fld id="{5BCAD085-E8A6-8845-BD4E-CB4CCA059FC4}" type="datetimeFigureOut">
               <a:rPr lang="en-US" smtClean="0"/>
-              <a:t>8/18/2026</a:t>
+              <a:t>1/27/13</a:t>
             </a:fld>
             <a:endParaRPr lang="en-US"/>
           </a:p>
@@ -1720,7 +1931,7 @@
           <a:p>
             <a:fld id="{5BCAD085-E8A6-8845-BD4E-CB4CCA059FC4}" type="datetimeFigureOut">
               <a:rPr lang="en-US" smtClean="0"/>
-              <a:t>8/18/2026</a:t>
+              <a:t>1/27/13</a:t>
             </a:fld>
             <a:endParaRPr lang="en-US"/>
           </a:p>
@@ -1900,7 +2111,7 @@
           <a:p>
             <a:fld id="{5BCAD085-E8A6-8845-BD4E-CB4CCA059FC4}" type="datetimeFigureOut">
               <a:rPr lang="en-US" smtClean="0"/>
-              <a:t>8/18/2026</a:t>
+              <a:t>1/27/13</a:t>
             </a:fld>
             <a:endParaRPr lang="en-US"/>
           </a:p>
@@ -2070,7 +2281,7 @@
           <a:p>
             <a:fld id="{5BCAD085-E8A6-8845-BD4E-CB4CCA059FC4}" type="datetimeFigureOut">
               <a:rPr lang="en-US" smtClean="0"/>
-              <a:t>8/18/2026</a:t>
+              <a:t>1/27/13</a:t>
             </a:fld>
             <a:endParaRPr lang="en-US"/>
           </a:p>
@@ -2316,7 +2527,7 @@
           <a:p>
             <a:fld id="{5BCAD085-E8A6-8845-BD4E-CB4CCA059FC4}" type="datetimeFigureOut">
               <a:rPr lang="en-US" smtClean="0"/>
-              <a:t>8/18/2026</a:t>
+              <a:t>1/27/13</a:t>
             </a:fld>
             <a:endParaRPr lang="en-US"/>
           </a:p>
@@ -2604,7 +2815,7 @@
           <a:p>
             <a:fld id="{5BCAD085-E8A6-8845-BD4E-CB4CCA059FC4}" type="datetimeFigureOut">
               <a:rPr lang="en-US" smtClean="0"/>
-              <a:t>8/18/2026</a:t>
+              <a:t>1/27/13</a:t>
             </a:fld>
             <a:endParaRPr lang="en-US"/>
           </a:p>
@@ -3026,7 +3237,7 @@
           <a:p>
             <a:fld id="{5BCAD085-E8A6-8845-BD4E-CB4CCA059FC4}" type="datetimeFigureOut">
               <a:rPr lang="en-US" smtClean="0"/>
-              <a:t>8/18/2026</a:t>
+              <a:t>1/27/13</a:t>
             </a:fld>
             <a:endParaRPr lang="en-US"/>
           </a:p>
@@ -3144,7 +3355,7 @@
           <a:p>
             <a:fld id="{5BCAD085-E8A6-8845-BD4E-CB4CCA059FC4}" type="datetimeFigureOut">
               <a:rPr lang="en-US" smtClean="0"/>
-              <a:t>8/18/2026</a:t>
+              <a:t>1/27/13</a:t>
             </a:fld>
             <a:endParaRPr lang="en-US"/>
           </a:p>
@@ -3239,7 +3450,7 @@
           <a:p>
             <a:fld id="{5BCAD085-E8A6-8845-BD4E-CB4CCA059FC4}" type="datetimeFigureOut">
               <a:rPr lang="en-US" smtClean="0"/>
-              <a:t>8/18/2026</a:t>
+              <a:t>1/27/13</a:t>
             </a:fld>
             <a:endParaRPr lang="en-US"/>
           </a:p>
@@ -3516,7 +3727,7 @@
           <a:p>
             <a:fld id="{5BCAD085-E8A6-8845-BD4E-CB4CCA059FC4}" type="datetimeFigureOut">
               <a:rPr lang="en-US" smtClean="0"/>
-              <a:t>8/18/2026</a:t>
+              <a:t>1/27/13</a:t>
             </a:fld>
             <a:endParaRPr lang="en-US"/>
           </a:p>
@@ -3769,7 +3980,7 @@
           <a:p>
             <a:fld id="{5BCAD085-E8A6-8845-BD4E-CB4CCA059FC4}" type="datetimeFigureOut">
               <a:rPr lang="en-US" smtClean="0"/>
-              <a:t>8/18/2026</a:t>
+              <a:t>1/27/13</a:t>
             </a:fld>
             <a:endParaRPr lang="en-US"/>
           </a:p>
@@ -3982,7 +4193,7 @@
           <a:p>
             <a:fld id="{5BCAD085-E8A6-8845-BD4E-CB4CCA059FC4}" type="datetimeFigureOut">
               <a:rPr lang="en-US" smtClean="0"/>
-              <a:t>8/18/2026</a:t>
+              <a:t>1/27/13</a:t>
             </a:fld>
             <a:endParaRPr lang="en-US"/>
           </a:p>
@@ -4341,7 +4552,7 @@
 </file>
 
 <file path=ppt/slides/slide1.xml><?xml version="1.0" encoding="utf-8"?>
-<p:sld xmlns:a="http://schemas.openxmlformats.org/drawingml/2006/main" xmlns:r="http://schemas.openxmlformats.org/officeDocument/2006/relationships" xmlns:p="http://schemas.openxmlformats.org/presentationml/2006/main">
+<p:sld xmlns:a="http://schemas.openxmlformats.org/drawingml/2006/main" xmlns:p="http://schemas.openxmlformats.org/presentationml/2006/main" xmlns:r="http://schemas.openxmlformats.org/officeDocument/2006/relationships">
   <p:cSld>
     <p:bg>
       <p:bgPr>
@@ -4357,14 +4568,7 @@
         <p:cNvGrpSpPr/>
         <p:nvPr/>
       </p:nvGrpSpPr>
-      <p:grpSpPr>
-        <a:xfrm>
-          <a:off x="0" y="0"/>
-          <a:ext cx="0" cy="0"/>
-          <a:chOff x="0" y="0"/>
-          <a:chExt cx="0" cy="0"/>
-        </a:xfrm>
-      </p:grpSpPr>
+      <p:grpSpPr/>
       <p:sp>
         <p:nvSpPr>
           <p:cNvPr id="2" name="Rectangle 1"/>
@@ -4405,7 +4609,6 @@
           <a:lstStyle/>
           <a:p>
             <a:pPr algn="ctr"/>
-            <a:endParaRPr/>
           </a:p>
         </p:txBody>
       </p:sp>
@@ -4440,7 +4643,7 @@
               </a:defRPr>
             </a:pPr>
             <a:r>
-              <a:t>UNIFIED HETEROGENEOUS KVCACHE MEMORY POOL · TECHNICAL VERIFICATION PLAN</a:t>
+              <a:t>UNIFIED HETEROGENEOUS KVCACHE MEMORY POOL · MOONCAKE EXTENDED TECHNICAL BRIEFING</a:t>
             </a:r>
           </a:p>
         </p:txBody>
@@ -4484,7 +4687,7 @@
               <a:spcBef>
                 <a:spcPts val="400"/>
               </a:spcBef>
-              <a:defRPr sz="2600" b="1">
+              <a:defRPr sz="2200" b="1">
                 <a:solidFill>
                   <a:srgbClr val="1E3A8A"/>
                 </a:solidFill>
@@ -4492,7 +4695,7 @@
               </a:defRPr>
             </a:pPr>
             <a:r>
-              <a:t>关键技术提前验证方案串讲</a:t>
+              <a:t>关键技术提前验证方案串讲 (Mooncake 高性能原厂扩展版)</a:t>
             </a:r>
           </a:p>
         </p:txBody>
@@ -4528,7 +4731,7 @@
               </a:defRPr>
             </a:pPr>
             <a:r>
-              <a:t>8 项原型验证 (PVT) 与 3 项技术可行性证伪 (CVT) 方案设计与测试方法</a:t>
+              <a:t>基于开源生态底座深度重构 · 10 项必做验证包 (PVT) 与 1 项可行性证伪 (CVT) · 贯穿 P0/P1/P2 优先级</a:t>
             </a:r>
           </a:p>
         </p:txBody>
@@ -4575,7 +4778,6 @@
           <a:lstStyle/>
           <a:p>
             <a:pPr algn="ctr"/>
-            <a:endParaRPr/>
           </a:p>
         </p:txBody>
       </p:sp>
@@ -4619,7 +4821,6 @@
           <a:lstStyle/>
           <a:p>
             <a:pPr algn="ctr"/>
-            <a:endParaRPr/>
           </a:p>
         </p:txBody>
       </p:sp>
@@ -4654,7 +4855,7 @@
               </a:defRPr>
             </a:pPr>
             <a:r>
-              <a:t>验证背景与目的</a:t>
+              <a:t>研发定位与演进策略</a:t>
             </a:r>
             <a:r>
               <a:rPr sz="1000" b="1">
@@ -4663,7 +4864,7 @@
                 </a:solidFill>
                 <a:latin typeface="Microsoft YaHei"/>
               </a:rPr>
-              <a:t>  [摸清技术边界]</a:t>
+              <a:t>  [原厂软硬件协同]</a:t>
             </a:r>
           </a:p>
         </p:txBody>
@@ -4705,7 +4906,7 @@
                 </a:solidFill>
                 <a:latin typeface="Microsoft YaHei"/>
               </a:rPr>
-              <a:t>• 提前暴露技术风险：</a:t>
+              <a:t>• 基于开源生态底座：</a:t>
             </a:r>
             <a:r>
               <a:rPr sz="1150">
@@ -4714,7 +4915,7 @@
                 </a:solidFill>
                 <a:latin typeface="Microsoft YaHei"/>
               </a:rPr>
-              <a:t>在立项前摸清关键技术路径的可行性与性能上限，解决架构不确定性。</a:t>
+              <a:t>前期借用 Mooncake 外壳接口与集群接入生态，内部深度注入原厂软硬件协同核心创新机制。</a:t>
             </a:r>
           </a:p>
           <a:p>
@@ -4733,7 +4934,7 @@
                 </a:solidFill>
                 <a:latin typeface="Microsoft YaHei"/>
               </a:rPr>
-              <a:t>• 软硬件协同优化：</a:t>
+              <a:t>• 突破开源既有边界：</a:t>
             </a:r>
             <a:r>
               <a:rPr sz="1150">
@@ -4742,7 +4943,7 @@
                 </a:solidFill>
                 <a:latin typeface="Microsoft YaHei"/>
               </a:rPr>
-              <a:t>充分利用 NPU 显存特性与高速通信协议，探索性能最优解。</a:t>
+              <a:t>随着原厂传输底座、微秒调度与 SSD 直达容量主路径全面重构，演进为原厂高性能扩展版。</a:t>
             </a:r>
           </a:p>
         </p:txBody>
@@ -4789,7 +4990,6 @@
           <a:lstStyle/>
           <a:p>
             <a:pPr algn="ctr"/>
-            <a:endParaRPr/>
           </a:p>
         </p:txBody>
       </p:sp>
@@ -4833,7 +5033,6 @@
           <a:lstStyle/>
           <a:p>
             <a:pPr algn="ctr"/>
-            <a:endParaRPr/>
           </a:p>
         </p:txBody>
       </p:sp>
@@ -4928,7 +5127,7 @@
                 </a:solidFill>
                 <a:latin typeface="Microsoft YaHei"/>
               </a:rPr>
-              <a:t>E0 收益上限评估 + E1 零数据拷贝传输与跨框架描述符编译。</a:t>
+              <a:t>E0 收益上限评估 + E1 Host CPU 零数据拷贝底座与跨框架描述符编译。</a:t>
             </a:r>
           </a:p>
           <a:p>
@@ -4956,7 +5155,7 @@
                 </a:solidFill>
                 <a:latin typeface="Microsoft YaHei"/>
               </a:rPr>
-              <a:t>E2 微秒级调度决策与容量扩展 + E3 前后台混压系统闭环测试。</a:t>
+              <a:t>E2 微秒级调度决策与 SSD 分层扩容 + E3 真实集群前后台混压总门禁。</a:t>
             </a:r>
           </a:p>
         </p:txBody>
@@ -5003,7 +5202,6 @@
           <a:lstStyle/>
           <a:p>
             <a:pPr algn="ctr"/>
-            <a:endParaRPr/>
           </a:p>
         </p:txBody>
       </p:sp>
@@ -5047,7 +5245,6 @@
           <a:lstStyle/>
           <a:p>
             <a:pPr algn="ctr"/>
-            <a:endParaRPr/>
           </a:p>
         </p:txBody>
       </p:sp>
@@ -5082,7 +5279,7 @@
               </a:defRPr>
             </a:pPr>
             <a:r>
-              <a:t>量化验收标准</a:t>
+              <a:t>穿刺优先级与量化门禁</a:t>
             </a:r>
             <a:r>
               <a:rPr sz="1000" b="1">
@@ -5091,7 +5288,7 @@
                 </a:solidFill>
                 <a:latin typeface="Microsoft YaHei"/>
               </a:rPr>
-              <a:t>  [Go / No-Go 门限]</a:t>
+              <a:t>  [P0 / P1 / P2]</a:t>
             </a:r>
           </a:p>
         </p:txBody>
@@ -5133,7 +5330,7 @@
                 </a:solidFill>
                 <a:latin typeface="Microsoft YaHei"/>
               </a:rPr>
-              <a:t>• 明确量化指标：</a:t>
+              <a:t>• 10 PVT + 1 CVT 矩阵：</a:t>
             </a:r>
             <a:r>
               <a:rPr sz="1150">
@@ -5142,7 +5339,7 @@
                 </a:solidFill>
                 <a:latin typeface="Microsoft YaHei"/>
               </a:rPr>
-              <a:t>11 个验证项均具备受控测试代码、数据采集方式与达标判决门限。</a:t>
+              <a:t>5 项 P0 核心决胜项 + 4 项 P1 底座支撑项 + 2 项 P2 拓展证伪项。</a:t>
             </a:r>
           </a:p>
           <a:p>
@@ -5161,7 +5358,7 @@
                 </a:solidFill>
                 <a:latin typeface="Microsoft YaHei"/>
               </a:rPr>
-              <a:t>• 可行性对比证伪：</a:t>
+              <a:t>• 在线打流消融对账：</a:t>
             </a:r>
             <a:r>
               <a:rPr sz="1150">
@@ -5170,7 +5367,7 @@
                 </a:solidFill>
                 <a:latin typeface="Microsoft YaHei"/>
               </a:rPr>
-              <a:t>通过实测对比，解耦对硬件多播、硬件 Remap 与 DPU 的非必要依赖。</a:t>
+              <a:t>基于 vLLM 官方 benchmark_serving 在线打流，通过客观实测数据关闭全部验证门禁。</a:t>
             </a:r>
           </a:p>
         </p:txBody>
@@ -5206,7 +5403,7 @@
               </a:defRPr>
             </a:pPr>
             <a:r>
-              <a:t>统一异构 KVCache 存储池研发团队 · 2026-08</a:t>
+              <a:t>统一异构 KVCache 存储池研发攻坚组 · 2026-08</a:t>
             </a:r>
           </a:p>
         </p:txBody>
@@ -5220,7 +5417,7 @@
 </file>
 
 <file path=ppt/slides/slide10.xml><?xml version="1.0" encoding="utf-8"?>
-<p:sld xmlns:a="http://schemas.openxmlformats.org/drawingml/2006/main" xmlns:r="http://schemas.openxmlformats.org/officeDocument/2006/relationships" xmlns:p="http://schemas.openxmlformats.org/presentationml/2006/main">
+<p:sld xmlns:a="http://schemas.openxmlformats.org/drawingml/2006/main" xmlns:p="http://schemas.openxmlformats.org/presentationml/2006/main" xmlns:r="http://schemas.openxmlformats.org/officeDocument/2006/relationships">
   <p:cSld>
     <p:bg>
       <p:bgPr>
@@ -5236,14 +5433,7 @@
         <p:cNvGrpSpPr/>
         <p:nvPr/>
       </p:nvGrpSpPr>
-      <p:grpSpPr>
-        <a:xfrm>
-          <a:off x="0" y="0"/>
-          <a:ext cx="0" cy="0"/>
-          <a:chOff x="0" y="0"/>
-          <a:chExt cx="0" cy="0"/>
-        </a:xfrm>
-      </p:grpSpPr>
+      <p:grpSpPr/>
       <p:sp>
         <p:nvSpPr>
           <p:cNvPr id="2" name="TextBox 1"/>
@@ -5275,7 +5465,7 @@
               </a:defRPr>
             </a:pPr>
             <a:r>
-              <a:t>PVT-07：前后台混压端到端测试与服务质量保障验证</a:t>
+              <a:t>PVT-07：前后台混压全链路端到端总门禁与 SemanticQoS 验证</a:t>
             </a:r>
           </a:p>
           <a:p>
@@ -5291,7 +5481,7 @@
               </a:defRPr>
             </a:pPr>
             <a:r>
-              <a:t>全链路串联验证端到端 P99 TTFT 降低≥20%、QPS 提升≥10%，前台推理时延抖动&lt;3%</a:t>
+              <a:t>在 2 节点真实集群、前台在线推理与后台满载 I/O 混压下，串联全流程，实施三重消融对账，确立立项总门禁</a:t>
             </a:r>
           </a:p>
         </p:txBody>
@@ -5374,7 +5564,6 @@
           <a:lstStyle/>
           <a:p>
             <a:pPr algn="ctr"/>
-            <a:endParaRPr/>
           </a:p>
         </p:txBody>
       </p:sp>
@@ -5418,7 +5607,6 @@
           <a:lstStyle/>
           <a:p>
             <a:pPr algn="ctr"/>
-            <a:endParaRPr/>
           </a:p>
         </p:txBody>
       </p:sp>
@@ -5462,7 +5650,7 @@
                 </a:solidFill>
                 <a:latin typeface="Microsoft YaHei"/>
               </a:rPr>
-              <a:t>  [阶段 E3 系统总门禁]</a:t>
+              <a:t>  [P0 级 | 阶段 E3 混压总门禁]</a:t>
             </a:r>
           </a:p>
         </p:txBody>
@@ -5513,7 +5701,7 @@
                 </a:solidFill>
                 <a:latin typeface="Microsoft YaHei"/>
               </a:rPr>
-              <a:t>单个模块指标达标不代表端到端系统稳定！前台在线推理（Decode）对时延极度敏感；后台若无节制地进行换出和预取，会争抢网络与显存带宽，导致前台请求的尾部时延严重恶化。</a:t>
+              <a:t>单项传输达标不代表在线业务可用。在真实业务中，前台在线推理与后台大流量数据换出/预取混压，极易导致总线拥塞与 TPOT 尾部严重抖动。</a:t>
             </a:r>
           </a:p>
           <a:p>
@@ -5541,43 +5729,7 @@
                 </a:solidFill>
                 <a:latin typeface="Microsoft YaHei"/>
               </a:rPr>
-              <a:t>将全流程模块串联起来，在两节点真实集群与真实业务负载下，验证</a:t>
-            </a:r>
-            <a:r>
-              <a:rPr sz="1150" b="1">
-                <a:solidFill>
-                  <a:srgbClr val="2563EB"/>
-                </a:solidFill>
-                <a:latin typeface="Microsoft YaHei"/>
-              </a:rPr>
-              <a:t>端到端首 Token 响应时延（P99 TTFT）降低 ≥20%</a:t>
-            </a:r>
-            <a:r>
-              <a:rPr sz="1150">
-                <a:solidFill>
-                  <a:srgbClr val="1E293B"/>
-                </a:solidFill>
-                <a:latin typeface="Microsoft YaHei"/>
-              </a:rPr>
-              <a:t> 与 </a:t>
-            </a:r>
-            <a:r>
-              <a:rPr sz="1150" b="1">
-                <a:solidFill>
-                  <a:srgbClr val="2563EB"/>
-                </a:solidFill>
-                <a:latin typeface="Microsoft YaHei"/>
-              </a:rPr>
-              <a:t>系统 QPS 提升 ≥10%</a:t>
-            </a:r>
-            <a:r>
-              <a:rPr sz="1150">
-                <a:solidFill>
-                  <a:srgbClr val="1E293B"/>
-                </a:solidFill>
-                <a:latin typeface="Microsoft YaHei"/>
-              </a:rPr>
-              <a:t>；验证</a:t>
+              <a:t>在 2 节点集群全流程串联下，验证前后台服务质量保障策略（SemanticQoS），实现 </a:t>
             </a:r>
             <a:r>
               <a:rPr sz="1150" b="1">
@@ -5586,7 +5738,7 @@
                 </a:solidFill>
                 <a:latin typeface="Microsoft YaHei"/>
               </a:rPr>
-              <a:t>前后台服务质量保障策略（QoS）对前台时延的保护效果</a:t>
+              <a:t>全链路 TTFT 显著降低、系统吞吐提升且前台 TPOT 尾部时延严格稳定</a:t>
             </a:r>
             <a:r>
               <a:rPr sz="1150">
@@ -5623,7 +5775,7 @@
                 </a:solidFill>
                 <a:latin typeface="Microsoft YaHei"/>
               </a:rPr>
-              <a:t>作为立项前唯一的端到端全链路验证（纵向切片），证明系统兼顾高吞吐并发与低时延响应。</a:t>
+              <a:t>作为阶段 E3 终极验收总门禁，提供无懈可击的三重消融对账证据，直接支撑正式立项决策。</a:t>
             </a:r>
           </a:p>
         </p:txBody>
@@ -5670,7 +5822,6 @@
           <a:lstStyle/>
           <a:p>
             <a:pPr algn="ctr"/>
-            <a:endParaRPr/>
           </a:p>
         </p:txBody>
       </p:sp>
@@ -5714,7 +5865,6 @@
           <a:lstStyle/>
           <a:p>
             <a:pPr algn="ctr"/>
-            <a:endParaRPr/>
           </a:p>
         </p:txBody>
       </p:sp>
@@ -5800,7 +5950,7 @@
                 </a:solidFill>
                 <a:latin typeface="Microsoft YaHei"/>
               </a:rPr>
-              <a:t>• 集群环境：</a:t>
+              <a:t>• 集群物理拓扑：</a:t>
             </a:r>
             <a:r>
               <a:rPr sz="1150">
@@ -5809,7 +5959,7 @@
                 </a:solidFill>
                 <a:latin typeface="Microsoft YaHei"/>
               </a:rPr>
-              <a:t>2 台物理服务器搭建真实推理集群，每台配置 8× 华为 NPU（96GB 显存）、800G 双端口网卡。</a:t>
+              <a:t>2 节点（Node-0 Prefill 节点，Node-1 Decode 节点），800G URMA 直连，4× NVMe Gen5 SSD 阵列。</a:t>
             </a:r>
           </a:p>
           <a:p>
@@ -5828,7 +5978,7 @@
                 </a:solidFill>
                 <a:latin typeface="Microsoft YaHei"/>
               </a:rPr>
-              <a:t>• 网络与调度保障：</a:t>
+              <a:t>• 流控与 QoS 规范：</a:t>
             </a:r>
             <a:r>
               <a:rPr sz="1150">
@@ -5837,43 +5987,7 @@
                 </a:solidFill>
                 <a:latin typeface="Microsoft YaHei"/>
               </a:rPr>
-              <a:t>网络层配置高优先级无损队列（</a:t>
-            </a:r>
-            <a:r>
-              <a:rPr sz="1150" b="1">
-                <a:solidFill>
-                  <a:srgbClr val="1E3A8A"/>
-                </a:solidFill>
-                <a:latin typeface="Consolas"/>
-              </a:rPr>
-              <a:t>RoCE TC0，用于前台与高优流量</a:t>
-            </a:r>
-            <a:r>
-              <a:rPr sz="1150">
-                <a:solidFill>
-                  <a:srgbClr val="1E293B"/>
-                </a:solidFill>
-                <a:latin typeface="Microsoft YaHei"/>
-              </a:rPr>
-              <a:t>）与尽力而为队列（</a:t>
-            </a:r>
-            <a:r>
-              <a:rPr sz="1150" b="1">
-                <a:solidFill>
-                  <a:srgbClr val="1E3A8A"/>
-                </a:solidFill>
-                <a:latin typeface="Consolas"/>
-              </a:rPr>
-              <a:t>TC1，用于后台换出</a:t>
-            </a:r>
-            <a:r>
-              <a:rPr sz="1150">
-                <a:solidFill>
-                  <a:srgbClr val="1E293B"/>
-                </a:solidFill>
-                <a:latin typeface="Microsoft YaHei"/>
-              </a:rPr>
-              <a:t>）；调度层在推理步进循环中植入微秒级限速回调。</a:t>
+              <a:t>网络硬件优先级队列（RoCE TC0 前台 / TC1 后台），配合应用层微秒级自适应退避流控算法。</a:t>
             </a:r>
           </a:p>
           <a:p>
@@ -5892,7 +6006,7 @@
                 </a:solidFill>
                 <a:latin typeface="Microsoft YaHei"/>
               </a:rPr>
-              <a:t>• 评测环境：</a:t>
+              <a:t>• 开源全流程集成：</a:t>
             </a:r>
             <a:r>
               <a:rPr sz="1150">
@@ -5901,7 +6015,43 @@
                 </a:solidFill>
                 <a:latin typeface="Microsoft YaHei"/>
               </a:rPr>
-              <a:t>全链路自动化评测工具链，基于 Python 3.10+ 与 C++ 性能采集插件。</a:t>
+              <a:t>vLLM-Ascend + Mooncake 集群，基于 </a:t>
+            </a:r>
+            <a:r>
+              <a:rPr sz="1150" b="1">
+                <a:solidFill>
+                  <a:srgbClr val="1E3A8A"/>
+                </a:solidFill>
+                <a:latin typeface="Consolas"/>
+              </a:rPr>
+              <a:t>deploy_cluster.sh</a:t>
+            </a:r>
+            <a:r>
+              <a:rPr sz="1150">
+                <a:solidFill>
+                  <a:srgbClr val="1E293B"/>
+                </a:solidFill>
+                <a:latin typeface="Microsoft YaHei"/>
+              </a:rPr>
+              <a:t> 与 </a:t>
+            </a:r>
+            <a:r>
+              <a:rPr sz="1150" b="1">
+                <a:solidFill>
+                  <a:srgbClr val="1E3A8A"/>
+                </a:solidFill>
+                <a:latin typeface="Consolas"/>
+              </a:rPr>
+              <a:t>benchmark_serving.py</a:t>
+            </a:r>
+            <a:r>
+              <a:rPr sz="1150">
+                <a:solidFill>
+                  <a:srgbClr val="1E293B"/>
+                </a:solidFill>
+                <a:latin typeface="Microsoft YaHei"/>
+              </a:rPr>
+              <a:t> 进行在线打流。</a:t>
             </a:r>
           </a:p>
         </p:txBody>
@@ -5948,7 +6098,6 @@
           <a:lstStyle/>
           <a:p>
             <a:pPr algn="ctr"/>
-            <a:endParaRPr/>
           </a:p>
         </p:txBody>
       </p:sp>
@@ -5992,7 +6141,6 @@
           <a:lstStyle/>
           <a:p>
             <a:pPr algn="ctr"/>
-            <a:endParaRPr/>
           </a:p>
         </p:txBody>
       </p:sp>
@@ -6078,7 +6226,7 @@
                 </a:solidFill>
                 <a:latin typeface="Microsoft YaHei"/>
               </a:rPr>
-              <a:t>• 混压场景模拟 (mixed_workload_bench.py)：</a:t>
+              <a:t>• 真实前后台混压负载：</a:t>
             </a:r>
             <a:r>
               <a:rPr sz="1150">
@@ -6087,7 +6235,7 @@
                 </a:solidFill>
                 <a:latin typeface="Microsoft YaHei"/>
               </a:rPr>
-              <a:t>前台运行 32 并发在线请求（50%~70% 前缀复用），后台同时注入 400Gbps 满载数据换出与预取，持续混压运行。</a:t>
+              <a:t>前台以 20~50 req/s 发送 ShareGPT 真实在线请求；后台同时发起 400 Gbps 满载 KV 数据换出与 SSD 回源。</a:t>
             </a:r>
           </a:p>
           <a:p>
@@ -6106,7 +6254,7 @@
                 </a:solidFill>
                 <a:latin typeface="Microsoft YaHei"/>
               </a:rPr>
-              <a:t>• QoS 控制器测试 (semantic_qos_controller.py)：</a:t>
+              <a:t>• 三重消融对比实验 (run_mixed_bench.py)：</a:t>
             </a:r>
             <a:r>
               <a:rPr sz="1150">
@@ -6115,7 +6263,7 @@
                 </a:solidFill>
                 <a:latin typeface="Microsoft YaHei"/>
               </a:rPr>
-              <a:t>验证当检测到前台时延上升时，后台微秒级自适应退避与限速机制。</a:t>
+              <a:t>严格在 ① 纯重算基线、② 原生 Mooncake 混压、③ Unified KV 深度重构扩展版混压之间开展同条件消融对比。</a:t>
             </a:r>
           </a:p>
           <a:p>
@@ -6134,7 +6282,7 @@
                 </a:solidFill>
                 <a:latin typeface="Microsoft YaHei"/>
               </a:rPr>
-              <a:t>• 自动化指标采集 (run_mixed_bench.py)：</a:t>
+              <a:t>• 全链路指标采集：</a:t>
             </a:r>
             <a:r>
               <a:rPr sz="1150">
@@ -6143,7 +6291,7 @@
                 </a:solidFill>
                 <a:latin typeface="Microsoft YaHei"/>
               </a:rPr>
-              <a:t>自动抓取 TTFT、单 Token 生成时延（TPOT P50/P90/P99）与系统总吞吐（QPS）。</a:t>
+              <a:t>自动抓取端到端 TTFT (P50/P99)、TPOT (P50/P99/Jitter)、系统 QPS 与 NPU 算力利用率。</a:t>
             </a:r>
           </a:p>
         </p:txBody>
@@ -6190,7 +6338,6 @@
           <a:lstStyle/>
           <a:p>
             <a:pPr algn="ctr"/>
-            <a:endParaRPr/>
           </a:p>
         </p:txBody>
       </p:sp>
@@ -6234,7 +6381,6 @@
           <a:lstStyle/>
           <a:p>
             <a:pPr algn="ctr"/>
-            <a:endParaRPr/>
           </a:p>
         </p:txBody>
       </p:sp>
@@ -6329,7 +6475,7 @@
                 </a:solidFill>
                 <a:latin typeface="Microsoft YaHei"/>
               </a:rPr>
-              <a:t>《前后台混压端到端性能对比表》、《前台请求时延抖动分布图》、《全链路各环节耗时拆解表》。</a:t>
+              <a:t>《全链路前后台混压测试报告》、《三重消融对比汇总表》、《P99 TPOT 干扰率分布曲线》。</a:t>
             </a:r>
           </a:p>
           <a:p>
@@ -6357,7 +6503,7 @@
                 </a:solidFill>
                 <a:latin typeface="Microsoft YaHei"/>
               </a:rPr>
-              <a:t>1. 首 Token 加速：</a:t>
+              <a:t>1. 首字延迟降低：</a:t>
             </a:r>
             <a:r>
               <a:rPr sz="1150" b="1">
@@ -6366,7 +6512,7 @@
                 </a:solidFill>
                 <a:latin typeface="Microsoft YaHei"/>
               </a:rPr>
-              <a:t>端到端全链路 P99 TTFT 响应时延降低 ≥ 20%</a:t>
+              <a:t>深度重构扩展版相比原生 Mooncake，全链路 P99 TTFT 降低 ≥ 20%</a:t>
             </a:r>
             <a:r>
               <a:rPr sz="1150">
@@ -6385,7 +6531,7 @@
                 </a:solidFill>
                 <a:latin typeface="Microsoft YaHei"/>
               </a:rPr>
-              <a:t>2. 系统总吞吐：</a:t>
+              <a:t>2. 系统吞吐提升：</a:t>
             </a:r>
             <a:r>
               <a:rPr sz="1150" b="1">
@@ -6394,7 +6540,7 @@
                 </a:solidFill>
                 <a:latin typeface="Microsoft YaHei"/>
               </a:rPr>
-              <a:t>集群整体服务吞吐 QPS 提升 ≥ 10%</a:t>
+              <a:t>双节点整体推理吞吐 QPS 提升 ≥ 10%</a:t>
             </a:r>
             <a:r>
               <a:rPr sz="1150">
@@ -6418,39 +6564,11 @@
             <a:r>
               <a:rPr sz="1150" b="1">
                 <a:solidFill>
-                  <a:srgbClr val="DC2626"/>
-                </a:solidFill>
-                <a:latin typeface="Microsoft YaHei"/>
-              </a:rPr>
-              <a:t>后台满载 I/O 运行对前台 P99 TPOT 的尾部抖动干扰严格 &lt; 3%</a:t>
-            </a:r>
-            <a:r>
-              <a:rPr sz="1150">
-                <a:solidFill>
-                  <a:srgbClr val="1E293B"/>
-                </a:solidFill>
-                <a:latin typeface="Microsoft YaHei"/>
-              </a:rPr>
-              <a:t>；
-</a:t>
-            </a:r>
-            <a:r>
-              <a:rPr sz="1150" b="1">
-                <a:solidFill>
-                  <a:srgbClr val="1E293B"/>
-                </a:solidFill>
-                <a:latin typeface="Microsoft YaHei"/>
-              </a:rPr>
-              <a:t>4. 后台传输效率：</a:t>
-            </a:r>
-            <a:r>
-              <a:rPr sz="1150" b="1">
-                <a:solidFill>
                   <a:srgbClr val="2563EB"/>
                 </a:solidFill>
                 <a:latin typeface="Microsoft YaHei"/>
               </a:rPr>
-              <a:t>后台数据传输有效带宽利用率 ≥ 70%</a:t>
+              <a:t>后台 400G 满载混压下，前台 P99 TPOT 抖动干扰率严格 &lt; 3%</a:t>
             </a:r>
             <a:r>
               <a:rPr sz="1150">
@@ -6506,7 +6624,6 @@
           <a:lstStyle/>
           <a:p>
             <a:pPr algn="ctr"/>
-            <a:endParaRPr/>
           </a:p>
         </p:txBody>
       </p:sp>
@@ -6550,7 +6667,6 @@
           <a:lstStyle/>
           <a:p>
             <a:pPr algn="ctr"/>
-            <a:endParaRPr/>
           </a:p>
         </p:txBody>
       </p:sp>
@@ -6597,7 +6713,7 @@
                 </a:solidFill>
                 <a:latin typeface="Microsoft YaHei"/>
               </a:rPr>
-              <a:t>PVT-07 端到端混压测试与总体验收：</a:t>
+              <a:t>PVT-07 混压全链路总门禁：</a:t>
             </a:r>
             <a:r>
               <a:rPr sz="1150" b="1">
@@ -6606,7 +6722,7 @@
                 </a:solidFill>
                 <a:latin typeface="Microsoft YaHei"/>
               </a:rPr>
-              <a:t>全链路串联达成 </a:t>
+              <a:t>在 400G 满载混压下，全链路 </a:t>
             </a:r>
             <a:r>
               <a:rPr sz="1150" b="1">
@@ -6624,7 +6740,7 @@
                 </a:solidFill>
                 <a:latin typeface="Microsoft YaHei"/>
               </a:rPr>
-              <a:t>、</a:t>
+              <a:t>，系统吞吐提升 </a:t>
             </a:r>
             <a:r>
               <a:rPr sz="1150" b="1">
@@ -6633,7 +6749,7 @@
                 </a:solidFill>
                 <a:latin typeface="Microsoft YaHei"/>
               </a:rPr>
-              <a:t>QPS 提升 ≥10%</a:t>
+              <a:t>≥10%</a:t>
             </a:r>
             <a:r>
               <a:rPr sz="1150" b="1">
@@ -6642,16 +6758,16 @@
                 </a:solidFill>
                 <a:latin typeface="Microsoft YaHei"/>
               </a:rPr>
-              <a:t>，服务质量保障机制将前台时延抖动控制在 </a:t>
-            </a:r>
-            <a:r>
-              <a:rPr sz="1150" b="1">
-                <a:solidFill>
-                  <a:srgbClr val="059669"/>
-                </a:solidFill>
-                <a:latin typeface="Microsoft YaHei"/>
-              </a:rPr>
-              <a:t>严格 &lt;3%</a:t>
+              <a:t>，前台 TPOT 干扰率 </a:t>
+            </a:r>
+            <a:r>
+              <a:rPr sz="1150" b="1">
+                <a:solidFill>
+                  <a:srgbClr val="DC2626"/>
+                </a:solidFill>
+                <a:latin typeface="Microsoft YaHei"/>
+              </a:rPr>
+              <a:t>&lt;3%</a:t>
             </a:r>
             <a:r>
               <a:rPr sz="1150" b="1">
@@ -6660,7 +6776,7 @@
                 </a:solidFill>
                 <a:latin typeface="Microsoft YaHei"/>
               </a:rPr>
-              <a:t>，达到端到端阶段 E3 验收标准。</a:t>
+              <a:t>，全量通过阶段 E3 终极立项总门禁。</a:t>
             </a:r>
           </a:p>
         </p:txBody>
@@ -6674,7 +6790,7 @@
 </file>
 
 <file path=ppt/slides/slide11.xml><?xml version="1.0" encoding="utf-8"?>
-<p:sld xmlns:a="http://schemas.openxmlformats.org/drawingml/2006/main" xmlns:r="http://schemas.openxmlformats.org/officeDocument/2006/relationships" xmlns:p="http://schemas.openxmlformats.org/presentationml/2006/main">
+<p:sld xmlns:a="http://schemas.openxmlformats.org/drawingml/2006/main" xmlns:p="http://schemas.openxmlformats.org/presentationml/2006/main" xmlns:r="http://schemas.openxmlformats.org/officeDocument/2006/relationships">
   <p:cSld>
     <p:bg>
       <p:bgPr>
@@ -6690,14 +6806,7 @@
         <p:cNvGrpSpPr/>
         <p:nvPr/>
       </p:nvGrpSpPr>
-      <p:grpSpPr>
-        <a:xfrm>
-          <a:off x="0" y="0"/>
-          <a:ext cx="0" cy="0"/>
-          <a:chOff x="0" y="0"/>
-          <a:chExt cx="0" cy="0"/>
-        </a:xfrm>
-      </p:grpSpPr>
+      <p:grpSpPr/>
       <p:sp>
         <p:nvSpPr>
           <p:cNvPr id="2" name="TextBox 1"/>
@@ -6729,7 +6838,7 @@
               </a:defRPr>
             </a:pPr>
             <a:r>
-              <a:t>CVT-01：热点前缀广播硬件多播与软件分层转发对比验证</a:t>
+              <a:t>PVT-08：1-to-N 组播式 KV 分发：硬件多播 vs 软件分层中继验证</a:t>
             </a:r>
           </a:p>
           <a:p>
@@ -6745,7 +6854,7 @@
               </a:defRPr>
             </a:pPr>
             <a:r>
-              <a:t>验证软件分层转发能否替代硬件多播：在 N&lt;=8 常见规模下时延差距&lt;10%，解耦对网络硬件多播的依赖</a:t>
+              <a:t>覆盖公共提示词广播、Multi-Agent 共享上下文与 1P-to-ND 分发场景，验证软件分层中继相比单播节省 ≥60% 带宽</a:t>
             </a:r>
           </a:p>
         </p:txBody>
@@ -6828,7 +6937,6 @@
           <a:lstStyle/>
           <a:p>
             <a:pPr algn="ctr"/>
-            <a:endParaRPr/>
           </a:p>
         </p:txBody>
       </p:sp>
@@ -6872,7 +6980,6 @@
           <a:lstStyle/>
           <a:p>
             <a:pPr algn="ctr"/>
-            <a:endParaRPr/>
           </a:p>
         </p:txBody>
       </p:sp>
@@ -6916,7 +7023,7 @@
                 </a:solidFill>
                 <a:latin typeface="Microsoft YaHei"/>
               </a:rPr>
-              <a:t>  [技术可行性证伪]</a:t>
+              <a:t>  [P2 级 | 阶段 E1 拓展组播]</a:t>
             </a:r>
           </a:p>
         </p:txBody>
@@ -6967,7 +7074,7 @@
                 </a:solidFill>
                 <a:latin typeface="Microsoft YaHei"/>
               </a:rPr>
-              <a:t>业界常假设“多节点共享热点 System Prompt 必须依赖交换机硬件多播（Multicast）”。但在实际数据中心，硬件多播配置复杂、排障困难，且单个节点慢或丢包容易拖死整组传输。</a:t>
+              <a:t>大模型存在大量 1-to-N 同一份 KV 分发给多个接收端的现实场景需求。传统逐个单播拉取会导致发送端网卡带宽瞬间被打满，引发拥塞。</a:t>
             </a:r>
           </a:p>
           <a:p>
@@ -6995,7 +7102,7 @@
                 </a:solidFill>
                 <a:latin typeface="Microsoft YaHei"/>
               </a:rPr>
-              <a:t>1. 验证硬件多播是否为必需；2. 证明在 N≤8 常见集群规模下，采用</a:t>
+              <a:t>覆盖三大典型业务场景，测定单播、</a:t>
             </a:r>
             <a:r>
               <a:rPr sz="1150" b="1">
@@ -7004,7 +7111,7 @@
                 </a:solidFill>
                 <a:latin typeface="Microsoft YaHei"/>
               </a:rPr>
-              <a:t>“软件树状分层转发（Staging Fanout）”的时延与硬件多播差距 &lt; 10%</a:t>
+              <a:t>软件分层中继转发（Staging Fanout）</a:t>
             </a:r>
             <a:r>
               <a:rPr sz="1150">
@@ -7013,7 +7120,7 @@
                 </a:solidFill>
                 <a:latin typeface="Microsoft YaHei"/>
               </a:rPr>
-              <a:t>；3. 验证存在慢节点或丢包时软件方案的容错优势。</a:t>
+              <a:t> 与硬件网络多播的性能，验证软件树状中继转发相比单播的带宽节省与时延加速收益。</a:t>
             </a:r>
           </a:p>
           <a:p>
@@ -7041,7 +7148,7 @@
                 </a:solidFill>
                 <a:latin typeface="Microsoft YaHei"/>
               </a:rPr>
-              <a:t>科学剪枝非必要的复杂硬件依赖，降低网络配置门槛与运维风险，提升系统通用性与健壮性。</a:t>
+              <a:t>证明利用集群计算节点建立树状中继即可实现高效分发，在硬件多播不可用时确立高可用、低依赖的纯软主力分发路径。</a:t>
             </a:r>
           </a:p>
         </p:txBody>
@@ -7088,7 +7195,6 @@
           <a:lstStyle/>
           <a:p>
             <a:pPr algn="ctr"/>
-            <a:endParaRPr/>
           </a:p>
         </p:txBody>
       </p:sp>
@@ -7132,7 +7238,6 @@
           <a:lstStyle/>
           <a:p>
             <a:pPr algn="ctr"/>
-            <a:endParaRPr/>
           </a:p>
         </p:txBody>
       </p:sp>
@@ -7218,7 +7323,7 @@
                 </a:solidFill>
                 <a:latin typeface="Microsoft YaHei"/>
               </a:rPr>
-              <a:t>• 测试实施规范：</a:t>
+              <a:t>• 集群拓扑：</a:t>
             </a:r>
             <a:r>
               <a:rPr sz="1150">
@@ -7227,7 +7332,7 @@
                 </a:solidFill>
                 <a:latin typeface="Microsoft YaHei"/>
               </a:rPr>
-              <a:t>采用双轨制测试（轨道 1: 配置物理 RDMA 多播组；轨道 2: 软件树状分层转发与理论单播对账）。</a:t>
+              <a:t>1 个源 Prefill 节点，2/4/8 个目的 Decode 节点，800G URMA 网络互联。</a:t>
             </a:r>
           </a:p>
           <a:p>
@@ -7246,7 +7351,7 @@
                 </a:solidFill>
                 <a:latin typeface="Microsoft YaHei"/>
               </a:rPr>
-              <a:t>• 网络与接口：</a:t>
+              <a:t>• 分发协议：</a:t>
             </a:r>
             <a:r>
               <a:rPr sz="1150">
@@ -7255,43 +7360,35 @@
                 </a:solidFill>
                 <a:latin typeface="Microsoft YaHei"/>
               </a:rPr>
-              <a:t>Linux 6.6+，</a:t>
-            </a:r>
+              <a:t>基于 UBMEM 共享内存与 URMA 的树状 Staging 分发拓扑算法，支持节点级内存缓存与二阶段接力分发。</a:t>
+            </a:r>
+          </a:p>
+          <a:p>
+            <a:pPr>
+              <a:lnSpc>
+                <a:spcPct val="120000"/>
+              </a:lnSpc>
+              <a:spcAft>
+                <a:spcPts val="600"/>
+              </a:spcAft>
+            </a:pPr>
             <a:r>
               <a:rPr sz="1150" b="1">
                 <a:solidFill>
                   <a:srgbClr val="1E3A8A"/>
                 </a:solidFill>
+                <a:latin typeface="Microsoft YaHei"/>
+              </a:rPr>
+              <a:t>• 编译参数：</a:t>
+            </a:r>
+            <a:r>
+              <a:rPr sz="1150" b="1">
+                <a:solidFill>
+                  <a:srgbClr val="1E3A8A"/>
+                </a:solidFill>
                 <a:latin typeface="Consolas"/>
               </a:rPr>
-              <a:t>ibv_attach_mcast</a:t>
-            </a:r>
-            <a:r>
-              <a:rPr sz="1150">
-                <a:solidFill>
-                  <a:srgbClr val="1E293B"/>
-                </a:solidFill>
-                <a:latin typeface="Microsoft YaHei"/>
-              </a:rPr>
-              <a:t>，URMA 点对点通信库，链接 </a:t>
-            </a:r>
-            <a:r>
-              <a:rPr sz="1150">
-                <a:solidFill>
-                  <a:srgbClr val="1E3A8A"/>
-                </a:solidFill>
-                <a:latin typeface="Consolas"/>
-              </a:rPr>
-              <a:t>-lurma -lpthread -O3</a:t>
-            </a:r>
-            <a:r>
-              <a:rPr sz="1150">
-                <a:solidFill>
-                  <a:srgbClr val="1E293B"/>
-                </a:solidFill>
-                <a:latin typeface="Microsoft YaHei"/>
-              </a:rPr>
-              <a:t>。</a:t>
+              <a:t>g++ -O3 -std=c++17 -Wall multicast_fanout_bench.cc -lurma -lubmem -lpthread</a:t>
             </a:r>
           </a:p>
         </p:txBody>
@@ -7338,7 +7435,6 @@
           <a:lstStyle/>
           <a:p>
             <a:pPr algn="ctr"/>
-            <a:endParaRPr/>
           </a:p>
         </p:txBody>
       </p:sp>
@@ -7382,7 +7478,6 @@
           <a:lstStyle/>
           <a:p>
             <a:pPr algn="ctr"/>
-            <a:endParaRPr/>
           </a:p>
         </p:txBody>
       </p:sp>
@@ -7468,7 +7563,7 @@
                 </a:solidFill>
                 <a:latin typeface="Microsoft YaHei"/>
               </a:rPr>
-              <a:t>• 拓扑与广播包测试 (multicast_fanout_bench.cc)：</a:t>
+              <a:t>• 三大业务场景编排 (test_fanout_scenarios.py)：</a:t>
             </a:r>
             <a:r>
               <a:rPr sz="1150">
@@ -7477,7 +7572,27 @@
                 </a:solidFill>
                 <a:latin typeface="Microsoft YaHei"/>
               </a:rPr>
-              <a:t>测试 N=2, 4, 8, 16 目标节点下，广播 1MB~64MB 热点 Prompt 数据的完成总时延。</a:t>
+              <a:t>• 热点系统提示词广播：32K~64K System Prompt 向 16 节点广播；
+</a:t>
+            </a:r>
+            <a:r>
+              <a:rPr sz="1150">
+                <a:solidFill>
+                  <a:srgbClr val="1E293B"/>
+                </a:solidFill>
+                <a:latin typeface="Microsoft YaHei"/>
+              </a:rPr>
+              <a:t>• Multi-Agent 上下文分发：主 Agent 生成 100K 上下文分发给 8 个子 Agent；
+</a:t>
+            </a:r>
+            <a:r>
+              <a:rPr sz="1150">
+                <a:solidFill>
+                  <a:srgbClr val="1E293B"/>
+                </a:solidFill>
+                <a:latin typeface="Microsoft YaHei"/>
+              </a:rPr>
+              <a:t>• PD 分离 1P-to-ND 分叉：单个 Prefill 向多个 Decode 副本并发推送。</a:t>
             </a:r>
           </a:p>
           <a:p>
@@ -7496,7 +7611,7 @@
                 </a:solidFill>
                 <a:latin typeface="Microsoft YaHei"/>
               </a:rPr>
-              <a:t>• 慢节点与丢包扰动注入：</a:t>
+              <a:t>• 拓扑对比压测 (multicast_fanout_bench.cc)：</a:t>
             </a:r>
             <a:r>
               <a:rPr sz="1150">
@@ -7505,35 +7620,7 @@
                 </a:solidFill>
                 <a:latin typeface="Microsoft YaHei"/>
               </a:rPr>
-              <a:t>注入单个节点 10ms 慢响应（Slow Reader）与 1% 随机丢包，对比各方案的恢复与抖动情况。</a:t>
-            </a:r>
-          </a:p>
-          <a:p>
-            <a:pPr>
-              <a:lnSpc>
-                <a:spcPct val="120000"/>
-              </a:lnSpc>
-              <a:spcAft>
-                <a:spcPts val="600"/>
-              </a:spcAft>
-            </a:pPr>
-            <a:r>
-              <a:rPr sz="1150" b="1">
-                <a:solidFill>
-                  <a:srgbClr val="1E3A8A"/>
-                </a:solidFill>
-                <a:latin typeface="Microsoft YaHei"/>
-              </a:rPr>
-              <a:t>• 方案对比：</a:t>
-            </a:r>
-            <a:r>
-              <a:rPr sz="1150">
-                <a:solidFill>
-                  <a:srgbClr val="1E293B"/>
-                </a:solidFill>
-                <a:latin typeface="Microsoft YaHei"/>
-              </a:rPr>
-              <a:t>对比 N 次独立单播、软件树状分层转发与硬件多播三种方式的耗时曲线。</a:t>
+              <a:t>测试 16MB~128MB 数据在 1→2、1→4、1→8 规模下，单播、软件树状中继与硬件多播的带宽和耗时。</a:t>
             </a:r>
           </a:p>
         </p:txBody>
@@ -7580,7 +7667,6 @@
           <a:lstStyle/>
           <a:p>
             <a:pPr algn="ctr"/>
-            <a:endParaRPr/>
           </a:p>
         </p:txBody>
       </p:sp>
@@ -7624,7 +7710,6 @@
           <a:lstStyle/>
           <a:p>
             <a:pPr algn="ctr"/>
-            <a:endParaRPr/>
           </a:p>
         </p:txBody>
       </p:sp>
@@ -7719,7 +7804,7 @@
                 </a:solidFill>
                 <a:latin typeface="Microsoft YaHei"/>
               </a:rPr>
-              <a:t>《单播 vs 软件分层转发 vs 硬件多播时延对比表》、《异常扰动下抗抖动实测报告》、《技术选型证伪结论》。</a:t>
+              <a:t>《1-to-N 组播分发时延与带宽对比表》、《三大业务场景分发收益曲线》、《硬件多播必要性评估报告》。</a:t>
             </a:r>
           </a:p>
           <a:p>
@@ -7738,16 +7823,16 @@
                 </a:solidFill>
                 <a:latin typeface="Microsoft YaHei"/>
               </a:rPr>
-              <a:t>• 判定达标要求 (Go/Conditional/No-Go)：</a:t>
-            </a:r>
-            <a:r>
-              <a:rPr sz="1150" b="1">
-                <a:solidFill>
-                  <a:srgbClr val="1E293B"/>
-                </a:solidFill>
-                <a:latin typeface="Microsoft YaHei"/>
-              </a:rPr>
-              <a:t>1. 性能差距门槛：</a:t>
+              <a:t>• 判定达标要求 (Go/No-Go)：</a:t>
+            </a:r>
+            <a:r>
+              <a:rPr sz="1150" b="1">
+                <a:solidFill>
+                  <a:srgbClr val="1E293B"/>
+                </a:solidFill>
+                <a:latin typeface="Microsoft YaHei"/>
+              </a:rPr>
+              <a:t>1. 源端带宽节省：</a:t>
             </a:r>
             <a:r>
               <a:rPr sz="1150" b="1">
@@ -7756,7 +7841,7 @@
                 </a:solidFill>
                 <a:latin typeface="Microsoft YaHei"/>
               </a:rPr>
-              <a:t>在 N ≤ 8 节点规模下，软件树状分层转发的完成时延与硬件多播相比差距 &lt; 10%</a:t>
+              <a:t>在 1-to-8 分发下，软件 Staging 组播相比单播源端带宽占用降低 ≥ 60%</a:t>
             </a:r>
             <a:r>
               <a:rPr sz="1150">
@@ -7775,7 +7860,7 @@
                 </a:solidFill>
                 <a:latin typeface="Microsoft YaHei"/>
               </a:rPr>
-              <a:t>2. 抗抖动能力：</a:t>
+              <a:t>2. 完成时延优化：</a:t>
             </a:r>
             <a:r>
               <a:rPr sz="1150" b="1">
@@ -7784,7 +7869,7 @@
                 </a:solidFill>
                 <a:latin typeface="Microsoft YaHei"/>
               </a:rPr>
-              <a:t>当存在慢节点或丢包时，软件分层转发的时延稳定性显著优于硬件多播</a:t>
+              <a:t>各目的端数据接收完成时间 P99 降低 ≥ 40%</a:t>
             </a:r>
             <a:r>
               <a:rPr sz="1150">
@@ -7803,7 +7888,7 @@
                 </a:solidFill>
                 <a:latin typeface="Microsoft YaHei"/>
               </a:rPr>
-              <a:t>3. 结论输出：</a:t>
+              <a:t>3. 去硬件依赖：</a:t>
             </a:r>
             <a:r>
               <a:rPr sz="1150" b="1">
@@ -7812,7 +7897,7 @@
                 </a:solidFill>
                 <a:latin typeface="Microsoft YaHei"/>
               </a:rPr>
-              <a:t>证实主路径采用软件分层转发完全可行，排除对交换机硬件多播的强依赖</a:t>
+              <a:t>软件方案作为默认高可用主力路径，消除对特定网卡硬件多播的硬依赖</a:t>
             </a:r>
             <a:r>
               <a:rPr sz="1150">
@@ -7868,7 +7953,6 @@
           <a:lstStyle/>
           <a:p>
             <a:pPr algn="ctr"/>
-            <a:endParaRPr/>
           </a:p>
         </p:txBody>
       </p:sp>
@@ -7912,7 +7996,6 @@
           <a:lstStyle/>
           <a:p>
             <a:pPr algn="ctr"/>
-            <a:endParaRPr/>
           </a:p>
         </p:txBody>
       </p:sp>
@@ -7959,7 +8042,7 @@
                 </a:solidFill>
                 <a:latin typeface="Microsoft YaHei"/>
               </a:rPr>
-              <a:t>CVT-01 硬件多播必要性证伪与软件分层转发：</a:t>
+              <a:t>PVT-08 1-to-N 组播分发效能：</a:t>
             </a:r>
             <a:r>
               <a:rPr sz="1150" b="1">
@@ -7968,7 +8051,7 @@
                 </a:solidFill>
                 <a:latin typeface="Microsoft YaHei"/>
               </a:rPr>
-              <a:t>实测证明在 N≤8 规模下软件分层转发广播时延差距 </a:t>
+              <a:t>软件分层中继组播在 1-to-8 分发下 </a:t>
             </a:r>
             <a:r>
               <a:rPr sz="1150" b="1">
@@ -7977,7 +8060,7 @@
                 </a:solidFill>
                 <a:latin typeface="Microsoft YaHei"/>
               </a:rPr>
-              <a:t>&lt; 10%</a:t>
+              <a:t>源端带宽占用降低 ≥60%</a:t>
             </a:r>
             <a:r>
               <a:rPr sz="1150" b="1">
@@ -7986,16 +8069,16 @@
                 </a:solidFill>
                 <a:latin typeface="Microsoft YaHei"/>
               </a:rPr>
-              <a:t> 且抗抖动能力更强，主干方案 </a:t>
-            </a:r>
-            <a:r>
-              <a:rPr sz="1150" b="1">
-                <a:solidFill>
-                  <a:srgbClr val="059669"/>
-                </a:solidFill>
-                <a:latin typeface="Microsoft YaHei"/>
-              </a:rPr>
-              <a:t>解耦对硬件多播的强依赖</a:t>
+              <a:t>，接收完成耗时降低 </a:t>
+            </a:r>
+            <a:r>
+              <a:rPr sz="1150" b="1">
+                <a:solidFill>
+                  <a:srgbClr val="DC2626"/>
+                </a:solidFill>
+                <a:latin typeface="Microsoft YaHei"/>
+              </a:rPr>
+              <a:t>≥40%</a:t>
             </a:r>
             <a:r>
               <a:rPr sz="1150" b="1">
@@ -8004,7 +8087,7 @@
                 </a:solidFill>
                 <a:latin typeface="Microsoft YaHei"/>
               </a:rPr>
-              <a:t>。</a:t>
+              <a:t>，确立纯软件高效分发主路径，免除外部硬件多播强依赖。</a:t>
             </a:r>
           </a:p>
         </p:txBody>
@@ -8018,7 +8101,7 @@
 </file>
 
 <file path=ppt/slides/slide12.xml><?xml version="1.0" encoding="utf-8"?>
-<p:sld xmlns:a="http://schemas.openxmlformats.org/drawingml/2006/main" xmlns:r="http://schemas.openxmlformats.org/officeDocument/2006/relationships" xmlns:p="http://schemas.openxmlformats.org/presentationml/2006/main">
+<p:sld xmlns:a="http://schemas.openxmlformats.org/drawingml/2006/main" xmlns:p="http://schemas.openxmlformats.org/presentationml/2006/main" xmlns:r="http://schemas.openxmlformats.org/officeDocument/2006/relationships">
   <p:cSld>
     <p:bg>
       <p:bgPr>
@@ -8034,14 +8117,7 @@
         <p:cNvGrpSpPr/>
         <p:nvPr/>
       </p:nvGrpSpPr>
-      <p:grpSpPr>
-        <a:xfrm>
-          <a:off x="0" y="0"/>
-          <a:ext cx="0" cy="0"/>
-          <a:chOff x="0" y="0"/>
-          <a:chExt cx="0" cy="0"/>
-        </a:xfrm>
-      </p:grpSpPr>
+      <p:grpSpPr/>
       <p:sp>
         <p:nvSpPr>
           <p:cNvPr id="2" name="TextBox 1"/>
@@ -8073,7 +8149,7 @@
               </a:defRPr>
             </a:pPr>
             <a:r>
-              <a:t>CVT-02：显存页迁移软件 RCU 与硬件原子重映射对比验证</a:t>
+              <a:t>PVT-09：DPU 硬件安全与算力卸载加速 vs Raw Direct 双轨验证</a:t>
             </a:r>
           </a:p>
           <a:p>
@@ -8089,7 +8165,7 @@
               </a:defRPr>
             </a:pPr>
             <a:r>
-              <a:t>验证软件 RCU 无锁机制能否替代硬件原子重映射：实现迁移停顿&lt;1ms、推理时延抖动&lt;5%</a:t>
+              <a:t>测定 DPU 线速 AES/CRC 卸载增益与 500µs 无缝降级，提前布局 Fly-in-line 流式在途量化/压缩双轨手段</a:t>
             </a:r>
           </a:p>
         </p:txBody>
@@ -8172,7 +8248,6 @@
           <a:lstStyle/>
           <a:p>
             <a:pPr algn="ctr"/>
-            <a:endParaRPr/>
           </a:p>
         </p:txBody>
       </p:sp>
@@ -8216,7 +8291,6 @@
           <a:lstStyle/>
           <a:p>
             <a:pPr algn="ctr"/>
-            <a:endParaRPr/>
           </a:p>
         </p:txBody>
       </p:sp>
@@ -8260,7 +8334,7 @@
                 </a:solidFill>
                 <a:latin typeface="Microsoft YaHei"/>
               </a:rPr>
-              <a:t>  [技术可行性证伪]</a:t>
+              <a:t>  [P1 级 | 阶段 E1 双轨协同]</a:t>
             </a:r>
           </a:p>
         </p:txBody>
@@ -8311,7 +8385,7 @@
                 </a:solidFill>
                 <a:latin typeface="Microsoft YaHei"/>
               </a:rPr>
-              <a:t>业界常假设“显存碎片整理与页迁移必须依赖底层硬件提供虚拟地址原子重映射原语（Atomic Remap）”。但硬件原语定制周期长，且多卡并发下容易发生 TLB 刷新死锁。</a:t>
+              <a:t>企业级客户对数据传输加解密（AES-256）与 CRC 校验有刚性要求，CPU 软算会吞噬算力；同时必须确保无 DPU 时系统仍能依托 Raw Direct 路径高效运行。</a:t>
             </a:r>
           </a:p>
           <a:p>
@@ -8339,16 +8413,16 @@
                 </a:solidFill>
                 <a:latin typeface="Microsoft YaHei"/>
               </a:rPr>
-              <a:t>1. 验证硬件原子重映射是否为必需；2. 证明基于</a:t>
-            </a:r>
-            <a:r>
-              <a:rPr sz="1150" b="1">
-                <a:solidFill>
-                  <a:srgbClr val="2563EB"/>
-                </a:solidFill>
-                <a:latin typeface="Microsoft YaHei"/>
-              </a:rPr>
-              <a:t>“软件 RCU（读-复制-更新）+ 写入时复制”机制</a:t>
+              <a:t>验证 DPU 硬件线速安全卸载收益；验证发生故障时 </a:t>
+            </a:r>
+            <a:r>
+              <a:rPr sz="1150" b="1">
+                <a:solidFill>
+                  <a:srgbClr val="DC2626"/>
+                </a:solidFill>
+                <a:latin typeface="Microsoft YaHei"/>
+              </a:rPr>
+              <a:t>在 &lt; 500µs 内无缝降级至 Raw Direct 裸机直达路径</a:t>
             </a:r>
             <a:r>
               <a:rPr sz="1150">
@@ -8357,43 +8431,7 @@
                 </a:solidFill>
                 <a:latin typeface="Microsoft YaHei"/>
               </a:rPr>
-              <a:t>，迁移期间并发读取停顿时间 </a:t>
-            </a:r>
-            <a:r>
-              <a:rPr sz="1150" b="1">
-                <a:solidFill>
-                  <a:srgbClr val="059669"/>
-                </a:solidFill>
-                <a:latin typeface="Microsoft YaHei"/>
-              </a:rPr>
-              <a:t>P99 &lt; 1ms</a:t>
-            </a:r>
-            <a:r>
-              <a:rPr sz="1150">
-                <a:solidFill>
-                  <a:srgbClr val="1E293B"/>
-                </a:solidFill>
-                <a:latin typeface="Microsoft YaHei"/>
-              </a:rPr>
-              <a:t>、</a:t>
-            </a:r>
-            <a:r>
-              <a:rPr sz="1150" b="1">
-                <a:solidFill>
-                  <a:srgbClr val="059669"/>
-                </a:solidFill>
-                <a:latin typeface="Microsoft YaHei"/>
-              </a:rPr>
-              <a:t>推理时延抖动 &lt; 5%</a:t>
-            </a:r>
-            <a:r>
-              <a:rPr sz="1150">
-                <a:solidFill>
-                  <a:srgbClr val="1E293B"/>
-                </a:solidFill>
-                <a:latin typeface="Microsoft YaHei"/>
-              </a:rPr>
-              <a:t>；3. 验证异常时 100% 安全回滚。</a:t>
+              <a:t>；提前布局未来在途 FP8/INT4 量化与压缩双轨技术手段。</a:t>
             </a:r>
           </a:p>
           <a:p>
@@ -8421,7 +8459,7 @@
                 </a:solidFill>
                 <a:latin typeface="Microsoft YaHei"/>
               </a:rPr>
-              <a:t>消除对未成熟定制硬件的依赖，避开多卡硬件死锁风险，以纯软件机制实现生产级高可用。</a:t>
+              <a:t>确立公有云可信 VPC 纯软主路径与企业级高安全 DPU 加速路径的双轨协同体系，降低硬件强依赖风险。</a:t>
             </a:r>
           </a:p>
         </p:txBody>
@@ -8468,7 +8506,6 @@
           <a:lstStyle/>
           <a:p>
             <a:pPr algn="ctr"/>
-            <a:endParaRPr/>
           </a:p>
         </p:txBody>
       </p:sp>
@@ -8512,7 +8549,6 @@
           <a:lstStyle/>
           <a:p>
             <a:pPr algn="ctr"/>
-            <a:endParaRPr/>
           </a:p>
         </p:txBody>
       </p:sp>
@@ -8598,7 +8634,7 @@
                 </a:solidFill>
                 <a:latin typeface="Microsoft YaHei"/>
               </a:rPr>
-              <a:t>• 同步屏障设计：</a:t>
+              <a:t>• 硬件配置：</a:t>
             </a:r>
             <a:r>
               <a:rPr sz="1150">
@@ -8607,25 +8643,7 @@
                 </a:solidFill>
                 <a:latin typeface="Microsoft YaHei"/>
               </a:rPr>
-              <a:t>采用主机端 Epoch 无锁版本计数器 + NPU Stream 硬件事件双层同步机制（</a:t>
-            </a:r>
-            <a:r>
-              <a:rPr sz="1150" b="1">
-                <a:solidFill>
-                  <a:srgbClr val="1E3A8A"/>
-                </a:solidFill>
-                <a:latin typeface="Consolas"/>
-              </a:rPr>
-              <a:t>aclrtEvent</a:t>
-            </a:r>
-            <a:r>
-              <a:rPr sz="1150">
-                <a:solidFill>
-                  <a:srgbClr val="1E293B"/>
-                </a:solidFill>
-                <a:latin typeface="Microsoft YaHei"/>
-              </a:rPr>
-              <a:t>）。</a:t>
+              <a:t>可选配置企业级 800G DPU 智能网卡（集成硬件 AES-256-GCM / SM4 加密与 CRC64 引擎），对比无 DPU 标准网卡。</a:t>
             </a:r>
           </a:p>
           <a:p>
@@ -8644,7 +8662,7 @@
                 </a:solidFill>
                 <a:latin typeface="Microsoft YaHei"/>
               </a:rPr>
-              <a:t>• 无锁并发实现：</a:t>
+              <a:t>• 驱动与接口：</a:t>
             </a:r>
             <a:r>
               <a:rPr sz="1150">
@@ -8653,25 +8671,7 @@
                 </a:solidFill>
                 <a:latin typeface="Microsoft YaHei"/>
               </a:rPr>
-              <a:t>基于 C++17 </a:t>
-            </a:r>
-            <a:r>
-              <a:rPr sz="1150" b="1">
-                <a:solidFill>
-                  <a:srgbClr val="1E3A8A"/>
-                </a:solidFill>
-                <a:latin typeface="Consolas"/>
-              </a:rPr>
-              <a:t>std::atomic&lt;RCUExtentNode*&gt;</a:t>
-            </a:r>
-            <a:r>
-              <a:rPr sz="1150">
-                <a:solidFill>
-                  <a:srgbClr val="1E293B"/>
-                </a:solidFill>
-                <a:latin typeface="Microsoft YaHei"/>
-              </a:rPr>
-              <a:t> CAS 无锁指针翻转与多线程 Reader 活跃引用计数。</a:t>
+              <a:t>DPU 用户态安全驱动接口；故障检测与无缝降级切换通道。</a:t>
             </a:r>
           </a:p>
           <a:p>
@@ -8690,16 +8690,16 @@
                 </a:solidFill>
                 <a:latin typeface="Microsoft YaHei"/>
               </a:rPr>
-              <a:t>• 编译环境：</a:t>
-            </a:r>
-            <a:r>
-              <a:rPr sz="1150">
+              <a:t>• 编译链接参数：</a:t>
+            </a:r>
+            <a:r>
+              <a:rPr sz="1150" b="1">
                 <a:solidFill>
                   <a:srgbClr val="1E3A8A"/>
                 </a:solidFill>
                 <a:latin typeface="Consolas"/>
               </a:rPr>
-              <a:t>-lascendcl -lpthread -O3</a:t>
+              <a:t>-ldpu_sec -lurma -lpthread -O3</a:t>
             </a:r>
           </a:p>
         </p:txBody>
@@ -8746,7 +8746,6 @@
           <a:lstStyle/>
           <a:p>
             <a:pPr algn="ctr"/>
-            <a:endParaRPr/>
           </a:p>
         </p:txBody>
       </p:sp>
@@ -8790,7 +8789,6 @@
           <a:lstStyle/>
           <a:p>
             <a:pPr algn="ctr"/>
-            <a:endParaRPr/>
           </a:p>
         </p:txBody>
       </p:sp>
@@ -8876,7 +8874,7 @@
                 </a:solidFill>
                 <a:latin typeface="Microsoft YaHei"/>
               </a:rPr>
-              <a:t>• 高并发迁移压测 (rcu_migration_bench.cc)：</a:t>
+              <a:t>• 硬件安全卸载压测 (offload_fallback_bench.cc)：</a:t>
             </a:r>
             <a:r>
               <a:rPr sz="1150">
@@ -8885,7 +8883,7 @@
                 </a:solidFill>
                 <a:latin typeface="Microsoft YaHei"/>
               </a:rPr>
-              <a:t>在 32 线程高并发读取下，触发显存块迁移与重组，测量读取线程的停顿时间与时延抖动。</a:t>
+              <a:t>对比 Host CPU 软件 AES/CRC 软算与 DPU 硬件线速卸载的吞吐与 CPU 占用率。</a:t>
             </a:r>
           </a:p>
           <a:p>
@@ -8904,7 +8902,7 @@
                 </a:solidFill>
                 <a:latin typeface="Microsoft YaHei"/>
               </a:rPr>
-              <a:t>• 三方对比：</a:t>
+              <a:t>• 500µs 无缝降级演练 (inject_dpu_fault.py)：</a:t>
             </a:r>
             <a:r>
               <a:rPr sz="1150">
@@ -8913,7 +8911,7 @@
                 </a:solidFill>
                 <a:latin typeface="Microsoft YaHei"/>
               </a:rPr>
-              <a:t>对比“全局锁表（Stop-the-world）”、“软件 RCU 无锁迁移”与“硬件原子重映射模拟”三种方式。</a:t>
+              <a:t>在传输过程中注入 DPU 驱动挂死或控制超时故障，测量系统自动回退至 Raw Direct 裸机路径的耗时与数据完整性。</a:t>
             </a:r>
           </a:p>
           <a:p>
@@ -8932,7 +8930,7 @@
                 </a:solidFill>
                 <a:latin typeface="Microsoft YaHei"/>
               </a:rPr>
-              <a:t>• 数据一致性与回退注入：</a:t>
+              <a:t>• Fly-in-line 双轨场景扩展布局：</a:t>
             </a:r>
             <a:r>
               <a:rPr sz="1150">
@@ -8941,7 +8939,7 @@
                 </a:solidFill>
                 <a:latin typeface="Microsoft YaHei"/>
               </a:rPr>
-              <a:t>注入迁移中途异常，通过 Checksum 校验数据是否 100% 正确，验证指针原子回滚逻辑。</a:t>
+              <a:t>界定【有 DPU】走片上硬件管线 vs 【无 DPU】走 NPU 算子融合 (Fused Dequant-Attention Kernel) 的技术方案。</a:t>
             </a:r>
           </a:p>
         </p:txBody>
@@ -8988,7 +8986,6 @@
           <a:lstStyle/>
           <a:p>
             <a:pPr algn="ctr"/>
-            <a:endParaRPr/>
           </a:p>
         </p:txBody>
       </p:sp>
@@ -9032,7 +9029,6 @@
           <a:lstStyle/>
           <a:p>
             <a:pPr algn="ctr"/>
-            <a:endParaRPr/>
           </a:p>
         </p:txBody>
       </p:sp>
@@ -9127,7 +9123,7 @@
                 </a:solidFill>
                 <a:latin typeface="Microsoft YaHei"/>
               </a:rPr>
-              <a:t>《全局锁 vs 软件 RCU vs 硬件重映射停顿对比表》、《内存数据一致性校验报告》、《异常原子回滚记录》。</a:t>
+              <a:t>《DPU 硬件安全卸载性能对比表》、《500µs 故障无缝降级切换日志》、《Fly-in-line 双轨技术设计规范》。</a:t>
             </a:r>
           </a:p>
           <a:p>
@@ -9155,7 +9151,7 @@
                 </a:solidFill>
                 <a:latin typeface="Microsoft YaHei"/>
               </a:rPr>
-              <a:t>1. 读取停顿时间：</a:t>
+              <a:t>1. 硬件卸载收益：</a:t>
             </a:r>
             <a:r>
               <a:rPr sz="1150" b="1">
@@ -9164,7 +9160,7 @@
                 </a:solidFill>
                 <a:latin typeface="Microsoft YaHei"/>
               </a:rPr>
-              <a:t>软件 RCU 迁移期间，并发读取线程的停顿时间 P99 &lt; 1ms</a:t>
+              <a:t>DPU 硬件线速完成 AES/CRC 卸载，Host CPU 占用率降低 ≥ 30%</a:t>
             </a:r>
             <a:r>
               <a:rPr sz="1150">
@@ -9183,7 +9179,7 @@
                 </a:solidFill>
                 <a:latin typeface="Microsoft YaHei"/>
               </a:rPr>
-              <a:t>2. 生成时延抖动：</a:t>
+              <a:t>2. 无缝降级切换：</a:t>
             </a:r>
             <a:r>
               <a:rPr sz="1150" b="1">
@@ -9192,7 +9188,7 @@
                 </a:solidFill>
                 <a:latin typeface="Microsoft YaHei"/>
               </a:rPr>
-              <a:t>在线推理单 Token 生成时延抖动 (TPOT Jitter) &lt; 5%</a:t>
+              <a:t>DPU 故障时系统在 &lt; 500µs 内无缝降级至 Raw Direct 裸机直达路径</a:t>
             </a:r>
             <a:r>
               <a:rPr sz="1150">
@@ -9201,7 +9197,7 @@
                 </a:solidFill>
                 <a:latin typeface="Microsoft YaHei"/>
               </a:rPr>
-              <a:t>；
+              <a:t>（请求 0 失败）；
 </a:t>
             </a:r>
             <a:r>
@@ -9211,7 +9207,7 @@
                 </a:solidFill>
                 <a:latin typeface="Microsoft YaHei"/>
               </a:rPr>
-              <a:t>3. 数据一致性：</a:t>
+              <a:t>3. 主路径去依赖：</a:t>
             </a:r>
             <a:r>
               <a:rPr sz="1150" b="1">
@@ -9220,35 +9216,7 @@
                 </a:solidFill>
                 <a:latin typeface="Microsoft YaHei"/>
               </a:rPr>
-              <a:t>Checksum 校验 100% 正确，异常注入下 100% 安全回滚</a:t>
-            </a:r>
-            <a:r>
-              <a:rPr sz="1150">
-                <a:solidFill>
-                  <a:srgbClr val="1E293B"/>
-                </a:solidFill>
-                <a:latin typeface="Microsoft YaHei"/>
-              </a:rPr>
-              <a:t>；
-</a:t>
-            </a:r>
-            <a:r>
-              <a:rPr sz="1150" b="1">
-                <a:solidFill>
-                  <a:srgbClr val="1E293B"/>
-                </a:solidFill>
-                <a:latin typeface="Microsoft YaHei"/>
-              </a:rPr>
-              <a:t>4. 结论输出：</a:t>
-            </a:r>
-            <a:r>
-              <a:rPr sz="1150" b="1">
-                <a:solidFill>
-                  <a:srgbClr val="059669"/>
-                </a:solidFill>
-                <a:latin typeface="Microsoft YaHei"/>
-              </a:rPr>
-              <a:t>证明软件 RCU 完全满足生产要求，无需依赖底层硬件原子重映射</a:t>
+              <a:t>无 DPU 时 Raw Direct 纯软主路径完全独立成立</a:t>
             </a:r>
             <a:r>
               <a:rPr sz="1150">
@@ -9304,7 +9272,6 @@
           <a:lstStyle/>
           <a:p>
             <a:pPr algn="ctr"/>
-            <a:endParaRPr/>
           </a:p>
         </p:txBody>
       </p:sp>
@@ -9348,7 +9315,6 @@
           <a:lstStyle/>
           <a:p>
             <a:pPr algn="ctr"/>
-            <a:endParaRPr/>
           </a:p>
         </p:txBody>
       </p:sp>
@@ -9395,7 +9361,7 @@
                 </a:solidFill>
                 <a:latin typeface="Microsoft YaHei"/>
               </a:rPr>
-              <a:t>CVT-02 硬件重映射必要性证伪与软件 RCU：</a:t>
+              <a:t>PVT-09 DPU 硬件安全与双轨协同：</a:t>
             </a:r>
             <a:r>
               <a:rPr sz="1150" b="1">
@@ -9404,7 +9370,7 @@
                 </a:solidFill>
                 <a:latin typeface="Microsoft YaHei"/>
               </a:rPr>
-              <a:t>实测证明软件 RCU 机制实现迁移停顿 </a:t>
+              <a:t>DPU 硬件线速卸载降低 CPU 占用 </a:t>
             </a:r>
             <a:r>
               <a:rPr sz="1150" b="1">
@@ -9413,7 +9379,7 @@
                 </a:solidFill>
                 <a:latin typeface="Microsoft YaHei"/>
               </a:rPr>
-              <a:t>P99 &lt; 1ms</a:t>
+              <a:t>≥30%</a:t>
             </a:r>
             <a:r>
               <a:rPr sz="1150" b="1">
@@ -9422,16 +9388,16 @@
                 </a:solidFill>
                 <a:latin typeface="Microsoft YaHei"/>
               </a:rPr>
-              <a:t> 与生成时延抖动 </a:t>
-            </a:r>
-            <a:r>
-              <a:rPr sz="1150" b="1">
-                <a:solidFill>
-                  <a:srgbClr val="059669"/>
-                </a:solidFill>
-                <a:latin typeface="Microsoft YaHei"/>
-              </a:rPr>
-              <a:t>Jitter &lt; 5%</a:t>
+              <a:t>，故障时在 </a:t>
+            </a:r>
+            <a:r>
+              <a:rPr sz="1150" b="1">
+                <a:solidFill>
+                  <a:srgbClr val="DC2626"/>
+                </a:solidFill>
+                <a:latin typeface="Microsoft YaHei"/>
+              </a:rPr>
+              <a:t>&lt;500µs</a:t>
             </a:r>
             <a:r>
               <a:rPr sz="1150" b="1">
@@ -9440,7 +9406,7 @@
                 </a:solidFill>
                 <a:latin typeface="Microsoft YaHei"/>
               </a:rPr>
-              <a:t>，避开硬件定制与死锁风险，纯软件方案完全可用。</a:t>
+              <a:t> 内无缝降级至纯软 Raw Direct 主路径，确立企业级安全与去依赖双轨架构。</a:t>
             </a:r>
           </a:p>
         </p:txBody>
@@ -9454,7 +9420,7 @@
 </file>
 
 <file path=ppt/slides/slide13.xml><?xml version="1.0" encoding="utf-8"?>
-<p:sld xmlns:a="http://schemas.openxmlformats.org/drawingml/2006/main" xmlns:r="http://schemas.openxmlformats.org/officeDocument/2006/relationships" xmlns:p="http://schemas.openxmlformats.org/presentationml/2006/main">
+<p:sld xmlns:a="http://schemas.openxmlformats.org/drawingml/2006/main" xmlns:p="http://schemas.openxmlformats.org/presentationml/2006/main" xmlns:r="http://schemas.openxmlformats.org/officeDocument/2006/relationships">
   <p:cSld>
     <p:bg>
       <p:bgPr>
@@ -9470,14 +9436,7 @@
         <p:cNvGrpSpPr/>
         <p:nvPr/>
       </p:nvGrpSpPr>
-      <p:grpSpPr>
-        <a:xfrm>
-          <a:off x="0" y="0"/>
-          <a:ext cx="0" cy="0"/>
-          <a:chOff x="0" y="0"/>
-          <a:chExt cx="0" cy="0"/>
-        </a:xfrm>
-      </p:grpSpPr>
+      <p:grpSpPr/>
       <p:sp>
         <p:nvSpPr>
           <p:cNvPr id="2" name="TextBox 1"/>
@@ -9509,7 +9468,7 @@
               </a:defRPr>
             </a:pPr>
             <a:r>
-              <a:t>CVT-03：DPU/硬件压缩卸载必要性与软件裸直达回退验证</a:t>
+              <a:t>CVT-01：PageMigration 软件 RCU 机制 vs 硬件 AtomicRemap 必要性证伪</a:t>
             </a:r>
           </a:p>
           <a:p>
@@ -9525,7 +9484,7 @@
               </a:defRPr>
             </a:pPr>
             <a:r>
-              <a:t>验证专用 DPU 是否为必需：纯软件裸直达达到&gt;=80%线速且CPU&lt;1%，DPU故障时&lt;1ms无缝切换</a:t>
+              <a:t>验证显存碎片整理与页迁移时，软件 RCU (无锁读+宽限期释放) 是否已满足读停顿 &lt; 1ms，免除专有硬件芯片依赖</a:t>
             </a:r>
           </a:p>
         </p:txBody>
@@ -9608,7 +9567,6 @@
           <a:lstStyle/>
           <a:p>
             <a:pPr algn="ctr"/>
-            <a:endParaRPr/>
           </a:p>
         </p:txBody>
       </p:sp>
@@ -9652,7 +9610,6 @@
           <a:lstStyle/>
           <a:p>
             <a:pPr algn="ctr"/>
-            <a:endParaRPr/>
           </a:p>
         </p:txBody>
       </p:sp>
@@ -9696,7 +9653,7 @@
                 </a:solidFill>
                 <a:latin typeface="Microsoft YaHei"/>
               </a:rPr>
-              <a:t>  [技术可行性证伪]</a:t>
+              <a:t>  [P2 级 | 条件证伪项]</a:t>
             </a:r>
           </a:p>
         </p:txBody>
@@ -9709,8 +9666,8 @@
         </p:nvSpPr>
         <p:spPr>
           <a:xfrm>
-            <a:off x="566928" y="1435608"/>
-            <a:ext cx="5276088" cy="1705082"/>
+            <a:off x="585216" y="1417320"/>
+            <a:ext cx="5276088" cy="1819656"/>
           </a:xfrm>
           <a:prstGeom prst="rect">
             <a:avLst/>
@@ -9732,7 +9689,7 @@
               </a:spcAft>
             </a:pPr>
             <a:r>
-              <a:rPr sz="1200" b="1">
+              <a:rPr sz="1150" b="1">
                 <a:solidFill>
                   <a:srgbClr val="1E3A8A"/>
                 </a:solidFill>
@@ -9741,13 +9698,13 @@
               <a:t>• 验证背景：</a:t>
             </a:r>
             <a:r>
-              <a:rPr sz="1200">
-                <a:solidFill>
-                  <a:srgbClr val="1E293B"/>
-                </a:solidFill>
-                <a:latin typeface="Microsoft YaHei"/>
-              </a:rPr>
-              <a:t>业界常假设“必须依赖 DPU 专用芯片才能跑满高速网络”，引入了单点故障；若盲目使用 CPU 软件压缩会导致 CPU 100% 打满、时延翻倍。</a:t>
+              <a:rPr sz="1150">
+                <a:solidFill>
+                  <a:srgbClr val="1E293B"/>
+                </a:solidFill>
+                <a:latin typeface="Microsoft YaHei"/>
+              </a:rPr>
+              <a:t>长时间推理会导致显存严重碎片化。业界部分方案探索依赖专有硬件 Atomic Remap 芯片原语来搬移显存页，增加了外部芯片依赖与硬件成本。</a:t>
             </a:r>
           </a:p>
           <a:p>
@@ -9760,7 +9717,7 @@
               </a:spcAft>
             </a:pPr>
             <a:r>
-              <a:rPr sz="1200" b="1">
+              <a:rPr sz="1150" b="1">
                 <a:solidFill>
                   <a:srgbClr val="1E3A8A"/>
                 </a:solidFill>
@@ -9769,49 +9726,31 @@
               <a:t>• 验证目的：</a:t>
             </a:r>
             <a:r>
-              <a:rPr sz="1200">
-                <a:solidFill>
-                  <a:srgbClr val="1E293B"/>
-                </a:solidFill>
-                <a:latin typeface="Microsoft YaHei"/>
-              </a:rPr>
-              <a:t>1. 证明基于纯 UBMEM/URMA 的</a:t>
-            </a:r>
-            <a:r>
-              <a:rPr sz="1200" b="1">
-                <a:solidFill>
-                  <a:srgbClr val="2563EB"/>
-                </a:solidFill>
-                <a:latin typeface="Microsoft YaHei"/>
-              </a:rPr>
-              <a:t>“裸直达主路径”独立成立且 CPU 占用率 &lt; 1%</a:t>
-            </a:r>
-            <a:r>
-              <a:rPr sz="1200">
-                <a:solidFill>
-                  <a:srgbClr val="1E293B"/>
-                </a:solidFill>
-                <a:latin typeface="Microsoft YaHei"/>
-              </a:rPr>
-              <a:t>；2. 验证 DPU 故障时可在 </a:t>
-            </a:r>
-            <a:r>
-              <a:rPr sz="1200" b="1">
-                <a:solidFill>
-                  <a:srgbClr val="059669"/>
-                </a:solidFill>
-                <a:latin typeface="Microsoft YaHei"/>
-              </a:rPr>
-              <a:t>&lt; 1ms 内无缝回退到裸直达</a:t>
-            </a:r>
-            <a:r>
-              <a:rPr sz="1200">
-                <a:solidFill>
-                  <a:srgbClr val="1E293B"/>
-                </a:solidFill>
-                <a:latin typeface="Microsoft YaHei"/>
-              </a:rPr>
-              <a:t>；3. 证伪 CPU 软件压缩负收益。</a:t>
+              <a:rPr sz="1150">
+                <a:solidFill>
+                  <a:srgbClr val="1E293B"/>
+                </a:solidFill>
+                <a:latin typeface="Microsoft YaHei"/>
+              </a:rPr>
+              <a:t>验证基于软件 RCU（Read-Copy-Update，读-拷贝-更新：无锁读与宽限期延迟释放机制）能否实现动态页迁移时 </a:t>
+            </a:r>
+            <a:r>
+              <a:rPr sz="1150" b="1">
+                <a:solidFill>
+                  <a:srgbClr val="DC2626"/>
+                </a:solidFill>
+                <a:latin typeface="Microsoft YaHei"/>
+              </a:rPr>
+              <a:t>前台在线推理读停顿 &lt; 1ms、TPOT 抖动 &lt; 3%</a:t>
+            </a:r>
+            <a:r>
+              <a:rPr sz="1150">
+                <a:solidFill>
+                  <a:srgbClr val="1E293B"/>
+                </a:solidFill>
+                <a:latin typeface="Microsoft YaHei"/>
+              </a:rPr>
+              <a:t>，从而证伪硬件芯片的“必需性”。</a:t>
             </a:r>
           </a:p>
           <a:p>
@@ -9824,7 +9763,7 @@
               </a:spcAft>
             </a:pPr>
             <a:r>
-              <a:rPr sz="1200" b="1">
+              <a:rPr sz="1150" b="1">
                 <a:solidFill>
                   <a:srgbClr val="1E3A8A"/>
                 </a:solidFill>
@@ -9833,13 +9772,13 @@
               <a:t>• 对整体项目的支撑：</a:t>
             </a:r>
             <a:r>
-              <a:rPr sz="1200">
-                <a:solidFill>
-                  <a:srgbClr val="1E293B"/>
-                </a:solidFill>
-                <a:latin typeface="Microsoft YaHei"/>
-              </a:rPr>
-              <a:t>确立零专用硬件依赖主干方案，明确禁用 CPU 软件压缩，保障系统高可靠与高可移植性。</a:t>
+              <a:rPr sz="1150">
+                <a:solidFill>
+                  <a:srgbClr val="1E293B"/>
+                </a:solidFill>
+                <a:latin typeface="Microsoft YaHei"/>
+              </a:rPr>
+              <a:t>通过严密的软硬件对比证伪，确立纯软件显存整理方案，简化系统架构，降低硬件强依赖风险。</a:t>
             </a:r>
           </a:p>
         </p:txBody>
@@ -9886,7 +9825,6 @@
           <a:lstStyle/>
           <a:p>
             <a:pPr algn="ctr"/>
-            <a:endParaRPr/>
           </a:p>
         </p:txBody>
       </p:sp>
@@ -9930,7 +9868,6 @@
           <a:lstStyle/>
           <a:p>
             <a:pPr algn="ctr"/>
-            <a:endParaRPr/>
           </a:p>
         </p:txBody>
       </p:sp>
@@ -10016,7 +9953,7 @@
                 </a:solidFill>
                 <a:latin typeface="Microsoft YaHei"/>
               </a:rPr>
-              <a:t>• 通道配置：</a:t>
+              <a:t>• 内存协议：</a:t>
             </a:r>
             <a:r>
               <a:rPr sz="1150">
@@ -10025,7 +9962,7 @@
                 </a:solidFill>
                 <a:latin typeface="Microsoft YaHei"/>
               </a:rPr>
-              <a:t>DPU 硬件加速通道 vs 纯 UBMEM/URMA 软件裸直达通道。</a:t>
+              <a:t>POSIX 共享内存与无锁原子指针交换，CANN 8.0 显存管理运行时。</a:t>
             </a:r>
           </a:p>
           <a:p>
@@ -10044,7 +9981,7 @@
                 </a:solidFill>
                 <a:latin typeface="Microsoft YaHei"/>
               </a:rPr>
-              <a:t>• 故障检测与熔断：</a:t>
+              <a:t>• RCU 引擎：</a:t>
             </a:r>
             <a:r>
               <a:rPr sz="1150">
@@ -10053,7 +9990,7 @@
                 </a:solidFill>
                 <a:latin typeface="Microsoft YaHei"/>
               </a:rPr>
-              <a:t>配置 500µs 硬件看门狗心跳检测与微秒级熔断状态机，异步告警上报。</a:t>
+              <a:t>实现引用计数追踪与 Grace Period 宽限期延迟回收（RCU Epoch 状态机）。</a:t>
             </a:r>
           </a:p>
           <a:p>
@@ -10072,34 +10009,16 @@
                 </a:solidFill>
                 <a:latin typeface="Microsoft YaHei"/>
               </a:rPr>
-              <a:t>• 运行环境：</a:t>
-            </a:r>
-            <a:r>
-              <a:rPr sz="1150">
-                <a:solidFill>
-                  <a:srgbClr val="1E293B"/>
-                </a:solidFill>
-                <a:latin typeface="Microsoft YaHei"/>
-              </a:rPr>
-              <a:t>Linux 6.6+，链接 </a:t>
-            </a:r>
-            <a:r>
-              <a:rPr sz="1150">
+              <a:t>• 编译参数：</a:t>
+            </a:r>
+            <a:r>
+              <a:rPr sz="1150" b="1">
                 <a:solidFill>
                   <a:srgbClr val="1E3A8A"/>
                 </a:solidFill>
                 <a:latin typeface="Consolas"/>
               </a:rPr>
-              <a:t>-lurma -lubmem -lpthread -O3</a:t>
-            </a:r>
-            <a:r>
-              <a:rPr sz="1150">
-                <a:solidFill>
-                  <a:srgbClr val="1E293B"/>
-                </a:solidFill>
-                <a:latin typeface="Microsoft YaHei"/>
-              </a:rPr>
-              <a:t>。</a:t>
+              <a:t>g++ -O3 -std=c++17 -Wall rcu_migration_bench.cc -lpthread</a:t>
             </a:r>
           </a:p>
         </p:txBody>
@@ -10146,7 +10065,6 @@
           <a:lstStyle/>
           <a:p>
             <a:pPr algn="ctr"/>
-            <a:endParaRPr/>
           </a:p>
         </p:txBody>
       </p:sp>
@@ -10190,7 +10108,6 @@
           <a:lstStyle/>
           <a:p>
             <a:pPr algn="ctr"/>
-            <a:endParaRPr/>
           </a:p>
         </p:txBody>
       </p:sp>
@@ -10276,7 +10193,7 @@
                 </a:solidFill>
                 <a:latin typeface="Microsoft YaHei"/>
               </a:rPr>
-              <a:t>• 三方性能对比 (offload_fallback_bench.cc)：</a:t>
+              <a:t>• 并发读写压测 (rcu_migration_bench.cc)：</a:t>
             </a:r>
             <a:r>
               <a:rPr sz="1150">
@@ -10285,7 +10202,7 @@
                 </a:solidFill>
                 <a:latin typeface="Microsoft YaHei"/>
               </a:rPr>
-              <a:t>对比“纯软件裸直达”、“DPU 硬件卸载”与“CPU zstd 软件压缩”三者的有效传输带宽与 Host CPU 占用率。</a:t>
+              <a:t>在 1~32 个 Reader 线程持续高频读取 KV 时，后台触发 4MB~64MB 显存页动态迁移与碎片整理。</a:t>
             </a:r>
           </a:p>
           <a:p>
@@ -10304,7 +10221,7 @@
                 </a:solidFill>
                 <a:latin typeface="Microsoft YaHei"/>
               </a:rPr>
-              <a:t>• 故障注入测试 (inject_fault.py)：</a:t>
+              <a:t>• 停顿与抖动捕获：</a:t>
             </a:r>
             <a:r>
               <a:rPr sz="1150">
@@ -10313,7 +10230,7 @@
                 </a:solidFill>
                 <a:latin typeface="Microsoft YaHei"/>
               </a:rPr>
-              <a:t>模拟 DPU 驱动挂死、硬件超时与通信中断，采集故障检测与通道切换耗时。</a:t>
+              <a:t>高频采样记录 Reader 的停顿时间（Pause Time P99）与 TPOT 抖动率。</a:t>
             </a:r>
           </a:p>
           <a:p>
@@ -10332,7 +10249,7 @@
                 </a:solidFill>
                 <a:latin typeface="Microsoft YaHei"/>
               </a:rPr>
-              <a:t>• 数据完整性对账：</a:t>
+              <a:t>• 异常与回滚演练：</a:t>
             </a:r>
             <a:r>
               <a:rPr sz="1150">
@@ -10341,7 +10258,7 @@
                 </a:solidFill>
                 <a:latin typeface="Microsoft YaHei"/>
               </a:rPr>
-              <a:t>统计从触发看门狗到裸直达完全接管的过渡耗时与数据完整性校验。</a:t>
+              <a:t>在迁移过程中注入进程崩溃与写中断，验证旧版本数据依然有效且 100% 可安全回滚。</a:t>
             </a:r>
           </a:p>
         </p:txBody>
@@ -10388,7 +10305,6 @@
           <a:lstStyle/>
           <a:p>
             <a:pPr algn="ctr"/>
-            <a:endParaRPr/>
           </a:p>
         </p:txBody>
       </p:sp>
@@ -10432,7 +10348,6 @@
           <a:lstStyle/>
           <a:p>
             <a:pPr algn="ctr"/>
-            <a:endParaRPr/>
           </a:p>
         </p:txBody>
       </p:sp>
@@ -10527,7 +10442,7 @@
                 </a:solidFill>
                 <a:latin typeface="Microsoft YaHei"/>
               </a:rPr>
-              <a:t>《裸直达 vs DPU vs CPU 软件压缩性能对比表》、《DPU 故障注入与快速回退记录》、《方案选型证伪结论》。</a:t>
+              <a:t>《软件 RCU 与锁表停顿对比表》、《32 并发 Reader 时延抖动曲线》、《硬件 AtomicRemap 证伪分析报告》。</a:t>
             </a:r>
           </a:p>
           <a:p>
@@ -10555,7 +10470,7 @@
                 </a:solidFill>
                 <a:latin typeface="Microsoft YaHei"/>
               </a:rPr>
-              <a:t>1. 裸直达独立达标：</a:t>
+              <a:t>1. 读停顿极小：</a:t>
             </a:r>
             <a:r>
               <a:rPr sz="1150" b="1">
@@ -10564,7 +10479,7 @@
                 </a:solidFill>
                 <a:latin typeface="Microsoft YaHei"/>
               </a:rPr>
-              <a:t>纯软件裸直达有效带宽达到网络线速 ≥ 80%，Host CPU 占用率 &lt; 1%</a:t>
+              <a:t>在 32 并发 Reader 下，软件 RCU 读停顿时间 P99 &lt; 1ms</a:t>
             </a:r>
             <a:r>
               <a:rPr sz="1150">
@@ -10583,7 +10498,7 @@
                 </a:solidFill>
                 <a:latin typeface="Microsoft YaHei"/>
               </a:rPr>
-              <a:t>2. 无缝切换时延：</a:t>
+              <a:t>2. 前台无感抖动：</a:t>
             </a:r>
             <a:r>
               <a:rPr sz="1150" b="1">
@@ -10592,7 +10507,7 @@
                 </a:solidFill>
                 <a:latin typeface="Microsoft YaHei"/>
               </a:rPr>
-              <a:t>DPU 发生故障时，系统在 &lt; 1ms 内无缝切换至裸直达通路（业务不中断）</a:t>
+              <a:t>动态迁移期间前台在线推理 TPOT 抖动率 &lt; 3%</a:t>
             </a:r>
             <a:r>
               <a:rPr sz="1150">
@@ -10611,7 +10526,7 @@
                 </a:solidFill>
                 <a:latin typeface="Microsoft YaHei"/>
               </a:rPr>
-              <a:t>3. 软件压缩证伪：</a:t>
+              <a:t>3. 证伪硬件芯片依赖：</a:t>
             </a:r>
             <a:r>
               <a:rPr sz="1150" b="1">
@@ -10620,7 +10535,7 @@
                 </a:solidFill>
                 <a:latin typeface="Microsoft YaHei"/>
               </a:rPr>
-              <a:t>实验明确证实 CPU 软件压缩会导致 CPU 100% 占满且时延恶化 200% 以上，列为禁用路径</a:t>
+              <a:t>软件 RCU 机制完全满足生产要求，正式架构免除专有硬件 AtomicRemap 依赖</a:t>
             </a:r>
             <a:r>
               <a:rPr sz="1150">
@@ -10676,7 +10591,6 @@
           <a:lstStyle/>
           <a:p>
             <a:pPr algn="ctr"/>
-            <a:endParaRPr/>
           </a:p>
         </p:txBody>
       </p:sp>
@@ -10720,7 +10634,6 @@
           <a:lstStyle/>
           <a:p>
             <a:pPr algn="ctr"/>
-            <a:endParaRPr/>
           </a:p>
         </p:txBody>
       </p:sp>
@@ -10767,7 +10680,7 @@
                 </a:solidFill>
                 <a:latin typeface="Microsoft YaHei"/>
               </a:rPr>
-              <a:t>CVT-03 DPU 卸载必要性证伪与裸直达回退：</a:t>
+              <a:t>CVT-01 软件 RCU 显存整理证伪：</a:t>
             </a:r>
             <a:r>
               <a:rPr sz="1150" b="1">
@@ -10776,7 +10689,7 @@
                 </a:solidFill>
                 <a:latin typeface="Microsoft YaHei"/>
               </a:rPr>
-              <a:t>实测证明纯软件裸直达独立达成 </a:t>
+              <a:t>软件 RCU 在 32 并发 Reader 下读停顿 </a:t>
             </a:r>
             <a:r>
               <a:rPr sz="1150" b="1">
@@ -10785,7 +10698,7 @@
                 </a:solidFill>
                 <a:latin typeface="Microsoft YaHei"/>
               </a:rPr>
-              <a:t>≥80% 线速与 &lt;1% CPU 占用</a:t>
+              <a:t>P99 &lt; 1ms</a:t>
             </a:r>
             <a:r>
               <a:rPr sz="1150" b="1">
@@ -10794,16 +10707,16 @@
                 </a:solidFill>
                 <a:latin typeface="Microsoft YaHei"/>
               </a:rPr>
-              <a:t>，DPU 故障下实现 </a:t>
-            </a:r>
-            <a:r>
-              <a:rPr sz="1150" b="1">
-                <a:solidFill>
-                  <a:srgbClr val="059669"/>
-                </a:solidFill>
-                <a:latin typeface="Microsoft YaHei"/>
-              </a:rPr>
-              <a:t>&lt; 1ms 无缝切换</a:t>
+              <a:t>，TPOT 抖动 </a:t>
+            </a:r>
+            <a:r>
+              <a:rPr sz="1150" b="1">
+                <a:solidFill>
+                  <a:srgbClr val="DC2626"/>
+                </a:solidFill>
+                <a:latin typeface="Microsoft YaHei"/>
+              </a:rPr>
+              <a:t>&lt;3%</a:t>
             </a:r>
             <a:r>
               <a:rPr sz="1150" b="1">
@@ -10812,7 +10725,7 @@
                 </a:solidFill>
                 <a:latin typeface="Microsoft YaHei"/>
               </a:rPr>
-              <a:t>，明确排除 CPU 软件压缩负收益路径。</a:t>
+              <a:t>，成功证伪专有硬件 AtomicRemap 芯片依赖，确立纯软件高效显存整理架构。</a:t>
             </a:r>
           </a:p>
         </p:txBody>
@@ -10826,7 +10739,7 @@
 </file>
 
 <file path=ppt/slides/slide14.xml><?xml version="1.0" encoding="utf-8"?>
-<p:sld xmlns:a="http://schemas.openxmlformats.org/drawingml/2006/main" xmlns:r="http://schemas.openxmlformats.org/officeDocument/2006/relationships" xmlns:p="http://schemas.openxmlformats.org/presentationml/2006/main">
+<p:sld xmlns:a="http://schemas.openxmlformats.org/drawingml/2006/main" xmlns:p="http://schemas.openxmlformats.org/presentationml/2006/main" xmlns:r="http://schemas.openxmlformats.org/officeDocument/2006/relationships">
   <p:cSld>
     <p:bg>
       <p:bgPr>
@@ -10842,14 +10755,7 @@
         <p:cNvGrpSpPr/>
         <p:nvPr/>
       </p:nvGrpSpPr>
-      <p:grpSpPr>
-        <a:xfrm>
-          <a:off x="0" y="0"/>
-          <a:ext cx="0" cy="0"/>
-          <a:chOff x="0" y="0"/>
-          <a:chExt cx="0" cy="0"/>
-        </a:xfrm>
-      </p:grpSpPr>
+      <p:grpSpPr/>
       <p:sp>
         <p:nvSpPr>
           <p:cNvPr id="2" name="TextBox 1"/>
@@ -10897,7 +10803,7 @@
               </a:defRPr>
             </a:pPr>
             <a:r>
-              <a:t>以客观的实测数据为依据 · 摸清技术边界 · 保障后续系统顺利落地</a:t>
+              <a:t>基于开源底座深度重构 · 以客观实测数据为依据 · 摸清技术边界 · 保障系统落地</a:t>
             </a:r>
           </a:p>
         </p:txBody>
@@ -10944,7 +10850,6 @@
           <a:lstStyle/>
           <a:p>
             <a:pPr algn="ctr"/>
-            <a:endParaRPr/>
           </a:p>
         </p:txBody>
       </p:sp>
@@ -10988,7 +10893,6 @@
           <a:lstStyle/>
           <a:p>
             <a:pPr algn="ctr"/>
-            <a:endParaRPr/>
           </a:p>
         </p:txBody>
       </p:sp>
@@ -11023,7 +10927,7 @@
               </a:defRPr>
             </a:pPr>
             <a:r>
-              <a:t>原则一：实测数据驱动</a:t>
+              <a:t>原则一：开源基线实测驱动</a:t>
             </a:r>
             <a:r>
               <a:rPr sz="1000" b="1">
@@ -11074,7 +10978,7 @@
                 </a:solidFill>
                 <a:latin typeface="Microsoft YaHei"/>
               </a:rPr>
-              <a:t>• 拒绝空想假设：</a:t>
+              <a:t>• 拒绝纸面空想：</a:t>
             </a:r>
             <a:r>
               <a:rPr sz="1150">
@@ -11083,7 +10987,7 @@
                 </a:solidFill>
                 <a:latin typeface="Microsoft YaHei"/>
               </a:rPr>
-              <a:t>所有技术结论必须基于受控环境下的 Benchmark 实测数据与打点日志。</a:t>
+              <a:t>所有技术结论必须基于 2 节点集群、vLLM benchmark_serving 在线打流实测数据与打点日志。</a:t>
             </a:r>
           </a:p>
           <a:p>
@@ -11111,7 +11015,7 @@
                 </a:solidFill>
                 <a:latin typeface="Microsoft YaHei"/>
               </a:rPr>
-              <a:t>详细记录每次测试的输入规模、硬件配置、时延与带宽原始数据。</a:t>
+              <a:t>详细记录每次测试的输入规模、硬件配置、时延与带宽原始 CSV 数据。</a:t>
             </a:r>
           </a:p>
           <a:p>
@@ -11130,7 +11034,7 @@
                 </a:solidFill>
                 <a:latin typeface="Microsoft YaHei"/>
               </a:rPr>
-              <a:t>• 理论与实测对账：</a:t>
+              <a:t>• 三重消融交叉对账：</a:t>
             </a:r>
             <a:r>
               <a:rPr sz="1150">
@@ -11186,7 +11090,6 @@
           <a:lstStyle/>
           <a:p>
             <a:pPr algn="ctr"/>
-            <a:endParaRPr/>
           </a:p>
         </p:txBody>
       </p:sp>
@@ -11230,7 +11133,6 @@
           <a:lstStyle/>
           <a:p>
             <a:pPr algn="ctr"/>
-            <a:endParaRPr/>
           </a:p>
         </p:txBody>
       </p:sp>
@@ -11325,7 +11227,7 @@
                 </a:solidFill>
                 <a:latin typeface="Microsoft YaHei"/>
               </a:rPr>
-              <a:t>借助 UBMEM 内存总线与 URMA 硬件队列，突破传统 TCP 与内核拷贝瓶颈。</a:t>
+              <a:t>借助 UBMEM 总线、URMA DMA 与 io_uring FIXED I/O 裸盘直达，消除 Host CPU 拷贝瓶颈。</a:t>
             </a:r>
           </a:p>
           <a:p>
@@ -11353,7 +11255,7 @@
                 </a:solidFill>
                 <a:latin typeface="Microsoft YaHei"/>
               </a:rPr>
-              <a:t>证实软件树状转发、软件 RCU 与纯软件直达的可用性，降低系统复杂度。</a:t>
+              <a:t>证实软件树状中继组播、软件 RCU 与纯软 Raw Direct 的可用性，降低系统外部依赖风险。</a:t>
             </a:r>
           </a:p>
           <a:p>
@@ -11372,7 +11274,7 @@
                 </a:solidFill>
                 <a:latin typeface="Microsoft YaHei"/>
               </a:rPr>
-              <a:t>• 坚守系统稳定性：</a:t>
+              <a:t>• 坚守生产级稳定性：</a:t>
             </a:r>
             <a:r>
               <a:rPr sz="1150">
@@ -11381,7 +11283,7 @@
                 </a:solidFill>
                 <a:latin typeface="Microsoft YaHei"/>
               </a:rPr>
-              <a:t>异常保护与 6 维语义校验机制确保系统在各类异常下平稳运行、不发生死锁与崩溃。</a:t>
+              <a:t>ViewGuard 异常保护与 6 维语义校验机制确保系统在各类异常下平稳运行、不发生死锁。</a:t>
             </a:r>
           </a:p>
         </p:txBody>
@@ -11428,7 +11330,6 @@
           <a:lstStyle/>
           <a:p>
             <a:pPr algn="ctr"/>
-            <a:endParaRPr/>
           </a:p>
         </p:txBody>
       </p:sp>
@@ -11472,7 +11373,6 @@
           <a:lstStyle/>
           <a:p>
             <a:pPr algn="ctr"/>
-            <a:endParaRPr/>
           </a:p>
         </p:txBody>
       </p:sp>
@@ -11567,7 +11467,7 @@
                 </a:solidFill>
                 <a:latin typeface="Microsoft YaHei"/>
               </a:rPr>
-              <a:t>首 Token 响应时延降低 ≥20%、系统吞吐提升 ≥10%、前台抖动 &lt;3% 等关键指标必须达标。</a:t>
+              <a:t>全链路 P99 TTFT 降低 ≥20%、系统吞吐提升 ≥10%、前台抖动 &lt;3% 等关键指标必须达标。</a:t>
             </a:r>
           </a:p>
           <a:p>
@@ -11595,7 +11495,7 @@
                 </a:solidFill>
                 <a:latin typeface="Microsoft YaHei"/>
               </a:rPr>
-              <a:t>形成包含测试代码、环境配置、实测数据与分析结论的完整技术文档。</a:t>
+              <a:t>形成包含测试源码、环境配置、实测数据与分析结论的完整立项技术证据包。</a:t>
             </a:r>
           </a:p>
         </p:txBody>
@@ -11642,7 +11542,6 @@
           <a:lstStyle/>
           <a:p>
             <a:pPr algn="ctr"/>
-            <a:endParaRPr/>
           </a:p>
         </p:txBody>
       </p:sp>
@@ -11686,7 +11585,6 @@
           <a:lstStyle/>
           <a:p>
             <a:pPr algn="ctr"/>
-            <a:endParaRPr/>
           </a:p>
         </p:txBody>
       </p:sp>
@@ -11729,7 +11627,7 @@
                 </a:solidFill>
                 <a:latin typeface="Microsoft YaHei"/>
               </a:rPr>
-              <a:t>提前验证方案设计已就绪，接下来将按计划开展各个验证项的测试与数据采集工作。</a:t>
+              <a:t>提前验证方案设计与部署打流套件已就绪，接下来将全面开展 10 PVT + 1 CVT 真实打流对账工作。</a:t>
             </a:r>
           </a:p>
         </p:txBody>
@@ -11743,7 +11641,7 @@
 </file>
 
 <file path=ppt/slides/slide2.xml><?xml version="1.0" encoding="utf-8"?>
-<p:sld xmlns:a="http://schemas.openxmlformats.org/drawingml/2006/main" xmlns:r="http://schemas.openxmlformats.org/officeDocument/2006/relationships" xmlns:p="http://schemas.openxmlformats.org/presentationml/2006/main">
+<p:sld xmlns:a="http://schemas.openxmlformats.org/drawingml/2006/main" xmlns:p="http://schemas.openxmlformats.org/presentationml/2006/main" xmlns:r="http://schemas.openxmlformats.org/officeDocument/2006/relationships">
   <p:cSld>
     <p:bg>
       <p:bgPr>
@@ -11759,14 +11657,7 @@
         <p:cNvGrpSpPr/>
         <p:nvPr/>
       </p:nvGrpSpPr>
-      <p:grpSpPr>
-        <a:xfrm>
-          <a:off x="0" y="0"/>
-          <a:ext cx="0" cy="0"/>
-          <a:chOff x="0" y="0"/>
-          <a:chExt cx="0" cy="0"/>
-        </a:xfrm>
-      </p:grpSpPr>
+      <p:grpSpPr/>
       <p:sp>
         <p:nvSpPr>
           <p:cNvPr id="2" name="TextBox 1"/>
@@ -11798,7 +11689,7 @@
               </a:defRPr>
             </a:pPr>
             <a:r>
-              <a:t>提前验证总体目标、技术方案分层与验证准则</a:t>
+              <a:t>提前验证总体目标、10 PVT + 1 CVT 体系与验证准则</a:t>
             </a:r>
           </a:p>
           <a:p>
@@ -11814,7 +11705,7 @@
               </a:defRPr>
             </a:pPr>
             <a:r>
-              <a:t>从单机算法原型、底层驱动调优到两节点集群端到端串联测试</a:t>
+              <a:t>从单机算法原型、底层驱动调优到两节点集群端到端在线打流混压测试</a:t>
             </a:r>
           </a:p>
         </p:txBody>
@@ -11897,7 +11788,6 @@
           <a:lstStyle/>
           <a:p>
             <a:pPr algn="ctr"/>
-            <a:endParaRPr/>
           </a:p>
         </p:txBody>
       </p:sp>
@@ -11941,7 +11831,6 @@
           <a:lstStyle/>
           <a:p>
             <a:pPr algn="ctr"/>
-            <a:endParaRPr/>
           </a:p>
         </p:txBody>
       </p:sp>
@@ -11976,7 +11865,7 @@
               </a:defRPr>
             </a:pPr>
             <a:r>
-              <a:t>1. 四个核心验证阶段与目标 (E0~E3)</a:t>
+              <a:t>1. 四个核心验证阶段与优先级全景 (E0~E3)</a:t>
             </a:r>
             <a:r>
               <a:rPr sz="1000" b="1">
@@ -11985,7 +11874,7 @@
                 </a:solidFill>
                 <a:latin typeface="Microsoft YaHei"/>
               </a:rPr>
-              <a:t>  [阶段目标]</a:t>
+              <a:t>  [10 PVT + 1 CVT]</a:t>
             </a:r>
           </a:p>
         </p:txBody>
@@ -12017,38 +11906,38 @@
                 <a:spcPct val="120000"/>
               </a:lnSpc>
               <a:spcAft>
-                <a:spcPts val="600"/>
+                <a:spcPts val="500"/>
               </a:spcAft>
             </a:pPr>
             <a:r>
-              <a:rPr sz="1150" b="1">
+              <a:rPr sz="1100" b="1">
                 <a:solidFill>
                   <a:srgbClr val="1E3A8A"/>
                 </a:solidFill>
                 <a:latin typeface="Microsoft YaHei"/>
               </a:rPr>
-              <a:t>【阶段 E0 收益评估】 PVT-00：</a:t>
-            </a:r>
-            <a:r>
-              <a:rPr sz="1150">
-                <a:solidFill>
-                  <a:srgbClr val="1E293B"/>
-                </a:solidFill>
-                <a:latin typeface="Microsoft YaHei"/>
-              </a:rPr>
-              <a:t>验证外接 KV 池相比本地重算是否有明确的时间节省（</a:t>
-            </a:r>
-            <a:r>
-              <a:rPr sz="1150" b="1">
+              <a:t>【阶段 E0 收益确认】 P1 级 PVT-00：</a:t>
+            </a:r>
+            <a:r>
+              <a:rPr sz="1100">
+                <a:solidFill>
+                  <a:srgbClr val="1E293B"/>
+                </a:solidFill>
+                <a:latin typeface="Microsoft YaHei"/>
+              </a:rPr>
+              <a:t>测定 MLA (512B) 与 MHA 在各复用率下的 Saved-Prefill 净收益（</a:t>
+            </a:r>
+            <a:r>
+              <a:rPr sz="1100" b="1">
                 <a:solidFill>
                   <a:srgbClr val="DC2626"/>
                 </a:solidFill>
                 <a:latin typeface="Microsoft YaHei"/>
               </a:rPr>
-              <a:t>净时间收益 ≥ 2.0× 查询与传输总耗时</a:t>
-            </a:r>
-            <a:r>
-              <a:rPr sz="1150">
+              <a:t>净收益 ≥ 2.0× 总开销</a:t>
+            </a:r>
+            <a:r>
+              <a:rPr sz="1100">
                 <a:solidFill>
                   <a:srgbClr val="1E293B"/>
                 </a:solidFill>
@@ -12057,16 +11946,16 @@
               <a:t>），UBMEM 加速比 </a:t>
             </a:r>
             <a:r>
-              <a:rPr sz="1150" b="1">
+              <a:rPr sz="1100" b="1">
                 <a:solidFill>
                   <a:srgbClr val="2563EB"/>
                 </a:solidFill>
                 <a:latin typeface="Microsoft YaHei"/>
               </a:rPr>
-              <a:t>≥ 1.3×</a:t>
-            </a:r>
-            <a:r>
-              <a:rPr sz="1150">
+              <a:t>≥ 1.30×</a:t>
+            </a:r>
+            <a:r>
+              <a:rPr sz="1100">
                 <a:solidFill>
                   <a:srgbClr val="1E293B"/>
                 </a:solidFill>
@@ -12081,20 +11970,20 @@
                 <a:spcPct val="120000"/>
               </a:lnSpc>
               <a:spcAft>
-                <a:spcPts val="600"/>
+                <a:spcPts val="500"/>
               </a:spcAft>
             </a:pPr>
             <a:r>
-              <a:rPr sz="1150" b="1">
+              <a:rPr sz="1100" b="1">
                 <a:solidFill>
                   <a:srgbClr val="1E3A8A"/>
                 </a:solidFill>
                 <a:latin typeface="Microsoft YaHei"/>
               </a:rPr>
-              <a:t>【阶段 E1 传输与正确性】 PVT-01/02/06：</a:t>
-            </a:r>
-            <a:r>
-              <a:rPr sz="1150">
+              <a:t>【阶段 E1 通路与多卡同步】 P0 PVT-02/06 | P1 PVT-01/09 | P2 PVT-08：</a:t>
+            </a:r>
+            <a:r>
+              <a:rPr sz="1100">
                 <a:solidFill>
                   <a:srgbClr val="1E293B"/>
                 </a:solidFill>
@@ -12103,7 +11992,7 @@
               <a:t>验证 </a:t>
             </a:r>
             <a:r>
-              <a:rPr sz="1150" b="1">
+              <a:rPr sz="1100" b="1">
                 <a:solidFill>
                   <a:srgbClr val="DC2626"/>
                 </a:solidFill>
@@ -12112,13 +12001,13 @@
               <a:t>Host CPU 零数据拷贝</a:t>
             </a:r>
             <a:r>
-              <a:rPr sz="1150">
-                <a:solidFill>
-                  <a:srgbClr val="1E293B"/>
-                </a:solidFill>
-                <a:latin typeface="Microsoft YaHei"/>
-              </a:rPr>
-              <a:t>；跨框架描述符合并数量减少 ≥50%、计算传输异步重叠 ≥60%；6 维语义校验 0 错误消费、8 卡状态同步 P99&lt;100µs。</a:t>
+              <a:rPr sz="1100">
+                <a:solidFill>
+                  <a:srgbClr val="1E293B"/>
+                </a:solidFill>
+                <a:latin typeface="Microsoft YaHei"/>
+              </a:rPr>
+              <a:t>；C++ 描述符开销降低 ≥40%、异步重叠 ≥60%；6 维语义校验 0 错误消费；TP=8 多卡同步 P99&lt;100µs；DPU 双轨 500µs 降级；软件组播带宽节省 ≥60%。</a:t>
             </a:r>
           </a:p>
           <a:p>
@@ -12127,44 +12016,44 @@
                 <a:spcPct val="120000"/>
               </a:lnSpc>
               <a:spcAft>
-                <a:spcPts val="600"/>
+                <a:spcPts val="500"/>
               </a:spcAft>
             </a:pPr>
             <a:r>
-              <a:rPr sz="1150" b="1">
+              <a:rPr sz="1100" b="1">
                 <a:solidFill>
                   <a:srgbClr val="1E3A8A"/>
                 </a:solidFill>
                 <a:latin typeface="Microsoft YaHei"/>
               </a:rPr>
-              <a:t>【阶段 E2 调度与容量扩展】 PVT-03/04/05：</a:t>
-            </a:r>
-            <a:r>
-              <a:rPr sz="1150">
-                <a:solidFill>
-                  <a:srgbClr val="1E293B"/>
-                </a:solidFill>
-                <a:latin typeface="Microsoft YaHei"/>
-              </a:rPr>
-              <a:t>测定远端直读边界（Decode 阶段走拷贝更优）；</a:t>
-            </a:r>
-            <a:r>
-              <a:rPr sz="1150" b="1">
+              <a:t>【阶段 E2 调度决策与分层扩容】 P0 PVT-04/05 | P1 PVT-03：</a:t>
+            </a:r>
+            <a:r>
+              <a:rPr sz="1100">
+                <a:solidFill>
+                  <a:srgbClr val="1E293B"/>
+                </a:solidFill>
+                <a:latin typeface="Microsoft YaHei"/>
+              </a:rPr>
+              <a:t>测定远端直读边界；</a:t>
+            </a:r>
+            <a:r>
+              <a:rPr sz="1100" b="1">
                 <a:solidFill>
                   <a:srgbClr val="DC2626"/>
                 </a:solidFill>
                 <a:latin typeface="Microsoft YaHei"/>
               </a:rPr>
-              <a:t>QueryPlan 决策 P99&lt;5µs 且负收益率 &lt;1%</a:t>
-            </a:r>
-            <a:r>
-              <a:rPr sz="1150">
-                <a:solidFill>
-                  <a:srgbClr val="1E293B"/>
-                </a:solidFill>
-                <a:latin typeface="Microsoft YaHei"/>
-              </a:rPr>
-              <a:t>；显存超载 150% 下服务容量提升 ≥30%、OOM 降低 ≥50%。</a:t>
+              <a:t>QueryPlan 决策 P99&lt;5µs 且负收益拦截率 100%</a:t>
+            </a:r>
+            <a:r>
+              <a:rPr sz="1100">
+                <a:solidFill>
+                  <a:srgbClr val="1E293B"/>
+                </a:solidFill>
+                <a:latin typeface="Microsoft YaHei"/>
+              </a:rPr>
+              <a:t>；io_uring 裸盘直达在 150% 超载下服务容量提升 ≥30%、OOM 降低 ≥50%。</a:t>
             </a:r>
           </a:p>
           <a:p>
@@ -12173,38 +12062,38 @@
                 <a:spcPct val="120000"/>
               </a:lnSpc>
               <a:spcAft>
-                <a:spcPts val="600"/>
+                <a:spcPts val="500"/>
               </a:spcAft>
             </a:pPr>
             <a:r>
-              <a:rPr sz="1150" b="1">
+              <a:rPr sz="1100" b="1">
                 <a:solidFill>
                   <a:srgbClr val="1E3A8A"/>
                 </a:solidFill>
                 <a:latin typeface="Microsoft YaHei"/>
               </a:rPr>
-              <a:t>【阶段 E3 端到端混压测试】 PVT-07：</a:t>
-            </a:r>
-            <a:r>
-              <a:rPr sz="1150">
-                <a:solidFill>
-                  <a:srgbClr val="1E293B"/>
-                </a:solidFill>
-                <a:latin typeface="Microsoft YaHei"/>
-              </a:rPr>
-              <a:t>2 节点真实集群全链路混压，</a:t>
-            </a:r>
-            <a:r>
-              <a:rPr sz="1150" b="1">
+              <a:t>【阶段 E3 前后台混压总门禁】 P0 级 PVT-07：</a:t>
+            </a:r>
+            <a:r>
+              <a:rPr sz="1100">
+                <a:solidFill>
+                  <a:srgbClr val="1E293B"/>
+                </a:solidFill>
+                <a:latin typeface="Microsoft YaHei"/>
+              </a:rPr>
+              <a:t>2 节点集群在线打流混压，</a:t>
+            </a:r>
+            <a:r>
+              <a:rPr sz="1100" b="1">
                 <a:solidFill>
                   <a:srgbClr val="DC2626"/>
                 </a:solidFill>
                 <a:latin typeface="Microsoft YaHei"/>
               </a:rPr>
-              <a:t>端到端 P99 TTFT 降低 ≥20%</a:t>
-            </a:r>
-            <a:r>
-              <a:rPr sz="1150">
+              <a:t>P99 TTFT 降低 ≥20%</a:t>
+            </a:r>
+            <a:r>
+              <a:rPr sz="1100">
                 <a:solidFill>
                   <a:srgbClr val="1E293B"/>
                 </a:solidFill>
@@ -12213,7 +12102,7 @@
               <a:t>，</a:t>
             </a:r>
             <a:r>
-              <a:rPr sz="1150" b="1">
+              <a:rPr sz="1100" b="1">
                 <a:solidFill>
                   <a:srgbClr val="DC2626"/>
                 </a:solidFill>
@@ -12222,13 +12111,13 @@
               <a:t>QPS 提升 ≥10%</a:t>
             </a:r>
             <a:r>
-              <a:rPr sz="1150">
-                <a:solidFill>
-                  <a:srgbClr val="1E293B"/>
-                </a:solidFill>
-                <a:latin typeface="Microsoft YaHei"/>
-              </a:rPr>
-              <a:t>，前台推理时延抖动 &lt; 3%。</a:t>
+              <a:rPr sz="1100">
+                <a:solidFill>
+                  <a:srgbClr val="1E293B"/>
+                </a:solidFill>
+                <a:latin typeface="Microsoft YaHei"/>
+              </a:rPr>
+              <a:t>，前台 TPOT 干扰率严格 &lt; 3%。</a:t>
             </a:r>
           </a:p>
           <a:p>
@@ -12237,26 +12126,26 @@
                 <a:spcPct val="120000"/>
               </a:lnSpc>
               <a:spcAft>
-                <a:spcPts val="600"/>
+                <a:spcPts val="500"/>
               </a:spcAft>
             </a:pPr>
             <a:r>
-              <a:rPr sz="1150" b="1">
+              <a:rPr sz="1100" b="1">
                 <a:solidFill>
                   <a:srgbClr val="1E3A8A"/>
                 </a:solidFill>
                 <a:latin typeface="Microsoft YaHei"/>
               </a:rPr>
-              <a:t>【技术可行性证伪项】 CVT-01/02/03：</a:t>
-            </a:r>
-            <a:r>
-              <a:rPr sz="1150">
-                <a:solidFill>
-                  <a:srgbClr val="1E293B"/>
-                </a:solidFill>
-                <a:latin typeface="Microsoft YaHei"/>
-              </a:rPr>
-              <a:t>验证软件方案能否替代复杂硬件特性（软件分层转发替代硬件多播、软件 RCU 替代硬件 Remap、纯软件裸直达替代 DPU 卸载）。</a:t>
+              <a:t>【技术可行性证伪项】 P2 级 CVT-01：</a:t>
+            </a:r>
+            <a:r>
+              <a:rPr sz="1100">
+                <a:solidFill>
+                  <a:srgbClr val="1E293B"/>
+                </a:solidFill>
+                <a:latin typeface="Microsoft YaHei"/>
+              </a:rPr>
+              <a:t>验证软件 RCU 机制显存整理读停顿 &lt; 1ms、TPOT 抖动 &lt; 3%，成功证伪专有硬件 AtomicRemap 芯片依赖。</a:t>
             </a:r>
           </a:p>
         </p:txBody>
@@ -12303,7 +12192,6 @@
           <a:lstStyle/>
           <a:p>
             <a:pPr algn="ctr"/>
-            <a:endParaRPr/>
           </a:p>
         </p:txBody>
       </p:sp>
@@ -12347,7 +12235,6 @@
           <a:lstStyle/>
           <a:p>
             <a:pPr algn="ctr"/>
-            <a:endParaRPr/>
           </a:p>
         </p:txBody>
       </p:sp>
@@ -12433,7 +12320,7 @@
                 </a:solidFill>
                 <a:latin typeface="Microsoft YaHei"/>
               </a:rPr>
-              <a:t>• 调度与控制层：</a:t>
+              <a:t>• 调度大脑与控制面：</a:t>
             </a:r>
             <a:r>
               <a:rPr sz="1150">
@@ -12442,7 +12329,7 @@
                 </a:solidFill>
                 <a:latin typeface="Microsoft YaHei"/>
               </a:rPr>
-              <a:t>QueryPlan 动态决策引擎、成本预估模型、6 维元数据语义校验、多卡共享内存状态位图同步。</a:t>
+              <a:t>QueryPlan 动态决策引擎、MLA/MHA 成本预估模型、ConsumeEligibility 6 维强校验、多卡 POSIX 共享内存同步。</a:t>
             </a:r>
           </a:p>
           <a:p>
@@ -12461,7 +12348,7 @@
                 </a:solidFill>
                 <a:latin typeface="Microsoft YaHei"/>
               </a:rPr>
-              <a:t>• 编译与内存管理：</a:t>
+              <a:t>• 描述符与内存管理：</a:t>
             </a:r>
             <a:r>
               <a:rPr sz="1150">
@@ -12470,7 +12357,7 @@
                 </a:solidFill>
                 <a:latin typeface="Microsoft YaHei"/>
               </a:rPr>
-              <a:t>跨框架 Layout 描述符编译器、NPU/DMA 异步双流重叠、Direct-View 异常保护与安全回退机制。</a:t>
+              <a:t>跨框架 Layout 描述符编译器、Layerwise 边算边传异步 DAG 流水、ViewGuard 租约守卫与 SIGBUS 异常回滚。</a:t>
             </a:r>
           </a:p>
           <a:p>
@@ -12489,7 +12376,7 @@
                 </a:solidFill>
                 <a:latin typeface="Microsoft YaHei"/>
               </a:rPr>
-              <a:t>• 底层传输与存储：</a:t>
+              <a:t>• 底层传输与分层存储：</a:t>
             </a:r>
             <a:r>
               <a:rPr sz="1150">
@@ -12498,7 +12385,7 @@
                 </a:solidFill>
                 <a:latin typeface="Microsoft YaHei"/>
               </a:rPr>
-              <a:t>UBMEM 共享内存通信、URMA 用户态网络、CANN P2P 显存映射、io_uring SSD 裸盘直达通路。</a:t>
+              <a:t>UBMEM 共享内存、URMA 用户态网络、CANN P2P 显存锁定、io_uring FIXED 裸盘直达主路径、DPU 安全双轨。</a:t>
             </a:r>
           </a:p>
         </p:txBody>
@@ -12545,7 +12432,6 @@
           <a:lstStyle/>
           <a:p>
             <a:pPr algn="ctr"/>
-            <a:endParaRPr/>
           </a:p>
         </p:txBody>
       </p:sp>
@@ -12589,7 +12475,6 @@
           <a:lstStyle/>
           <a:p>
             <a:pPr algn="ctr"/>
-            <a:endParaRPr/>
           </a:p>
         </p:txBody>
       </p:sp>
@@ -12624,7 +12509,7 @@
               </a:defRPr>
             </a:pPr>
             <a:r>
-              <a:t>3. 方案验证的实施原则</a:t>
+              <a:t>3. 开源基线对标与在线打流实施原则</a:t>
             </a:r>
             <a:r>
               <a:rPr sz="1000" b="1">
@@ -12633,7 +12518,7 @@
                 </a:solidFill>
                 <a:latin typeface="Microsoft YaHei"/>
               </a:rPr>
-              <a:t>  [实施原则]</a:t>
+              <a:t>  [实施准则]</a:t>
             </a:r>
           </a:p>
         </p:txBody>
@@ -12675,7 +12560,7 @@
                 </a:solidFill>
                 <a:latin typeface="Microsoft YaHei"/>
               </a:rPr>
-              <a:t>• 真实环境实测：</a:t>
+              <a:t>• 真实集群在线打流：</a:t>
             </a:r>
             <a:r>
               <a:rPr sz="1150">
@@ -12684,7 +12569,7 @@
                 </a:solidFill>
                 <a:latin typeface="Microsoft YaHei"/>
               </a:rPr>
-              <a:t>所有指标必须在真实物理机器上运行测试脚本、抓取日志与打点，不采信纯理论推导。</a:t>
+              <a:t>基于 Mooncake Master + vLLM-Ascend 2 节点真实集群，运行官方 benchmark_serving 发送在线多并发流量。</a:t>
             </a:r>
           </a:p>
           <a:p>
@@ -12703,7 +12588,7 @@
                 </a:solidFill>
                 <a:latin typeface="Microsoft YaHei"/>
               </a:rPr>
-              <a:t>• 软硬件协同优化：</a:t>
+              <a:t>• 同条件严格消融对账：</a:t>
             </a:r>
             <a:r>
               <a:rPr sz="1150">
@@ -12712,7 +12597,7 @@
                 </a:solidFill>
                 <a:latin typeface="Microsoft YaHei"/>
               </a:rPr>
-              <a:t>充分利用 NPU、UBMEM 及 Linux 6.6+ 特性，寻找兼顾性能与稳定性的最优方案。</a:t>
+              <a:t>在纯重算基线、官方原生 Mooncake 混压与 Unified KV 扩展版之间开展严格同条件消融对比。</a:t>
             </a:r>
           </a:p>
           <a:p>
@@ -12731,7 +12616,7 @@
                 </a:solidFill>
                 <a:latin typeface="Microsoft YaHei"/>
               </a:rPr>
-              <a:t>• 方案科学剪枝：</a:t>
+              <a:t>• 兵力压强集中决胜：</a:t>
             </a:r>
             <a:r>
               <a:rPr sz="1150">
@@ -12740,7 +12625,7 @@
                 </a:solidFill>
                 <a:latin typeface="Microsoft YaHei"/>
               </a:rPr>
-              <a:t>对复杂度高、稳定性差的专用硬件依赖，通过实测对比，能用软件方案优雅解决的坚决不引入硬件依赖。</a:t>
+              <a:t>聚焦 5 大 P0 核心决胜项（描述符编译、微秒决策、裸盘直达、多卡同步、混压门禁），彻底攻克技术瓶颈。</a:t>
             </a:r>
           </a:p>
         </p:txBody>
@@ -12787,7 +12672,6 @@
           <a:lstStyle/>
           <a:p>
             <a:pPr algn="ctr"/>
-            <a:endParaRPr/>
           </a:p>
         </p:txBody>
       </p:sp>
@@ -12831,7 +12715,6 @@
           <a:lstStyle/>
           <a:p>
             <a:pPr algn="ctr"/>
-            <a:endParaRPr/>
           </a:p>
         </p:txBody>
       </p:sp>
@@ -12887,7 +12770,7 @@
                 </a:solidFill>
                 <a:latin typeface="Microsoft YaHei"/>
               </a:rPr>
-              <a:t>围绕四个核心验证阶段，通过 11 个具体验证项摸清性能底线与边界，</a:t>
+              <a:t>围绕四个核心验证阶段，通过 10 PVT + 1 CVT 摸清软硬件性能边界，</a:t>
             </a:r>
             <a:r>
               <a:rPr sz="1150" b="1">
@@ -12896,7 +12779,7 @@
                 </a:solidFill>
                 <a:latin typeface="Microsoft YaHei"/>
               </a:rPr>
-              <a:t>为后续系统实现提供扎实的技术依据</a:t>
+              <a:t>为后续系统落地提供扎实的技术依据</a:t>
             </a:r>
             <a:r>
               <a:rPr sz="1150" b="1">
@@ -12919,7 +12802,7 @@
 </file>
 
 <file path=ppt/slides/slide3.xml><?xml version="1.0" encoding="utf-8"?>
-<p:sld xmlns:a="http://schemas.openxmlformats.org/drawingml/2006/main" xmlns:r="http://schemas.openxmlformats.org/officeDocument/2006/relationships" xmlns:p="http://schemas.openxmlformats.org/presentationml/2006/main">
+<p:sld xmlns:a="http://schemas.openxmlformats.org/drawingml/2006/main" xmlns:p="http://schemas.openxmlformats.org/presentationml/2006/main" xmlns:r="http://schemas.openxmlformats.org/officeDocument/2006/relationships">
   <p:cSld>
     <p:bg>
       <p:bgPr>
@@ -12935,14 +12818,7 @@
         <p:cNvGrpSpPr/>
         <p:nvPr/>
       </p:nvGrpSpPr>
-      <p:grpSpPr>
-        <a:xfrm>
-          <a:off x="0" y="0"/>
-          <a:ext cx="0" cy="0"/>
-          <a:chOff x="0" y="0"/>
-          <a:chExt cx="0" cy="0"/>
-        </a:xfrm>
-      </p:grpSpPr>
+      <p:grpSpPr/>
       <p:sp>
         <p:nvSpPr>
           <p:cNvPr id="2" name="TextBox 1"/>
@@ -12974,7 +12850,7 @@
               </a:defRPr>
             </a:pPr>
             <a:r>
-              <a:t>PVT-00：业务流量外接缓存时间收益评估</a:t>
+              <a:t>PVT-00：业务流量 Saved-Prefill 收益上限与通信加速边界评估</a:t>
             </a:r>
           </a:p>
           <a:p>
@@ -12990,7 +12866,7 @@
               </a:defRPr>
             </a:pPr>
             <a:r>
-              <a:t>评估不同前缀复用率与上下文长度下，外接 KV 池相比本地算力重算的时间节省与通信加速比</a:t>
+              <a:t>评估 MLA (512B) 与 MHA 在不同复用率下，外接 KV 池相比本地直接重算的时间节省与通信协议加速边界</a:t>
             </a:r>
           </a:p>
         </p:txBody>
@@ -13073,7 +12949,6 @@
           <a:lstStyle/>
           <a:p>
             <a:pPr algn="ctr"/>
-            <a:endParaRPr/>
           </a:p>
         </p:txBody>
       </p:sp>
@@ -13117,7 +12992,6 @@
           <a:lstStyle/>
           <a:p>
             <a:pPr algn="ctr"/>
-            <a:endParaRPr/>
           </a:p>
         </p:txBody>
       </p:sp>
@@ -13161,7 +13035,7 @@
                 </a:solidFill>
                 <a:latin typeface="Microsoft YaHei"/>
               </a:rPr>
-              <a:t>  [阶段 E0 收益评估]</a:t>
+              <a:t>  [P1 级 | 阶段 E0 收益评估]</a:t>
             </a:r>
           </a:p>
         </p:txBody>
@@ -13212,7 +13086,7 @@
                 </a:solidFill>
                 <a:latin typeface="Microsoft YaHei"/>
               </a:rPr>
-              <a:t>大模型推理的首字生成（Prefill）阶段计算量大、耗时长。外接 KVCache 存储池能否相比本地算力重新计算真正节省响应时间（TTFT），是方案成立的前提基石。</a:t>
+              <a:t>大模型首字生成（Prefill）算力开销巨大。外接 KV 存储池能否相比本地直接重算产生显著时间节省（Saved-Prefill 净收益），是立项前提基石。</a:t>
             </a:r>
           </a:p>
           <a:p>
@@ -13240,16 +13114,16 @@
                 </a:solidFill>
                 <a:latin typeface="Microsoft YaHei"/>
               </a:rPr>
-              <a:t>实测探明在</a:t>
-            </a:r>
-            <a:r>
-              <a:rPr sz="1150" b="1">
-                <a:solidFill>
-                  <a:srgbClr val="1E293B"/>
-                </a:solidFill>
-                <a:latin typeface="Microsoft YaHei"/>
-              </a:rPr>
-              <a:t> 30%~98% 前缀复用率 </a:t>
+              <a:t>实测探明在 </a:t>
+            </a:r>
+            <a:r>
+              <a:rPr sz="1150" b="1">
+                <a:solidFill>
+                  <a:srgbClr val="1E293B"/>
+                </a:solidFill>
+                <a:latin typeface="Microsoft YaHei"/>
+              </a:rPr>
+              <a:t>30%~98% 前缀复用率</a:t>
             </a:r>
             <a:r>
               <a:rPr sz="1150">
@@ -13258,7 +13132,7 @@
                 </a:solidFill>
                 <a:latin typeface="Microsoft YaHei"/>
               </a:rPr>
-              <a:t>与 8K~128K 上下文长度下，读取外接缓存能省多少时间；同时对比 </a:t>
+              <a:t> 与 8K~128K 上下文下，读取缓存能省多少时间；测定 </a:t>
             </a:r>
             <a:r>
               <a:rPr sz="1150" b="1">
@@ -13267,7 +13141,7 @@
                 </a:solidFill>
                 <a:latin typeface="Microsoft YaHei"/>
               </a:rPr>
-              <a:t>UBMEM 共享内存通信</a:t>
+              <a:t>UBMEM 共享内存直通通信</a:t>
             </a:r>
             <a:r>
               <a:rPr sz="1150">
@@ -13276,7 +13150,7 @@
                 </a:solidFill>
                 <a:latin typeface="Microsoft YaHei"/>
               </a:rPr>
-              <a:t> 相比标准 URMA/RDMA 通信的加速效果。</a:t>
+              <a:t> 相比标准 URMA 通信的协议加速上限。</a:t>
             </a:r>
           </a:p>
           <a:p>
@@ -13304,7 +13178,7 @@
                 </a:solidFill>
                 <a:latin typeface="Microsoft YaHei"/>
               </a:rPr>
-              <a:t>作为阶段 E0 的核心验证，用实测数据证明外接缓存方案能带来确定性的首 Token 时间节省（端到端 TTFT 降低 ≥ 20%）。</a:t>
+              <a:t>作为阶段 E0 核心验证，用客观实测数据确认外接缓存方案能带来确定性的首 Token 响应时间 (TTFT) 显著降低。</a:t>
             </a:r>
           </a:p>
         </p:txBody>
@@ -13351,7 +13225,6 @@
           <a:lstStyle/>
           <a:p>
             <a:pPr algn="ctr"/>
-            <a:endParaRPr/>
           </a:p>
         </p:txBody>
       </p:sp>
@@ -13395,7 +13268,6 @@
           <a:lstStyle/>
           <a:p>
             <a:pPr algn="ctr"/>
-            <a:endParaRPr/>
           </a:p>
         </p:txBody>
       </p:sp>
@@ -13517,7 +13389,7 @@
                 </a:solidFill>
                 <a:latin typeface="Microsoft YaHei"/>
               </a:rPr>
-              <a:t>800G URMA/RDMA</a:t>
+              <a:t>800G URMA 双端口网卡</a:t>
             </a:r>
             <a:r>
               <a:rPr sz="1150">
@@ -13526,7 +13398,7 @@
                 </a:solidFill>
                 <a:latin typeface="Microsoft YaHei"/>
               </a:rPr>
-              <a:t> 双端口网卡，512GB 内存。</a:t>
+              <a:t>，512GB DDR5 内存。</a:t>
             </a:r>
           </a:p>
           <a:p>
@@ -13572,7 +13444,7 @@
                 </a:solidFill>
                 <a:latin typeface="Microsoft YaHei"/>
               </a:rPr>
-              <a:t>（用户态网络与共享内存通信库），动态链接 </a:t>
+              <a:t>，动态链接 </a:t>
             </a:r>
             <a:r>
               <a:rPr sz="1150" b="1">
@@ -13590,7 +13462,7 @@
                 </a:solidFill>
                 <a:latin typeface="Microsoft YaHei"/>
               </a:rPr>
-              <a:t>，基于 Linux 6.6+ 内核。</a:t>
+              <a:t>，基于 Linux 6.6+ 内核与 CANN 8.0 驱动。</a:t>
             </a:r>
           </a:p>
           <a:p>
@@ -13609,16 +13481,34 @@
                 </a:solidFill>
                 <a:latin typeface="Microsoft YaHei"/>
               </a:rPr>
-              <a:t>• 编译参数：</a:t>
+              <a:t>• 开源软件基线：</a:t>
             </a:r>
             <a:r>
               <a:rPr sz="1150">
                 <a:solidFill>
+                  <a:srgbClr val="1E293B"/>
+                </a:solidFill>
+                <a:latin typeface="Microsoft YaHei"/>
+              </a:rPr>
+              <a:t>Mooncake (v0.3.12+) + vLLM-Ascend 2 节点集群，基于官方 </a:t>
+            </a:r>
+            <a:r>
+              <a:rPr sz="1150" b="1">
+                <a:solidFill>
                   <a:srgbClr val="1E3A8A"/>
                 </a:solidFill>
                 <a:latin typeface="Consolas"/>
               </a:rPr>
-              <a:t>g++ -O3 -march=native -std=c++17 -Wall -Wextra</a:t>
+              <a:t>benchmark_serving.py</a:t>
+            </a:r>
+            <a:r>
+              <a:rPr sz="1150">
+                <a:solidFill>
+                  <a:srgbClr val="1E293B"/>
+                </a:solidFill>
+                <a:latin typeface="Microsoft YaHei"/>
+              </a:rPr>
+              <a:t> 进行在线打流消融。</a:t>
             </a:r>
           </a:p>
         </p:txBody>
@@ -13665,7 +13555,6 @@
           <a:lstStyle/>
           <a:p>
             <a:pPr algn="ctr"/>
-            <a:endParaRPr/>
           </a:p>
         </p:txBody>
       </p:sp>
@@ -13709,7 +13598,6 @@
           <a:lstStyle/>
           <a:p>
             <a:pPr algn="ctr"/>
-            <a:endParaRPr/>
           </a:p>
         </p:txBody>
       </p:sp>
@@ -13795,7 +13683,7 @@
                 </a:solidFill>
                 <a:latin typeface="Microsoft YaHei"/>
               </a:rPr>
-              <a:t>• 测试数据集构造 (make_workload.py)：</a:t>
+              <a:t>• 多模型测试集 (make_workload.py)：</a:t>
             </a:r>
             <a:r>
               <a:rPr sz="1150">
@@ -13804,7 +13692,43 @@
                 </a:solidFill>
                 <a:latin typeface="Microsoft YaHei"/>
               </a:rPr>
-              <a:t>构造前缀复用率在 50%~98% 的请求对（如 50K 前缀 + 50K 新增内容的 100K 序列，模拟长对话与问答）。</a:t>
+              <a:t>同时覆盖 </a:t>
+            </a:r>
+            <a:r>
+              <a:rPr sz="1150" b="1">
+                <a:solidFill>
+                  <a:srgbClr val="DC2626"/>
+                </a:solidFill>
+                <a:latin typeface="Microsoft YaHei"/>
+              </a:rPr>
+              <a:t>DeepSeek MLA (512B/tok)</a:t>
+            </a:r>
+            <a:r>
+              <a:rPr sz="1150">
+                <a:solidFill>
+                  <a:srgbClr val="1E293B"/>
+                </a:solidFill>
+                <a:latin typeface="Microsoft YaHei"/>
+              </a:rPr>
+              <a:t> 与 </a:t>
+            </a:r>
+            <a:r>
+              <a:rPr sz="1150" b="1">
+                <a:solidFill>
+                  <a:srgbClr val="2563EB"/>
+                </a:solidFill>
+                <a:latin typeface="Microsoft YaHei"/>
+              </a:rPr>
+              <a:t>Qwen MHA (320KB/tok)</a:t>
+            </a:r>
+            <a:r>
+              <a:rPr sz="1150">
+                <a:solidFill>
+                  <a:srgbClr val="1E293B"/>
+                </a:solidFill>
+                <a:latin typeface="Microsoft YaHei"/>
+              </a:rPr>
+              <a:t>，生成 30%~98% 复用率请求序列。</a:t>
             </a:r>
           </a:p>
           <a:p>
@@ -13823,7 +13747,7 @@
                 </a:solidFill>
                 <a:latin typeface="Microsoft YaHei"/>
               </a:rPr>
-              <a:t>• 微基准测试 (proto_bench.cc)：</a:t>
+              <a:t>• 底层协议微基准 (proto_bench.cc)：</a:t>
             </a:r>
             <a:r>
               <a:rPr sz="1150">
@@ -13832,7 +13756,7 @@
                 </a:solidFill>
                 <a:latin typeface="Microsoft YaHei"/>
               </a:rPr>
-              <a:t>扫参 4KB~64MB 传输块大小、1~64 并发线程，测量 URMA 和 UBMEM 的单向/双向带宽与 P99 延迟。</a:t>
+              <a:t>扫参 4KB~64MB 块与 1~64 并发，测量 URMA 和 UBMEM 单双向带宽与 P99 延迟。</a:t>
             </a:r>
           </a:p>
           <a:p>
@@ -13851,7 +13775,7 @@
                 </a:solidFill>
                 <a:latin typeface="Microsoft YaHei"/>
               </a:rPr>
-              <a:t>• 框架源码打点：</a:t>
+              <a:t>• 在线打流消融：</a:t>
             </a:r>
             <a:r>
               <a:rPr sz="1150">
@@ -13860,7 +13784,7 @@
                 </a:solidFill>
                 <a:latin typeface="Microsoft YaHei"/>
               </a:rPr>
-              <a:t>在推理框架（vLLM / Mooncake）中加入微秒级时钟打点，分别记录元数据查询、网络传输与本地重新计算耗时。</a:t>
+              <a:t>运行 benchmark_serving.py 发送真实流量，对比纯重算、原生 Mooncake 与 UBMEM 扩展版 TTFT。</a:t>
             </a:r>
           </a:p>
         </p:txBody>
@@ -13907,7 +13831,6 @@
           <a:lstStyle/>
           <a:p>
             <a:pPr algn="ctr"/>
-            <a:endParaRPr/>
           </a:p>
         </p:txBody>
       </p:sp>
@@ -13951,7 +13874,6 @@
           <a:lstStyle/>
           <a:p>
             <a:pPr algn="ctr"/>
-            <a:endParaRPr/>
           </a:p>
         </p:txBody>
       </p:sp>
@@ -14046,7 +13968,7 @@
                 </a:solidFill>
                 <a:latin typeface="Microsoft YaHei"/>
               </a:rPr>
-              <a:t>《通信协议基础性能评测表》、《前缀复用时延实测对比表》、《首Token响应时延(TTFT)净收益分析图》。</a:t>
+              <a:t>《通信协议基础性能评测表》、《多模型前缀复用时延实测对比表》、《Saved-Prefill 净收益分析图》。</a:t>
             </a:r>
           </a:p>
           <a:p>
@@ -14074,7 +13996,7 @@
                 </a:solidFill>
                 <a:latin typeface="Microsoft YaHei"/>
               </a:rPr>
-              <a:t>1. 净时间节省：</a:t>
+              <a:t>1. 净收益判定：</a:t>
             </a:r>
             <a:r>
               <a:rPr sz="1150" b="1">
@@ -14083,7 +14005,7 @@
                 </a:solidFill>
                 <a:latin typeface="Microsoft YaHei"/>
               </a:rPr>
-              <a:t>读取缓存节省的时间 ≥ 查询和传输总耗时的 2.0 倍</a:t>
+              <a:t>读取与加载总开销 &lt; 本地直接重算耗时</a:t>
             </a:r>
             <a:r>
               <a:rPr sz="1150">
@@ -14092,7 +14014,7 @@
                 </a:solidFill>
                 <a:latin typeface="Microsoft YaHei"/>
               </a:rPr>
-              <a:t>（拉取缓存的开销远小于重新计算时间）；
+              <a:t>（在 ≥50% 复用率下，净时间节省 ≥ 2.0× 查询与传输总开销）；
 </a:t>
             </a:r>
             <a:r>
@@ -14111,7 +14033,7 @@
                 </a:solidFill>
                 <a:latin typeface="Microsoft YaHei"/>
               </a:rPr>
-              <a:t>UBMEM 共享内存相比标准 URMA/RDMA 带宽/时延提升 ≥ 1.3 倍</a:t>
+              <a:t>UBMEM 共享内存协议相比标准 URMA 带宽/时延加速比 ≥ 1.30 倍</a:t>
             </a:r>
             <a:r>
               <a:rPr sz="1150">
@@ -14167,7 +14089,6 @@
           <a:lstStyle/>
           <a:p>
             <a:pPr algn="ctr"/>
-            <a:endParaRPr/>
           </a:p>
         </p:txBody>
       </p:sp>
@@ -14211,7 +14132,6 @@
           <a:lstStyle/>
           <a:p>
             <a:pPr algn="ctr"/>
-            <a:endParaRPr/>
           </a:p>
         </p:txBody>
       </p:sp>
@@ -14267,7 +14187,7 @@
                 </a:solidFill>
                 <a:latin typeface="Microsoft YaHei"/>
               </a:rPr>
-              <a:t>实测证明外接缓存池在 ≥50% 复用率下节省时间达到传输开销的 </a:t>
+              <a:t>实测证明在 ≥50% 复用率下，读取外接缓存节省的时间达到传输总开销的 </a:t>
             </a:r>
             <a:r>
               <a:rPr sz="1150" b="1">
@@ -14285,7 +14205,7 @@
                 </a:solidFill>
                 <a:latin typeface="Microsoft YaHei"/>
               </a:rPr>
-              <a:t>，UBMEM 通信提升性能 </a:t>
+              <a:t>，UBMEM 通信协议加速比 </a:t>
             </a:r>
             <a:r>
               <a:rPr sz="1150" b="1">
@@ -14294,7 +14214,7 @@
                 </a:solidFill>
                 <a:latin typeface="Microsoft YaHei"/>
               </a:rPr>
-              <a:t>≥30%</a:t>
+              <a:t>≥1.30×</a:t>
             </a:r>
             <a:r>
               <a:rPr sz="1150" b="1">
@@ -14303,7 +14223,7 @@
                 </a:solidFill>
                 <a:latin typeface="Microsoft YaHei"/>
               </a:rPr>
-              <a:t>，达到阶段 E0 准入要求。</a:t>
+              <a:t>，达到阶段 E0 准入门槛。</a:t>
             </a:r>
           </a:p>
         </p:txBody>
@@ -14317,7 +14237,7 @@
 </file>
 
 <file path=ppt/slides/slide4.xml><?xml version="1.0" encoding="utf-8"?>
-<p:sld xmlns:a="http://schemas.openxmlformats.org/drawingml/2006/main" xmlns:r="http://schemas.openxmlformats.org/officeDocument/2006/relationships" xmlns:p="http://schemas.openxmlformats.org/presentationml/2006/main">
+<p:sld xmlns:a="http://schemas.openxmlformats.org/drawingml/2006/main" xmlns:p="http://schemas.openxmlformats.org/presentationml/2006/main" xmlns:r="http://schemas.openxmlformats.org/officeDocument/2006/relationships">
   <p:cSld>
     <p:bg>
       <p:bgPr>
@@ -14333,14 +14253,7 @@
         <p:cNvGrpSpPr/>
         <p:nvPr/>
       </p:nvGrpSpPr>
-      <p:grpSpPr>
-        <a:xfrm>
-          <a:off x="0" y="0"/>
-          <a:ext cx="0" cy="0"/>
-          <a:chOff x="0" y="0"/>
-          <a:chExt cx="0" cy="0"/>
-        </a:xfrm>
-      </p:grpSpPr>
+      <p:grpSpPr/>
       <p:sp>
         <p:nvSpPr>
           <p:cNvPr id="2" name="TextBox 1"/>
@@ -14372,7 +14285,7 @@
               </a:defRPr>
             </a:pPr>
             <a:r>
-              <a:t>PVT-01：零数据拷贝传输通路与硬件能力矩阵验证</a:t>
+              <a:t>PVT-01：Host CPU 零数据拷贝传输通路与硬件能力矩阵验证</a:t>
             </a:r>
           </a:p>
           <a:p>
@@ -14388,7 +14301,7 @@
               </a:defRPr>
             </a:pPr>
             <a:r>
-              <a:t>验证跨节点 URMA/UBMEM 与本地 NVMe SSD 直达通路中的零 CPU 数据拷贝及硬件线速达成率</a:t>
+              <a:t>验证跨节点 URMA/UBMEM 与本地 NVMe SSD 直达通路中的 CPU 零数据拷贝及硬件线速达成率</a:t>
             </a:r>
           </a:p>
         </p:txBody>
@@ -14471,7 +14384,6 @@
           <a:lstStyle/>
           <a:p>
             <a:pPr algn="ctr"/>
-            <a:endParaRPr/>
           </a:p>
         </p:txBody>
       </p:sp>
@@ -14515,7 +14427,6 @@
           <a:lstStyle/>
           <a:p>
             <a:pPr algn="ctr"/>
-            <a:endParaRPr/>
           </a:p>
         </p:txBody>
       </p:sp>
@@ -14559,7 +14470,7 @@
                 </a:solidFill>
                 <a:latin typeface="Microsoft YaHei"/>
               </a:rPr>
-              <a:t>  [阶段 E1 传输底座]</a:t>
+              <a:t>  [P1 级 | 阶段 E1 传输底座]</a:t>
             </a:r>
           </a:p>
         </p:txBody>
@@ -14610,7 +14521,7 @@
                 </a:solidFill>
                 <a:latin typeface="Microsoft YaHei"/>
               </a:rPr>
-              <a:t>在 800G 网络与 Gen5 SSD 环境下，若由 Host CPU 参与内存拷贝或软件拆包，会瞬间占满 CPU 与内存带宽，导致降速与时延抖动。</a:t>
+              <a:t>800G 网络与 Gen5 SSD 环境下，若由 Host CPU 参与内存拷贝或拆包，会瞬间占满 CPU 与内存带宽，导致降速与时延抖动。</a:t>
             </a:r>
           </a:p>
           <a:p>
@@ -14638,7 +14549,7 @@
                 </a:solidFill>
                 <a:latin typeface="Microsoft YaHei"/>
               </a:rPr>
-              <a:t>验证跨节点传输与本地 SSD 通路中，数据直接在显存与网卡/SSD 流动，</a:t>
+              <a:t>验证传输通路中数据直达显存，</a:t>
             </a:r>
             <a:r>
               <a:rPr sz="1150" b="1">
@@ -14647,7 +14558,7 @@
                 </a:solidFill>
                 <a:latin typeface="Microsoft YaHei"/>
               </a:rPr>
-              <a:t>Host CPU 零数据拷贝（CPU 仅下发控制指令，不参与正文搬运）</a:t>
+              <a:t>Host CPU 零数据拷贝（CPU 仅负责下发指令，Host Payload Touch Bytes 严格为 0）</a:t>
             </a:r>
             <a:r>
               <a:rPr sz="1150">
@@ -14656,7 +14567,7 @@
                 </a:solidFill>
                 <a:latin typeface="Microsoft YaHei"/>
               </a:rPr>
-              <a:t>，有效带宽达线速 </a:t>
+              <a:t>，有效带宽达物理线速 </a:t>
             </a:r>
             <a:r>
               <a:rPr sz="1150" b="1">
@@ -14711,7 +14622,7 @@
                 </a:solidFill>
                 <a:latin typeface="Microsoft YaHei"/>
               </a:rPr>
-              <a:t>“硬件能力矩阵”（运行时自动探测各链路物理参数表）</a:t>
+              <a:t>“硬件能力矩阵 (CapabilityMatrix)”</a:t>
             </a:r>
             <a:r>
               <a:rPr sz="1150">
@@ -14720,7 +14631,7 @@
                 </a:solidFill>
                 <a:latin typeface="Microsoft YaHei"/>
               </a:rPr>
-              <a:t>，供调度算法使用。</a:t>
+              <a:t>，供调度算法读取。</a:t>
             </a:r>
           </a:p>
         </p:txBody>
@@ -14767,7 +14678,6 @@
           <a:lstStyle/>
           <a:p>
             <a:pPr algn="ctr"/>
-            <a:endParaRPr/>
           </a:p>
         </p:txBody>
       </p:sp>
@@ -14811,7 +14721,6 @@
           <a:lstStyle/>
           <a:p>
             <a:pPr algn="ctr"/>
-            <a:endParaRPr/>
           </a:p>
         </p:txBody>
       </p:sp>
@@ -14942,7 +14851,7 @@
                 </a:solidFill>
                 <a:latin typeface="Microsoft YaHei"/>
               </a:rPr>
-              <a:t> 将显存直接注册给网卡。</a:t>
+              <a:t> 将显存直接注册给网卡实现显存直读传输。</a:t>
             </a:r>
           </a:p>
           <a:p>
@@ -14988,7 +14897,7 @@
                 </a:solidFill>
                 <a:latin typeface="Microsoft YaHei"/>
               </a:rPr>
-              <a:t>，完全绕过 OS 页缓存与内存中转。</a:t>
+              <a:t>，严格绕过主机内存 Host DDR，消除 CPU 拷贝。</a:t>
             </a:r>
           </a:p>
           <a:p>
@@ -15016,7 +14925,7 @@
                 </a:solidFill>
                 <a:latin typeface="Microsoft YaHei"/>
               </a:rPr>
-              <a:t>使用 eBPF（内核跟踪工具）挂载内核与 glibc，全量监控是否有 CPU 数据拷贝发生。</a:t>
+              <a:t>使用 eBPF 内核跟踪探针全量监控是否发生 CPU 内存拷贝，确保零拷贝底座成立。</a:t>
             </a:r>
           </a:p>
         </p:txBody>
@@ -15063,7 +14972,6 @@
           <a:lstStyle/>
           <a:p>
             <a:pPr algn="ctr"/>
-            <a:endParaRPr/>
           </a:p>
         </p:txBody>
       </p:sp>
@@ -15107,7 +15015,6 @@
           <a:lstStyle/>
           <a:p>
             <a:pPr algn="ctr"/>
-            <a:endParaRPr/>
           </a:p>
         </p:txBody>
       </p:sp>
@@ -15230,7 +15137,7 @@
                 </a:solidFill>
                 <a:latin typeface="Microsoft YaHei"/>
               </a:rPr>
-              <a:t>在长时间高并发传输下，通过 eBPF 统计 CPU 拷贝的字节数，提供严格的防漏报校验。</a:t>
+              <a:t>在长时间高并发大流量传输下，通过 eBPF 统计 CPU 触碰数据的字节数，提供严格的防漏报凭证。</a:t>
             </a:r>
           </a:p>
           <a:p>
@@ -15258,7 +15165,7 @@
                 </a:solidFill>
                 <a:latin typeface="Microsoft YaHei"/>
               </a:rPr>
-              <a:t>自动解析实测吞吐并导出结构化 capability_matrix.json 硬件参数文件。</a:t>
+              <a:t>自动解析实测吞吐并导出结构化 capability_matrix.json 硬件能力参数文件。</a:t>
             </a:r>
           </a:p>
         </p:txBody>
@@ -15305,7 +15212,6 @@
           <a:lstStyle/>
           <a:p>
             <a:pPr algn="ctr"/>
-            <a:endParaRPr/>
           </a:p>
         </p:txBody>
       </p:sp>
@@ -15349,7 +15255,6 @@
           <a:lstStyle/>
           <a:p>
             <a:pPr algn="ctr"/>
-            <a:endParaRPr/>
           </a:p>
         </p:txBody>
       </p:sp>
@@ -15472,7 +15377,7 @@
                 </a:solidFill>
                 <a:latin typeface="Microsoft YaHei"/>
               </a:rPr>
-              <a:t>1. CPU 零拷贝：</a:t>
+              <a:t>1. CPU 零数据拷贝：</a:t>
             </a:r>
             <a:r>
               <a:rPr sz="1150" b="1">
@@ -15490,7 +15395,7 @@
                 </a:solidFill>
                 <a:latin typeface="Microsoft YaHei"/>
               </a:rPr>
-              <a:t>（CPU 仅负责提交 SQ/CQ 描述符指令）；
+              <a:t>（CPU 仅负责提交描述符指令）；
 </a:t>
             </a:r>
             <a:r>
@@ -15593,7 +15498,6 @@
           <a:lstStyle/>
           <a:p>
             <a:pPr algn="ctr"/>
-            <a:endParaRPr/>
           </a:p>
         </p:txBody>
       </p:sp>
@@ -15637,7 +15541,6 @@
           <a:lstStyle/>
           <a:p>
             <a:pPr algn="ctr"/>
-            <a:endParaRPr/>
           </a:p>
         </p:txBody>
       </p:sp>
@@ -15729,7 +15632,7 @@
                 </a:solidFill>
                 <a:latin typeface="Microsoft YaHei"/>
               </a:rPr>
-              <a:t>，产出准确的硬件能力矩阵参数表。</a:t>
+              <a:t>，产出准确的硬件能力矩阵参数表供调度使用。</a:t>
             </a:r>
           </a:p>
         </p:txBody>
@@ -15743,7 +15646,7 @@
 </file>
 
 <file path=ppt/slides/slide5.xml><?xml version="1.0" encoding="utf-8"?>
-<p:sld xmlns:a="http://schemas.openxmlformats.org/drawingml/2006/main" xmlns:r="http://schemas.openxmlformats.org/officeDocument/2006/relationships" xmlns:p="http://schemas.openxmlformats.org/presentationml/2006/main">
+<p:sld xmlns:a="http://schemas.openxmlformats.org/drawingml/2006/main" xmlns:p="http://schemas.openxmlformats.org/presentationml/2006/main" xmlns:r="http://schemas.openxmlformats.org/officeDocument/2006/relationships">
   <p:cSld>
     <p:bg>
       <p:bgPr>
@@ -15759,14 +15662,7 @@
         <p:cNvGrpSpPr/>
         <p:nvPr/>
       </p:nvGrpSpPr>
-      <p:grpSpPr>
-        <a:xfrm>
-          <a:off x="0" y="0"/>
-          <a:ext cx="0" cy="0"/>
-          <a:chOff x="0" y="0"/>
-          <a:chExt cx="0" cy="0"/>
-        </a:xfrm>
-      </p:grpSpPr>
+      <p:grpSpPr/>
       <p:sp>
         <p:nvSpPr>
           <p:cNvPr id="2" name="TextBox 1"/>
@@ -15798,7 +15694,7 @@
               </a:defRPr>
             </a:pPr>
             <a:r>
-              <a:t>PVT-02：跨框架内存描述符编译与异步流水验证</a:t>
+              <a:t>PVT-02：异构框架 Layout 描述符编译器与跨节点异步流水验证</a:t>
             </a:r>
           </a:p>
           <a:p>
@@ -15814,7 +15710,7 @@
               </a:defRPr>
             </a:pPr>
             <a:r>
-              <a:t>验证 vLLM 与 SGLang 异构格式的连续块合并算法、64B 共享内存协议及计算与传输异步重叠</a:t>
+              <a:t>对标 vLLM-Ascend 原生连接器，验证 64B POD 描述符贪心合并与跨节点 Layerwise 边算边传异步 DAG 重叠流水</a:t>
             </a:r>
           </a:p>
         </p:txBody>
@@ -15897,7 +15793,6 @@
           <a:lstStyle/>
           <a:p>
             <a:pPr algn="ctr"/>
-            <a:endParaRPr/>
           </a:p>
         </p:txBody>
       </p:sp>
@@ -15941,7 +15836,6 @@
           <a:lstStyle/>
           <a:p>
             <a:pPr algn="ctr"/>
-            <a:endParaRPr/>
           </a:p>
         </p:txBody>
       </p:sp>
@@ -15985,7 +15879,7 @@
                 </a:solidFill>
                 <a:latin typeface="Microsoft YaHei"/>
               </a:rPr>
-              <a:t>  [阶段 E1 控制编译]</a:t>
+              <a:t>  [P0 级 | 阶段 E1 核心决胜]</a:t>
             </a:r>
           </a:p>
         </p:txBody>
@@ -16036,7 +15930,7 @@
                 </a:solidFill>
                 <a:latin typeface="Microsoft YaHei"/>
               </a:rPr>
-              <a:t>vLLM 采用分页内存管理（PagedAttention，物理块离散），SGLang 采用基数树连续分段（Radix Tree）。若 CPU 逐块向硬件下发传输描述符，CPU 处理开销与碎片小 I/O 会抵消硬件性能。</a:t>
+              <a:t>vLLM 采用分页内存管理（物理块离散），vLLM-Ascend 默认使用 Python-ZMQ 连接器逐块处理，CPU 序列化与小 I/O 抵消了硬件性能。</a:t>
             </a:r>
           </a:p>
           <a:p>
@@ -16064,7 +15958,7 @@
                 </a:solidFill>
                 <a:latin typeface="Microsoft YaHei"/>
               </a:rPr>
-              <a:t>验证“描述符编译器”将离散物理块零拷贝编译为硬件连续 Scatter-Gather 描述符的能力；验证在 NPU 上开辟计算流与传输流，实现</a:t>
+              <a:t>验证 C++ 描述符编译器将离散块零拷贝合并为 Scatter-Gather 描述符；验证 2 节点下 </a:t>
             </a:r>
             <a:r>
               <a:rPr sz="1150" b="1">
@@ -16073,7 +15967,7 @@
                 </a:solidFill>
                 <a:latin typeface="Microsoft YaHei"/>
               </a:rPr>
-              <a:t>“边计算边传输”的异步流水线重叠</a:t>
+              <a:t>Chunked Prefill 逐层边算边传 (Layerwise KV Streaming)</a:t>
             </a:r>
             <a:r>
               <a:rPr sz="1150">
@@ -16082,7 +15976,7 @@
                 </a:solidFill>
                 <a:latin typeface="Microsoft YaHei"/>
               </a:rPr>
-              <a:t>。</a:t>
+              <a:t> 的计算-传输完全重叠。</a:t>
             </a:r>
           </a:p>
           <a:p>
@@ -16110,7 +16004,7 @@
                 </a:solidFill>
                 <a:latin typeface="Microsoft YaHei"/>
               </a:rPr>
-              <a:t>支撑 E1 阶段能力路径，降低控制面开销，使数据传输耗时能够在线被模型矩阵计算（GEMM）时间掩盖。</a:t>
+              <a:t>直面开源代码瓶颈，大幅降低 CPU 提交开销，使数据传输时间在线被大模型矩阵计算时间完全掩盖。</a:t>
             </a:r>
           </a:p>
         </p:txBody>
@@ -16157,7 +16051,6 @@
           <a:lstStyle/>
           <a:p>
             <a:pPr algn="ctr"/>
-            <a:endParaRPr/>
           </a:p>
         </p:txBody>
       </p:sp>
@@ -16201,7 +16094,6 @@
           <a:lstStyle/>
           <a:p>
             <a:pPr algn="ctr"/>
-            <a:endParaRPr/>
           </a:p>
         </p:txBody>
       </p:sp>
@@ -16287,7 +16179,7 @@
                 </a:solidFill>
                 <a:latin typeface="Microsoft YaHei"/>
               </a:rPr>
-              <a:t>• 共享内存协议：</a:t>
+              <a:t>• 描述符协议：</a:t>
             </a:r>
             <a:r>
               <a:rPr sz="1150">
@@ -16296,7 +16188,7 @@
                 </a:solidFill>
                 <a:latin typeface="Microsoft YaHei"/>
               </a:rPr>
-              <a:t>定义 64 字节对齐定长结构体 </a:t>
+              <a:t>定义 64B POD 定长结构体 </a:t>
             </a:r>
             <a:r>
               <a:rPr sz="1150" b="1">
@@ -16305,7 +16197,7 @@
                 </a:solidFill>
                 <a:latin typeface="Consolas"/>
               </a:rPr>
-              <a:t>ExtentManifestHeader</a:t>
+              <a:t>BatchDescriptorHeader</a:t>
             </a:r>
             <a:r>
               <a:rPr sz="1150">
@@ -16314,7 +16206,7 @@
                 </a:solidFill>
                 <a:latin typeface="Microsoft YaHei"/>
               </a:rPr>
-              <a:t> 与 32 字节 Extent，通过共享内存（</a:t>
+              <a:t>，通过共享内存（</a:t>
             </a:r>
             <a:r>
               <a:rPr sz="1150">
@@ -16332,7 +16224,7 @@
                 </a:solidFill>
                 <a:latin typeface="Microsoft YaHei"/>
               </a:rPr>
-              <a:t>）零拷贝传递。</a:t>
+              <a:t>）零拷贝跨进程传递。</a:t>
             </a:r>
           </a:p>
           <a:p>
@@ -16396,7 +16288,7 @@
                 </a:solidFill>
                 <a:latin typeface="Microsoft YaHei"/>
               </a:rPr>
-              <a:t> 硬件事件保序。</a:t>
+              <a:t> 构建硬件无锁同步屏障。</a:t>
             </a:r>
           </a:p>
           <a:p>
@@ -16424,7 +16316,7 @@
                 </a:solidFill>
                 <a:latin typeface="Consolas"/>
               </a:rPr>
-              <a:t>-lascendcl -lubmem -lpthread -O3</a:t>
+              <a:t>-lascendcl -lubmem -lpthread -O3 -std=c++17</a:t>
             </a:r>
           </a:p>
         </p:txBody>
@@ -16471,7 +16363,6 @@
           <a:lstStyle/>
           <a:p>
             <a:pPr algn="ctr"/>
-            <a:endParaRPr/>
           </a:p>
         </p:txBody>
       </p:sp>
@@ -16515,7 +16406,6 @@
           <a:lstStyle/>
           <a:p>
             <a:pPr algn="ctr"/>
-            <a:endParaRPr/>
           </a:p>
         </p:txBody>
       </p:sp>
@@ -16601,7 +16491,7 @@
                 </a:solidFill>
                 <a:latin typeface="Microsoft YaHei"/>
               </a:rPr>
-              <a:t>• 内存碎片生成 (make_manifests.py)：</a:t>
+              <a:t>• 描述符编译基准 (descriptor_compiler.cc)：</a:t>
             </a:r>
             <a:r>
               <a:rPr sz="1150">
@@ -16610,7 +16500,7 @@
                 </a:solidFill>
                 <a:latin typeface="Microsoft YaHei"/>
               </a:rPr>
-              <a:t>生成碎片率在 10%~100% 的内存映射表（覆盖 16~1024 个离散物理块）。</a:t>
+              <a:t>模拟 10%~100% 显存碎片率，压测连续物理块的贪心合并算法与编译耗时。</a:t>
             </a:r>
           </a:p>
           <a:p>
@@ -16629,7 +16519,7 @@
                 </a:solidFill>
                 <a:latin typeface="Microsoft YaHei"/>
               </a:rPr>
-              <a:t>• 编译器压测 (descriptor_compiler.cc)：</a:t>
+              <a:t>• 跨节点流水重叠压测 (async_dag_bench.cc)：</a:t>
             </a:r>
             <a:r>
               <a:rPr sz="1150">
@@ -16638,7 +16528,7 @@
                 </a:solidFill>
                 <a:latin typeface="Microsoft YaHei"/>
               </a:rPr>
-              <a:t>运行贪心合并算法，测量合并后描述符的压缩比例与 CPU 提交耗时下降幅度。</a:t>
+              <a:t>模拟 16~64 层大模型逐层边算边传流水，测量计算耗时、传输耗时与流水线总耗时。</a:t>
             </a:r>
           </a:p>
           <a:p>
@@ -16657,7 +16547,7 @@
                 </a:solidFill>
                 <a:latin typeface="Microsoft YaHei"/>
               </a:rPr>
-              <a:t>• 异步流水压测 (async_dag_bench.cc)：</a:t>
+              <a:t>• 对标 vLLM-Ascend 在线消融：</a:t>
             </a:r>
             <a:r>
               <a:rPr sz="1150">
@@ -16666,7 +16556,7 @@
                 </a:solidFill>
                 <a:latin typeface="Microsoft YaHei"/>
               </a:rPr>
-              <a:t>模拟多 Layer 计算与传输并发执行，抓取 Timeline 性能时间线计算异步重叠比例。</a:t>
+              <a:t>替换 MooncakeLayerwiseConnector 底层实现，对比原生 Python 序列化与 C++ 描述符加速效果。</a:t>
             </a:r>
           </a:p>
         </p:txBody>
@@ -16713,7 +16603,6 @@
           <a:lstStyle/>
           <a:p>
             <a:pPr algn="ctr"/>
-            <a:endParaRPr/>
           </a:p>
         </p:txBody>
       </p:sp>
@@ -16757,7 +16646,6 @@
           <a:lstStyle/>
           <a:p>
             <a:pPr algn="ctr"/>
-            <a:endParaRPr/>
           </a:p>
         </p:txBody>
       </p:sp>
@@ -16852,7 +16740,7 @@
                 </a:solidFill>
                 <a:latin typeface="Microsoft YaHei"/>
               </a:rPr>
-              <a:t>《描述符编译器耗时与压缩率表》、《CPU 控制面开销优化表》、《NPU 计算与传输异步重叠率分析及 Trace 图》。</a:t>
+              <a:t>《描述符编译性能与压缩比报告》、《Layerwise 异步流水重叠率曲线》、《CPU 提交开销消融对比表》。</a:t>
             </a:r>
           </a:p>
           <a:p>
@@ -16880,16 +16768,16 @@
                 </a:solidFill>
                 <a:latin typeface="Microsoft YaHei"/>
               </a:rPr>
-              <a:t>1. 描述符压缩率：</a:t>
-            </a:r>
-            <a:r>
-              <a:rPr sz="1150" b="1">
-                <a:solidFill>
-                  <a:srgbClr val="059669"/>
-                </a:solidFill>
-                <a:latin typeface="Microsoft YaHei"/>
-              </a:rPr>
-              <a:t>经连续物理块贪心合并后，提交给硬件的描述符数量减少 ≥ 50%</a:t>
+              <a:t>1. 描述符压缩率与时延：</a:t>
+            </a:r>
+            <a:r>
+              <a:rPr sz="1150" b="1">
+                <a:solidFill>
+                  <a:srgbClr val="DC2626"/>
+                </a:solidFill>
+                <a:latin typeface="Microsoft YaHei"/>
+              </a:rPr>
+              <a:t>描述符连续块合并压缩率 ≥ 50%，单次编译耗时 &lt; 5µs</a:t>
             </a:r>
             <a:r>
               <a:rPr sz="1150">
@@ -16908,7 +16796,7 @@
                 </a:solidFill>
                 <a:latin typeface="Microsoft YaHei"/>
               </a:rPr>
-              <a:t>2. CPU 提交开销：</a:t>
+              <a:t>2. 流水重叠率：</a:t>
             </a:r>
             <a:r>
               <a:rPr sz="1150" b="1">
@@ -16917,7 +16805,7 @@
                 </a:solidFill>
                 <a:latin typeface="Microsoft YaHei"/>
               </a:rPr>
-              <a:t>CPU 构造与提交描述符的耗时下降 ≥ 40%</a:t>
+              <a:t>异步 DAG 流水计算-传输重叠率 ≥ 60%</a:t>
             </a:r>
             <a:r>
               <a:rPr sz="1150">
@@ -16926,7 +16814,7 @@
                 </a:solidFill>
                 <a:latin typeface="Microsoft YaHei"/>
               </a:rPr>
-              <a:t>；
+              <a:t>（传输时间被计算掩盖 ≥ 60%）；
 </a:t>
             </a:r>
             <a:r>
@@ -16936,16 +16824,16 @@
                 </a:solidFill>
                 <a:latin typeface="Microsoft YaHei"/>
               </a:rPr>
-              <a:t>3. 计算与传输重叠：</a:t>
-            </a:r>
-            <a:r>
-              <a:rPr sz="1150" b="1">
-                <a:solidFill>
-                  <a:srgbClr val="DC2626"/>
-                </a:solidFill>
-                <a:latin typeface="Microsoft YaHei"/>
-              </a:rPr>
-              <a:t>NPU 计算流与 DMA 传输流的异步重叠比例 (Overlap Ratio) ≥ 60%</a:t>
+              <a:t>3. 控制面加速：</a:t>
+            </a:r>
+            <a:r>
+              <a:rPr sz="1150" b="1">
+                <a:solidFill>
+                  <a:srgbClr val="2563EB"/>
+                </a:solidFill>
+                <a:latin typeface="Microsoft YaHei"/>
+              </a:rPr>
+              <a:t>CPU 描述符提交开销相比原生 Python-ZMQ 降低 ≥ 40%</a:t>
             </a:r>
             <a:r>
               <a:rPr sz="1150">
@@ -17001,7 +16889,6 @@
           <a:lstStyle/>
           <a:p>
             <a:pPr algn="ctr"/>
-            <a:endParaRPr/>
           </a:p>
         </p:txBody>
       </p:sp>
@@ -17045,7 +16932,6 @@
           <a:lstStyle/>
           <a:p>
             <a:pPr algn="ctr"/>
-            <a:endParaRPr/>
           </a:p>
         </p:txBody>
       </p:sp>
@@ -17092,7 +16978,7 @@
                 </a:solidFill>
                 <a:latin typeface="Microsoft YaHei"/>
               </a:rPr>
-              <a:t>PVT-02 跨框架描述符编译与异步流水：</a:t>
+              <a:t>PVT-02 描述符编译与异步流水：</a:t>
             </a:r>
             <a:r>
               <a:rPr sz="1150" b="1">
@@ -17101,7 +16987,7 @@
                 </a:solidFill>
                 <a:latin typeface="Microsoft YaHei"/>
               </a:rPr>
-              <a:t>通过 64B 共享内存协议与贪心合并实现描述符数量 </a:t>
+              <a:t>描述符合并压缩率达到 </a:t>
             </a:r>
             <a:r>
               <a:rPr sz="1150" b="1">
@@ -17110,7 +16996,7 @@
                 </a:solidFill>
                 <a:latin typeface="Microsoft YaHei"/>
               </a:rPr>
-              <a:t>压缩 ≥50%</a:t>
+              <a:t>≥50%</a:t>
             </a:r>
             <a:r>
               <a:rPr sz="1150" b="1">
@@ -17119,7 +17005,7 @@
                 </a:solidFill>
                 <a:latin typeface="Microsoft YaHei"/>
               </a:rPr>
-              <a:t>、CPU 耗时 </a:t>
+              <a:t>，计算传输异步流水重叠率达到 </a:t>
             </a:r>
             <a:r>
               <a:rPr sz="1150" b="1">
@@ -17128,7 +17014,7 @@
                 </a:solidFill>
                 <a:latin typeface="Microsoft YaHei"/>
               </a:rPr>
-              <a:t>下降 ≥40%</a:t>
+              <a:t>≥60%</a:t>
             </a:r>
             <a:r>
               <a:rPr sz="1150" b="1">
@@ -17137,25 +17023,7 @@
                 </a:solidFill>
                 <a:latin typeface="Microsoft YaHei"/>
               </a:rPr>
-              <a:t>，NPU 计算与 DMA 传输达成 </a:t>
-            </a:r>
-            <a:r>
-              <a:rPr sz="1150" b="1">
-                <a:solidFill>
-                  <a:srgbClr val="DC2626"/>
-                </a:solidFill>
-                <a:latin typeface="Microsoft YaHei"/>
-              </a:rPr>
-              <a:t>≥60% 异步重叠掩盖</a:t>
-            </a:r>
-            <a:r>
-              <a:rPr sz="1150" b="1">
-                <a:solidFill>
-                  <a:srgbClr val="0F172A"/>
-                </a:solidFill>
-                <a:latin typeface="Microsoft YaHei"/>
-              </a:rPr>
-              <a:t>。</a:t>
+              <a:t>，CPU 提交开销大幅降低 ≥40%，突破开源控制面瓶颈。</a:t>
             </a:r>
           </a:p>
         </p:txBody>
@@ -17169,7 +17037,7 @@
 </file>
 
 <file path=ppt/slides/slide6.xml><?xml version="1.0" encoding="utf-8"?>
-<p:sld xmlns:a="http://schemas.openxmlformats.org/drawingml/2006/main" xmlns:r="http://schemas.openxmlformats.org/officeDocument/2006/relationships" xmlns:p="http://schemas.openxmlformats.org/presentationml/2006/main">
+<p:sld xmlns:a="http://schemas.openxmlformats.org/drawingml/2006/main" xmlns:p="http://schemas.openxmlformats.org/presentationml/2006/main" xmlns:r="http://schemas.openxmlformats.org/officeDocument/2006/relationships">
   <p:cSld>
     <p:bg>
       <p:bgPr>
@@ -17185,14 +17053,7 @@
         <p:cNvGrpSpPr/>
         <p:nvPr/>
       </p:nvGrpSpPr>
-      <p:grpSpPr>
-        <a:xfrm>
-          <a:off x="0" y="0"/>
-          <a:ext cx="0" cy="0"/>
-          <a:chOff x="0" y="0"/>
-          <a:chExt cx="0" cy="0"/>
-        </a:xfrm>
-      </p:grpSpPr>
+      <p:grpSpPr/>
       <p:sp>
         <p:nvSpPr>
           <p:cNvPr id="2" name="TextBox 1"/>
@@ -17224,7 +17085,7 @@
               </a:defRPr>
             </a:pPr>
             <a:r>
-              <a:t>PVT-03：远端内存直读与拷贝到显存适用边界及异常保护验证</a:t>
+              <a:t>PVT-03：远端直读 vs 显存拷贝适用边界与 ViewGuard 容错验证</a:t>
             </a:r>
           </a:p>
           <a:p>
@@ -17240,7 +17101,7 @@
               </a:defRPr>
             </a:pPr>
             <a:r>
-              <a:t>测定 Direct-View（远端直读）与 Copy-to-HBM（拷贝到显存）的性能临界点，验证 ViewGuard 故障保护机制</a:t>
+              <a:t>测定 Direct-View 与 Copy-to-HBM 的交叉临界点，实测证伪 Decode 活跃 KV 直读，验证 ViewGuard 租约安全守卫</a:t>
             </a:r>
           </a:p>
         </p:txBody>
@@ -17323,7 +17184,6 @@
           <a:lstStyle/>
           <a:p>
             <a:pPr algn="ctr"/>
-            <a:endParaRPr/>
           </a:p>
         </p:txBody>
       </p:sp>
@@ -17367,7 +17227,6 @@
           <a:lstStyle/>
           <a:p>
             <a:pPr algn="ctr"/>
-            <a:endParaRPr/>
           </a:p>
         </p:txBody>
       </p:sp>
@@ -17411,7 +17270,7 @@
                 </a:solidFill>
                 <a:latin typeface="Microsoft YaHei"/>
               </a:rPr>
-              <a:t>  [阶段 E1/E2 决策边界]</a:t>
+              <a:t>  [P1 级 | 阶段 E1/E2 决策边界]</a:t>
             </a:r>
           </a:p>
         </p:txBody>
@@ -17462,7 +17321,7 @@
                 </a:solidFill>
                 <a:latin typeface="Microsoft YaHei"/>
               </a:rPr>
-              <a:t>业界常假设“直接读取远端节点内存（Direct-View）免除数据拷贝是最好的”。但在 Decode（逐字生成）阶段，NPU 需要反复读取远端内存上千次，每次总线往返时延会导致算力严重空等。</a:t>
+              <a:t>业界对于是否应跨节点直接读取远端显存存在争议。必须实测探明远端直读与本地显存拷贝的性能交叉临界点，防止错误选路恶化单字生成耗时（TPOT）。</a:t>
             </a:r>
           </a:p>
           <a:p>
@@ -17490,7 +17349,7 @@
                 </a:solidFill>
                 <a:latin typeface="Microsoft YaHei"/>
               </a:rPr>
-              <a:t>1. </a:t>
+              <a:t>实测不同重读次数下两种路径的耗时曲线；实测证伪 Decode 阶段活跃 KV 直读的可行性；验证 </a:t>
             </a:r>
             <a:r>
               <a:rPr sz="1150" b="1">
@@ -17499,25 +17358,7 @@
                 </a:solidFill>
                 <a:latin typeface="Microsoft YaHei"/>
               </a:rPr>
-              <a:t>实测明确：Decode 活跃阶段不适合远端直读（必须走拷贝到本地显存）</a:t>
-            </a:r>
-            <a:r>
-              <a:rPr sz="1150">
-                <a:solidFill>
-                  <a:srgbClr val="1E293B"/>
-                </a:solidFill>
-                <a:latin typeface="Microsoft YaHei"/>
-              </a:rPr>
-              <a:t>；2. 精确测出 Prefill 阶段远端直读相比拷贝的适用边界公式；3. 验证 </a:t>
-            </a:r>
-            <a:r>
-              <a:rPr sz="1150" b="1">
-                <a:solidFill>
-                  <a:srgbClr val="2563EB"/>
-                </a:solidFill>
-                <a:latin typeface="Microsoft YaHei"/>
-              </a:rPr>
-              <a:t>ViewGuard 租约失效或远端宕机时的异常安全回退</a:t>
+              <a:t>ViewGuard 视图租约安全守卫机制（捕获 SIGBUS 异常并安全回滚至本地重算）</a:t>
             </a:r>
             <a:r>
               <a:rPr sz="1150">
@@ -17554,7 +17395,7 @@
                 </a:solidFill>
                 <a:latin typeface="Microsoft YaHei"/>
               </a:rPr>
-              <a:t>指导调度算法在不同阶段选择最优读取方式，避免误用远端直读导致生成时延恶化，确保跨节点故障时 0 进程崩溃。</a:t>
+              <a:t>确立清晰的访问模式决策边界，保障远端直读在发生节点宕机或租约超时等故障时 100% 安全回滚不崩溃。</a:t>
             </a:r>
           </a:p>
         </p:txBody>
@@ -17601,7 +17442,6 @@
           <a:lstStyle/>
           <a:p>
             <a:pPr algn="ctr"/>
-            <a:endParaRPr/>
           </a:p>
         </p:txBody>
       </p:sp>
@@ -17645,7 +17485,6 @@
           <a:lstStyle/>
           <a:p>
             <a:pPr algn="ctr"/>
-            <a:endParaRPr/>
           </a:p>
         </p:txBody>
       </p:sp>
@@ -17731,7 +17570,7 @@
                 </a:solidFill>
                 <a:latin typeface="Microsoft YaHei"/>
               </a:rPr>
-              <a:t>• 统一编址映射：</a:t>
+              <a:t>• 硬件与驱动：</a:t>
             </a:r>
             <a:r>
               <a:rPr sz="1150">
@@ -17740,7 +17579,7 @@
                 </a:solidFill>
                 <a:latin typeface="Microsoft YaHei"/>
               </a:rPr>
-              <a:t>NPU SVM 跨总线虚拟内存映射与 UBMEM 共享内存。</a:t>
+              <a:t>UBMEM 共享内存驱动库、CANN 8.0 运行时环境、Linux 6.6+ 信号处理子系统。</a:t>
             </a:r>
           </a:p>
           <a:p>
@@ -17759,7 +17598,7 @@
                 </a:solidFill>
                 <a:latin typeface="Microsoft YaHei"/>
               </a:rPr>
-              <a:t>• 异常捕获与恢复：</a:t>
+              <a:t>• 核心头文件：</a:t>
             </a:r>
             <a:r>
               <a:rPr sz="1150">
@@ -17768,7 +17607,7 @@
                 </a:solidFill>
                 <a:latin typeface="Microsoft YaHei"/>
               </a:rPr>
-              <a:t>注册信号处理函数捕获 </a:t>
+              <a:t>引入 </a:t>
             </a:r>
             <a:r>
               <a:rPr sz="1150" b="1">
@@ -17777,7 +17616,7 @@
                 </a:solidFill>
                 <a:latin typeface="Consolas"/>
               </a:rPr>
-              <a:t>SIGBUS / SIGSEGV</a:t>
+              <a:t>view_guard.h</a:t>
             </a:r>
             <a:r>
               <a:rPr sz="1150">
@@ -17786,16 +17625,16 @@
                 </a:solidFill>
                 <a:latin typeface="Microsoft YaHei"/>
               </a:rPr>
-              <a:t> 信号，调用 CANN </a:t>
-            </a:r>
-            <a:r>
-              <a:rPr sz="1150" b="1">
+              <a:t>，通过 </a:t>
+            </a:r>
+            <a:r>
+              <a:rPr sz="1150">
                 <a:solidFill>
                   <a:srgbClr val="1E3A8A"/>
                 </a:solidFill>
                 <a:latin typeface="Consolas"/>
               </a:rPr>
-              <a:t>aclrtStreamAbort</a:t>
+              <a:t>sigaction(SIGBUS)</a:t>
             </a:r>
             <a:r>
               <a:rPr sz="1150">
@@ -17804,16 +17643,16 @@
                 </a:solidFill>
                 <a:latin typeface="Microsoft YaHei"/>
               </a:rPr>
-              <a:t> 重置硬件队列，通过 </a:t>
-            </a:r>
-            <a:r>
-              <a:rPr sz="1150" b="1">
+              <a:t> 捕获跨节点总线访问异常，利用 </a:t>
+            </a:r>
+            <a:r>
+              <a:rPr sz="1150">
                 <a:solidFill>
                   <a:srgbClr val="1E3A8A"/>
                 </a:solidFill>
                 <a:latin typeface="Consolas"/>
               </a:rPr>
-              <a:t>siglongjmp</a:t>
+              <a:t>sigsetjmp/siglongjmp</a:t>
             </a:r>
             <a:r>
               <a:rPr sz="1150">
@@ -17822,35 +17661,7 @@
                 </a:solidFill>
                 <a:latin typeface="Microsoft YaHei"/>
               </a:rPr>
-              <a:t> 恢复执行栈并安全回退到本地重算。</a:t>
-            </a:r>
-          </a:p>
-          <a:p>
-            <a:pPr>
-              <a:lnSpc>
-                <a:spcPct val="120000"/>
-              </a:lnSpc>
-              <a:spcAft>
-                <a:spcPts val="600"/>
-              </a:spcAft>
-            </a:pPr>
-            <a:r>
-              <a:rPr sz="1150" b="1">
-                <a:solidFill>
-                  <a:srgbClr val="1E3A8A"/>
-                </a:solidFill>
-                <a:latin typeface="Microsoft YaHei"/>
-              </a:rPr>
-              <a:t>• 依赖库：</a:t>
-            </a:r>
-            <a:r>
-              <a:rPr sz="1150">
-                <a:solidFill>
-                  <a:srgbClr val="1E3A8A"/>
-                </a:solidFill>
-                <a:latin typeface="Consolas"/>
-              </a:rPr>
-              <a:t>-lascendcl -lubmem -lpthread -O3</a:t>
+              <a:t> 实现执行栈安全回滚。</a:t>
             </a:r>
           </a:p>
         </p:txBody>
@@ -17897,7 +17708,6 @@
           <a:lstStyle/>
           <a:p>
             <a:pPr algn="ctr"/>
-            <a:endParaRPr/>
           </a:p>
         </p:txBody>
       </p:sp>
@@ -17941,7 +17751,6 @@
           <a:lstStyle/>
           <a:p>
             <a:pPr algn="ctr"/>
-            <a:endParaRPr/>
           </a:p>
         </p:txBody>
       </p:sp>
@@ -18027,7 +17836,7 @@
                 </a:solidFill>
                 <a:latin typeface="Microsoft YaHei"/>
               </a:rPr>
-              <a:t>• 边界扫参测试 (view_vs_copy_bench.cc)：</a:t>
+              <a:t>• 交叉曲线测定 (view_vs_copy_bench.cc)：</a:t>
             </a:r>
             <a:r>
               <a:rPr sz="1150">
@@ -18036,7 +17845,7 @@
                 </a:solidFill>
                 <a:latin typeface="Microsoft YaHei"/>
               </a:rPr>
-              <a:t>扫描重复读取次数 (1~2048) 与前缀数据量 (4KB~128MB)，测定两者耗时的交叉曲线。</a:t>
+              <a:t>测试不同数据块大小（16KB~4MB）在 1~10 次重复读取下的累计耗时，绘制 Crossover 临界曲线。</a:t>
             </a:r>
           </a:p>
           <a:p>
@@ -18055,7 +17864,7 @@
                 </a:solidFill>
                 <a:latin typeface="Microsoft YaHei"/>
               </a:rPr>
-              <a:t>• 推理场景对比 (benchmark_serving_view.py)：</a:t>
+              <a:t>• Decode 直读证伪实验 (benchmark_serving_view.py)：</a:t>
             </a:r>
             <a:r>
               <a:rPr sz="1150">
@@ -18064,7 +17873,7 @@
                 </a:solidFill>
                 <a:latin typeface="Microsoft YaHei"/>
               </a:rPr>
-              <a:t>在大模型服务中对比 Decode 阶段远端直读与拷贝到本地显存对单 Token 生成时延（TPOT）的影响。</a:t>
+              <a:t>在推理服务 Decode 阶段强制注入远端直读，对比本地显存读取的 TPOT 尾部延迟恶化程度。</a:t>
             </a:r>
           </a:p>
           <a:p>
@@ -18083,7 +17892,7 @@
                 </a:solidFill>
                 <a:latin typeface="Microsoft YaHei"/>
               </a:rPr>
-              <a:t>• 故障注入测试：</a:t>
+              <a:t>• 故障注入与安全回滚：</a:t>
             </a:r>
             <a:r>
               <a:rPr sz="1150">
@@ -18092,7 +17901,7 @@
                 </a:solidFill>
                 <a:latin typeface="Microsoft YaHei"/>
               </a:rPr>
-              <a:t>模拟 远端节点 Crash、网络断连与租约超时，触发总线错误，验证系统是否平滑回退。</a:t>
+              <a:t>在远端直读过程中人为杀掉目标节点进程或制造租约超时，验证 ViewGuard 异常捕获与回滚。</a:t>
             </a:r>
           </a:p>
         </p:txBody>
@@ -18139,7 +17948,6 @@
           <a:lstStyle/>
           <a:p>
             <a:pPr algn="ctr"/>
-            <a:endParaRPr/>
           </a:p>
         </p:txBody>
       </p:sp>
@@ -18183,7 +17991,6 @@
           <a:lstStyle/>
           <a:p>
             <a:pPr algn="ctr"/>
-            <a:endParaRPr/>
           </a:p>
         </p:txBody>
       </p:sp>
@@ -18278,7 +18085,7 @@
                 </a:solidFill>
                 <a:latin typeface="Microsoft YaHei"/>
               </a:rPr>
-              <a:t>《直读与拷贝耗时交叉临界曲线表》、《Decode 阶段单Token生成时延对比表》、《故障注入安全回退记录表》。</a:t>
+              <a:t>《Direct-View 与 Copy-to-HBM 性能交叉曲线》、《Decode 活跃直读证伪报告》、《ViewGuard 容错日志》。</a:t>
             </a:r>
           </a:p>
           <a:p>
@@ -18297,25 +18104,16 @@
                 </a:solidFill>
                 <a:latin typeface="Microsoft YaHei"/>
               </a:rPr>
-              <a:t>• 判定达标要求 (Go/Conditional/No-Go)：</a:t>
-            </a:r>
-            <a:r>
-              <a:rPr sz="1150" b="1">
-                <a:solidFill>
-                  <a:srgbClr val="1E293B"/>
-                </a:solidFill>
-                <a:latin typeface="Microsoft YaHei"/>
-              </a:rPr>
-              <a:t>1. 策略约束：</a:t>
-            </a:r>
-            <a:r>
-              <a:rPr sz="1150" b="1">
-                <a:solidFill>
-                  <a:srgbClr val="DC2626"/>
-                </a:solidFill>
-                <a:latin typeface="Microsoft YaHei"/>
-              </a:rPr>
-              <a:t>Decode 活跃阶段强制禁止使用远端直读（100% 走拷贝到本地显存）</a:t>
+              <a:t>• 判定达标要求 (Go/No-Go)：</a:t>
+            </a:r>
+            <a:r>
+              <a:rPr sz="1150" b="1">
+                <a:solidFill>
+                  <a:srgbClr val="1E293B"/>
+                </a:solidFill>
+                <a:latin typeface="Microsoft YaHei"/>
+              </a:rPr>
+              <a:t>1. 决策边界明确：</a:t>
             </a:r>
             <a:r>
               <a:rPr sz="1150">
@@ -18324,7 +18122,7 @@
                 </a:solidFill>
                 <a:latin typeface="Microsoft YaHei"/>
               </a:rPr>
-              <a:t>；
+              <a:t>确立重读次数 &gt; 2 时必须走 Copy-to-HBM 路径；证实 Decode 活跃 KV 直读导致 TPOT 恶化（证伪成立）；
 </a:t>
             </a:r>
             <a:r>
@@ -18334,16 +18132,16 @@
                 </a:solidFill>
                 <a:latin typeface="Microsoft YaHei"/>
               </a:rPr>
-              <a:t>2. 临界公式：</a:t>
-            </a:r>
-            <a:r>
-              <a:rPr sz="1150" b="1">
-                <a:solidFill>
-                  <a:srgbClr val="2563EB"/>
-                </a:solidFill>
-                <a:latin typeface="Microsoft YaHei"/>
-              </a:rPr>
-              <a:t>给出 Prefill 阶段基于读取次数与数据量的精准判决数学公式</a:t>
+              <a:t>2. 异常安全回滚：</a:t>
+            </a:r>
+            <a:r>
+              <a:rPr sz="1150" b="1">
+                <a:solidFill>
+                  <a:srgbClr val="059669"/>
+                </a:solidFill>
+                <a:latin typeface="Microsoft YaHei"/>
+              </a:rPr>
+              <a:t>远端异常时 ViewGuard 实现 100% 捕获 SIGBUS 并安全回滚至本地重算</a:t>
             </a:r>
             <a:r>
               <a:rPr sz="1150">
@@ -18352,35 +18150,7 @@
                 </a:solidFill>
                 <a:latin typeface="Microsoft YaHei"/>
               </a:rPr>
-              <a:t>；
-</a:t>
-            </a:r>
-            <a:r>
-              <a:rPr sz="1150" b="1">
-                <a:solidFill>
-                  <a:srgbClr val="1E293B"/>
-                </a:solidFill>
-                <a:latin typeface="Microsoft YaHei"/>
-              </a:rPr>
-              <a:t>3. 容错安全底线：</a:t>
-            </a:r>
-            <a:r>
-              <a:rPr sz="1150" b="1">
-                <a:solidFill>
-                  <a:srgbClr val="059669"/>
-                </a:solidFill>
-                <a:latin typeface="Microsoft YaHei"/>
-              </a:rPr>
-              <a:t>远端故障或租约失效下：0 进程挂死、0 异常崩溃、100% 安全回退到本地算力重算</a:t>
-            </a:r>
-            <a:r>
-              <a:rPr sz="1150">
-                <a:solidFill>
-                  <a:srgbClr val="1E293B"/>
-                </a:solidFill>
-                <a:latin typeface="Microsoft YaHei"/>
-              </a:rPr>
-              <a:t>。</a:t>
+              <a:t>（服务 0 崩溃）。</a:t>
             </a:r>
           </a:p>
         </p:txBody>
@@ -18427,7 +18197,6 @@
           <a:lstStyle/>
           <a:p>
             <a:pPr algn="ctr"/>
-            <a:endParaRPr/>
           </a:p>
         </p:txBody>
       </p:sp>
@@ -18471,7 +18240,6 @@
           <a:lstStyle/>
           <a:p>
             <a:pPr algn="ctr"/>
-            <a:endParaRPr/>
           </a:p>
         </p:txBody>
       </p:sp>
@@ -18518,7 +18286,7 @@
                 </a:solidFill>
                 <a:latin typeface="Microsoft YaHei"/>
               </a:rPr>
-              <a:t>PVT-03 远端直读边界与异常保护：</a:t>
+              <a:t>PVT-03 访问边界与安全容错：</a:t>
             </a:r>
             <a:r>
               <a:rPr sz="1150" b="1">
@@ -18527,7 +18295,7 @@
                 </a:solidFill>
                 <a:latin typeface="Microsoft YaHei"/>
               </a:rPr>
-              <a:t>实测明确</a:t>
+              <a:t>明确判定重读次数 &gt; 2 时必须执行显存拷贝，实测证伪 Decode 直读，</a:t>
             </a:r>
             <a:r>
               <a:rPr sz="1150" b="1">
@@ -18536,7 +18304,7 @@
                 </a:solidFill>
                 <a:latin typeface="Microsoft YaHei"/>
               </a:rPr>
-              <a:t>Decode 活跃阶段禁止远端直读</a:t>
+              <a:t>ViewGuard 实现 100% 安全捕获异常并回滚至本地重算</a:t>
             </a:r>
             <a:r>
               <a:rPr sz="1150" b="1">
@@ -18545,25 +18313,7 @@
                 </a:solidFill>
                 <a:latin typeface="Microsoft YaHei"/>
               </a:rPr>
-              <a:t>（强制走拷贝保护生成时延），界定 Prefill 直读临界公式，ViewGuard 实现 </a:t>
-            </a:r>
-            <a:r>
-              <a:rPr sz="1150" b="1">
-                <a:solidFill>
-                  <a:srgbClr val="059669"/>
-                </a:solidFill>
-                <a:latin typeface="Microsoft YaHei"/>
-              </a:rPr>
-              <a:t>0 崩溃与 100% 安全回退</a:t>
-            </a:r>
-            <a:r>
-              <a:rPr sz="1150" b="1">
-                <a:solidFill>
-                  <a:srgbClr val="0F172A"/>
-                </a:solidFill>
-                <a:latin typeface="Microsoft YaHei"/>
-              </a:rPr>
-              <a:t>。</a:t>
+              <a:t>，保障推理服务连续性。</a:t>
             </a:r>
           </a:p>
         </p:txBody>
@@ -18577,7 +18327,7 @@
 </file>
 
 <file path=ppt/slides/slide7.xml><?xml version="1.0" encoding="utf-8"?>
-<p:sld xmlns:a="http://schemas.openxmlformats.org/drawingml/2006/main" xmlns:r="http://schemas.openxmlformats.org/officeDocument/2006/relationships" xmlns:p="http://schemas.openxmlformats.org/presentationml/2006/main">
+<p:sld xmlns:a="http://schemas.openxmlformats.org/drawingml/2006/main" xmlns:p="http://schemas.openxmlformats.org/presentationml/2006/main" xmlns:r="http://schemas.openxmlformats.org/officeDocument/2006/relationships">
   <p:cSld>
     <p:bg>
       <p:bgPr>
@@ -18593,14 +18343,7 @@
         <p:cNvGrpSpPr/>
         <p:nvPr/>
       </p:nvGrpSpPr>
-      <p:grpSpPr>
-        <a:xfrm>
-          <a:off x="0" y="0"/>
-          <a:ext cx="0" cy="0"/>
-          <a:chOff x="0" y="0"/>
-          <a:chExt cx="0" cy="0"/>
-        </a:xfrm>
-      </p:grpSpPr>
+      <p:grpSpPr/>
       <p:sp>
         <p:nvSpPr>
           <p:cNvPr id="2" name="TextBox 1"/>
@@ -18632,7 +18375,7 @@
               </a:defRPr>
             </a:pPr>
             <a:r>
-              <a:t>PVT-04：微秒级动态调度决策引擎与成本预估模型验证</a:t>
+              <a:t>PVT-04：微秒级动态决策引擎与 CostEvaluator 成本模型验证</a:t>
             </a:r>
           </a:p>
           <a:p>
@@ -18648,7 +18391,7 @@
               </a:defRPr>
             </a:pPr>
             <a:r>
-              <a:t>基于实时网络遥测与算力评估，在 P99&lt;5us 内做出最优调度决策，消除拉取慢于重算的负收益现象</a:t>
+              <a:t>构建微秒调度大脑，在微秒级时间内根据链路状态、算力与上下文长度选择最优加载或重算路径，覆盖 MLA 与 MHA</a:t>
             </a:r>
           </a:p>
         </p:txBody>
@@ -18731,7 +18474,6 @@
           <a:lstStyle/>
           <a:p>
             <a:pPr algn="ctr"/>
-            <a:endParaRPr/>
           </a:p>
         </p:txBody>
       </p:sp>
@@ -18775,7 +18517,6 @@
           <a:lstStyle/>
           <a:p>
             <a:pPr algn="ctr"/>
-            <a:endParaRPr/>
           </a:p>
         </p:txBody>
       </p:sp>
@@ -18819,7 +18560,7 @@
                 </a:solidFill>
                 <a:latin typeface="Microsoft YaHei"/>
               </a:rPr>
-              <a:t>  [阶段 E2 调度决策]</a:t>
+              <a:t>  [P0 级 | 阶段 E2 核心决胜]</a:t>
             </a:r>
           </a:p>
         </p:txBody>
@@ -18870,7 +18611,7 @@
                 </a:solidFill>
                 <a:latin typeface="Microsoft YaHei"/>
               </a:rPr>
-              <a:t>物理命中（找到缓存）不等于性能提升！当网络发生拥塞或复用的前缀极短时，强行从远端拉取 KV Cache 的耗时反而会超过本地重新计算的时间，产生“负收益”。</a:t>
+              <a:t>命中缓存并不总能获得加速。对于 DeepSeek MLA (单 Token 仅 512B) 与高负载网络，若加载开销大于计算耗时，盲目拉取缓存会导致负收益。</a:t>
             </a:r>
           </a:p>
           <a:p>
@@ -18898,16 +18639,16 @@
                 </a:solidFill>
                 <a:latin typeface="Microsoft YaHei"/>
               </a:rPr>
-              <a:t>验证 QueryPlan 决策引擎能在极短时间（</a:t>
-            </a:r>
-            <a:r>
-              <a:rPr sz="1150" b="1">
-                <a:solidFill>
-                  <a:srgbClr val="2563EB"/>
-                </a:solidFill>
-                <a:latin typeface="Microsoft YaHei"/>
-              </a:rPr>
-              <a:t>P99 &lt; 5µs</a:t>
+              <a:t>验证决策引擎在微秒级时间内根据链路状态与上下文长度量化预估成本，执行 </a:t>
+            </a:r>
+            <a:r>
+              <a:rPr sz="1150" b="1">
+                <a:solidFill>
+                  <a:srgbClr val="DC2626"/>
+                </a:solidFill>
+                <a:latin typeface="Microsoft YaHei"/>
+              </a:rPr>
+              <a:t>“拉取与加载总开销 &lt; 本地直接重算耗时”</a:t>
             </a:r>
             <a:r>
               <a:rPr sz="1150">
@@ -18916,25 +18657,7 @@
                 </a:solidFill>
                 <a:latin typeface="Microsoft YaHei"/>
               </a:rPr>
-              <a:t>）内评估传输成本与算力成本，给出最优动作（直连/拉取/分层换入/本地重算）；验证 </a:t>
-            </a:r>
-            <a:r>
-              <a:rPr sz="1150" b="1">
-                <a:solidFill>
-                  <a:srgbClr val="059669"/>
-                </a:solidFill>
-                <a:latin typeface="Microsoft YaHei"/>
-              </a:rPr>
-              <a:t>CostEvaluator 成本预估准确率 ≥90%</a:t>
-            </a:r>
-            <a:r>
-              <a:rPr sz="1150">
-                <a:solidFill>
-                  <a:srgbClr val="1E293B"/>
-                </a:solidFill>
-                <a:latin typeface="Microsoft YaHei"/>
-              </a:rPr>
-              <a:t>。</a:t>
+              <a:t> 的动态前置决策，主动拦截负收益。</a:t>
             </a:r>
           </a:p>
           <a:p>
@@ -18962,7 +18685,7 @@
                 </a:solidFill>
                 <a:latin typeface="Microsoft YaHei"/>
               </a:rPr>
-              <a:t>支撑 E2 阶段调度决策能力，确保每次调度都能带来正向加速，负收益发生率严格控制在 1% 以内。</a:t>
+              <a:t>直面调度大脑核心挑战，确保系统在复杂网络拥塞与高并发下始终做出全局最优调度选择。</a:t>
             </a:r>
           </a:p>
         </p:txBody>
@@ -19009,7 +18732,6 @@
           <a:lstStyle/>
           <a:p>
             <a:pPr algn="ctr"/>
-            <a:endParaRPr/>
           </a:p>
         </p:txBody>
       </p:sp>
@@ -19053,7 +18775,6 @@
           <a:lstStyle/>
           <a:p>
             <a:pPr algn="ctr"/>
-            <a:endParaRPr/>
           </a:p>
         </p:txBody>
       </p:sp>
@@ -19139,7 +18860,7 @@
                 </a:solidFill>
                 <a:latin typeface="Microsoft YaHei"/>
               </a:rPr>
-              <a:t>• 实时遥测组件：</a:t>
+              <a:t>• 算法引擎：</a:t>
             </a:r>
             <a:r>
               <a:rPr sz="1150">
@@ -19148,7 +18869,25 @@
                 </a:solidFill>
                 <a:latin typeface="Microsoft YaHei"/>
               </a:rPr>
-              <a:t>运行 100Hz 独立后台轻量线程，通过滑动窗口（EWMA）实时采集网络带宽、时延与排队深度。</a:t>
+              <a:t>引入头文件 </a:t>
+            </a:r>
+            <a:r>
+              <a:rPr sz="1150" b="1">
+                <a:solidFill>
+                  <a:srgbClr val="1E3A8A"/>
+                </a:solidFill>
+                <a:latin typeface="Consolas"/>
+              </a:rPr>
+              <a:t>query_plan_fastpath.h</a:t>
+            </a:r>
+            <a:r>
+              <a:rPr sz="1150">
+                <a:solidFill>
+                  <a:srgbClr val="1E293B"/>
+                </a:solidFill>
+                <a:latin typeface="Microsoft YaHei"/>
+              </a:rPr>
+              <a:t>，实现基于位运算与查表的微秒级成本预估模型（CostEvaluator）。</a:t>
             </a:r>
           </a:p>
           <a:p>
@@ -19167,7 +18906,7 @@
                 </a:solidFill>
                 <a:latin typeface="Microsoft YaHei"/>
               </a:rPr>
-              <a:t>• 缓存行隔离优化：</a:t>
+              <a:t>• 性能优化：</a:t>
             </a:r>
             <a:r>
               <a:rPr sz="1150">
@@ -19176,25 +18915,7 @@
                 </a:solidFill>
                 <a:latin typeface="Microsoft YaHei"/>
               </a:rPr>
-              <a:t>关键遥测与状态结构体显式声明 64 字节对齐 </a:t>
-            </a:r>
-            <a:r>
-              <a:rPr sz="1150" b="1">
-                <a:solidFill>
-                  <a:srgbClr val="1E3A8A"/>
-                </a:solidFill>
-                <a:latin typeface="Consolas"/>
-              </a:rPr>
-              <a:t>alignas(64)</a:t>
-            </a:r>
-            <a:r>
-              <a:rPr sz="1150">
-                <a:solidFill>
-                  <a:srgbClr val="1E293B"/>
-                </a:solidFill>
-                <a:latin typeface="Microsoft YaHei"/>
-              </a:rPr>
-              <a:t>，避免多核 CPU 并发访问时产生伪共享（False Sharing）引发时延抖动。</a:t>
+              <a:t>无锁环形队列传递请求意图，单次决策全内存纯算，消除任何动态内存分配与跨线程锁争用。</a:t>
             </a:r>
           </a:p>
           <a:p>
@@ -19213,7 +18934,7 @@
                 </a:solidFill>
                 <a:latin typeface="Microsoft YaHei"/>
               </a:rPr>
-              <a:t>• 运行环境：</a:t>
+              <a:t>• 多模型覆盖：</a:t>
             </a:r>
             <a:r>
               <a:rPr sz="1150">
@@ -19222,25 +18943,7 @@
                 </a:solidFill>
                 <a:latin typeface="Microsoft YaHei"/>
               </a:rPr>
-              <a:t>标准 Linux 6.6+，POSIX 共享内存，</a:t>
-            </a:r>
-            <a:r>
-              <a:rPr sz="1150">
-                <a:solidFill>
-                  <a:srgbClr val="1E3A8A"/>
-                </a:solidFill>
-                <a:latin typeface="Consolas"/>
-              </a:rPr>
-              <a:t>g++ -O3 -march=native -lpthread</a:t>
-            </a:r>
-            <a:r>
-              <a:rPr sz="1150">
-                <a:solidFill>
-                  <a:srgbClr val="1E293B"/>
-                </a:solidFill>
-                <a:latin typeface="Microsoft YaHei"/>
-              </a:rPr>
-              <a:t>。</a:t>
+              <a:t>内置 DeepSeek MLA (512B) 与 Qwen MHA (320KB) 双轨成本系数表。</a:t>
             </a:r>
           </a:p>
         </p:txBody>
@@ -19287,7 +18990,6 @@
           <a:lstStyle/>
           <a:p>
             <a:pPr algn="ctr"/>
-            <a:endParaRPr/>
           </a:p>
         </p:txBody>
       </p:sp>
@@ -19331,7 +19033,6 @@
           <a:lstStyle/>
           <a:p>
             <a:pPr algn="ctr"/>
-            <a:endParaRPr/>
           </a:p>
         </p:txBody>
       </p:sp>
@@ -19417,7 +19118,7 @@
                 </a:solidFill>
                 <a:latin typeface="Microsoft YaHei"/>
               </a:rPr>
-              <a:t>• 高并发压测 (query_plan_bench.cc)：</a:t>
+              <a:t>• 决策吞吐压测 (query_plan_bench.cc)：</a:t>
             </a:r>
             <a:r>
               <a:rPr sz="1150">
@@ -19426,7 +19127,7 @@
                 </a:solidFill>
                 <a:latin typeface="Microsoft YaHei"/>
               </a:rPr>
-              <a:t>模拟 10 万 QPS 并发查询，输入不同前缀长度 (16~128K)、SLA Deadline 与网络拥塞矩阵。</a:t>
+              <a:t>在单核与多核下压测 100K QPS 高并发决策吞吐，测量 P50/P99 决策时延。</a:t>
             </a:r>
           </a:p>
           <a:p>
@@ -19454,7 +19155,7 @@
                 </a:solidFill>
                 <a:latin typeface="Microsoft YaHei"/>
               </a:rPr>
-              <a:t>对同一批请求同时执行“选中的策略”与“相反的策略”，记录实际执行时间，检验决策是否确实是最优解。</a:t>
+              <a:t>采集 10 万条真实推理轨迹，将决策引擎给出的选择与事后实测耗时进行离线反事实交叉对比。</a:t>
             </a:r>
           </a:p>
           <a:p>
@@ -19473,7 +19174,7 @@
                 </a:solidFill>
                 <a:latin typeface="Microsoft YaHei"/>
               </a:rPr>
-              <a:t>• 极端拥塞注入：</a:t>
+              <a:t>• 负收益拦截率验证：</a:t>
             </a:r>
             <a:r>
               <a:rPr sz="1150">
@@ -19482,7 +19183,7 @@
                 </a:solidFill>
                 <a:latin typeface="Microsoft YaHei"/>
               </a:rPr>
-              <a:t>注入 800G 网络 90% 拥塞与 &lt;64 tokens 短前缀场景，验证负收益请求拦截率。</a:t>
+              <a:t>在网络拥塞与高负载扰动下，验证系统是否准确放弃拉取、主动回退至本地直接重算。</a:t>
             </a:r>
           </a:p>
         </p:txBody>
@@ -19529,7 +19230,6 @@
           <a:lstStyle/>
           <a:p>
             <a:pPr algn="ctr"/>
-            <a:endParaRPr/>
           </a:p>
         </p:txBody>
       </p:sp>
@@ -19573,7 +19273,6 @@
           <a:lstStyle/>
           <a:p>
             <a:pPr algn="ctr"/>
-            <a:endParaRPr/>
           </a:p>
         </p:txBody>
       </p:sp>
@@ -19668,7 +19367,7 @@
                 </a:solidFill>
                 <a:latin typeface="Microsoft YaHei"/>
               </a:rPr>
-              <a:t>《QueryPlan 决策耗时分位表 (P50/P90/P99)》、《成本预估 vs 真实耗时对账表》、《负收益拦截率统计表》。</a:t>
+              <a:t>《微秒级决策时延分布表》、《MLA/MHA 决策准确率矩阵》、《负收益主动拦截率报告》。</a:t>
             </a:r>
           </a:p>
           <a:p>
@@ -19696,7 +19395,7 @@
                 </a:solidFill>
                 <a:latin typeface="Microsoft YaHei"/>
               </a:rPr>
-              <a:t>1. 决策耗时门禁：</a:t>
+              <a:t>1. 极低决策开销：</a:t>
             </a:r>
             <a:r>
               <a:rPr sz="1150" b="1">
@@ -19705,7 +19404,7 @@
                 </a:solidFill>
                 <a:latin typeface="Microsoft YaHei"/>
               </a:rPr>
-              <a:t>在 10 万 QPS 高并发查询下，单次决策耗时 P99 &lt; 5µs</a:t>
+              <a:t>单次选路决策耗时 P99 &lt; 5µs，决策吞吐 ≥ 50,000 QPS</a:t>
             </a:r>
             <a:r>
               <a:rPr sz="1150">
@@ -19724,7 +19423,7 @@
                 </a:solidFill>
                 <a:latin typeface="Microsoft YaHei"/>
               </a:rPr>
-              <a:t>2. 成本预测精度：</a:t>
+              <a:t>2. 决策准确率：</a:t>
             </a:r>
             <a:r>
               <a:rPr sz="1150" b="1">
@@ -19733,7 +19432,7 @@
                 </a:solidFill>
                 <a:latin typeface="Microsoft YaHei"/>
               </a:rPr>
-              <a:t>成本预估误差 MAPE &lt; 20%，调度动作准确率 ≥ 90%</a:t>
+              <a:t>决策命中推荐与最优路径对齐率 ≥ 90%</a:t>
             </a:r>
             <a:r>
               <a:rPr sz="1150">
@@ -19752,16 +19451,16 @@
                 </a:solidFill>
                 <a:latin typeface="Microsoft YaHei"/>
               </a:rPr>
-              <a:t>3. 负收益控制：</a:t>
-            </a:r>
-            <a:r>
-              <a:rPr sz="1150" b="1">
-                <a:solidFill>
-                  <a:srgbClr val="DC2626"/>
-                </a:solidFill>
-                <a:latin typeface="Microsoft YaHei"/>
-              </a:rPr>
-              <a:t>误选了远端拉取但实际慢于本地重算的“负收益发生率”严格 &lt; 1%</a:t>
+              <a:t>3. 负收益拦截：</a:t>
+            </a:r>
+            <a:r>
+              <a:rPr sz="1150" b="1">
+                <a:solidFill>
+                  <a:srgbClr val="2563EB"/>
+                </a:solidFill>
+                <a:latin typeface="Microsoft YaHei"/>
+              </a:rPr>
+              <a:t>在负收益场景下主动回退率 100%，错误决策率 &lt; 1%</a:t>
             </a:r>
             <a:r>
               <a:rPr sz="1150">
@@ -19817,7 +19516,6 @@
           <a:lstStyle/>
           <a:p>
             <a:pPr algn="ctr"/>
-            <a:endParaRPr/>
           </a:p>
         </p:txBody>
       </p:sp>
@@ -19861,7 +19559,6 @@
           <a:lstStyle/>
           <a:p>
             <a:pPr algn="ctr"/>
-            <a:endParaRPr/>
           </a:p>
         </p:txBody>
       </p:sp>
@@ -19908,7 +19605,7 @@
                 </a:solidFill>
                 <a:latin typeface="Microsoft YaHei"/>
               </a:rPr>
-              <a:t>PVT-04 微秒级动态决策与负收益消除：</a:t>
+              <a:t>PVT-04 微秒动态调度大脑：</a:t>
             </a:r>
             <a:r>
               <a:rPr sz="1150" b="1">
@@ -19917,7 +19614,7 @@
                 </a:solidFill>
                 <a:latin typeface="Microsoft YaHei"/>
               </a:rPr>
-              <a:t>在 10 万 QPS 并发下达成 </a:t>
+              <a:t>单次选路决策耗时 </a:t>
             </a:r>
             <a:r>
               <a:rPr sz="1150" b="1">
@@ -19926,7 +19623,7 @@
                 </a:solidFill>
                 <a:latin typeface="Microsoft YaHei"/>
               </a:rPr>
-              <a:t>P99 &lt; 5µs 决策时延</a:t>
+              <a:t>P99 &lt; 5µs</a:t>
             </a:r>
             <a:r>
               <a:rPr sz="1150" b="1">
@@ -19935,7 +19632,7 @@
                 </a:solidFill>
                 <a:latin typeface="Microsoft YaHei"/>
               </a:rPr>
-              <a:t> 与 </a:t>
+              <a:t>，决策准确率达到 </a:t>
             </a:r>
             <a:r>
               <a:rPr sz="1150" b="1">
@@ -19944,7 +19641,7 @@
                 </a:solidFill>
                 <a:latin typeface="Microsoft YaHei"/>
               </a:rPr>
-              <a:t>≥90% 决策准确率</a:t>
+              <a:t>≥90%</a:t>
             </a:r>
             <a:r>
               <a:rPr sz="1150" b="1">
@@ -19953,25 +19650,7 @@
                 </a:solidFill>
                 <a:latin typeface="Microsoft YaHei"/>
               </a:rPr>
-              <a:t>，将负收益发生率控制在 </a:t>
-            </a:r>
-            <a:r>
-              <a:rPr sz="1150" b="1">
-                <a:solidFill>
-                  <a:srgbClr val="059669"/>
-                </a:solidFill>
-                <a:latin typeface="Microsoft YaHei"/>
-              </a:rPr>
-              <a:t>严格 &lt;1%</a:t>
-            </a:r>
-            <a:r>
-              <a:rPr sz="1150" b="1">
-                <a:solidFill>
-                  <a:srgbClr val="0F172A"/>
-                </a:solidFill>
-                <a:latin typeface="Microsoft YaHei"/>
-              </a:rPr>
-              <a:t>，达到阶段 E2 调度要求。</a:t>
+              <a:t>，负收益加载拦截率 100%，确保任意网络状态下系统收益为正。</a:t>
             </a:r>
           </a:p>
         </p:txBody>
@@ -19985,7 +19664,7 @@
 </file>
 
 <file path=ppt/slides/slide8.xml><?xml version="1.0" encoding="utf-8"?>
-<p:sld xmlns:a="http://schemas.openxmlformats.org/drawingml/2006/main" xmlns:r="http://schemas.openxmlformats.org/officeDocument/2006/relationships" xmlns:p="http://schemas.openxmlformats.org/presentationml/2006/main">
+<p:sld xmlns:a="http://schemas.openxmlformats.org/drawingml/2006/main" xmlns:p="http://schemas.openxmlformats.org/presentationml/2006/main" xmlns:r="http://schemas.openxmlformats.org/officeDocument/2006/relationships">
   <p:cSld>
     <p:bg>
       <p:bgPr>
@@ -20001,14 +19680,7 @@
         <p:cNvGrpSpPr/>
         <p:nvPr/>
       </p:nvGrpSpPr>
-      <p:grpSpPr>
-        <a:xfrm>
-          <a:off x="0" y="0"/>
-          <a:ext cx="0" cy="0"/>
-          <a:chOff x="0" y="0"/>
-          <a:chExt cx="0" cy="0"/>
-        </a:xfrm>
-      </p:grpSpPr>
+      <p:grpSpPr/>
       <p:sp>
         <p:nvSpPr>
           <p:cNvPr id="2" name="TextBox 1"/>
@@ -20040,7 +19712,7 @@
               </a:defRPr>
             </a:pPr>
             <a:r>
-              <a:t>PVT-05：显存-SSD 直达存储扩展与内存分层机制验证</a:t>
+              <a:t>PVT-05：HBM-SSD 直达容量主路径与分层存储扩容验证</a:t>
             </a:r>
           </a:p>
           <a:p>
@@ -20056,7 +19728,7 @@
               </a:defRPr>
             </a:pPr>
             <a:r>
-              <a:t>验证 150% 显存超载下服务容量提升≥30%、OOM 下降≥50%，数据传输完全绕过主机内存</a:t>
+              <a:t>对标 Mooncake 原生文件级 SSD Offload，验证 Linux 6.6+ io_uring 裸盘直达容量主路径与显存超载分层扩容</a:t>
             </a:r>
           </a:p>
         </p:txBody>
@@ -20139,7 +19811,6 @@
           <a:lstStyle/>
           <a:p>
             <a:pPr algn="ctr"/>
-            <a:endParaRPr/>
           </a:p>
         </p:txBody>
       </p:sp>
@@ -20183,7 +19854,6 @@
           <a:lstStyle/>
           <a:p>
             <a:pPr algn="ctr"/>
-            <a:endParaRPr/>
           </a:p>
         </p:txBody>
       </p:sp>
@@ -20227,7 +19897,7 @@
                 </a:solidFill>
                 <a:latin typeface="Microsoft YaHei"/>
               </a:rPr>
-              <a:t>  [阶段 E2/E3 容量扩展]</a:t>
+              <a:t>  [P0 级 | 阶段 E2 核心决胜]</a:t>
             </a:r>
           </a:p>
         </p:txBody>
@@ -20278,7 +19948,7 @@
                 </a:solidFill>
                 <a:latin typeface="Microsoft YaHei"/>
               </a:rPr>
-              <a:t>NPU 显存容量昂贵且有限，长文本并发推理时极易发生显存不足（OOM），导致请求被中断或重新计算；若经由主机内存（Host DDR）中转，会占用大量 CPU 资源与内存带宽。</a:t>
+              <a:t>大模型长文本推理极易引发显存不足（OOM）。Mooncake 原生采用文件系统级 SSD Offload，存在 OS 页缓存与内核拷贝开销，无法充分发挥 Gen5 SSD 性能。</a:t>
             </a:r>
           </a:p>
           <a:p>
@@ -20306,16 +19976,16 @@
                 </a:solidFill>
                 <a:latin typeface="Microsoft YaHei"/>
               </a:rPr>
-              <a:t>验证 </a:t>
-            </a:r>
-            <a:r>
-              <a:rPr sz="1150" b="1">
-                <a:solidFill>
-                  <a:srgbClr val="2563EB"/>
-                </a:solidFill>
-                <a:latin typeface="Microsoft YaHei"/>
-              </a:rPr>
-              <a:t>NPU 显存与 NVMe SSD 之间的直达读写通路</a:t>
+              <a:t>验证分层块分配器（TierBlockAllocator）管理 4KB 对齐裸盘扇区，通过 io_uring FIXED I/O 实现 </a:t>
+            </a:r>
+            <a:r>
+              <a:rPr sz="1150" b="1">
+                <a:solidFill>
+                  <a:srgbClr val="DC2626"/>
+                </a:solidFill>
+                <a:latin typeface="Microsoft YaHei"/>
+              </a:rPr>
+              <a:t>数据在 NVMe SSD 与显存间流转（严格绕过主机内存 Host DDR）</a:t>
             </a:r>
             <a:r>
               <a:rPr sz="1150">
@@ -20324,25 +19994,7 @@
                 </a:solidFill>
                 <a:latin typeface="Microsoft YaHei"/>
               </a:rPr>
-              <a:t>；在 130%~200% 显存超载压力下验证系统并发承载容量；证明 </a:t>
-            </a:r>
-            <a:r>
-              <a:rPr sz="1150" b="1">
-                <a:solidFill>
-                  <a:srgbClr val="DC2626"/>
-                </a:solidFill>
-                <a:latin typeface="Microsoft YaHei"/>
-              </a:rPr>
-              <a:t>数据传输完全绕过主机内存</a:t>
-            </a:r>
-            <a:r>
-              <a:rPr sz="1150">
-                <a:solidFill>
-                  <a:srgbClr val="1E293B"/>
-                </a:solidFill>
-                <a:latin typeface="Microsoft YaHei"/>
-              </a:rPr>
-              <a:t>（DDR 仅存放元数据）。</a:t>
+              <a:t>；验证显存超载下的平滑扩容能力。</a:t>
             </a:r>
           </a:p>
           <a:p>
@@ -20370,7 +20022,7 @@
                 </a:solidFill>
                 <a:latin typeface="Microsoft YaHei"/>
               </a:rPr>
-              <a:t>支撑 E2/E3 阶段的容量扩展，提升系统对长文本大并发请求的承载能力，降低显存硬件成本。</a:t>
+              <a:t>确立廉价大容量 SSD 作为容量扩展主路径，大幅降低服务器采购能耗与 TCO 成本。</a:t>
             </a:r>
           </a:p>
         </p:txBody>
@@ -20417,7 +20069,6 @@
           <a:lstStyle/>
           <a:p>
             <a:pPr algn="ctr"/>
-            <a:endParaRPr/>
           </a:p>
         </p:txBody>
       </p:sp>
@@ -20461,7 +20112,6 @@
           <a:lstStyle/>
           <a:p>
             <a:pPr algn="ctr"/>
-            <a:endParaRPr/>
           </a:p>
         </p:txBody>
       </p:sp>
@@ -20556,7 +20206,7 @@
                 </a:solidFill>
                 <a:latin typeface="Microsoft YaHei"/>
               </a:rPr>
-              <a:t>每台服务器配置 4 块 NVMe PCIe Gen5 SSD 盘组（标称顺序读带宽 28GB/s），8 张 NPU (96GB 显存)。</a:t>
+              <a:t>4× NVMe PCIe Gen5 SSD 阵列，格式化为裸块设备（/dev/nvme0n1），顺序读标称 28 GB/s。</a:t>
             </a:r>
           </a:p>
           <a:p>
@@ -20575,7 +20225,7 @@
                 </a:solidFill>
                 <a:latin typeface="Microsoft YaHei"/>
               </a:rPr>
-              <a:t>• 驱动与访问方式：</a:t>
+              <a:t>• 驱动与内核规范：</a:t>
             </a:r>
             <a:r>
               <a:rPr sz="1150">
@@ -20584,7 +20234,7 @@
                 </a:solidFill>
                 <a:latin typeface="Microsoft YaHei"/>
               </a:rPr>
-              <a:t>Linux 6.6+ 内核 </a:t>
+              <a:t>Linux 6.6+ 内核，引入头文件 </a:t>
             </a:r>
             <a:r>
               <a:rPr sz="1150" b="1">
@@ -20593,7 +20243,7 @@
                 </a:solidFill>
                 <a:latin typeface="Consolas"/>
               </a:rPr>
-              <a:t>io_uring 裸盘读写 (O_DIRECT 直接 I/O)</a:t>
+              <a:t>&lt;liburing.h&gt;</a:t>
             </a:r>
             <a:r>
               <a:rPr sz="1150">
@@ -20602,7 +20252,7 @@
                 </a:solidFill>
                 <a:latin typeface="Microsoft YaHei"/>
               </a:rPr>
-              <a:t>，</a:t>
+              <a:t>，启用 </a:t>
             </a:r>
             <a:r>
               <a:rPr sz="1150" b="1">
@@ -20611,7 +20261,7 @@
                 </a:solidFill>
                 <a:latin typeface="Consolas"/>
               </a:rPr>
-              <a:t>TierBlockAllocator</a:t>
+              <a:t>IORING_OP_READ_FIXED / WRITE_FIXED</a:t>
             </a:r>
             <a:r>
               <a:rPr sz="1150">
@@ -20620,7 +20270,7 @@
                 </a:solidFill>
                 <a:latin typeface="Microsoft YaHei"/>
               </a:rPr>
-              <a:t> 实现 4KB 扇区物理 LBA 严格对齐分配。</a:t>
+              <a:t> 与 O_DIRECT。</a:t>
             </a:r>
           </a:p>
           <a:p>
@@ -20639,16 +20289,16 @@
                 </a:solidFill>
                 <a:latin typeface="Microsoft YaHei"/>
               </a:rPr>
-              <a:t>• 依赖库：</a:t>
-            </a:r>
-            <a:r>
-              <a:rPr sz="1150">
+              <a:t>• 编译链接参数：</a:t>
+            </a:r>
+            <a:r>
+              <a:rPr sz="1150" b="1">
                 <a:solidFill>
                   <a:srgbClr val="1E3A8A"/>
                 </a:solidFill>
                 <a:latin typeface="Consolas"/>
               </a:rPr>
-              <a:t>-luring -lascendcl -lpthread -O3</a:t>
+              <a:t>-luring -lpthread -O3</a:t>
             </a:r>
           </a:p>
         </p:txBody>
@@ -20695,7 +20345,6 @@
           <a:lstStyle/>
           <a:p>
             <a:pPr algn="ctr"/>
-            <a:endParaRPr/>
           </a:p>
         </p:txBody>
       </p:sp>
@@ -20739,7 +20388,6 @@
           <a:lstStyle/>
           <a:p>
             <a:pPr algn="ctr"/>
-            <a:endParaRPr/>
           </a:p>
         </p:txBody>
       </p:sp>
@@ -20825,7 +20473,7 @@
                 </a:solidFill>
                 <a:latin typeface="Microsoft YaHei"/>
               </a:rPr>
-              <a:t>• 显存超载压力生成 (benchmark_tiering.py)：</a:t>
+              <a:t>• 裸盘存储基准 (tier_storage_bench.cc)：</a:t>
             </a:r>
             <a:r>
               <a:rPr sz="1150">
@@ -20834,7 +20482,7 @@
                 </a:solidFill>
                 <a:latin typeface="Microsoft YaHei"/>
               </a:rPr>
-              <a:t>注入达到系统额定显存 130%、150%、180%、200% 的长文本突发请求序列。</a:t>
+              <a:t>压测 16MB/64MB 连续扇区读写，对比 io_uring Direct I/O、Host DDR 中转与 Mooncake 原生文件 offload 吞吐。</a:t>
             </a:r>
           </a:p>
           <a:p>
@@ -20853,7 +20501,7 @@
                 </a:solidFill>
                 <a:latin typeface="Microsoft YaHei"/>
               </a:rPr>
-              <a:t>• 介质性能压测 (tier_storage_bench.cc)：</a:t>
+              <a:t>• 显存超载打流压测 (benchmark_tiering.py)：</a:t>
             </a:r>
             <a:r>
               <a:rPr sz="1150">
@@ -20862,7 +20510,7 @@
                 </a:solidFill>
                 <a:latin typeface="Microsoft YaHei"/>
               </a:rPr>
-              <a:t>测试 4KB~16MB 块大小下，SSD 裸盘读写、主机内存中转对比组以及显存直达换入换出的带宽。</a:t>
+              <a:t>在 150%~200% HBM 显存超载压力下，验证高低水位线 (85%/65%) 驱动的冷数据异步换出与热数据换入。</a:t>
             </a:r>
           </a:p>
           <a:p>
@@ -20881,7 +20529,7 @@
                 </a:solidFill>
                 <a:latin typeface="Microsoft YaHei"/>
               </a:rPr>
-              <a:t>• 驱逐率统计：</a:t>
+              <a:t>• OOM 与请求驱逐统计：</a:t>
             </a:r>
             <a:r>
               <a:rPr sz="1150">
@@ -20890,7 +20538,7 @@
                 </a:solidFill>
                 <a:latin typeface="Microsoft YaHei"/>
               </a:rPr>
-              <a:t>统计显存超载场景下，请求被中断驱逐（Preemption）的比例与 OOM 发生次数。</a:t>
+              <a:t>记录超载场景下的请求成功率、OOM 发生次数与并发服务请求数。</a:t>
             </a:r>
           </a:p>
         </p:txBody>
@@ -20937,7 +20585,6 @@
           <a:lstStyle/>
           <a:p>
             <a:pPr algn="ctr"/>
-            <a:endParaRPr/>
           </a:p>
         </p:txBody>
       </p:sp>
@@ -20981,7 +20628,6 @@
           <a:lstStyle/>
           <a:p>
             <a:pPr algn="ctr"/>
-            <a:endParaRPr/>
           </a:p>
         </p:txBody>
       </p:sp>
@@ -21076,7 +20722,7 @@
                 </a:solidFill>
                 <a:latin typeface="Microsoft YaHei"/>
               </a:rPr>
-              <a:t>《显存与 SSD 直达读写带宽表》、《显存超载下分层扩容与 OOM 对比表》、《主机内存绕行监控报告》。</a:t>
+              <a:t>《SSD 裸盘直达读写带宽表》、《150% 显存超载扩容评测报告》、《OOM 与驱逐率消融对比图》。</a:t>
             </a:r>
           </a:p>
           <a:p>
@@ -21104,16 +20750,16 @@
                 </a:solidFill>
                 <a:latin typeface="Microsoft YaHei"/>
               </a:rPr>
-              <a:t>1. 直达带宽：</a:t>
-            </a:r>
-            <a:r>
-              <a:rPr sz="1150" b="1">
-                <a:solidFill>
-                  <a:srgbClr val="059669"/>
-                </a:solidFill>
-                <a:latin typeface="Microsoft YaHei"/>
-              </a:rPr>
-              <a:t>显存-SSD 直达带宽达到物理裸盘峰值的 ≥ 80%</a:t>
+              <a:t>1. 容量扩展能力：</a:t>
+            </a:r>
+            <a:r>
+              <a:rPr sz="1150" b="1">
+                <a:solidFill>
+                  <a:srgbClr val="DC2626"/>
+                </a:solidFill>
+                <a:latin typeface="Microsoft YaHei"/>
+              </a:rPr>
+              <a:t>在 150% 显存超载下，系统支持的可服务 Token 容量提升 ≥ 30%</a:t>
             </a:r>
             <a:r>
               <a:rPr sz="1150">
@@ -21132,16 +20778,16 @@
                 </a:solidFill>
                 <a:latin typeface="Microsoft YaHei"/>
               </a:rPr>
-              <a:t>2. 超载容量：</a:t>
-            </a:r>
-            <a:r>
-              <a:rPr sz="1150" b="1">
-                <a:solidFill>
-                  <a:srgbClr val="DC2626"/>
-                </a:solidFill>
-                <a:latin typeface="Microsoft YaHei"/>
-              </a:rPr>
-              <a:t>150% 显存超载下，系统服务 Token 容量提升 ≥ 30%</a:t>
+              <a:t>2. OOM 发生率：</a:t>
+            </a:r>
+            <a:r>
+              <a:rPr sz="1150" b="1">
+                <a:solidFill>
+                  <a:srgbClr val="059669"/>
+                </a:solidFill>
+                <a:latin typeface="Microsoft YaHei"/>
+              </a:rPr>
+              <a:t>显存超载下请求因显存不足导致的 OOM 发生率降低 ≥ 50%</a:t>
             </a:r>
             <a:r>
               <a:rPr sz="1150">
@@ -21160,35 +20806,7 @@
                 </a:solidFill>
                 <a:latin typeface="Microsoft YaHei"/>
               </a:rPr>
-              <a:t>3. 驱逐下降：</a:t>
-            </a:r>
-            <a:r>
-              <a:rPr sz="1150" b="1">
-                <a:solidFill>
-                  <a:srgbClr val="DC2626"/>
-                </a:solidFill>
-                <a:latin typeface="Microsoft YaHei"/>
-              </a:rPr>
-              <a:t>超载引发的 OOM 与请求中断驱逐率下降 ≥ 50%</a:t>
-            </a:r>
-            <a:r>
-              <a:rPr sz="1150">
-                <a:solidFill>
-                  <a:srgbClr val="1E293B"/>
-                </a:solidFill>
-                <a:latin typeface="Microsoft YaHei"/>
-              </a:rPr>
-              <a:t>；
-</a:t>
-            </a:r>
-            <a:r>
-              <a:rPr sz="1150" b="1">
-                <a:solidFill>
-                  <a:srgbClr val="1E293B"/>
-                </a:solidFill>
-                <a:latin typeface="Microsoft YaHei"/>
-              </a:rPr>
-              <a:t>4. 内存绕行：</a:t>
+              <a:t>3. 硬件线速与零 DDR 拷贝：</a:t>
             </a:r>
             <a:r>
               <a:rPr sz="1150" b="1">
@@ -21197,7 +20815,7 @@
                 </a:solidFill>
                 <a:latin typeface="Microsoft YaHei"/>
               </a:rPr>
-              <a:t>数据搬运完全绕过主机内存（Host 零拷贝）</a:t>
+              <a:t>SSD 顺序读吞吐达到硬件物理线速 ≥ 80%，全程绕过 Host DDR</a:t>
             </a:r>
             <a:r>
               <a:rPr sz="1150">
@@ -21253,7 +20871,6 @@
           <a:lstStyle/>
           <a:p>
             <a:pPr algn="ctr"/>
-            <a:endParaRPr/>
           </a:p>
         </p:txBody>
       </p:sp>
@@ -21297,7 +20914,6 @@
           <a:lstStyle/>
           <a:p>
             <a:pPr algn="ctr"/>
-            <a:endParaRPr/>
           </a:p>
         </p:txBody>
       </p:sp>
@@ -21344,7 +20960,7 @@
                 </a:solidFill>
                 <a:latin typeface="Microsoft YaHei"/>
               </a:rPr>
-              <a:t>PVT-05 分层容量扩展与超载承载：</a:t>
+              <a:t>PVT-05 裸盘直达与容量扩容：</a:t>
             </a:r>
             <a:r>
               <a:rPr sz="1150" b="1">
@@ -21353,7 +20969,7 @@
                 </a:solidFill>
                 <a:latin typeface="Microsoft YaHei"/>
               </a:rPr>
-              <a:t>确立显存与 SSD 直达通路并完全绕过主机内存，在 150% 超载下实现 </a:t>
+              <a:t>在 150% 显存超载下可服务容量提升 </a:t>
             </a:r>
             <a:r>
               <a:rPr sz="1150" b="1">
@@ -21362,7 +20978,7 @@
                 </a:solidFill>
                 <a:latin typeface="Microsoft YaHei"/>
               </a:rPr>
-              <a:t>容量提升 ≥30%</a:t>
+              <a:t>≥30%</a:t>
             </a:r>
             <a:r>
               <a:rPr sz="1150" b="1">
@@ -21371,7 +20987,7 @@
                 </a:solidFill>
                 <a:latin typeface="Microsoft YaHei"/>
               </a:rPr>
-              <a:t>、</a:t>
+              <a:t>，OOM 错误降低 </a:t>
             </a:r>
             <a:r>
               <a:rPr sz="1150" b="1">
@@ -21380,7 +20996,7 @@
                 </a:solidFill>
                 <a:latin typeface="Microsoft YaHei"/>
               </a:rPr>
-              <a:t>OOM 降低 ≥50%</a:t>
+              <a:t>≥50%</a:t>
             </a:r>
             <a:r>
               <a:rPr sz="1150" b="1">
@@ -21389,25 +21005,7 @@
                 </a:solidFill>
                 <a:latin typeface="Microsoft YaHei"/>
               </a:rPr>
-              <a:t>，直达带宽达到 </a:t>
-            </a:r>
-            <a:r>
-              <a:rPr sz="1150" b="1">
-                <a:solidFill>
-                  <a:srgbClr val="059669"/>
-                </a:solidFill>
-                <a:latin typeface="Microsoft YaHei"/>
-              </a:rPr>
-              <a:t>裸盘峰值 ≥80%</a:t>
-            </a:r>
-            <a:r>
-              <a:rPr sz="1150" b="1">
-                <a:solidFill>
-                  <a:srgbClr val="0F172A"/>
-                </a:solidFill>
-                <a:latin typeface="Microsoft YaHei"/>
-              </a:rPr>
-              <a:t>。</a:t>
+              <a:t>，SSD 读写达到物理线速 ≥80% 且全程绕过 Host DDR，确立容量主路径。</a:t>
             </a:r>
           </a:p>
         </p:txBody>
@@ -21421,7 +21019,7 @@
 </file>
 
 <file path=ppt/slides/slide9.xml><?xml version="1.0" encoding="utf-8"?>
-<p:sld xmlns:a="http://schemas.openxmlformats.org/drawingml/2006/main" xmlns:r="http://schemas.openxmlformats.org/officeDocument/2006/relationships" xmlns:p="http://schemas.openxmlformats.org/presentationml/2006/main">
+<p:sld xmlns:a="http://schemas.openxmlformats.org/drawingml/2006/main" xmlns:p="http://schemas.openxmlformats.org/presentationml/2006/main" xmlns:r="http://schemas.openxmlformats.org/officeDocument/2006/relationships">
   <p:cSld>
     <p:bg>
       <p:bgPr>
@@ -21437,14 +21035,7 @@
         <p:cNvGrpSpPr/>
         <p:nvPr/>
       </p:nvGrpSpPr>
-      <p:grpSpPr>
-        <a:xfrm>
-          <a:off x="0" y="0"/>
-          <a:ext cx="0" cy="0"/>
-          <a:chOff x="0" y="0"/>
-          <a:chExt cx="0" cy="0"/>
-        </a:xfrm>
-      </p:grpSpPr>
+      <p:grpSpPr/>
       <p:sp>
         <p:nvSpPr>
           <p:cNvPr id="2" name="TextBox 1"/>
@@ -21476,7 +21067,7 @@
               </a:defRPr>
             </a:pPr>
             <a:r>
-              <a:t>PVT-06：KV 缓存可消费语义校验与多卡状态同步验证</a:t>
+              <a:t>PVT-06：多维度语义一致性强校验与 TP=8 多卡状态同步验证</a:t>
             </a:r>
           </a:p>
           <a:p>
@@ -21492,7 +21083,7 @@
               </a:defRPr>
             </a:pPr>
             <a:r>
-              <a:t>基于 xxHash64 进行 6 维语义校验防止误用，张量并行(TP=8)多卡状态同步耗时 P99&lt;100us</a:t>
+              <a:t>验证 6 维语义微秒级合法性强校验（杜绝陈旧失效读取）与张量并行多卡共享内存状态同步 (P99 &lt; 100µs)</a:t>
             </a:r>
           </a:p>
         </p:txBody>
@@ -21575,7 +21166,6 @@
           <a:lstStyle/>
           <a:p>
             <a:pPr algn="ctr"/>
-            <a:endParaRPr/>
           </a:p>
         </p:txBody>
       </p:sp>
@@ -21619,7 +21209,6 @@
           <a:lstStyle/>
           <a:p>
             <a:pPr algn="ctr"/>
-            <a:endParaRPr/>
           </a:p>
         </p:txBody>
       </p:sp>
@@ -21663,7 +21252,7 @@
                 </a:solidFill>
                 <a:latin typeface="Microsoft YaHei"/>
               </a:rPr>
-              <a:t>  [阶段 E1 正确性保障]</a:t>
+              <a:t>  [P0 级 | 阶段 E1 核心决胜]</a:t>
             </a:r>
           </a:p>
         </p:txBody>
@@ -21714,7 +21303,7 @@
                 </a:solidFill>
                 <a:latin typeface="Microsoft YaHei"/>
               </a:rPr>
-              <a:t>物理上找到 KV 缓存不代表可以安全使用！若拉取的 KV 来自不同模型版本、Tokenizer 分词规则变动或对话模板不一致，强行使用会导致模型输出乱码；多卡并行下若状态不同步还会引发死锁。</a:t>
+              <a:t>跨节点共享 KV 极易因模型版本、词表、提示词模板漂移或半写脏块导致错误消费；在 TP=8 多卡并行下，各卡状态不一致会触发集合通信死锁。</a:t>
             </a:r>
           </a:p>
           <a:p>
@@ -21742,7 +21331,7 @@
                 </a:solidFill>
                 <a:latin typeface="Microsoft YaHei"/>
               </a:rPr>
-              <a:t>验证 6 维元数据语义校验机制，在发生冲突时准确拦截（</a:t>
+              <a:t>验证消费资格校验引擎（ConsumeEligibility）执行 6 维语义微秒级检查；验证基于 POSIX 共享内存的 </a:t>
             </a:r>
             <a:r>
               <a:rPr sz="1150" b="1">
@@ -21751,7 +21340,7 @@
                 </a:solidFill>
                 <a:latin typeface="Microsoft YaHei"/>
               </a:rPr>
-              <a:t>0 错误/过期/不匹配消费</a:t>
+              <a:t>张量并行多卡状态同步机制（TP=8 多卡状态同步耗时 P99 &lt; 100µs）</a:t>
             </a:r>
             <a:r>
               <a:rPr sz="1150">
@@ -21760,25 +21349,7 @@
                 </a:solidFill>
                 <a:latin typeface="Microsoft YaHei"/>
               </a:rPr>
-              <a:t>）；验证张量并行（</a:t>
-            </a:r>
-            <a:r>
-              <a:rPr sz="1150" b="1">
-                <a:solidFill>
-                  <a:srgbClr val="2563EB"/>
-                </a:solidFill>
-                <a:latin typeface="Microsoft YaHei"/>
-              </a:rPr>
-              <a:t>TP=8 多卡状态同步耗时 P99 &lt; 100µs</a:t>
-            </a:r>
-            <a:r>
-              <a:rPr sz="1150">
-                <a:solidFill>
-                  <a:srgbClr val="1E293B"/>
-                </a:solidFill>
-                <a:latin typeface="Microsoft YaHei"/>
-              </a:rPr>
-              <a:t>）以及协同安全回退机制。</a:t>
+              <a:t>。</a:t>
             </a:r>
           </a:p>
           <a:p>
@@ -21806,7 +21377,7 @@
                 </a:solidFill>
                 <a:latin typeface="Microsoft YaHei"/>
               </a:rPr>
-              <a:t>确保分布式并行加速下模型输出内容的 100% 逻辑正确性，杜绝多卡死锁，守住功能正确性底线。</a:t>
+              <a:t>筑牢生产级系统正确性底线，彻底杜绝脏读，杜绝多卡集合通信死锁。</a:t>
             </a:r>
           </a:p>
         </p:txBody>
@@ -21853,7 +21424,6 @@
           <a:lstStyle/>
           <a:p>
             <a:pPr algn="ctr"/>
-            <a:endParaRPr/>
           </a:p>
         </p:txBody>
       </p:sp>
@@ -21897,7 +21467,6 @@
           <a:lstStyle/>
           <a:p>
             <a:pPr algn="ctr"/>
-            <a:endParaRPr/>
           </a:p>
         </p:txBody>
       </p:sp>
@@ -21983,7 +21552,7 @@
                 </a:solidFill>
                 <a:latin typeface="Microsoft YaHei"/>
               </a:rPr>
-              <a:t>• 校验算法：</a:t>
+              <a:t>• 语义校验引擎：</a:t>
             </a:r>
             <a:r>
               <a:rPr sz="1150">
@@ -21992,7 +21561,7 @@
                 </a:solidFill>
                 <a:latin typeface="Microsoft YaHei"/>
               </a:rPr>
-              <a:t>统一采用 64 位高效哈希算法 </a:t>
+              <a:t>引入头文件 </a:t>
             </a:r>
             <a:r>
               <a:rPr sz="1150" b="1">
@@ -22001,7 +21570,7 @@
                 </a:solidFill>
                 <a:latin typeface="Consolas"/>
               </a:rPr>
-              <a:t>xxHash64 (XXH64)</a:t>
+              <a:t>consume_eligibility.h</a:t>
             </a:r>
             <a:r>
               <a:rPr sz="1150">
@@ -22010,7 +21579,25 @@
                 </a:solidFill>
                 <a:latin typeface="Microsoft YaHei"/>
               </a:rPr>
-              <a:t> 对 Tokenizer 分词表与 ChatTemplate 对话模板进行哈希校验，模型名称规范化匹配。</a:t>
+              <a:t>，采用 </a:t>
+            </a:r>
+            <a:r>
+              <a:rPr sz="1150" b="1">
+                <a:solidFill>
+                  <a:srgbClr val="1E3A8A"/>
+                </a:solidFill>
+                <a:latin typeface="Consolas"/>
+              </a:rPr>
+              <a:t>xxHash64</a:t>
+            </a:r>
+            <a:r>
+              <a:rPr sz="1150">
+                <a:solidFill>
+                  <a:srgbClr val="1E293B"/>
+                </a:solidFill>
+                <a:latin typeface="Microsoft YaHei"/>
+              </a:rPr>
+              <a:t> 对模型架构、Tokenizer 词表、Prompt 模板、LoRA 适配器及租约执行微秒级校验。</a:t>
             </a:r>
           </a:p>
           <a:p>
@@ -22029,7 +21616,7 @@
                 </a:solidFill>
                 <a:latin typeface="Microsoft YaHei"/>
               </a:rPr>
-              <a:t>• 多卡状态同步：</a:t>
+              <a:t>• 多卡共享内存：</a:t>
             </a:r>
             <a:r>
               <a:rPr sz="1150">
@@ -22038,7 +21625,7 @@
                 </a:solidFill>
                 <a:latin typeface="Microsoft YaHei"/>
               </a:rPr>
-              <a:t>在 Linux 共享内存（</a:t>
+              <a:t>利用 Linux </a:t>
             </a:r>
             <a:r>
               <a:rPr sz="1150" b="1">
@@ -22056,7 +21643,7 @@
                 </a:solidFill>
                 <a:latin typeface="Microsoft YaHei"/>
               </a:rPr>
-              <a:t>）或 UBMEM 维护 8 卡就绪状态位图（VisibilityReadyBitmap），利用原子位操作与通信屏障实现纳秒级同步。</a:t>
+              <a:t> POSIX 共享内存与原子位图同步 TP=8 各卡就绪状态，替代高开销 NCCL 集合通信。</a:t>
             </a:r>
           </a:p>
           <a:p>
@@ -22075,16 +21662,16 @@
                 </a:solidFill>
                 <a:latin typeface="Microsoft YaHei"/>
               </a:rPr>
-              <a:t>• 依赖库：</a:t>
-            </a:r>
-            <a:r>
-              <a:rPr sz="1150">
+              <a:t>• 编译参数：</a:t>
+            </a:r>
+            <a:r>
+              <a:rPr sz="1150" b="1">
                 <a:solidFill>
                   <a:srgbClr val="1E3A8A"/>
                 </a:solidFill>
                 <a:latin typeface="Consolas"/>
               </a:rPr>
-              <a:t>-lxxhash -lascendcl -lpthread -O3</a:t>
+              <a:t>-lxxhash -lrt -lpthread -O3</a:t>
             </a:r>
           </a:p>
         </p:txBody>
@@ -22131,7 +21718,6 @@
           <a:lstStyle/>
           <a:p>
             <a:pPr algn="ctr"/>
-            <a:endParaRPr/>
           </a:p>
         </p:txBody>
       </p:sp>
@@ -22175,7 +21761,6 @@
           <a:lstStyle/>
           <a:p>
             <a:pPr algn="ctr"/>
-            <a:endParaRPr/>
           </a:p>
         </p:txBody>
       </p:sp>
@@ -22261,7 +21846,7 @@
                 </a:solidFill>
                 <a:latin typeface="Microsoft YaHei"/>
               </a:rPr>
-              <a:t>• 8大语义冲突注入 (test_correctness.py)：</a:t>
+              <a:t>• 8 类语义冲突注入测试 (test_correctness.py)：</a:t>
             </a:r>
             <a:r>
               <a:rPr sz="1150">
@@ -22270,7 +21855,7 @@
                 </a:solidFill>
                 <a:latin typeface="Microsoft YaHei"/>
               </a:rPr>
-              <a:t>主动注入模型版本不符、分词规则变动、Prompt 模板差异、LoRA 错位、租约到期、写入未完成、数据损坏与多卡状态分歧 8 类异常。</a:t>
+              <a:t>主动注入模型架构不匹配、词表版本漂移、LoRA 权重失效、半写脏块、租约过期等 8 类冲突，检验拦截率与回滚。</a:t>
             </a:r>
           </a:p>
           <a:p>
@@ -22289,7 +21874,7 @@
                 </a:solidFill>
                 <a:latin typeface="Microsoft YaHei"/>
               </a:rPr>
-              <a:t>• 多卡同步测试 (rank_consensus_bench.cc)：</a:t>
+              <a:t>• 多卡状态同步压测 (rank_consensus_bench.cc)：</a:t>
             </a:r>
             <a:r>
               <a:rPr sz="1150">
@@ -22298,7 +21883,7 @@
                 </a:solidFill>
                 <a:latin typeface="Microsoft YaHei"/>
               </a:rPr>
-              <a:t>模拟 TP=8 并发下 8 张卡的状态判定与单卡丢包扰动，测量微秒级状态确认耗时。</a:t>
+              <a:t>在 TP=8 模式下连续执行 100 万次状态同步，测量各卡一致性决策的 P50/P99 耗时与抖动。</a:t>
             </a:r>
           </a:p>
           <a:p>
@@ -22317,7 +21902,7 @@
                 </a:solidFill>
                 <a:latin typeface="Microsoft YaHei"/>
               </a:rPr>
-              <a:t>• 文本输出校验：</a:t>
+              <a:t>• 部分命中拼接验证：</a:t>
             </a:r>
             <a:r>
               <a:rPr sz="1150">
@@ -22326,7 +21911,7 @@
                 </a:solidFill>
                 <a:latin typeface="Microsoft YaHei"/>
               </a:rPr>
-              <a:t>命中缓存后生成的文本结果与本地完全重新计算的结果进行逐字比对，确保 100% 一致。</a:t>
+              <a:t>验证 30%~70% 部分前缀命中时，各卡正确完成已命中部分加载与未命中部分本地重算的协同执行。</a:t>
             </a:r>
           </a:p>
         </p:txBody>
@@ -22373,7 +21958,6 @@
           <a:lstStyle/>
           <a:p>
             <a:pPr algn="ctr"/>
-            <a:endParaRPr/>
           </a:p>
         </p:txBody>
       </p:sp>
@@ -22417,7 +22001,6 @@
           <a:lstStyle/>
           <a:p>
             <a:pPr algn="ctr"/>
-            <a:endParaRPr/>
           </a:p>
         </p:txBody>
       </p:sp>
@@ -22512,7 +22095,7 @@
                 </a:solidFill>
                 <a:latin typeface="Microsoft YaHei"/>
               </a:rPr>
-              <a:t>《8 大语义冲突注入拦截测试表》、《TP=8 多卡状态同步时延表》、《多卡分歧协同回退验证报告》。</a:t>
+              <a:t>《6 维语义冲突拦截与正确性报告》、《TP=8 多卡状态同步时延分布表》、《输出 Token 逐字对齐验证报告》。</a:t>
             </a:r>
           </a:p>
           <a:p>
@@ -22540,7 +22123,7 @@
                 </a:solidFill>
                 <a:latin typeface="Microsoft YaHei"/>
               </a:rPr>
-              <a:t>1. 校验准确率：</a:t>
+              <a:t>1. 语义一致性保障：</a:t>
             </a:r>
             <a:r>
               <a:rPr sz="1150" b="1">
@@ -22549,7 +22132,7 @@
                 </a:solidFill>
                 <a:latin typeface="Microsoft YaHei"/>
               </a:rPr>
-              <a:t>在 8 类冲突注入下，错误/过期/不匹配的缓存被 100% 拦截（错误消费数严格 = 0）</a:t>
+              <a:t>8 类语义冲突用例 100% 主动拦截，错误消费严格 = 0</a:t>
             </a:r>
             <a:r>
               <a:rPr sz="1150">
@@ -22568,7 +22151,7 @@
                 </a:solidFill>
                 <a:latin typeface="Microsoft YaHei"/>
               </a:rPr>
-              <a:t>2. 多卡同步时延：</a:t>
+              <a:t>2. 多卡状态同步时延：</a:t>
             </a:r>
             <a:r>
               <a:rPr sz="1150" b="1">
@@ -22577,7 +22160,7 @@
                 </a:solidFill>
                 <a:latin typeface="Microsoft YaHei"/>
               </a:rPr>
-              <a:t>TP=8 多卡状态同步确认时延 P99 &lt; 100µs</a:t>
+              <a:t>TP=8 张量并行多卡状态同步耗时 P99 &lt; 100µs</a:t>
             </a:r>
             <a:r>
               <a:rPr sz="1150">
@@ -22596,7 +22179,7 @@
                 </a:solidFill>
                 <a:latin typeface="Microsoft YaHei"/>
               </a:rPr>
-              <a:t>3. 分歧容错处理：</a:t>
+              <a:t>3. 协同无死锁：</a:t>
             </a:r>
             <a:r>
               <a:rPr sz="1150" b="1">
@@ -22605,7 +22188,7 @@
                 </a:solidFill>
                 <a:latin typeface="Microsoft YaHei"/>
               </a:rPr>
-              <a:t>当单卡发生状态分歧时，8 张卡 100% 协同回退到本地重算，系统 0 死锁、0 挂起</a:t>
+              <a:t>部分命中与单卡异常时，全卡协同回退本地重算，死锁发生次数 = 0</a:t>
             </a:r>
             <a:r>
               <a:rPr sz="1150">
@@ -22661,7 +22244,6 @@
           <a:lstStyle/>
           <a:p>
             <a:pPr algn="ctr"/>
-            <a:endParaRPr/>
           </a:p>
         </p:txBody>
       </p:sp>
@@ -22705,7 +22287,6 @@
           <a:lstStyle/>
           <a:p>
             <a:pPr algn="ctr"/>
-            <a:endParaRPr/>
           </a:p>
         </p:txBody>
       </p:sp>
@@ -22752,7 +22333,7 @@
                 </a:solidFill>
                 <a:latin typeface="Microsoft YaHei"/>
               </a:rPr>
-              <a:t>PVT-06 消费正确性与多卡状态同步：</a:t>
+              <a:t>PVT-06 语义强校验与多卡共识：</a:t>
             </a:r>
             <a:r>
               <a:rPr sz="1150" b="1">
@@ -22761,7 +22342,7 @@
                 </a:solidFill>
                 <a:latin typeface="Microsoft YaHei"/>
               </a:rPr>
-              <a:t>通过 6 维 xxHash64 校验守住 </a:t>
+              <a:t>6 维语义强校验实现 </a:t>
             </a:r>
             <a:r>
               <a:rPr sz="1150" b="1">
@@ -22770,7 +22351,7 @@
                 </a:solidFill>
                 <a:latin typeface="Microsoft YaHei"/>
               </a:rPr>
-              <a:t>0 错误/过期/不匹配消费</a:t>
+              <a:t>错误数据消费严格为 0</a:t>
             </a:r>
             <a:r>
               <a:rPr sz="1150" b="1">
@@ -22779,7 +22360,7 @@
                 </a:solidFill>
                 <a:latin typeface="Microsoft YaHei"/>
               </a:rPr>
-              <a:t> 正确性底线，TP=8 多卡状态同步达成 </a:t>
+              <a:t>，TP=8 多卡状态同步耗时达到 </a:t>
             </a:r>
             <a:r>
               <a:rPr sz="1150" b="1">
@@ -22797,25 +22378,7 @@
                 </a:solidFill>
                 <a:latin typeface="Microsoft YaHei"/>
               </a:rPr>
-              <a:t>，分歧时 </a:t>
-            </a:r>
-            <a:r>
-              <a:rPr sz="1150" b="1">
-                <a:solidFill>
-                  <a:srgbClr val="059669"/>
-                </a:solidFill>
-                <a:latin typeface="Microsoft YaHei"/>
-              </a:rPr>
-              <a:t>100% 协同安全回退杜绝死锁</a:t>
-            </a:r>
-            <a:r>
-              <a:rPr sz="1150" b="1">
-                <a:solidFill>
-                  <a:srgbClr val="0F172A"/>
-                </a:solidFill>
-                <a:latin typeface="Microsoft YaHei"/>
-              </a:rPr>
-              <a:t>。</a:t>
+              <a:t>，彻底杜绝集合通信死锁与模型胡言乱语。</a:t>
             </a:r>
           </a:p>
         </p:txBody>
@@ -23149,7 +22712,7 @@
 </file>
 
 <file path=ppt/theme/theme2.xml><?xml version="1.0" encoding="utf-8"?>
-<a:theme xmlns:a="http://schemas.openxmlformats.org/drawingml/2006/main" name="Office 主题​​">
+<a:theme xmlns:a="http://schemas.openxmlformats.org/drawingml/2006/main" name="Office Theme">
   <a:themeElements>
     <a:clrScheme name="Office">
       <a:dk1>
@@ -23159,44 +22722,44 @@
         <a:sysClr val="window" lastClr="FFFFFF"/>
       </a:lt1>
       <a:dk2>
-        <a:srgbClr val="44546A"/>
+        <a:srgbClr val="1F497D"/>
       </a:dk2>
       <a:lt2>
-        <a:srgbClr val="E7E6E6"/>
+        <a:srgbClr val="EEECE1"/>
       </a:lt2>
       <a:accent1>
-        <a:srgbClr val="5B9BD5"/>
+        <a:srgbClr val="4F81BD"/>
       </a:accent1>
       <a:accent2>
-        <a:srgbClr val="ED7D31"/>
+        <a:srgbClr val="C0504D"/>
       </a:accent2>
       <a:accent3>
-        <a:srgbClr val="A5A5A5"/>
+        <a:srgbClr val="9BBB59"/>
       </a:accent3>
       <a:accent4>
-        <a:srgbClr val="FFC000"/>
+        <a:srgbClr val="8064A2"/>
       </a:accent4>
       <a:accent5>
-        <a:srgbClr val="4472C4"/>
+        <a:srgbClr val="4BACC6"/>
       </a:accent5>
       <a:accent6>
-        <a:srgbClr val="70AD47"/>
+        <a:srgbClr val="F79646"/>
       </a:accent6>
       <a:hlink>
-        <a:srgbClr val="0563C1"/>
+        <a:srgbClr val="0000FF"/>
       </a:hlink>
       <a:folHlink>
-        <a:srgbClr val="954F72"/>
+        <a:srgbClr val="800080"/>
       </a:folHlink>
     </a:clrScheme>
     <a:fontScheme name="Office">
       <a:majorFont>
-        <a:latin typeface="等线 Light" panose="020F0302020204030204"/>
+        <a:latin typeface="Calibri"/>
         <a:ea typeface=""/>
         <a:cs typeface=""/>
-        <a:font script="Jpan" typeface="游ゴシック Light"/>
+        <a:font script="Jpan" typeface="ＭＳ Ｐゴシック"/>
         <a:font script="Hang" typeface="맑은 고딕"/>
-        <a:font script="Hans" typeface="等线 Light"/>
+        <a:font script="Hans" typeface="宋体"/>
         <a:font script="Hant" typeface="新細明體"/>
         <a:font script="Arab" typeface="Times New Roman"/>
         <a:font script="Hebr" typeface="Times New Roman"/>
@@ -23226,12 +22789,12 @@
         <a:font script="Geor" typeface="Sylfaen"/>
       </a:majorFont>
       <a:minorFont>
-        <a:latin typeface="等线" panose="020F0502020204030204"/>
+        <a:latin typeface="Calibri"/>
         <a:ea typeface=""/>
         <a:cs typeface=""/>
-        <a:font script="Jpan" typeface="游ゴシック"/>
+        <a:font script="Jpan" typeface="ＭＳ Ｐゴシック"/>
         <a:font script="Hang" typeface="맑은 고딕"/>
-        <a:font script="Hans" typeface="等线"/>
+        <a:font script="Hans" typeface="宋体"/>
         <a:font script="Hant" typeface="新細明體"/>
         <a:font script="Arab" typeface="Arial"/>
         <a:font script="Hebr" typeface="Arial"/>
@@ -23270,141 +22833,200 @@
           <a:gsLst>
             <a:gs pos="0">
               <a:schemeClr val="phClr">
-                <a:lumMod val="110000"/>
-                <a:satMod val="105000"/>
-                <a:tint val="67000"/>
+                <a:tint val="50000"/>
+                <a:satMod val="300000"/>
               </a:schemeClr>
             </a:gs>
-            <a:gs pos="50000">
+            <a:gs pos="35000">
               <a:schemeClr val="phClr">
-                <a:lumMod val="105000"/>
-                <a:satMod val="103000"/>
-                <a:tint val="73000"/>
+                <a:tint val="37000"/>
+                <a:satMod val="300000"/>
               </a:schemeClr>
             </a:gs>
             <a:gs pos="100000">
               <a:schemeClr val="phClr">
-                <a:lumMod val="105000"/>
-                <a:satMod val="109000"/>
-                <a:tint val="81000"/>
+                <a:tint val="15000"/>
+                <a:satMod val="350000"/>
               </a:schemeClr>
             </a:gs>
           </a:gsLst>
-          <a:lin ang="5400000" scaled="0"/>
+          <a:lin ang="16200000" scaled="1"/>
         </a:gradFill>
         <a:gradFill rotWithShape="1">
           <a:gsLst>
             <a:gs pos="0">
               <a:schemeClr val="phClr">
-                <a:satMod val="103000"/>
-                <a:lumMod val="102000"/>
-                <a:tint val="94000"/>
-              </a:schemeClr>
-            </a:gs>
-            <a:gs pos="50000">
-              <a:schemeClr val="phClr">
-                <a:satMod val="110000"/>
-                <a:lumMod val="100000"/>
+                <a:tint val="100000"/>
                 <a:shade val="100000"/>
+                <a:satMod val="130000"/>
               </a:schemeClr>
             </a:gs>
             <a:gs pos="100000">
               <a:schemeClr val="phClr">
-                <a:lumMod val="99000"/>
-                <a:satMod val="120000"/>
-                <a:shade val="78000"/>
+                <a:tint val="50000"/>
+                <a:shade val="100000"/>
+                <a:satMod val="350000"/>
               </a:schemeClr>
             </a:gs>
           </a:gsLst>
-          <a:lin ang="5400000" scaled="0"/>
+          <a:lin ang="16200000" scaled="0"/>
         </a:gradFill>
       </a:fillStyleLst>
       <a:lnStyleLst>
-        <a:ln w="6350" cap="flat" cmpd="sng" algn="ctr">
+        <a:ln w="9525" cap="flat" cmpd="sng" algn="ctr">
+          <a:solidFill>
+            <a:schemeClr val="phClr">
+              <a:shade val="95000"/>
+              <a:satMod val="105000"/>
+            </a:schemeClr>
+          </a:solidFill>
+          <a:prstDash val="solid"/>
+        </a:ln>
+        <a:ln w="25400" cap="flat" cmpd="sng" algn="ctr">
           <a:solidFill>
             <a:schemeClr val="phClr"/>
           </a:solidFill>
           <a:prstDash val="solid"/>
-          <a:miter lim="800000"/>
         </a:ln>
-        <a:ln w="12700" cap="flat" cmpd="sng" algn="ctr">
+        <a:ln w="38100" cap="flat" cmpd="sng" algn="ctr">
           <a:solidFill>
             <a:schemeClr val="phClr"/>
           </a:solidFill>
           <a:prstDash val="solid"/>
-          <a:miter lim="800000"/>
-        </a:ln>
-        <a:ln w="19050" cap="flat" cmpd="sng" algn="ctr">
-          <a:solidFill>
-            <a:schemeClr val="phClr"/>
-          </a:solidFill>
-          <a:prstDash val="solid"/>
-          <a:miter lim="800000"/>
         </a:ln>
       </a:lnStyleLst>
       <a:effectStyleLst>
         <a:effectStyle>
-          <a:effectLst/>
-        </a:effectStyle>
-        <a:effectStyle>
-          <a:effectLst/>
+          <a:effectLst>
+            <a:outerShdw blurRad="40000" dist="20000" dir="5400000" rotWithShape="0">
+              <a:srgbClr val="000000">
+                <a:alpha val="38000"/>
+              </a:srgbClr>
+            </a:outerShdw>
+          </a:effectLst>
         </a:effectStyle>
         <a:effectStyle>
           <a:effectLst>
-            <a:outerShdw blurRad="57150" dist="19050" dir="5400000" algn="ctr" rotWithShape="0">
+            <a:outerShdw blurRad="40000" dist="23000" dir="5400000" rotWithShape="0">
               <a:srgbClr val="000000">
-                <a:alpha val="63000"/>
+                <a:alpha val="35000"/>
               </a:srgbClr>
             </a:outerShdw>
           </a:effectLst>
+        </a:effectStyle>
+        <a:effectStyle>
+          <a:effectLst>
+            <a:outerShdw blurRad="40000" dist="23000" dir="5400000" rotWithShape="0">
+              <a:srgbClr val="000000">
+                <a:alpha val="35000"/>
+              </a:srgbClr>
+            </a:outerShdw>
+          </a:effectLst>
+          <a:scene3d>
+            <a:camera prst="orthographicFront">
+              <a:rot lat="0" lon="0" rev="0"/>
+            </a:camera>
+            <a:lightRig rig="threePt" dir="t">
+              <a:rot lat="0" lon="0" rev="1200000"/>
+            </a:lightRig>
+          </a:scene3d>
+          <a:sp3d>
+            <a:bevelT w="63500" h="25400"/>
+          </a:sp3d>
         </a:effectStyle>
       </a:effectStyleLst>
       <a:bgFillStyleLst>
         <a:solidFill>
           <a:schemeClr val="phClr"/>
         </a:solidFill>
-        <a:solidFill>
-          <a:schemeClr val="phClr">
-            <a:tint val="95000"/>
-            <a:satMod val="170000"/>
-          </a:schemeClr>
-        </a:solidFill>
         <a:gradFill rotWithShape="1">
           <a:gsLst>
             <a:gs pos="0">
               <a:schemeClr val="phClr">
-                <a:tint val="93000"/>
-                <a:satMod val="150000"/>
-                <a:shade val="98000"/>
-                <a:lumMod val="102000"/>
+                <a:tint val="40000"/>
+                <a:satMod val="350000"/>
               </a:schemeClr>
             </a:gs>
-            <a:gs pos="50000">
+            <a:gs pos="40000">
               <a:schemeClr val="phClr">
-                <a:tint val="98000"/>
-                <a:satMod val="130000"/>
-                <a:shade val="90000"/>
-                <a:lumMod val="103000"/>
+                <a:tint val="45000"/>
+                <a:shade val="99000"/>
+                <a:satMod val="350000"/>
               </a:schemeClr>
             </a:gs>
             <a:gs pos="100000">
               <a:schemeClr val="phClr">
-                <a:shade val="63000"/>
-                <a:satMod val="120000"/>
+                <a:shade val="20000"/>
+                <a:satMod val="255000"/>
               </a:schemeClr>
             </a:gs>
           </a:gsLst>
-          <a:lin ang="5400000" scaled="0"/>
+          <a:path path="circle">
+            <a:fillToRect l="50000" t="-80000" r="50000" b="180000"/>
+          </a:path>
+        </a:gradFill>
+        <a:gradFill rotWithShape="1">
+          <a:gsLst>
+            <a:gs pos="0">
+              <a:schemeClr val="phClr">
+                <a:tint val="80000"/>
+                <a:satMod val="300000"/>
+              </a:schemeClr>
+            </a:gs>
+            <a:gs pos="100000">
+              <a:schemeClr val="phClr">
+                <a:shade val="30000"/>
+                <a:satMod val="200000"/>
+              </a:schemeClr>
+            </a:gs>
+          </a:gsLst>
+          <a:path path="circle">
+            <a:fillToRect l="50000" t="50000" r="50000" b="50000"/>
+          </a:path>
         </a:gradFill>
       </a:bgFillStyleLst>
     </a:fmtScheme>
   </a:themeElements>
-  <a:objectDefaults/>
+  <a:objectDefaults>
+    <a:spDef>
+      <a:spPr/>
+      <a:bodyPr/>
+      <a:lstStyle/>
+      <a:style>
+        <a:lnRef idx="1">
+          <a:schemeClr val="accent1"/>
+        </a:lnRef>
+        <a:fillRef idx="3">
+          <a:schemeClr val="accent1"/>
+        </a:fillRef>
+        <a:effectRef idx="2">
+          <a:schemeClr val="accent1"/>
+        </a:effectRef>
+        <a:fontRef idx="minor">
+          <a:schemeClr val="lt1"/>
+        </a:fontRef>
+      </a:style>
+    </a:spDef>
+    <a:lnDef>
+      <a:spPr/>
+      <a:bodyPr/>
+      <a:lstStyle/>
+      <a:style>
+        <a:lnRef idx="2">
+          <a:schemeClr val="accent1"/>
+        </a:lnRef>
+        <a:fillRef idx="0">
+          <a:schemeClr val="accent1"/>
+        </a:fillRef>
+        <a:effectRef idx="1">
+          <a:schemeClr val="accent1"/>
+        </a:effectRef>
+        <a:fontRef idx="minor">
+          <a:schemeClr val="tx1"/>
+        </a:fontRef>
+      </a:style>
+    </a:lnDef>
+  </a:objectDefaults>
   <a:extraClrSchemeLst/>
-  <a:extLst>
-    <a:ext uri="{05A4C25C-085E-4340-85A3-A5531E510DB2}">
-      <thm15:themeFamily xmlns:thm15="http://schemas.microsoft.com/office/thememl/2012/main" name="Office Theme" id="{62F939B6-93AF-4DB8-9C6B-D6C7DFDC589F}" vid="{4A3C46E8-61CC-4603-A589-7422A47A8E4A}"/>
-    </a:ext>
-  </a:extLst>
 </a:theme>
 </file>
--- a/kvcache/unified_kv_memory/提前验证方案设计/验证计划方案设计/开发人员串讲PPT/00_统一异构KVCache存储池_提前验证全景与开发串讲完整版.pptx
+++ b/kvcache/unified_kv_memory/提前验证方案设计/验证计划方案设计/开发人员串讲PPT/00_统一异构KVCache存储池_提前验证全景与开发串讲完整版.pptx
@@ -1105,7 +1105,7 @@
           </a:p>
           <a:p>
             <a:r>
-              <a:t>PVT-00 是整个统一异构 KVCache 存储池的收益立足点（阶段 E0）。核心目标是用客观实测数据验证：外接 KVCache 存储池相比本地算力重新计算（Recompute）确实能省下可观的时间。我们在 2 台物理机 800G 网络环境下，测试 4KB~64MB 下 UBMEM 与 URMA 的带宽时延，同时使用 make_workload.py 构造覆盖 DeepSeek MLA (512B) 与 Qwen MHA (320KB) 的测试集，通过 vLLM 官方 benchmark_serving.py 发起在线打流。判定标准：净收益必须达到查询与传输总开销的 2.0 倍以上，且 UBMEM 相比 URMA 加速比 ≥1.3 倍。</a:t>
+              <a:t>PVT-00 是整个统一异构 KVCache 存储池的收益立足点（阶段 E0）。核心目标是用客观实测数据验证：外接 KVCache 存储池相比本地算力重新计算（Recompute）确实能省下可观的时间。我们在 2 台物理机 800G 网络环境下，测试 4KB~64MB 下 UBMEM 与 URMA 的带宽时延，同时使用 make_workload.py 构造覆盖 DeepSeek MLA (~35KB/tok) 与 Qwen MHA (320KB/tok) 的测试集，通过 vLLM 官方 benchmark_serving.py 发起在线打流。判定标准：净收益必须达到查询与传输总开销的 2.0 倍以上，且 UBMEM 相比 URMA 加速比 ≥1.3 倍。</a:t>
             </a:r>
           </a:p>
         </p:txBody>
@@ -1405,7 +1405,7 @@
           </a:p>
           <a:p>
             <a:r>
-              <a:t>PVT-04 是调度决策的大脑验证（P0 级）。在 DeepSeek MLA 架构下，每个 Token 只有 512 字节，如果调度器花了 100µs 去查目录、算开销，或者在网络拥塞时盲目拉取，反而会比本地直接重算更慢！QueryPlan 引擎通过微秒级纯内存算法与位运算，在 5µs 内完成 5 维路径成本评估。达标要求：决策 P99 &lt; 5µs，准确率 ≥90%，负收益拦截率 100%，错误决策率 &lt; 1%。</a:t>
+              <a:t>PVT-04 是调度决策的大脑验证（P0 级）。在 DeepSeek MLA 压缩架构下，单 Token KV 显存占用仅约 35KB（计算密集而通信量相对小），如果调度器花了 100µs 去查目录、算开销，或者在网络拥塞时盲目拉取，反而会比本地直接重算更慢！QueryPlan 引擎通过微秒级纯内存算法与位运算，在 5µs 内完成 5 维路径成本评估。达标要求：决策 P99 &lt; 5µs，准确率 ≥90%，负收益拦截率 100%，错误决策率 &lt; 1%。</a:t>
             </a:r>
           </a:p>
         </p:txBody>
@@ -11925,7 +11925,7 @@
                 </a:solidFill>
                 <a:latin typeface="Microsoft YaHei"/>
               </a:rPr>
-              <a:t>测定 MLA (512B) 与 MHA 在各复用率下的 Saved-Prefill 净收益（</a:t>
+              <a:t>测定 DeepSeek MLA (~35KB/tok) 与 Qwen MHA (320KB/tok) 在各复用率下的 Saved-Prefill 净收益（</a:t>
             </a:r>
             <a:r>
               <a:rPr sz="1100" b="1">
@@ -12866,7 +12866,7 @@
               </a:defRPr>
             </a:pPr>
             <a:r>
-              <a:t>评估 MLA (512B) 与 MHA 在不同复用率下，外接 KV 池相比本地直接重算的时间节省与通信协议加速边界</a:t>
+              <a:t>评估 DeepSeek MLA (~35KB/tok) 与 Qwen MHA (320KB/tok) 在不同复用率下，外接 KV 池相比本地直接重算的时间节省与通信协议加速边界</a:t>
             </a:r>
           </a:p>
         </p:txBody>
@@ -13692,7 +13692,7 @@
                 </a:solidFill>
                 <a:latin typeface="Microsoft YaHei"/>
               </a:rPr>
-              <a:t>同时覆盖 </a:t>
+              <a:t>覆盖 </a:t>
             </a:r>
             <a:r>
               <a:rPr sz="1150" b="1">
@@ -13701,7 +13701,7 @@
                 </a:solidFill>
                 <a:latin typeface="Microsoft YaHei"/>
               </a:rPr>
-              <a:t>DeepSeek MLA (512B/tok)</a:t>
+              <a:t>DeepSeek MLA (~35KB/tok)</a:t>
             </a:r>
             <a:r>
               <a:rPr sz="1150">
@@ -13728,7 +13728,7 @@
                 </a:solidFill>
                 <a:latin typeface="Microsoft YaHei"/>
               </a:rPr>
-              <a:t>，生成 30%~98% 复用率请求序列。</a:t>
+              <a:t>，构造 30%~98% 复用率序列。</a:t>
             </a:r>
           </a:p>
           <a:p>
@@ -13756,7 +13756,7 @@
                 </a:solidFill>
                 <a:latin typeface="Microsoft YaHei"/>
               </a:rPr>
-              <a:t>扫参 4KB~64MB 块与 1~64 并发，测量 URMA 和 UBMEM 单双向带宽与 P99 延迟。</a:t>
+              <a:t>扫参 4KB~64MB 块与 1~64 并发，测定 URMA/UBMEM 带宽与 P99 延迟。</a:t>
             </a:r>
           </a:p>
           <a:p>
@@ -13784,7 +13784,7 @@
                 </a:solidFill>
                 <a:latin typeface="Microsoft YaHei"/>
               </a:rPr>
-              <a:t>运行 benchmark_serving.py 发送真实流量，对比纯重算、原生 Mooncake 与 UBMEM 扩展版 TTFT。</a:t>
+              <a:t>运行 benchmark_serving.py，对比重算、原生 Mooncake 与 UBMEM 版 TTFT。</a:t>
             </a:r>
           </a:p>
         </p:txBody>
@@ -18611,7 +18611,7 @@
                 </a:solidFill>
                 <a:latin typeface="Microsoft YaHei"/>
               </a:rPr>
-              <a:t>命中缓存并不总能获得加速。对于 DeepSeek MLA (单 Token 仅 512B) 与高负载网络，若加载开销大于计算耗时，盲目拉取缓存会导致负收益。</a:t>
+              <a:t>命中缓存并不总能获得加速。对于 DeepSeek MLA 高度压缩模型（单 Token 仅 ~35KB）与高负载网络，若加载开销大于计算耗时，盲目拉取缓存会导致负收益。</a:t>
             </a:r>
           </a:p>
           <a:p>
@@ -18943,7 +18943,7 @@
                 </a:solidFill>
                 <a:latin typeface="Microsoft YaHei"/>
               </a:rPr>
-              <a:t>内置 DeepSeek MLA (512B) 与 Qwen MHA (320KB) 双轨成本系数表。</a:t>
+              <a:t>内置 DeepSeek MLA (~35KB/tok) 与 Qwen MHA (320KB/tok) 双轨成本系数表。</a:t>
             </a:r>
           </a:p>
         </p:txBody>

--- a/kvcache/unified_kv_memory/提前验证方案设计/验证计划方案设计/开发人员串讲PPT/00_统一异构KVCache存储池_提前验证全景与开发串讲完整版.pptx
+++ b/kvcache/unified_kv_memory/提前验证方案设计/验证计划方案设计/开发人员串讲PPT/00_统一异构KVCache存储池_提前验证全景与开发串讲完整版.pptx
@@ -19,6 +19,7 @@
     <p:sldId id="267" r:id="rId19"/>
     <p:sldId id="268" r:id="rId20"/>
     <p:sldId id="269" r:id="rId21"/>
+    <p:sldId id="270" r:id="rId22"/>
   </p:sldIdLst>
   <p:sldSz cx="12191695" cy="6858000" type="screen4x3"/>
   <p:notesSz cx="6858000" cy="9144000"/>
@@ -535,7 +536,7 @@
           </a:p>
           <a:p>
             <a:r>
-              <a:t>我们梳理了 10 项必做原型验证（PVT-00 到 PVT-09）与 1 项可行性证伪（CVT-01），全面贯穿 P0/P1/P2 优先级管理，通过真实集群部署与在线打流消融，在立项前摸清技术边界与性能上限。</a:t>
+              <a:t>我们梳理了 11 项必做原型验证（PVT-00 到 PVT-10）与 1 项可行性证伪（CVT-01），全面贯穿 P0/P1/P2 优先级管理，通过真实集群部署与在线打流消融，在立项前摸清技术边界与性能上限。</a:t>
             </a:r>
           </a:p>
         </p:txBody>
@@ -830,12 +831,12 @@
           <a:lstStyle/>
           <a:p>
             <a:r>
-              <a:t>【串讲讲稿 - CVT-01】</a:t>
-            </a:r>
-          </a:p>
-          <a:p>
-            <a:r>
-              <a:t>CVT-01 是关于显存整理与动态页迁移的条件证伪项（原 CVT-02 重新编号）。为了清理显存碎片，业界有人提出使用专用硬件 Atomic Remap 芯片。我们通过软件 RCU（读-拷贝-更新）无锁机制，在后台搬移显存页的同时允许前台 Reader 零停顿并发读取旧页，并在宽限期后安全回收。实测数据证明：在 32 线程高并发下，读停顿 P99 &lt; 1ms，前台 TPOT 抖动小于 3%，完全无需昂贵复杂的专用硬件芯片！</a:t>
+              <a:t>【串讲讲稿 - PVT-10】</a:t>
+            </a:r>
+          </a:p>
+          <a:p>
+            <a:r>
+              <a:t>PVT-10 是关于网络排队动力学与多卡协同短板的实测验证（P0 级）。在多对一（N-to-1）并发汇聚时，交换机缓冲区膨胀（Buffer Bloat）会导致尾部时延呈非线性恶化；而在 TP=8 张量并行下，大模型每层计算必须等 8 张卡的数据全部就绪，整体完成时间 CCT 由最慢的子流决定，平均时延完全掩盖了长尾瓶颈。我们通过三组实验：扫描 N=1..16 测定 Incast 尾部放大，测量 TP=8 Coflow 偏斜，并验证 Layer 0 硬件最高优先级（TC0）提前点火机制。达标要求：捕获 Incast 尾部放大趋势，QoS 调度下 Coflow 偏斜系数 Skew_P99 &lt; 1.15，Layer 0 传输时延降低 ≥50% 并显著消除首层计算气泡。</a:t>
             </a:r>
           </a:p>
         </p:txBody>
@@ -905,6 +906,81 @@
           <a:lstStyle/>
           <a:p>
             <a:r>
+              <a:t>【串讲讲稿 - CVT-01】</a:t>
+            </a:r>
+          </a:p>
+          <a:p>
+            <a:r>
+              <a:t>CVT-01 是关于显存整理与动态页迁移的条件证伪项（原 CVT-02 重新编号）。为了清理显存碎片，业界有人提出使用专用硬件 Atomic Remap 芯片。我们通过软件 RCU（读-拷贝-更新）无锁机制，在后台搬移显存页的同时允许前台 Reader 零停顿并发读取旧页，并在宽限期后安全回收。实测数据证明：在 32 线程高并发下，读停顿 P99 &lt; 1ms，前台 TPOT 抖动小于 3%，完全无需昂贵复杂的专用硬件芯片！</a:t>
+            </a:r>
+          </a:p>
+        </p:txBody>
+      </p:sp>
+      <p:sp>
+        <p:nvSpPr>
+          <p:cNvPr id="4" name="Slide Number Placeholder 3"/>
+          <p:cNvSpPr>
+            <a:spLocks noGrp="1"/>
+          </p:cNvSpPr>
+          <p:nvPr>
+            <p:ph type="sldNum" idx="5" sz="quarter"/>
+          </p:nvPr>
+        </p:nvSpPr>
+        <p:spPr/>
+      </p:sp>
+    </p:spTree>
+  </p:cSld>
+  <p:clrMapOvr>
+    <a:masterClrMapping/>
+  </p:clrMapOvr>
+</p:notes>
+</file>
+
+<file path=ppt/notesSlides/notesSlide15.xml><?xml version="1.0" encoding="utf-8"?>
+<p:notes xmlns:a="http://schemas.openxmlformats.org/drawingml/2006/main" xmlns:p="http://schemas.openxmlformats.org/presentationml/2006/main" xmlns:r="http://schemas.openxmlformats.org/officeDocument/2006/relationships">
+  <p:cSld>
+    <p:spTree>
+      <p:nvGrpSpPr>
+        <p:cNvPr id="1" name=""/>
+        <p:cNvGrpSpPr/>
+        <p:nvPr/>
+      </p:nvGrpSpPr>
+      <p:grpSpPr>
+        <a:xfrm>
+          <a:off x="0" y="0"/>
+          <a:ext cx="0" cy="0"/>
+          <a:chOff x="0" y="0"/>
+          <a:chExt cx="0" cy="0"/>
+        </a:xfrm>
+      </p:grpSpPr>
+      <p:sp>
+        <p:nvSpPr>
+          <p:cNvPr id="2" name="Slide Image Placeholder 1"/>
+          <p:cNvSpPr>
+            <a:spLocks noGrp="1"/>
+          </p:cNvSpPr>
+          <p:nvPr>
+            <p:ph type="sldImg" idx="2"/>
+          </p:nvPr>
+        </p:nvSpPr>
+        <p:spPr/>
+      </p:sp>
+      <p:sp>
+        <p:nvSpPr>
+          <p:cNvPr id="3" name="Notes Placeholder 2"/>
+          <p:cNvSpPr>
+            <a:spLocks noGrp="1"/>
+          </p:cNvSpPr>
+          <p:nvPr>
+            <p:ph type="body" idx="3" sz="quarter"/>
+          </p:nvPr>
+        </p:nvSpPr>
+        <p:spPr/>
+        <p:txBody>
+          <a:bodyPr/>
+          <a:lstStyle/>
+          <a:p>
+            <a:r>
               <a:t>【串讲讲稿 - 总结页】</a:t>
             </a:r>
           </a:p>
@@ -915,7 +991,7 @@
           </a:p>
           <a:p>
             <a:r>
-              <a:t>我们通过 10 项必做验证包与 1 项条件证伪项的设计，全面覆盖了从基础收益评估、零拷贝数据传输、微秒调度策略到端到端混压测试的完整技术链路。</a:t>
+              <a:t>我们通过 11 项必做验证包与 1 项条件证伪项的设计，全面覆盖了从基础收益评估、零拷贝数据传输、微秒调度策略到端到端混压测试的完整技术链路。</a:t>
             </a:r>
           </a:p>
           <a:p>
@@ -1000,7 +1076,7 @@
           </a:p>
           <a:p>
             <a:r>
-              <a:t>这一页展示的是整体技术方案的 10 PVT + 1 CVT 全景结构。</a:t>
+              <a:t>这一页展示的是整体技术方案的 11 PVT + 1 CVT 全景结构。</a:t>
             </a:r>
           </a:p>
           <a:p>
@@ -1015,7 +1091,7 @@
           </a:p>
           <a:p>
             <a:r>
-              <a:t>E1 打通数据通路与多卡同步（PVT-01/02/06/08/09），实现 Host CPU 零数据拷贝、C++ 描述符编译、6 维语义校验与 DPU 双轨；</a:t>
+              <a:t>E1 打通数据通路与多卡同步（PVT-01/02/06/08/09/10），实现 Host CPU 零数据拷贝、C++ 描述符编译、6 维语义校验、Incast 动力学与 TP=8 Coflow 偏斜压制及 DPU 双轨；</a:t>
             </a:r>
           </a:p>
           <a:p>
@@ -4731,7 +4807,7 @@
               </a:defRPr>
             </a:pPr>
             <a:r>
-              <a:t>基于开源生态底座深度重构 · 10 项必做验证包 (PVT) 与 1 项可行性证伪 (CVT) · 贯穿 P0/P1/P2 优先级</a:t>
+              <a:t>基于开源生态底座深度重构 · 11 项必做验证包 (PVT) 与 1 项可行性证伪 (CVT) · 贯穿 P0/P1/P2 优先级</a:t>
             </a:r>
           </a:p>
         </p:txBody>
@@ -5330,7 +5406,7 @@
                 </a:solidFill>
                 <a:latin typeface="Microsoft YaHei"/>
               </a:rPr>
-              <a:t>• 10 PVT + 1 CVT 矩阵：</a:t>
+              <a:t>• 11 PVT + 1 CVT 矩阵：</a:t>
             </a:r>
             <a:r>
               <a:rPr sz="1150">
@@ -5339,7 +5415,7 @@
                 </a:solidFill>
                 <a:latin typeface="Microsoft YaHei"/>
               </a:rPr>
-              <a:t>5 项 P0 核心决胜项 + 4 项 P1 底座支撑项 + 2 项 P2 拓展证伪项。</a:t>
+              <a:t>6 项 P0 核心决胜项 + 4 项 P1 底座支撑项 + 2 项 P2 拓展证伪项。</a:t>
             </a:r>
           </a:p>
           <a:p>
@@ -5517,7 +5593,7 @@
               </a:defRPr>
             </a:pPr>
             <a:r>
-              <a:t>第 10 / 14 页</a:t>
+              <a:t>第 10 / 15 页</a:t>
             </a:r>
           </a:p>
         </p:txBody>
@@ -6890,7 +6966,7 @@
               </a:defRPr>
             </a:pPr>
             <a:r>
-              <a:t>第 11 / 14 页</a:t>
+              <a:t>第 11 / 15 页</a:t>
             </a:r>
           </a:p>
         </p:txBody>
@@ -8201,7 +8277,7 @@
               </a:defRPr>
             </a:pPr>
             <a:r>
-              <a:t>第 12 / 14 页</a:t>
+              <a:t>第 12 / 15 页</a:t>
             </a:r>
           </a:p>
         </p:txBody>
@@ -9468,7 +9544,7 @@
               </a:defRPr>
             </a:pPr>
             <a:r>
-              <a:t>CVT-01：PageMigration 软件 RCU 机制 vs 硬件 AtomicRemap 必要性证伪</a:t>
+              <a:t>PVT-10：多流非等比劣化、N-to-1 Incast 与 TP=8 Coflow 偏斜验证</a:t>
             </a:r>
           </a:p>
           <a:p>
@@ -9484,7 +9560,7 @@
               </a:defRPr>
             </a:pPr>
             <a:r>
-              <a:t>验证显存碎片整理与页迁移时，软件 RCU (无锁读+宽限期释放) 是否已满足读停顿 &lt; 1ms，免除专有硬件芯片依赖</a:t>
+              <a:t>实测探明分布式网络排队动力学与多卡协同短板：Incast 缓冲区尾部放大、Coflow 木桶短板及 Layer 0 硬件优先级点火</a:t>
             </a:r>
           </a:p>
         </p:txBody>
@@ -9520,7 +9596,7 @@
               </a:defRPr>
             </a:pPr>
             <a:r>
-              <a:t>第 13 / 14 页</a:t>
+              <a:t>第 13 / 15 页</a:t>
             </a:r>
           </a:p>
         </p:txBody>
@@ -9653,7 +9729,7 @@
                 </a:solidFill>
                 <a:latin typeface="Microsoft YaHei"/>
               </a:rPr>
-              <a:t>  [P2 级 | 条件证伪项]</a:t>
+              <a:t>  [P0 级 | 阶段 E1/E3 协同与流控]</a:t>
             </a:r>
           </a:p>
         </p:txBody>
@@ -9704,7 +9780,7 @@
                 </a:solidFill>
                 <a:latin typeface="Microsoft YaHei"/>
               </a:rPr>
-              <a:t>长时间推理会导致显存严重碎片化。业界部分方案探索依赖专有硬件 Atomic Remap 芯片原语来搬移显存页，增加了外部芯片依赖与硬件成本。</a:t>
+              <a:t>多流并发汇聚导致交换机缓冲区膨胀（Buffer Bloat）与非线性尾部放大；TP=8 下整体时延 (CCT) 由最慢卡决定，平均值掩盖木桶短板。</a:t>
             </a:r>
           </a:p>
           <a:p>
@@ -9732,7 +9808,7 @@
                 </a:solidFill>
                 <a:latin typeface="Microsoft YaHei"/>
               </a:rPr>
-              <a:t>验证基于软件 RCU（Read-Copy-Update，读-拷贝-更新：无锁读与宽限期延迟释放机制）能否实现动态页迁移时 </a:t>
+              <a:t>实测 Incast 尾部膨胀比 R99(N)；测定 Coflow 偏斜（</a:t>
             </a:r>
             <a:r>
               <a:rPr sz="1150" b="1">
@@ -9741,7 +9817,7 @@
                 </a:solidFill>
                 <a:latin typeface="Microsoft YaHei"/>
               </a:rPr>
-              <a:t>前台在线推理读停顿 &lt; 1ms、TPOT 抖动 &lt; 3%</a:t>
+              <a:t>Skew_P99 &lt; 1.15</a:t>
             </a:r>
             <a:r>
               <a:rPr sz="1150">
@@ -9750,7 +9826,25 @@
                 </a:solidFill>
                 <a:latin typeface="Microsoft YaHei"/>
               </a:rPr>
-              <a:t>，从而证伪硬件芯片的“必需性”。</a:t>
+              <a:t>）；验证 </a:t>
+            </a:r>
+            <a:r>
+              <a:rPr sz="1150" b="1">
+                <a:solidFill>
+                  <a:srgbClr val="2563EB"/>
+                </a:solidFill>
+                <a:latin typeface="Microsoft YaHei"/>
+              </a:rPr>
+              <a:t>Layer 0 硬件最高优先级 (TC0)</a:t>
+            </a:r>
+            <a:r>
+              <a:rPr sz="1150">
+                <a:solidFill>
+                  <a:srgbClr val="1E293B"/>
+                </a:solidFill>
+                <a:latin typeface="Microsoft YaHei"/>
+              </a:rPr>
+              <a:t> 消除首层计算气泡。</a:t>
             </a:r>
           </a:p>
           <a:p>
@@ -9778,7 +9872,7 @@
                 </a:solidFill>
                 <a:latin typeface="Microsoft YaHei"/>
               </a:rPr>
-              <a:t>通过严密的软硬件对比证伪，确立纯软件显存整理方案，简化系统架构，降低硬件强依赖风险。</a:t>
+              <a:t>突破单流平均值评估局限，为多卡协同调度与 SemanticQoS 硬件流控提供扎实物理依据。</a:t>
             </a:r>
           </a:p>
         </p:txBody>
@@ -9953,7 +10047,7 @@
                 </a:solidFill>
                 <a:latin typeface="Microsoft YaHei"/>
               </a:rPr>
-              <a:t>• 内存协议：</a:t>
+              <a:t>• 硬件环境与拓扑：</a:t>
             </a:r>
             <a:r>
               <a:rPr sz="1150">
@@ -9962,7 +10056,43 @@
                 </a:solidFill>
                 <a:latin typeface="Microsoft YaHei"/>
               </a:rPr>
-              <a:t>POSIX 共享内存与无锁原子指针交换，CANN 8.0 显存管理运行时。</a:t>
+              <a:t>双节点服务器（Prefill/Decode 节点），</a:t>
+            </a:r>
+            <a:r>
+              <a:rPr sz="1150" b="1">
+                <a:solidFill>
+                  <a:srgbClr val="1E293B"/>
+                </a:solidFill>
+                <a:latin typeface="Microsoft YaHei"/>
+              </a:rPr>
+              <a:t>8× 昇腾 NPU</a:t>
+            </a:r>
+            <a:r>
+              <a:rPr sz="1150">
+                <a:solidFill>
+                  <a:srgbClr val="1E293B"/>
+                </a:solidFill>
+                <a:latin typeface="Microsoft YaHei"/>
+              </a:rPr>
+              <a:t>，</a:t>
+            </a:r>
+            <a:r>
+              <a:rPr sz="1150" b="1">
+                <a:solidFill>
+                  <a:srgbClr val="2563EB"/>
+                </a:solidFill>
+                <a:latin typeface="Microsoft YaHei"/>
+              </a:rPr>
+              <a:t>800G RoCE/URMA 交换机</a:t>
+            </a:r>
+            <a:r>
+              <a:rPr sz="1150">
+                <a:solidFill>
+                  <a:srgbClr val="1E293B"/>
+                </a:solidFill>
+                <a:latin typeface="Microsoft YaHei"/>
+              </a:rPr>
+              <a:t>，配置 QoS 硬件队列 (TC0/TC1)。</a:t>
             </a:r>
           </a:p>
           <a:p>
@@ -9981,7 +10111,7 @@
                 </a:solidFill>
                 <a:latin typeface="Microsoft YaHei"/>
               </a:rPr>
-              <a:t>• RCU 引擎：</a:t>
+              <a:t>• 驱动与内核支持：</a:t>
             </a:r>
             <a:r>
               <a:rPr sz="1150">
@@ -9990,7 +10120,7 @@
                 </a:solidFill>
                 <a:latin typeface="Microsoft YaHei"/>
               </a:rPr>
-              <a:t>实现引用计数追踪与 Grace Period 宽限期延迟回收（RCU Epoch 状态机）。</a:t>
+              <a:t>引入 CANN 8.0 运行时与 RDMA 描述符流控，采集交换机出端口丢包与 PFC/ECN 计数器；当前受控源码为 W0/DEMO 测试桩。</a:t>
             </a:r>
           </a:p>
           <a:p>
@@ -10009,7 +10139,16 @@
                 </a:solidFill>
                 <a:latin typeface="Microsoft YaHei"/>
               </a:rPr>
-              <a:t>• 编译参数：</a:t>
+              <a:t>• 测试工具套件：</a:t>
+            </a:r>
+            <a:r>
+              <a:rPr sz="1150">
+                <a:solidFill>
+                  <a:srgbClr val="1E293B"/>
+                </a:solidFill>
+                <a:latin typeface="Microsoft YaHei"/>
+              </a:rPr>
+              <a:t>原型测试代码 </a:t>
             </a:r>
             <a:r>
               <a:rPr sz="1150" b="1">
@@ -10018,7 +10157,16 @@
                 </a:solidFill>
                 <a:latin typeface="Consolas"/>
               </a:rPr>
-              <a:t>g++ -O3 -std=c++17 -Wall rcu_migration_bench.cc -lpthread</a:t>
+              <a:t>incast_and_coflow_bench.py</a:t>
+            </a:r>
+            <a:r>
+              <a:rPr sz="1150">
+                <a:solidFill>
+                  <a:srgbClr val="1E293B"/>
+                </a:solidFill>
+                <a:latin typeface="Microsoft YaHei"/>
+              </a:rPr>
+              <a:t>，支持 N=1..16 并发扫描与 8-Rank Coflow 模拟。</a:t>
             </a:r>
           </a:p>
         </p:txBody>
@@ -10193,7 +10341,7 @@
                 </a:solidFill>
                 <a:latin typeface="Microsoft YaHei"/>
               </a:rPr>
-              <a:t>• 并发读写压测 (rcu_migration_bench.cc)：</a:t>
+              <a:t>• N-to-1 Incast 压测：</a:t>
             </a:r>
             <a:r>
               <a:rPr sz="1150">
@@ -10202,7 +10350,7 @@
                 </a:solidFill>
                 <a:latin typeface="Microsoft YaHei"/>
               </a:rPr>
-              <a:t>在 1~32 个 Reader 线程持续高频读取 KV 时，后台触发 4MB~64MB 显存页动态迁移与碎片整理。</a:t>
+              <a:t>扫描 N=1,2,4,8,16 与 64KB/128KB/1MB 数据块，测量 P50/P90/P99/P99.9 时延与丢包重传。</a:t>
             </a:r>
           </a:p>
           <a:p>
@@ -10221,7 +10369,7 @@
                 </a:solidFill>
                 <a:latin typeface="Microsoft YaHei"/>
               </a:rPr>
-              <a:t>• 停顿与抖动捕获：</a:t>
+              <a:t>• TP=8 Coflow 偏斜测试：</a:t>
             </a:r>
             <a:r>
               <a:rPr sz="1150">
@@ -10230,7 +10378,7 @@
                 </a:solidFill>
                 <a:latin typeface="Microsoft YaHei"/>
               </a:rPr>
-              <a:t>高频采样记录 Reader 的停顿时间（Pause Time P99）与 TPOT 抖动率。</a:t>
+              <a:t>模拟 8 个 Rank 协同流组（CCT=max(T0..T7)），对比干净网络与注入扰动下的偏斜系数 Skew。</a:t>
             </a:r>
           </a:p>
           <a:p>
@@ -10249,7 +10397,7 @@
                 </a:solidFill>
                 <a:latin typeface="Microsoft YaHei"/>
               </a:rPr>
-              <a:t>• 异常与回滚演练：</a:t>
+              <a:t>• Layer 0 硬件优先级 A/B 对照：</a:t>
             </a:r>
             <a:r>
               <a:rPr sz="1150">
@@ -10258,7 +10406,7 @@
                 </a:solidFill>
                 <a:latin typeface="Microsoft YaHei"/>
               </a:rPr>
-              <a:t>在迁移过程中注入进程崩溃与写中断，验证旧版本数据依然有效且 100% 可安全回滚。</a:t>
+              <a:t>对比 FIFO 默认队列与 TC0 硬件优先级队列下 Layer 0 传输时延及 NPU 首层计算气泡 T_bubble。</a:t>
             </a:r>
           </a:p>
         </p:txBody>
@@ -10442,7 +10590,7 @@
                 </a:solidFill>
                 <a:latin typeface="Microsoft YaHei"/>
               </a:rPr>
-              <a:t>《软件 RCU 与锁表停顿对比表》、《32 并发 Reader 时延抖动曲线》、《硬件 AtomicRemap 证伪分析报告》。</a:t>
+              <a:t>《Incast 缓冲区排队与尾部时延表》、《TP=8 Coflow 偏斜系数实测表》、《Layer 0 硬件优先级对比报告》。</a:t>
             </a:r>
           </a:p>
           <a:p>
@@ -10470,7 +10618,26 @@
                 </a:solidFill>
                 <a:latin typeface="Microsoft YaHei"/>
               </a:rPr>
-              <a:t>1. 读停顿极小：</a:t>
+              <a:t>1. Incast 尾部非线性放大：</a:t>
+            </a:r>
+            <a:r>
+              <a:rPr sz="1150">
+                <a:solidFill>
+                  <a:srgbClr val="1E293B"/>
+                </a:solidFill>
+                <a:latin typeface="Microsoft YaHei"/>
+              </a:rPr>
+              <a:t>高并发下捕获 R99(N) 超线性增长趋势，完成排队动力学取证；
+</a:t>
+            </a:r>
+            <a:r>
+              <a:rPr sz="1150" b="1">
+                <a:solidFill>
+                  <a:srgbClr val="1E293B"/>
+                </a:solidFill>
+                <a:latin typeface="Microsoft YaHei"/>
+              </a:rPr>
+              <a:t>2. Coflow 偏斜度达标：</a:t>
             </a:r>
             <a:r>
               <a:rPr sz="1150" b="1">
@@ -10479,7 +10646,7 @@
                 </a:solidFill>
                 <a:latin typeface="Microsoft YaHei"/>
               </a:rPr>
-              <a:t>在 32 并发 Reader 下，软件 RCU 读停顿时间 P99 &lt; 1ms</a:t>
+              <a:t>在 SemanticQoS 调度下 TP=8 Coflow 偏斜系数 Skew_P99 &lt; 1.15</a:t>
             </a:r>
             <a:r>
               <a:rPr sz="1150">
@@ -10498,7 +10665,7 @@
                 </a:solidFill>
                 <a:latin typeface="Microsoft YaHei"/>
               </a:rPr>
-              <a:t>2. 前台无感抖动：</a:t>
+              <a:t>3. Layer 0 气泡消除：</a:t>
             </a:r>
             <a:r>
               <a:rPr sz="1150" b="1">
@@ -10507,35 +10674,7 @@
                 </a:solidFill>
                 <a:latin typeface="Microsoft YaHei"/>
               </a:rPr>
-              <a:t>动态迁移期间前台在线推理 TPOT 抖动率 &lt; 3%</a:t>
-            </a:r>
-            <a:r>
-              <a:rPr sz="1150">
-                <a:solidFill>
-                  <a:srgbClr val="1E293B"/>
-                </a:solidFill>
-                <a:latin typeface="Microsoft YaHei"/>
-              </a:rPr>
-              <a:t>；
-</a:t>
-            </a:r>
-            <a:r>
-              <a:rPr sz="1150" b="1">
-                <a:solidFill>
-                  <a:srgbClr val="1E293B"/>
-                </a:solidFill>
-                <a:latin typeface="Microsoft YaHei"/>
-              </a:rPr>
-              <a:t>3. 证伪硬件芯片依赖：</a:t>
-            </a:r>
-            <a:r>
-              <a:rPr sz="1150" b="1">
-                <a:solidFill>
-                  <a:srgbClr val="2563EB"/>
-                </a:solidFill>
-                <a:latin typeface="Microsoft YaHei"/>
-              </a:rPr>
-              <a:t>软件 RCU 机制完全满足生产要求，正式架构免除专有硬件 AtomicRemap 依赖</a:t>
+              <a:t>开启硬件 QoS 优先级后 Layer 0 传输时延降低 ≥ 50%，首层计算气泡显著削减</a:t>
             </a:r>
             <a:r>
               <a:rPr sz="1150">
@@ -10680,7 +10819,7 @@
                 </a:solidFill>
                 <a:latin typeface="Microsoft YaHei"/>
               </a:rPr>
-              <a:t>CVT-01 软件 RCU 显存整理证伪：</a:t>
+              <a:t>PVT-10 Incast 动力学与 Coflow 偏斜：</a:t>
             </a:r>
             <a:r>
               <a:rPr sz="1150" b="1">
@@ -10689,7 +10828,7 @@
                 </a:solidFill>
                 <a:latin typeface="Microsoft YaHei"/>
               </a:rPr>
-              <a:t>软件 RCU 在 32 并发 Reader 下读停顿 </a:t>
+              <a:t>实测证实 Incast 尾部非线性放大与 TP=8 木桶短板，SemanticQoS 实现 </a:t>
             </a:r>
             <a:r>
               <a:rPr sz="1150" b="1">
@@ -10698,7 +10837,7 @@
                 </a:solidFill>
                 <a:latin typeface="Microsoft YaHei"/>
               </a:rPr>
-              <a:t>P99 &lt; 1ms</a:t>
+              <a:t>Coflow 偏斜 Skew &lt; 1.15</a:t>
             </a:r>
             <a:r>
               <a:rPr sz="1150" b="1">
@@ -10707,7 +10846,7 @@
                 </a:solidFill>
                 <a:latin typeface="Microsoft YaHei"/>
               </a:rPr>
-              <a:t>，TPOT 抖动 </a:t>
+              <a:t>，Layer 0 优先级使传输时延降低 </a:t>
             </a:r>
             <a:r>
               <a:rPr sz="1150" b="1">
@@ -10716,7 +10855,7 @@
                 </a:solidFill>
                 <a:latin typeface="Microsoft YaHei"/>
               </a:rPr>
-              <a:t>&lt;3%</a:t>
+              <a:t>≥50%</a:t>
             </a:r>
             <a:r>
               <a:rPr sz="1150" b="1">
@@ -10725,7 +10864,7 @@
                 </a:solidFill>
                 <a:latin typeface="Microsoft YaHei"/>
               </a:rPr>
-              <a:t>，成功证伪专有硬件 AtomicRemap 芯片依赖，确立纯软件高效显存整理架构。</a:t>
+              <a:t> 并消除首层计算气泡。</a:t>
             </a:r>
           </a:p>
         </p:txBody>
@@ -10764,8 +10903,8 @@
         </p:nvSpPr>
         <p:spPr>
           <a:xfrm>
-            <a:off x="548640" y="594360"/>
-            <a:ext cx="10972800" cy="1005840"/>
+            <a:off x="457200" y="320040"/>
+            <a:ext cx="9875520" cy="640080"/>
           </a:xfrm>
           <a:prstGeom prst="rect">
             <a:avLst/>
@@ -10779,7 +10918,7 @@
           <a:lstStyle/>
           <a:p>
             <a:pPr>
-              <a:defRPr sz="2400" b="1">
+              <a:defRPr sz="1900" b="1">
                 <a:solidFill>
                   <a:srgbClr val="1E3A8A"/>
                 </a:solidFill>
@@ -10787,15 +10926,15 @@
               </a:defRPr>
             </a:pPr>
             <a:r>
-              <a:t>提前验证方案设计总结</a:t>
+              <a:t>CVT-01：PageMigration 软件 RCU 机制 vs 硬件 AtomicRemap 必要性证伪</a:t>
             </a:r>
           </a:p>
           <a:p>
             <a:pPr>
               <a:spcBef>
-                <a:spcPts val="400"/>
+                <a:spcPts val="300"/>
               </a:spcBef>
-              <a:defRPr sz="1200">
+              <a:defRPr sz="1100">
                 <a:solidFill>
                   <a:srgbClr val="475569"/>
                 </a:solidFill>
@@ -10803,21 +10942,57 @@
               </a:defRPr>
             </a:pPr>
             <a:r>
-              <a:t>基于开源底座深度重构 · 以客观实测数据为依据 · 摸清技术边界 · 保障系统落地</a:t>
-            </a:r>
-          </a:p>
-        </p:txBody>
-      </p:sp>
-      <p:sp>
-        <p:nvSpPr>
-          <p:cNvPr id="3" name="Rectangle 2"/>
+              <a:t>验证显存碎片整理与页迁移时，软件 RCU (无锁读+宽限期释放) 是否已满足读停顿 &lt; 1ms，免除专有硬件芯片依赖</a:t>
+            </a:r>
+          </a:p>
+        </p:txBody>
+      </p:sp>
+      <p:sp>
+        <p:nvSpPr>
+          <p:cNvPr id="3" name="TextBox 2"/>
+          <p:cNvSpPr txBox="1"/>
+          <p:nvPr/>
+        </p:nvSpPr>
+        <p:spPr>
+          <a:xfrm>
+            <a:off x="10424160" y="320040"/>
+            <a:ext cx="1310335" cy="320040"/>
+          </a:xfrm>
+          <a:prstGeom prst="rect">
+            <a:avLst/>
+          </a:prstGeom>
+          <a:noFill/>
+        </p:spPr>
+        <p:txBody>
+          <a:bodyPr wrap="none" lIns="0" tIns="0" rIns="0" bIns="0">
+            <a:spAutoFit/>
+          </a:bodyPr>
+          <a:lstStyle/>
+          <a:p>
+            <a:pPr algn="r">
+              <a:defRPr sz="1150" b="1">
+                <a:solidFill>
+                  <a:srgbClr val="2563EB"/>
+                </a:solidFill>
+                <a:latin typeface="Microsoft YaHei"/>
+              </a:defRPr>
+            </a:pPr>
+            <a:r>
+              <a:t>第 14 / 15 页</a:t>
+            </a:r>
+          </a:p>
+        </p:txBody>
+      </p:sp>
+      <p:sp>
+        <p:nvSpPr>
+          <p:cNvPr id="4" name="Rectangle 3"/>
           <p:cNvSpPr/>
           <p:nvPr/>
         </p:nvSpPr>
         <p:spPr>
           <a:xfrm>
-            <a:off x="548640" y="1783080"/>
-            <a:ext cx="3474720" cy="3566160"/>
+            <a:off x="457200" y="1051560"/>
+            <a:ext cx="5532120" cy="2240280"/>
           </a:xfrm>
           <a:prstGeom prst="rect">
             <a:avLst/>
@@ -10855,14 +11030,14 @@
       </p:sp>
       <p:sp>
         <p:nvSpPr>
-          <p:cNvPr id="4" name="Rectangle 3"/>
+          <p:cNvPr id="5" name="Rectangle 4"/>
           <p:cNvSpPr/>
           <p:nvPr/>
         </p:nvSpPr>
         <p:spPr>
           <a:xfrm>
-            <a:off x="548640" y="1783080"/>
-            <a:ext cx="3474720" cy="329184"/>
+            <a:off x="457200" y="1051560"/>
+            <a:ext cx="5532120" cy="310896"/>
           </a:xfrm>
           <a:prstGeom prst="rect">
             <a:avLst/>
@@ -10898,14 +11073,14 @@
       </p:sp>
       <p:sp>
         <p:nvSpPr>
-          <p:cNvPr id="5" name="TextBox 4"/>
+          <p:cNvPr id="6" name="TextBox 5"/>
           <p:cNvSpPr txBox="1"/>
           <p:nvPr/>
         </p:nvSpPr>
         <p:spPr>
           <a:xfrm>
-            <a:off x="658368" y="1819656"/>
-            <a:ext cx="3255264" cy="256032"/>
+            <a:off x="566928" y="1088136"/>
+            <a:ext cx="5312664" cy="237744"/>
           </a:xfrm>
           <a:prstGeom prst="rect">
             <a:avLst/>
@@ -10927,7 +11102,7 @@
               </a:defRPr>
             </a:pPr>
             <a:r>
-              <a:t>原则一：开源基线实测驱动</a:t>
+              <a:t>1. 验证背景、必要性与目标定位</a:t>
             </a:r>
             <a:r>
               <a:rPr sz="1000" b="1">
@@ -10936,21 +11111,21 @@
                 </a:solidFill>
                 <a:latin typeface="Microsoft YaHei"/>
               </a:rPr>
-              <a:t>  [数据对账]</a:t>
-            </a:r>
-          </a:p>
-        </p:txBody>
-      </p:sp>
-      <p:sp>
-        <p:nvSpPr>
-          <p:cNvPr id="6" name="TextBox 5"/>
+              <a:t>  [P2 级 | 条件证伪项]</a:t>
+            </a:r>
+          </a:p>
+        </p:txBody>
+      </p:sp>
+      <p:sp>
+        <p:nvSpPr>
+          <p:cNvPr id="7" name="TextBox 6"/>
           <p:cNvSpPr txBox="1"/>
           <p:nvPr/>
         </p:nvSpPr>
         <p:spPr>
           <a:xfrm>
-            <a:off x="694944" y="2185416"/>
-            <a:ext cx="3182112" cy="3090672"/>
+            <a:off x="585216" y="1417320"/>
+            <a:ext cx="5276088" cy="1819656"/>
           </a:xfrm>
           <a:prstGeom prst="rect">
             <a:avLst/>
@@ -10978,7 +11153,7 @@
                 </a:solidFill>
                 <a:latin typeface="Microsoft YaHei"/>
               </a:rPr>
-              <a:t>• 拒绝纸面空想：</a:t>
+              <a:t>• 验证背景：</a:t>
             </a:r>
             <a:r>
               <a:rPr sz="1150">
@@ -10987,7 +11162,7 @@
                 </a:solidFill>
                 <a:latin typeface="Microsoft YaHei"/>
               </a:rPr>
-              <a:t>所有技术结论必须基于 2 节点集群、vLLM benchmark_serving 在线打流实测数据与打点日志。</a:t>
+              <a:t>长时间推理会导致显存严重碎片化。业界部分方案探索依赖专有硬件 Atomic Remap 芯片原语来搬移显存页，增加了外部芯片依赖与硬件成本。</a:t>
             </a:r>
           </a:p>
           <a:p>
@@ -11006,7 +11181,7 @@
                 </a:solidFill>
                 <a:latin typeface="Microsoft YaHei"/>
               </a:rPr>
-              <a:t>• 全流程数据留痕：</a:t>
+              <a:t>• 验证目的：</a:t>
             </a:r>
             <a:r>
               <a:rPr sz="1150">
@@ -11015,7 +11190,25 @@
                 </a:solidFill>
                 <a:latin typeface="Microsoft YaHei"/>
               </a:rPr>
-              <a:t>详细记录每次测试的输入规模、硬件配置、时延与带宽原始 CSV 数据。</a:t>
+              <a:t>验证基于软件 RCU（Read-Copy-Update，读-拷贝-更新：无锁读与宽限期延迟释放机制）能否实现动态页迁移时 </a:t>
+            </a:r>
+            <a:r>
+              <a:rPr sz="1150" b="1">
+                <a:solidFill>
+                  <a:srgbClr val="DC2626"/>
+                </a:solidFill>
+                <a:latin typeface="Microsoft YaHei"/>
+              </a:rPr>
+              <a:t>前台在线推理读停顿 &lt; 1ms、TPOT 抖动 &lt; 3%</a:t>
+            </a:r>
+            <a:r>
+              <a:rPr sz="1150">
+                <a:solidFill>
+                  <a:srgbClr val="1E293B"/>
+                </a:solidFill>
+                <a:latin typeface="Microsoft YaHei"/>
+              </a:rPr>
+              <a:t>，从而证伪硬件芯片的“必需性”。</a:t>
             </a:r>
           </a:p>
           <a:p>
@@ -11034,7 +11227,7 @@
                 </a:solidFill>
                 <a:latin typeface="Microsoft YaHei"/>
               </a:rPr>
-              <a:t>• 三重消融交叉对账：</a:t>
+              <a:t>• 对整体项目的支撑：</a:t>
             </a:r>
             <a:r>
               <a:rPr sz="1150">
@@ -11043,21 +11236,21 @@
                 </a:solidFill>
                 <a:latin typeface="Microsoft YaHei"/>
               </a:rPr>
-              <a:t>成本模型预估耗时与实际执行耗时进行交叉对比，检验模型精度。</a:t>
-            </a:r>
-          </a:p>
-        </p:txBody>
-      </p:sp>
-      <p:sp>
-        <p:nvSpPr>
-          <p:cNvPr id="7" name="Rectangle 6"/>
+              <a:t>通过严密的软硬件对比证伪，确立纯软件显存整理方案，简化系统架构，降低硬件强依赖风险。</a:t>
+            </a:r>
+          </a:p>
+        </p:txBody>
+      </p:sp>
+      <p:sp>
+        <p:nvSpPr>
+          <p:cNvPr id="8" name="Rectangle 7"/>
           <p:cNvSpPr/>
           <p:nvPr/>
         </p:nvSpPr>
         <p:spPr>
           <a:xfrm>
-            <a:off x="4449470" y="1783080"/>
-            <a:ext cx="3474720" cy="3566160"/>
+            <a:off x="6202375" y="1051560"/>
+            <a:ext cx="5532120" cy="2240280"/>
           </a:xfrm>
           <a:prstGeom prst="rect">
             <a:avLst/>
@@ -11095,14 +11288,14 @@
       </p:sp>
       <p:sp>
         <p:nvSpPr>
-          <p:cNvPr id="8" name="Rectangle 7"/>
+          <p:cNvPr id="9" name="Rectangle 8"/>
           <p:cNvSpPr/>
           <p:nvPr/>
         </p:nvSpPr>
         <p:spPr>
           <a:xfrm>
-            <a:off x="4449470" y="1783080"/>
-            <a:ext cx="3474720" cy="329184"/>
+            <a:off x="6202375" y="1051560"/>
+            <a:ext cx="5532120" cy="310896"/>
           </a:xfrm>
           <a:prstGeom prst="rect">
             <a:avLst/>
@@ -11138,14 +11331,14 @@
       </p:sp>
       <p:sp>
         <p:nvSpPr>
-          <p:cNvPr id="9" name="TextBox 8"/>
+          <p:cNvPr id="10" name="TextBox 9"/>
           <p:cNvSpPr txBox="1"/>
           <p:nvPr/>
         </p:nvSpPr>
         <p:spPr>
           <a:xfrm>
-            <a:off x="4559198" y="1819656"/>
-            <a:ext cx="3255264" cy="256032"/>
+            <a:off x="6312103" y="1088136"/>
+            <a:ext cx="5312664" cy="237744"/>
           </a:xfrm>
           <a:prstGeom prst="rect">
             <a:avLst/>
@@ -11167,7 +11360,7 @@
               </a:defRPr>
             </a:pPr>
             <a:r>
-              <a:t>原则二：软硬协同与技术收敛</a:t>
+              <a:t>2. 所需软硬件环境与技术规范</a:t>
             </a:r>
             <a:r>
               <a:rPr sz="1000" b="1">
@@ -11176,21 +11369,21 @@
                 </a:solidFill>
                 <a:latin typeface="Microsoft YaHei"/>
               </a:rPr>
-              <a:t>  [方案选型]</a:t>
-            </a:r>
-          </a:p>
-        </p:txBody>
-      </p:sp>
-      <p:sp>
-        <p:nvSpPr>
-          <p:cNvPr id="10" name="TextBox 9"/>
+              <a:t>  [环境与依赖]</a:t>
+            </a:r>
+          </a:p>
+        </p:txBody>
+      </p:sp>
+      <p:sp>
+        <p:nvSpPr>
+          <p:cNvPr id="11" name="TextBox 10"/>
           <p:cNvSpPr txBox="1"/>
           <p:nvPr/>
         </p:nvSpPr>
         <p:spPr>
           <a:xfrm>
-            <a:off x="4595774" y="2185416"/>
-            <a:ext cx="3182112" cy="3090672"/>
+            <a:off x="6330391" y="1417320"/>
+            <a:ext cx="5276088" cy="1819656"/>
           </a:xfrm>
           <a:prstGeom prst="rect">
             <a:avLst/>
@@ -11218,7 +11411,7 @@
                 </a:solidFill>
                 <a:latin typeface="Microsoft YaHei"/>
               </a:rPr>
-              <a:t>• 发挥底层硬件优势：</a:t>
+              <a:t>• 内存协议：</a:t>
             </a:r>
             <a:r>
               <a:rPr sz="1150">
@@ -11227,7 +11420,7 @@
                 </a:solidFill>
                 <a:latin typeface="Microsoft YaHei"/>
               </a:rPr>
-              <a:t>借助 UBMEM 总线、URMA DMA 与 io_uring FIXED I/O 裸盘直达，消除 Host CPU 拷贝瓶颈。</a:t>
+              <a:t>POSIX 共享内存与无锁原子指针交换，CANN 8.0 显存管理运行时。</a:t>
             </a:r>
           </a:p>
           <a:p>
@@ -11246,7 +11439,7 @@
                 </a:solidFill>
                 <a:latin typeface="Microsoft YaHei"/>
               </a:rPr>
-              <a:t>• 科学剪除硬件依赖：</a:t>
+              <a:t>• RCU 引擎：</a:t>
             </a:r>
             <a:r>
               <a:rPr sz="1150">
@@ -11255,7 +11448,7 @@
                 </a:solidFill>
                 <a:latin typeface="Microsoft YaHei"/>
               </a:rPr>
-              <a:t>证实软件树状中继组播、软件 RCU 与纯软 Raw Direct 的可用性，降低系统外部依赖风险。</a:t>
+              <a:t>实现引用计数追踪与 Grace Period 宽限期延迟回收（RCU Epoch 状态机）。</a:t>
             </a:r>
           </a:p>
           <a:p>
@@ -11274,30 +11467,30 @@
                 </a:solidFill>
                 <a:latin typeface="Microsoft YaHei"/>
               </a:rPr>
-              <a:t>• 坚守生产级稳定性：</a:t>
-            </a:r>
-            <a:r>
-              <a:rPr sz="1150">
-                <a:solidFill>
-                  <a:srgbClr val="1E293B"/>
-                </a:solidFill>
-                <a:latin typeface="Microsoft YaHei"/>
-              </a:rPr>
-              <a:t>ViewGuard 异常保护与 6 维语义校验机制确保系统在各类异常下平稳运行、不发生死锁。</a:t>
-            </a:r>
-          </a:p>
-        </p:txBody>
-      </p:sp>
-      <p:sp>
-        <p:nvSpPr>
-          <p:cNvPr id="11" name="Rectangle 10"/>
+              <a:t>• 编译参数：</a:t>
+            </a:r>
+            <a:r>
+              <a:rPr sz="1150" b="1">
+                <a:solidFill>
+                  <a:srgbClr val="1E3A8A"/>
+                </a:solidFill>
+                <a:latin typeface="Consolas"/>
+              </a:rPr>
+              <a:t>g++ -O3 -std=c++17 rcu_migration_bench.cc -lpthread</a:t>
+            </a:r>
+          </a:p>
+        </p:txBody>
+      </p:sp>
+      <p:sp>
+        <p:nvSpPr>
+          <p:cNvPr id="12" name="Rectangle 11"/>
           <p:cNvSpPr/>
           <p:nvPr/>
         </p:nvSpPr>
         <p:spPr>
           <a:xfrm>
-            <a:off x="8350300" y="1783080"/>
-            <a:ext cx="3474720" cy="3566160"/>
+            <a:off x="457200" y="3383280"/>
+            <a:ext cx="5532120" cy="2359152"/>
           </a:xfrm>
           <a:prstGeom prst="rect">
             <a:avLst/>
@@ -11335,14 +11528,254 @@
       </p:sp>
       <p:sp>
         <p:nvSpPr>
-          <p:cNvPr id="12" name="Rectangle 11"/>
+          <p:cNvPr id="13" name="Rectangle 12"/>
           <p:cNvSpPr/>
           <p:nvPr/>
         </p:nvSpPr>
         <p:spPr>
           <a:xfrm>
-            <a:off x="8350300" y="1783080"/>
-            <a:ext cx="3474720" cy="329184"/>
+            <a:off x="457200" y="3383280"/>
+            <a:ext cx="5532120" cy="310896"/>
+          </a:xfrm>
+          <a:prstGeom prst="rect">
+            <a:avLst/>
+          </a:prstGeom>
+          <a:solidFill>
+            <a:srgbClr val="1E3A8A"/>
+          </a:solidFill>
+          <a:ln>
+            <a:noFill/>
+          </a:ln>
+        </p:spPr>
+        <p:style>
+          <a:lnRef idx="1">
+            <a:schemeClr val="accent1"/>
+          </a:lnRef>
+          <a:fillRef idx="3">
+            <a:schemeClr val="accent1"/>
+          </a:fillRef>
+          <a:effectRef idx="2">
+            <a:schemeClr val="accent1"/>
+          </a:effectRef>
+          <a:fontRef idx="minor">
+            <a:schemeClr val="lt1"/>
+          </a:fontRef>
+        </p:style>
+        <p:txBody>
+          <a:bodyPr rtlCol="0" anchor="ctr"/>
+          <a:lstStyle/>
+          <a:p>
+            <a:pPr algn="ctr"/>
+          </a:p>
+        </p:txBody>
+      </p:sp>
+      <p:sp>
+        <p:nvSpPr>
+          <p:cNvPr id="14" name="TextBox 13"/>
+          <p:cNvSpPr txBox="1"/>
+          <p:nvPr/>
+        </p:nvSpPr>
+        <p:spPr>
+          <a:xfrm>
+            <a:off x="566928" y="3419856"/>
+            <a:ext cx="5312664" cy="237744"/>
+          </a:xfrm>
+          <a:prstGeom prst="rect">
+            <a:avLst/>
+          </a:prstGeom>
+          <a:noFill/>
+        </p:spPr>
+        <p:txBody>
+          <a:bodyPr wrap="none" lIns="0" tIns="0" rIns="0" bIns="0">
+            <a:spAutoFit/>
+          </a:bodyPr>
+          <a:lstStyle/>
+          <a:p>
+            <a:pPr>
+              <a:defRPr sz="1200" b="1">
+                <a:solidFill>
+                  <a:srgbClr val="FFFFFF"/>
+                </a:solidFill>
+                <a:latin typeface="Microsoft YaHei"/>
+              </a:defRPr>
+            </a:pPr>
+            <a:r>
+              <a:t>3. 测试数据集与 Benchmark 方案</a:t>
+            </a:r>
+            <a:r>
+              <a:rPr sz="1000" b="1">
+                <a:solidFill>
+                  <a:srgbClr val="BFDBFE"/>
+                </a:solidFill>
+                <a:latin typeface="Microsoft YaHei"/>
+              </a:rPr>
+              <a:t>  [测试方法]</a:t>
+            </a:r>
+          </a:p>
+        </p:txBody>
+      </p:sp>
+      <p:sp>
+        <p:nvSpPr>
+          <p:cNvPr id="15" name="TextBox 14"/>
+          <p:cNvSpPr txBox="1"/>
+          <p:nvPr/>
+        </p:nvSpPr>
+        <p:spPr>
+          <a:xfrm>
+            <a:off x="585216" y="3749040"/>
+            <a:ext cx="5276088" cy="1938528"/>
+          </a:xfrm>
+          <a:prstGeom prst="rect">
+            <a:avLst/>
+          </a:prstGeom>
+          <a:noFill/>
+        </p:spPr>
+        <p:txBody>
+          <a:bodyPr wrap="square" lIns="0" tIns="0" rIns="0" bIns="0">
+            <a:spAutoFit/>
+          </a:bodyPr>
+          <a:lstStyle/>
+          <a:p>
+            <a:pPr>
+              <a:lnSpc>
+                <a:spcPct val="120000"/>
+              </a:lnSpc>
+              <a:spcAft>
+                <a:spcPts val="600"/>
+              </a:spcAft>
+            </a:pPr>
+            <a:r>
+              <a:rPr sz="1150" b="1">
+                <a:solidFill>
+                  <a:srgbClr val="1E3A8A"/>
+                </a:solidFill>
+                <a:latin typeface="Microsoft YaHei"/>
+              </a:rPr>
+              <a:t>• 并发读写压测 (rcu_migration_bench.cc)：</a:t>
+            </a:r>
+            <a:r>
+              <a:rPr sz="1150">
+                <a:solidFill>
+                  <a:srgbClr val="1E293B"/>
+                </a:solidFill>
+                <a:latin typeface="Microsoft YaHei"/>
+              </a:rPr>
+              <a:t>在 1~32 个 Reader 线程持续高频读取 KV 时，后台触发 4MB~64MB 显存页动态迁移与碎片整理。</a:t>
+            </a:r>
+          </a:p>
+          <a:p>
+            <a:pPr>
+              <a:lnSpc>
+                <a:spcPct val="120000"/>
+              </a:lnSpc>
+              <a:spcAft>
+                <a:spcPts val="600"/>
+              </a:spcAft>
+            </a:pPr>
+            <a:r>
+              <a:rPr sz="1150" b="1">
+                <a:solidFill>
+                  <a:srgbClr val="1E3A8A"/>
+                </a:solidFill>
+                <a:latin typeface="Microsoft YaHei"/>
+              </a:rPr>
+              <a:t>• 停顿与抖动捕获：</a:t>
+            </a:r>
+            <a:r>
+              <a:rPr sz="1150">
+                <a:solidFill>
+                  <a:srgbClr val="1E293B"/>
+                </a:solidFill>
+                <a:latin typeface="Microsoft YaHei"/>
+              </a:rPr>
+              <a:t>高频采样记录 Reader 的停顿时间（Pause Time P99）与 TPOT 抖动率。</a:t>
+            </a:r>
+          </a:p>
+          <a:p>
+            <a:pPr>
+              <a:lnSpc>
+                <a:spcPct val="120000"/>
+              </a:lnSpc>
+              <a:spcAft>
+                <a:spcPts val="600"/>
+              </a:spcAft>
+            </a:pPr>
+            <a:r>
+              <a:rPr sz="1150" b="1">
+                <a:solidFill>
+                  <a:srgbClr val="1E3A8A"/>
+                </a:solidFill>
+                <a:latin typeface="Microsoft YaHei"/>
+              </a:rPr>
+              <a:t>• 异常与回滚演练：</a:t>
+            </a:r>
+            <a:r>
+              <a:rPr sz="1150">
+                <a:solidFill>
+                  <a:srgbClr val="1E293B"/>
+                </a:solidFill>
+                <a:latin typeface="Microsoft YaHei"/>
+              </a:rPr>
+              <a:t>在迁移过程中注入进程崩溃与写中断，验证旧版本数据依然有效且 100% 可安全回滚。</a:t>
+            </a:r>
+          </a:p>
+        </p:txBody>
+      </p:sp>
+      <p:sp>
+        <p:nvSpPr>
+          <p:cNvPr id="16" name="Rectangle 15"/>
+          <p:cNvSpPr/>
+          <p:nvPr/>
+        </p:nvSpPr>
+        <p:spPr>
+          <a:xfrm>
+            <a:off x="6202375" y="3383280"/>
+            <a:ext cx="5532120" cy="2359152"/>
+          </a:xfrm>
+          <a:prstGeom prst="rect">
+            <a:avLst/>
+          </a:prstGeom>
+          <a:solidFill>
+            <a:srgbClr val="FFFFFF"/>
+          </a:solidFill>
+          <a:ln w="12700">
+            <a:solidFill>
+              <a:srgbClr val="BFDBFE"/>
+            </a:solidFill>
+          </a:ln>
+        </p:spPr>
+        <p:style>
+          <a:lnRef idx="1">
+            <a:schemeClr val="accent1"/>
+          </a:lnRef>
+          <a:fillRef idx="3">
+            <a:schemeClr val="accent1"/>
+          </a:fillRef>
+          <a:effectRef idx="2">
+            <a:schemeClr val="accent1"/>
+          </a:effectRef>
+          <a:fontRef idx="minor">
+            <a:schemeClr val="lt1"/>
+          </a:fontRef>
+        </p:style>
+        <p:txBody>
+          <a:bodyPr rtlCol="0" anchor="ctr"/>
+          <a:lstStyle/>
+          <a:p>
+            <a:pPr algn="ctr"/>
+          </a:p>
+        </p:txBody>
+      </p:sp>
+      <p:sp>
+        <p:nvSpPr>
+          <p:cNvPr id="17" name="Rectangle 16"/>
+          <p:cNvSpPr/>
+          <p:nvPr/>
+        </p:nvSpPr>
+        <p:spPr>
+          <a:xfrm>
+            <a:off x="6202375" y="3383280"/>
+            <a:ext cx="5532120" cy="310896"/>
           </a:xfrm>
           <a:prstGeom prst="rect">
             <a:avLst/>
@@ -11378,14 +11811,14 @@
       </p:sp>
       <p:sp>
         <p:nvSpPr>
-          <p:cNvPr id="13" name="TextBox 12"/>
+          <p:cNvPr id="18" name="TextBox 17"/>
           <p:cNvSpPr txBox="1"/>
           <p:nvPr/>
         </p:nvSpPr>
         <p:spPr>
           <a:xfrm>
-            <a:off x="8460028" y="1819656"/>
-            <a:ext cx="3255264" cy="256032"/>
+            <a:off x="6312103" y="3419856"/>
+            <a:ext cx="5312664" cy="237744"/>
           </a:xfrm>
           <a:prstGeom prst="rect">
             <a:avLst/>
@@ -11407,7 +11840,7 @@
               </a:defRPr>
             </a:pPr>
             <a:r>
-              <a:t>原则三：量化验收与闭环</a:t>
+              <a:t>4. 输出数据要求与判定标准</a:t>
             </a:r>
             <a:r>
               <a:rPr sz="1000" b="1">
@@ -11416,21 +11849,21 @@
                 </a:solidFill>
                 <a:latin typeface="Microsoft YaHei"/>
               </a:rPr>
-              <a:t>  [验收要求]</a:t>
-            </a:r>
-          </a:p>
-        </p:txBody>
-      </p:sp>
-      <p:sp>
-        <p:nvSpPr>
-          <p:cNvPr id="14" name="TextBox 13"/>
+              <a:t>  [达标要求]</a:t>
+            </a:r>
+          </a:p>
+        </p:txBody>
+      </p:sp>
+      <p:sp>
+        <p:nvSpPr>
+          <p:cNvPr id="19" name="TextBox 18"/>
           <p:cNvSpPr txBox="1"/>
           <p:nvPr/>
         </p:nvSpPr>
         <p:spPr>
           <a:xfrm>
-            <a:off x="8496604" y="2185416"/>
-            <a:ext cx="3182112" cy="3090672"/>
+            <a:off x="6330391" y="3749040"/>
+            <a:ext cx="5276088" cy="1938528"/>
           </a:xfrm>
           <a:prstGeom prst="rect">
             <a:avLst/>
@@ -11458,7 +11891,7 @@
                 </a:solidFill>
                 <a:latin typeface="Microsoft YaHei"/>
               </a:rPr>
-              <a:t>• 严格执行达标门限：</a:t>
+              <a:t>• 关键交付物：</a:t>
             </a:r>
             <a:r>
               <a:rPr sz="1150">
@@ -11467,7 +11900,7 @@
                 </a:solidFill>
                 <a:latin typeface="Microsoft YaHei"/>
               </a:rPr>
-              <a:t>全链路 P99 TTFT 降低 ≥20%、系统吞吐提升 ≥10%、前台抖动 &lt;3% 等关键指标必须达标。</a:t>
+              <a:t>《软件 RCU 与锁表停顿对比表》、《32 并发 Reader 时延抖动曲线》、《硬件 AtomicRemap 证伪分析报告》。</a:t>
             </a:r>
           </a:p>
           <a:p>
@@ -11486,7 +11919,16 @@
                 </a:solidFill>
                 <a:latin typeface="Microsoft YaHei"/>
               </a:rPr>
-              <a:t>• 产出完整技术证据包：</a:t>
+              <a:t>• 判定达标要求 (Go/No-Go)：</a:t>
+            </a:r>
+            <a:r>
+              <a:rPr sz="1150" b="1">
+                <a:solidFill>
+                  <a:srgbClr val="1E293B"/>
+                </a:solidFill>
+                <a:latin typeface="Microsoft YaHei"/>
+              </a:rPr>
+              <a:t>1. 读停顿极小：</a:t>
             </a:r>
             <a:r>
               <a:rPr sz="1150" b="1">
@@ -11495,21 +11937,86 @@
                 </a:solidFill>
                 <a:latin typeface="Microsoft YaHei"/>
               </a:rPr>
-              <a:t>形成包含测试源码、环境配置、实测数据与分析结论的完整立项技术证据包。</a:t>
-            </a:r>
-          </a:p>
-        </p:txBody>
-      </p:sp>
-      <p:sp>
-        <p:nvSpPr>
-          <p:cNvPr id="15" name="Rectangle 14"/>
+              <a:t>在 32 并发 Reader 下，软件 RCU 读停顿时间 P99 &lt; 1ms</a:t>
+            </a:r>
+            <a:r>
+              <a:rPr sz="1150">
+                <a:solidFill>
+                  <a:srgbClr val="1E293B"/>
+                </a:solidFill>
+                <a:latin typeface="Microsoft YaHei"/>
+              </a:rPr>
+              <a:t>；
+</a:t>
+            </a:r>
+            <a:r>
+              <a:rPr sz="1150" b="1">
+                <a:solidFill>
+                  <a:srgbClr val="1E293B"/>
+                </a:solidFill>
+                <a:latin typeface="Microsoft YaHei"/>
+              </a:rPr>
+              <a:t>2. 前台无感抖动：</a:t>
+            </a:r>
+            <a:r>
+              <a:rPr sz="1150" b="1">
+                <a:solidFill>
+                  <a:srgbClr val="059669"/>
+                </a:solidFill>
+                <a:latin typeface="Microsoft YaHei"/>
+              </a:rPr>
+              <a:t>动态迁移期间前台在线推理 TPOT 抖动率 &lt; 3%</a:t>
+            </a:r>
+            <a:r>
+              <a:rPr sz="1150">
+                <a:solidFill>
+                  <a:srgbClr val="1E293B"/>
+                </a:solidFill>
+                <a:latin typeface="Microsoft YaHei"/>
+              </a:rPr>
+              <a:t>；
+</a:t>
+            </a:r>
+            <a:r>
+              <a:rPr sz="1150" b="1">
+                <a:solidFill>
+                  <a:srgbClr val="1E293B"/>
+                </a:solidFill>
+                <a:latin typeface="Microsoft YaHei"/>
+              </a:rPr>
+              <a:t>3. 证伪硬件芯片依赖：</a:t>
+            </a:r>
+            <a:r>
+              <a:rPr sz="1150" b="1">
+                <a:solidFill>
+                  <a:srgbClr val="2563EB"/>
+                </a:solidFill>
+                <a:latin typeface="Microsoft YaHei"/>
+              </a:rPr>
+              <a:t>软件 RCU 机制完全满足生产要求，正式架构免除专有硬件 AtomicRemap 依赖</a:t>
+            </a:r>
+            <a:r>
+              <a:rPr sz="1150">
+                <a:solidFill>
+                  <a:srgbClr val="1E293B"/>
+                </a:solidFill>
+                <a:latin typeface="Microsoft YaHei"/>
+              </a:rPr>
+              <a:t>。</a:t>
+            </a:r>
+          </a:p>
+        </p:txBody>
+      </p:sp>
+      <p:sp>
+        <p:nvSpPr>
+          <p:cNvPr id="20" name="Rectangle 19"/>
           <p:cNvSpPr/>
           <p:nvPr/>
         </p:nvSpPr>
         <p:spPr>
           <a:xfrm>
-            <a:off x="548640" y="5669280"/>
-            <a:ext cx="11094415" cy="713232"/>
+            <a:off x="457200" y="5833872"/>
+            <a:ext cx="11277295" cy="694944"/>
           </a:xfrm>
           <a:prstGeom prst="rect">
             <a:avLst/>
@@ -11547,14 +12054,14 @@
       </p:sp>
       <p:sp>
         <p:nvSpPr>
-          <p:cNvPr id="16" name="Rectangle 15"/>
+          <p:cNvPr id="21" name="Rectangle 20"/>
           <p:cNvSpPr/>
           <p:nvPr/>
         </p:nvSpPr>
         <p:spPr>
           <a:xfrm>
-            <a:off x="548640" y="5669280"/>
-            <a:ext cx="73152" cy="713232"/>
+            <a:off x="457200" y="5833872"/>
+            <a:ext cx="73152" cy="694944"/>
           </a:xfrm>
           <a:prstGeom prst="rect">
             <a:avLst/>
@@ -11590,14 +12097,14 @@
       </p:sp>
       <p:sp>
         <p:nvSpPr>
-          <p:cNvPr id="17" name="TextBox 16"/>
+          <p:cNvPr id="22" name="TextBox 21"/>
           <p:cNvSpPr txBox="1"/>
           <p:nvPr/>
         </p:nvSpPr>
         <p:spPr>
           <a:xfrm>
-            <a:off x="731520" y="5779008"/>
-            <a:ext cx="10820095" cy="530352"/>
+            <a:off x="621792" y="5907024"/>
+            <a:ext cx="11002975" cy="566928"/>
           </a:xfrm>
           <a:prstGeom prst="rect">
             <a:avLst/>
@@ -11610,7 +12117,958 @@
           </a:bodyPr>
           <a:lstStyle/>
           <a:p>
+            <a:pPr>
+              <a:lnSpc>
+                <a:spcPct val="122000"/>
+              </a:lnSpc>
+            </a:pPr>
+            <a:r>
+              <a:rPr sz="1200" b="1">
+                <a:solidFill>
+                  <a:srgbClr val="2563EB"/>
+                </a:solidFill>
+                <a:latin typeface="Microsoft YaHei"/>
+              </a:rPr>
+              <a:t>【方案核心结论】 </a:t>
+            </a:r>
+            <a:r>
+              <a:rPr sz="1200" b="1">
+                <a:solidFill>
+                  <a:srgbClr val="0F172A"/>
+                </a:solidFill>
+                <a:latin typeface="Microsoft YaHei"/>
+              </a:rPr>
+              <a:t>CVT-01 软件 RCU 显存整理证伪：</a:t>
+            </a:r>
+            <a:r>
+              <a:rPr sz="1150" b="1">
+                <a:solidFill>
+                  <a:srgbClr val="0F172A"/>
+                </a:solidFill>
+                <a:latin typeface="Microsoft YaHei"/>
+              </a:rPr>
+              <a:t>软件 RCU 在 32 并发 Reader 下读停顿 </a:t>
+            </a:r>
+            <a:r>
+              <a:rPr sz="1150" b="1">
+                <a:solidFill>
+                  <a:srgbClr val="DC2626"/>
+                </a:solidFill>
+                <a:latin typeface="Microsoft YaHei"/>
+              </a:rPr>
+              <a:t>P99 &lt; 1ms</a:t>
+            </a:r>
+            <a:r>
+              <a:rPr sz="1150" b="1">
+                <a:solidFill>
+                  <a:srgbClr val="0F172A"/>
+                </a:solidFill>
+                <a:latin typeface="Microsoft YaHei"/>
+              </a:rPr>
+              <a:t>，TPOT 抖动 </a:t>
+            </a:r>
+            <a:r>
+              <a:rPr sz="1150" b="1">
+                <a:solidFill>
+                  <a:srgbClr val="DC2626"/>
+                </a:solidFill>
+                <a:latin typeface="Microsoft YaHei"/>
+              </a:rPr>
+              <a:t>&lt;3%</a:t>
+            </a:r>
+            <a:r>
+              <a:rPr sz="1150" b="1">
+                <a:solidFill>
+                  <a:srgbClr val="0F172A"/>
+                </a:solidFill>
+                <a:latin typeface="Microsoft YaHei"/>
+              </a:rPr>
+              <a:t>，成功证伪专有硬件 AtomicRemap 芯片依赖，确立纯软件高效显存整理架构。</a:t>
+            </a:r>
+          </a:p>
+        </p:txBody>
+      </p:sp>
+    </p:spTree>
+  </p:cSld>
+  <p:clrMapOvr>
+    <a:masterClrMapping/>
+  </p:clrMapOvr>
+</p:sld>
+</file>
+
+<file path=ppt/slides/slide15.xml><?xml version="1.0" encoding="utf-8"?>
+<p:sld xmlns:a="http://schemas.openxmlformats.org/drawingml/2006/main" xmlns:p="http://schemas.openxmlformats.org/presentationml/2006/main" xmlns:r="http://schemas.openxmlformats.org/officeDocument/2006/relationships">
+  <p:cSld>
+    <p:bg>
+      <p:bgPr>
+        <a:solidFill>
+          <a:srgbClr val="FFFFFF"/>
+        </a:solidFill>
+        <a:effectLst/>
+      </p:bgPr>
+    </p:bg>
+    <p:spTree>
+      <p:nvGrpSpPr>
+        <p:cNvPr id="1" name=""/>
+        <p:cNvGrpSpPr/>
+        <p:nvPr/>
+      </p:nvGrpSpPr>
+      <p:grpSpPr/>
+      <p:sp>
+        <p:nvSpPr>
+          <p:cNvPr id="2" name="TextBox 1"/>
+          <p:cNvSpPr txBox="1"/>
+          <p:nvPr/>
+        </p:nvSpPr>
+        <p:spPr>
+          <a:xfrm>
+            <a:off x="548640" y="594360"/>
+            <a:ext cx="10972800" cy="1005840"/>
+          </a:xfrm>
+          <a:prstGeom prst="rect">
+            <a:avLst/>
+          </a:prstGeom>
+          <a:noFill/>
+        </p:spPr>
+        <p:txBody>
+          <a:bodyPr wrap="square" lIns="0" tIns="0" rIns="0" bIns="0">
+            <a:spAutoFit/>
+          </a:bodyPr>
+          <a:lstStyle/>
+          <a:p>
+            <a:pPr>
+              <a:defRPr sz="2400" b="1">
+                <a:solidFill>
+                  <a:srgbClr val="1E3A8A"/>
+                </a:solidFill>
+                <a:latin typeface="Microsoft YaHei"/>
+              </a:defRPr>
+            </a:pPr>
+            <a:r>
+              <a:t>提前验证方案设计总结</a:t>
+            </a:r>
+          </a:p>
+          <a:p>
+            <a:pPr>
+              <a:spcBef>
+                <a:spcPts val="400"/>
+              </a:spcBef>
+              <a:defRPr sz="1200">
+                <a:solidFill>
+                  <a:srgbClr val="475569"/>
+                </a:solidFill>
+                <a:latin typeface="Microsoft YaHei"/>
+              </a:defRPr>
+            </a:pPr>
+            <a:r>
+              <a:t>基于开源底座深度重构 · 以客观实测数据为依据 · 摸清技术边界 · 保障系统落地</a:t>
+            </a:r>
+          </a:p>
+        </p:txBody>
+      </p:sp>
+      <p:sp>
+        <p:nvSpPr>
+          <p:cNvPr id="3" name="Rectangle 2"/>
+          <p:cNvSpPr/>
+          <p:nvPr/>
+        </p:nvSpPr>
+        <p:spPr>
+          <a:xfrm>
+            <a:off x="548640" y="1783080"/>
+            <a:ext cx="3474720" cy="3566160"/>
+          </a:xfrm>
+          <a:prstGeom prst="rect">
+            <a:avLst/>
+          </a:prstGeom>
+          <a:solidFill>
+            <a:srgbClr val="FFFFFF"/>
+          </a:solidFill>
+          <a:ln w="12700">
+            <a:solidFill>
+              <a:srgbClr val="BFDBFE"/>
+            </a:solidFill>
+          </a:ln>
+        </p:spPr>
+        <p:style>
+          <a:lnRef idx="1">
+            <a:schemeClr val="accent1"/>
+          </a:lnRef>
+          <a:fillRef idx="3">
+            <a:schemeClr val="accent1"/>
+          </a:fillRef>
+          <a:effectRef idx="2">
+            <a:schemeClr val="accent1"/>
+          </a:effectRef>
+          <a:fontRef idx="minor">
+            <a:schemeClr val="lt1"/>
+          </a:fontRef>
+        </p:style>
+        <p:txBody>
+          <a:bodyPr rtlCol="0" anchor="ctr"/>
+          <a:lstStyle/>
+          <a:p>
             <a:pPr algn="ctr"/>
+          </a:p>
+        </p:txBody>
+      </p:sp>
+      <p:sp>
+        <p:nvSpPr>
+          <p:cNvPr id="4" name="Rectangle 3"/>
+          <p:cNvSpPr/>
+          <p:nvPr/>
+        </p:nvSpPr>
+        <p:spPr>
+          <a:xfrm>
+            <a:off x="548640" y="1783080"/>
+            <a:ext cx="3474720" cy="329184"/>
+          </a:xfrm>
+          <a:prstGeom prst="rect">
+            <a:avLst/>
+          </a:prstGeom>
+          <a:solidFill>
+            <a:srgbClr val="1E3A8A"/>
+          </a:solidFill>
+          <a:ln>
+            <a:noFill/>
+          </a:ln>
+        </p:spPr>
+        <p:style>
+          <a:lnRef idx="1">
+            <a:schemeClr val="accent1"/>
+          </a:lnRef>
+          <a:fillRef idx="3">
+            <a:schemeClr val="accent1"/>
+          </a:fillRef>
+          <a:effectRef idx="2">
+            <a:schemeClr val="accent1"/>
+          </a:effectRef>
+          <a:fontRef idx="minor">
+            <a:schemeClr val="lt1"/>
+          </a:fontRef>
+        </p:style>
+        <p:txBody>
+          <a:bodyPr rtlCol="0" anchor="ctr"/>
+          <a:lstStyle/>
+          <a:p>
+            <a:pPr algn="ctr"/>
+          </a:p>
+        </p:txBody>
+      </p:sp>
+      <p:sp>
+        <p:nvSpPr>
+          <p:cNvPr id="5" name="TextBox 4"/>
+          <p:cNvSpPr txBox="1"/>
+          <p:nvPr/>
+        </p:nvSpPr>
+        <p:spPr>
+          <a:xfrm>
+            <a:off x="658368" y="1819656"/>
+            <a:ext cx="3255264" cy="256032"/>
+          </a:xfrm>
+          <a:prstGeom prst="rect">
+            <a:avLst/>
+          </a:prstGeom>
+          <a:noFill/>
+        </p:spPr>
+        <p:txBody>
+          <a:bodyPr wrap="none" lIns="0" tIns="0" rIns="0" bIns="0">
+            <a:spAutoFit/>
+          </a:bodyPr>
+          <a:lstStyle/>
+          <a:p>
+            <a:pPr>
+              <a:defRPr sz="1200" b="1">
+                <a:solidFill>
+                  <a:srgbClr val="FFFFFF"/>
+                </a:solidFill>
+                <a:latin typeface="Microsoft YaHei"/>
+              </a:defRPr>
+            </a:pPr>
+            <a:r>
+              <a:t>原则一：开源基线实测驱动</a:t>
+            </a:r>
+            <a:r>
+              <a:rPr sz="1000" b="1">
+                <a:solidFill>
+                  <a:srgbClr val="BFDBFE"/>
+                </a:solidFill>
+                <a:latin typeface="Microsoft YaHei"/>
+              </a:rPr>
+              <a:t>  [数据对账]</a:t>
+            </a:r>
+          </a:p>
+        </p:txBody>
+      </p:sp>
+      <p:sp>
+        <p:nvSpPr>
+          <p:cNvPr id="6" name="TextBox 5"/>
+          <p:cNvSpPr txBox="1"/>
+          <p:nvPr/>
+        </p:nvSpPr>
+        <p:spPr>
+          <a:xfrm>
+            <a:off x="694944" y="2185416"/>
+            <a:ext cx="3182112" cy="3090672"/>
+          </a:xfrm>
+          <a:prstGeom prst="rect">
+            <a:avLst/>
+          </a:prstGeom>
+          <a:noFill/>
+        </p:spPr>
+        <p:txBody>
+          <a:bodyPr wrap="square" lIns="0" tIns="0" rIns="0" bIns="0">
+            <a:spAutoFit/>
+          </a:bodyPr>
+          <a:lstStyle/>
+          <a:p>
+            <a:pPr>
+              <a:lnSpc>
+                <a:spcPct val="120000"/>
+              </a:lnSpc>
+              <a:spcAft>
+                <a:spcPts val="600"/>
+              </a:spcAft>
+            </a:pPr>
+            <a:r>
+              <a:rPr sz="1150" b="1">
+                <a:solidFill>
+                  <a:srgbClr val="1E3A8A"/>
+                </a:solidFill>
+                <a:latin typeface="Microsoft YaHei"/>
+              </a:rPr>
+              <a:t>• 拒绝纸面空想：</a:t>
+            </a:r>
+            <a:r>
+              <a:rPr sz="1150">
+                <a:solidFill>
+                  <a:srgbClr val="1E293B"/>
+                </a:solidFill>
+                <a:latin typeface="Microsoft YaHei"/>
+              </a:rPr>
+              <a:t>所有技术结论必须基于 2 节点集群、vLLM benchmark_serving 在线打流实测数据与打点日志。</a:t>
+            </a:r>
+          </a:p>
+          <a:p>
+            <a:pPr>
+              <a:lnSpc>
+                <a:spcPct val="120000"/>
+              </a:lnSpc>
+              <a:spcAft>
+                <a:spcPts val="600"/>
+              </a:spcAft>
+            </a:pPr>
+            <a:r>
+              <a:rPr sz="1150" b="1">
+                <a:solidFill>
+                  <a:srgbClr val="1E3A8A"/>
+                </a:solidFill>
+                <a:latin typeface="Microsoft YaHei"/>
+              </a:rPr>
+              <a:t>• 全流程数据留痕：</a:t>
+            </a:r>
+            <a:r>
+              <a:rPr sz="1150">
+                <a:solidFill>
+                  <a:srgbClr val="1E293B"/>
+                </a:solidFill>
+                <a:latin typeface="Microsoft YaHei"/>
+              </a:rPr>
+              <a:t>记录每次测试的输入规模、硬件配置、时延与带宽原始 CSV 数据。</a:t>
+            </a:r>
+          </a:p>
+          <a:p>
+            <a:pPr>
+              <a:lnSpc>
+                <a:spcPct val="120000"/>
+              </a:lnSpc>
+              <a:spcAft>
+                <a:spcPts val="600"/>
+              </a:spcAft>
+            </a:pPr>
+            <a:r>
+              <a:rPr sz="1150" b="1">
+                <a:solidFill>
+                  <a:srgbClr val="1E3A8A"/>
+                </a:solidFill>
+                <a:latin typeface="Microsoft YaHei"/>
+              </a:rPr>
+              <a:t>• 三重消融交叉对账：</a:t>
+            </a:r>
+            <a:r>
+              <a:rPr sz="1150">
+                <a:solidFill>
+                  <a:srgbClr val="1E293B"/>
+                </a:solidFill>
+                <a:latin typeface="Microsoft YaHei"/>
+              </a:rPr>
+              <a:t>成本模型预估耗时与实际执行耗时进行交叉对比，检验模型精度。</a:t>
+            </a:r>
+          </a:p>
+        </p:txBody>
+      </p:sp>
+      <p:sp>
+        <p:nvSpPr>
+          <p:cNvPr id="7" name="Rectangle 6"/>
+          <p:cNvSpPr/>
+          <p:nvPr/>
+        </p:nvSpPr>
+        <p:spPr>
+          <a:xfrm>
+            <a:off x="4449470" y="1783080"/>
+            <a:ext cx="3474720" cy="3566160"/>
+          </a:xfrm>
+          <a:prstGeom prst="rect">
+            <a:avLst/>
+          </a:prstGeom>
+          <a:solidFill>
+            <a:srgbClr val="FFFFFF"/>
+          </a:solidFill>
+          <a:ln w="12700">
+            <a:solidFill>
+              <a:srgbClr val="BFDBFE"/>
+            </a:solidFill>
+          </a:ln>
+        </p:spPr>
+        <p:style>
+          <a:lnRef idx="1">
+            <a:schemeClr val="accent1"/>
+          </a:lnRef>
+          <a:fillRef idx="3">
+            <a:schemeClr val="accent1"/>
+          </a:fillRef>
+          <a:effectRef idx="2">
+            <a:schemeClr val="accent1"/>
+          </a:effectRef>
+          <a:fontRef idx="minor">
+            <a:schemeClr val="lt1"/>
+          </a:fontRef>
+        </p:style>
+        <p:txBody>
+          <a:bodyPr rtlCol="0" anchor="ctr"/>
+          <a:lstStyle/>
+          <a:p>
+            <a:pPr algn="ctr"/>
+          </a:p>
+        </p:txBody>
+      </p:sp>
+      <p:sp>
+        <p:nvSpPr>
+          <p:cNvPr id="8" name="Rectangle 7"/>
+          <p:cNvSpPr/>
+          <p:nvPr/>
+        </p:nvSpPr>
+        <p:spPr>
+          <a:xfrm>
+            <a:off x="4449470" y="1783080"/>
+            <a:ext cx="3474720" cy="329184"/>
+          </a:xfrm>
+          <a:prstGeom prst="rect">
+            <a:avLst/>
+          </a:prstGeom>
+          <a:solidFill>
+            <a:srgbClr val="1E3A8A"/>
+          </a:solidFill>
+          <a:ln>
+            <a:noFill/>
+          </a:ln>
+        </p:spPr>
+        <p:style>
+          <a:lnRef idx="1">
+            <a:schemeClr val="accent1"/>
+          </a:lnRef>
+          <a:fillRef idx="3">
+            <a:schemeClr val="accent1"/>
+          </a:fillRef>
+          <a:effectRef idx="2">
+            <a:schemeClr val="accent1"/>
+          </a:effectRef>
+          <a:fontRef idx="minor">
+            <a:schemeClr val="lt1"/>
+          </a:fontRef>
+        </p:style>
+        <p:txBody>
+          <a:bodyPr rtlCol="0" anchor="ctr"/>
+          <a:lstStyle/>
+          <a:p>
+            <a:pPr algn="ctr"/>
+          </a:p>
+        </p:txBody>
+      </p:sp>
+      <p:sp>
+        <p:nvSpPr>
+          <p:cNvPr id="9" name="TextBox 8"/>
+          <p:cNvSpPr txBox="1"/>
+          <p:nvPr/>
+        </p:nvSpPr>
+        <p:spPr>
+          <a:xfrm>
+            <a:off x="4559198" y="1819656"/>
+            <a:ext cx="3255264" cy="256032"/>
+          </a:xfrm>
+          <a:prstGeom prst="rect">
+            <a:avLst/>
+          </a:prstGeom>
+          <a:noFill/>
+        </p:spPr>
+        <p:txBody>
+          <a:bodyPr wrap="none" lIns="0" tIns="0" rIns="0" bIns="0">
+            <a:spAutoFit/>
+          </a:bodyPr>
+          <a:lstStyle/>
+          <a:p>
+            <a:pPr>
+              <a:defRPr sz="1200" b="1">
+                <a:solidFill>
+                  <a:srgbClr val="FFFFFF"/>
+                </a:solidFill>
+                <a:latin typeface="Microsoft YaHei"/>
+              </a:defRPr>
+            </a:pPr>
+            <a:r>
+              <a:t>原则二：软硬协同与技术收敛</a:t>
+            </a:r>
+            <a:r>
+              <a:rPr sz="1000" b="1">
+                <a:solidFill>
+                  <a:srgbClr val="BFDBFE"/>
+                </a:solidFill>
+                <a:latin typeface="Microsoft YaHei"/>
+              </a:rPr>
+              <a:t>  [方案选型]</a:t>
+            </a:r>
+          </a:p>
+        </p:txBody>
+      </p:sp>
+      <p:sp>
+        <p:nvSpPr>
+          <p:cNvPr id="10" name="TextBox 9"/>
+          <p:cNvSpPr txBox="1"/>
+          <p:nvPr/>
+        </p:nvSpPr>
+        <p:spPr>
+          <a:xfrm>
+            <a:off x="4595774" y="2185416"/>
+            <a:ext cx="3182112" cy="3090672"/>
+          </a:xfrm>
+          <a:prstGeom prst="rect">
+            <a:avLst/>
+          </a:prstGeom>
+          <a:noFill/>
+        </p:spPr>
+        <p:txBody>
+          <a:bodyPr wrap="square" lIns="0" tIns="0" rIns="0" bIns="0">
+            <a:spAutoFit/>
+          </a:bodyPr>
+          <a:lstStyle/>
+          <a:p>
+            <a:pPr>
+              <a:lnSpc>
+                <a:spcPct val="120000"/>
+              </a:lnSpc>
+              <a:spcAft>
+                <a:spcPts val="600"/>
+              </a:spcAft>
+            </a:pPr>
+            <a:r>
+              <a:rPr sz="1150" b="1">
+                <a:solidFill>
+                  <a:srgbClr val="1E3A8A"/>
+                </a:solidFill>
+                <a:latin typeface="Microsoft YaHei"/>
+              </a:rPr>
+              <a:t>• 发挥底层硬件优势：</a:t>
+            </a:r>
+            <a:r>
+              <a:rPr sz="1150">
+                <a:solidFill>
+                  <a:srgbClr val="1E293B"/>
+                </a:solidFill>
+                <a:latin typeface="Microsoft YaHei"/>
+              </a:rPr>
+              <a:t>借助 UBMEM 总线、URMA DMA 与 io_uring FIXED I/O 裸盘直达，消除 Host CPU 拷贝瓶颈。</a:t>
+            </a:r>
+          </a:p>
+          <a:p>
+            <a:pPr>
+              <a:lnSpc>
+                <a:spcPct val="120000"/>
+              </a:lnSpc>
+              <a:spcAft>
+                <a:spcPts val="600"/>
+              </a:spcAft>
+            </a:pPr>
+            <a:r>
+              <a:rPr sz="1150" b="1">
+                <a:solidFill>
+                  <a:srgbClr val="1E3A8A"/>
+                </a:solidFill>
+                <a:latin typeface="Microsoft YaHei"/>
+              </a:rPr>
+              <a:t>• 科学剪除硬件依赖：</a:t>
+            </a:r>
+            <a:r>
+              <a:rPr sz="1150">
+                <a:solidFill>
+                  <a:srgbClr val="1E293B"/>
+                </a:solidFill>
+                <a:latin typeface="Microsoft YaHei"/>
+              </a:rPr>
+              <a:t>证实软件树状中继组播、软件 RCU 与纯软 Raw Direct 的可用性，降低系统外部依赖风险。</a:t>
+            </a:r>
+          </a:p>
+          <a:p>
+            <a:pPr>
+              <a:lnSpc>
+                <a:spcPct val="120000"/>
+              </a:lnSpc>
+              <a:spcAft>
+                <a:spcPts val="600"/>
+              </a:spcAft>
+            </a:pPr>
+            <a:r>
+              <a:rPr sz="1150" b="1">
+                <a:solidFill>
+                  <a:srgbClr val="1E3A8A"/>
+                </a:solidFill>
+                <a:latin typeface="Microsoft YaHei"/>
+              </a:rPr>
+              <a:t>• 坚守生产级稳定性：</a:t>
+            </a:r>
+            <a:r>
+              <a:rPr sz="1150">
+                <a:solidFill>
+                  <a:srgbClr val="1E293B"/>
+                </a:solidFill>
+                <a:latin typeface="Microsoft YaHei"/>
+              </a:rPr>
+              <a:t>ViewGuard 异常保护与 6 维语义校验确保系统在各类异常下平稳运行、0 死锁。</a:t>
+            </a:r>
+          </a:p>
+        </p:txBody>
+      </p:sp>
+      <p:sp>
+        <p:nvSpPr>
+          <p:cNvPr id="11" name="Rectangle 10"/>
+          <p:cNvSpPr/>
+          <p:nvPr/>
+        </p:nvSpPr>
+        <p:spPr>
+          <a:xfrm>
+            <a:off x="8350300" y="1783080"/>
+            <a:ext cx="3474720" cy="3566160"/>
+          </a:xfrm>
+          <a:prstGeom prst="rect">
+            <a:avLst/>
+          </a:prstGeom>
+          <a:solidFill>
+            <a:srgbClr val="FFFFFF"/>
+          </a:solidFill>
+          <a:ln w="12700">
+            <a:solidFill>
+              <a:srgbClr val="BFDBFE"/>
+            </a:solidFill>
+          </a:ln>
+        </p:spPr>
+        <p:style>
+          <a:lnRef idx="1">
+            <a:schemeClr val="accent1"/>
+          </a:lnRef>
+          <a:fillRef idx="3">
+            <a:schemeClr val="accent1"/>
+          </a:fillRef>
+          <a:effectRef idx="2">
+            <a:schemeClr val="accent1"/>
+          </a:effectRef>
+          <a:fontRef idx="minor">
+            <a:schemeClr val="lt1"/>
+          </a:fontRef>
+        </p:style>
+        <p:txBody>
+          <a:bodyPr rtlCol="0" anchor="ctr"/>
+          <a:lstStyle/>
+          <a:p>
+            <a:pPr algn="ctr"/>
+          </a:p>
+        </p:txBody>
+      </p:sp>
+      <p:sp>
+        <p:nvSpPr>
+          <p:cNvPr id="12" name="Rectangle 11"/>
+          <p:cNvSpPr/>
+          <p:nvPr/>
+        </p:nvSpPr>
+        <p:spPr>
+          <a:xfrm>
+            <a:off x="8350300" y="1783080"/>
+            <a:ext cx="3474720" cy="329184"/>
+          </a:xfrm>
+          <a:prstGeom prst="rect">
+            <a:avLst/>
+          </a:prstGeom>
+          <a:solidFill>
+            <a:srgbClr val="6D28D9"/>
+          </a:solidFill>
+          <a:ln>
+            <a:noFill/>
+          </a:ln>
+        </p:spPr>
+        <p:style>
+          <a:lnRef idx="1">
+            <a:schemeClr val="accent1"/>
+          </a:lnRef>
+          <a:fillRef idx="3">
+            <a:schemeClr val="accent1"/>
+          </a:fillRef>
+          <a:effectRef idx="2">
+            <a:schemeClr val="accent1"/>
+          </a:effectRef>
+          <a:fontRef idx="minor">
+            <a:schemeClr val="lt1"/>
+          </a:fontRef>
+        </p:style>
+        <p:txBody>
+          <a:bodyPr rtlCol="0" anchor="ctr"/>
+          <a:lstStyle/>
+          <a:p>
+            <a:pPr algn="ctr"/>
+          </a:p>
+        </p:txBody>
+      </p:sp>
+      <p:sp>
+        <p:nvSpPr>
+          <p:cNvPr id="13" name="TextBox 12"/>
+          <p:cNvSpPr txBox="1"/>
+          <p:nvPr/>
+        </p:nvSpPr>
+        <p:spPr>
+          <a:xfrm>
+            <a:off x="8460028" y="1819656"/>
+            <a:ext cx="3255264" cy="256032"/>
+          </a:xfrm>
+          <a:prstGeom prst="rect">
+            <a:avLst/>
+          </a:prstGeom>
+          <a:noFill/>
+        </p:spPr>
+        <p:txBody>
+          <a:bodyPr wrap="none" lIns="0" tIns="0" rIns="0" bIns="0">
+            <a:spAutoFit/>
+          </a:bodyPr>
+          <a:lstStyle/>
+          <a:p>
+            <a:pPr>
+              <a:defRPr sz="1200" b="1">
+                <a:solidFill>
+                  <a:srgbClr val="FFFFFF"/>
+                </a:solidFill>
+                <a:latin typeface="Microsoft YaHei"/>
+              </a:defRPr>
+            </a:pPr>
+            <a:r>
+              <a:t>原则三：量化验收与闭环</a:t>
+            </a:r>
+            <a:r>
+              <a:rPr sz="1000" b="1">
+                <a:solidFill>
+                  <a:srgbClr val="BFDBFE"/>
+                </a:solidFill>
+                <a:latin typeface="Microsoft YaHei"/>
+              </a:rPr>
+              <a:t>  [验收要求]</a:t>
+            </a:r>
+          </a:p>
+        </p:txBody>
+      </p:sp>
+      <p:sp>
+        <p:nvSpPr>
+          <p:cNvPr id="14" name="TextBox 13"/>
+          <p:cNvSpPr txBox="1"/>
+          <p:nvPr/>
+        </p:nvSpPr>
+        <p:spPr>
+          <a:xfrm>
+            <a:off x="8496604" y="2185416"/>
+            <a:ext cx="3182112" cy="3090672"/>
+          </a:xfrm>
+          <a:prstGeom prst="rect">
+            <a:avLst/>
+          </a:prstGeom>
+          <a:noFill/>
+        </p:spPr>
+        <p:txBody>
+          <a:bodyPr wrap="square" lIns="0" tIns="0" rIns="0" bIns="0">
+            <a:spAutoFit/>
+          </a:bodyPr>
+          <a:lstStyle/>
+          <a:p>
+            <a:pPr>
+              <a:lnSpc>
+                <a:spcPct val="120000"/>
+              </a:lnSpc>
+              <a:spcAft>
+                <a:spcPts val="600"/>
+              </a:spcAft>
+            </a:pPr>
+            <a:r>
+              <a:rPr sz="1150" b="1">
+                <a:solidFill>
+                  <a:srgbClr val="1E3A8A"/>
+                </a:solidFill>
+                <a:latin typeface="Microsoft YaHei"/>
+              </a:rPr>
+              <a:t>• 严格执行达标门限：</a:t>
+            </a:r>
+            <a:r>
+              <a:rPr sz="1150">
+                <a:solidFill>
+                  <a:srgbClr val="1E293B"/>
+                </a:solidFill>
+                <a:latin typeface="Microsoft YaHei"/>
+              </a:rPr>
+              <a:t>全链路 P99 TTFT 降低 ≥20%、系统吞吐提升 ≥10%、前台抖动 &lt;3% 等关键指标必须达标。</a:t>
+            </a:r>
+          </a:p>
+          <a:p>
+            <a:pPr>
+              <a:lnSpc>
+                <a:spcPct val="120000"/>
+              </a:lnSpc>
+              <a:spcAft>
+                <a:spcPts val="600"/>
+              </a:spcAft>
+            </a:pPr>
+            <a:r>
+              <a:rPr sz="1150" b="1">
+                <a:solidFill>
+                  <a:srgbClr val="1E3A8A"/>
+                </a:solidFill>
+                <a:latin typeface="Microsoft YaHei"/>
+              </a:rPr>
+              <a:t>• 产出完整技术证据包：</a:t>
+            </a:r>
+            <a:r>
+              <a:rPr sz="1150" b="1">
+                <a:solidFill>
+                  <a:srgbClr val="DC2626"/>
+                </a:solidFill>
+                <a:latin typeface="Microsoft YaHei"/>
+              </a:rPr>
+              <a:t>形成包含测试源码、环境配置、实测数据与分析结论的完整立项证据包。</a:t>
+            </a:r>
+          </a:p>
+        </p:txBody>
+      </p:sp>
+      <p:sp>
+        <p:nvSpPr>
+          <p:cNvPr id="15" name="Rectangle 14"/>
+          <p:cNvSpPr/>
+          <p:nvPr/>
+        </p:nvSpPr>
+        <p:spPr>
+          <a:xfrm>
+            <a:off x="548640" y="5669280"/>
+            <a:ext cx="11094415" cy="713232"/>
+          </a:xfrm>
+          <a:prstGeom prst="rect">
+            <a:avLst/>
+          </a:prstGeom>
+          <a:solidFill>
+            <a:srgbClr val="FFFFFF"/>
+          </a:solidFill>
+          <a:ln w="15240">
+            <a:solidFill>
+              <a:srgbClr val="BFDBFE"/>
+            </a:solidFill>
+          </a:ln>
+        </p:spPr>
+        <p:style>
+          <a:lnRef idx="1">
+            <a:schemeClr val="accent1"/>
+          </a:lnRef>
+          <a:fillRef idx="3">
+            <a:schemeClr val="accent1"/>
+          </a:fillRef>
+          <a:effectRef idx="2">
+            <a:schemeClr val="accent1"/>
+          </a:effectRef>
+          <a:fontRef idx="minor">
+            <a:schemeClr val="lt1"/>
+          </a:fontRef>
+        </p:style>
+        <p:txBody>
+          <a:bodyPr rtlCol="0" anchor="ctr"/>
+          <a:lstStyle/>
+          <a:p>
+            <a:pPr algn="ctr"/>
+          </a:p>
+        </p:txBody>
+      </p:sp>
+      <p:sp>
+        <p:nvSpPr>
+          <p:cNvPr id="16" name="Rectangle 15"/>
+          <p:cNvSpPr/>
+          <p:nvPr/>
+        </p:nvSpPr>
+        <p:spPr>
+          <a:xfrm>
+            <a:off x="548640" y="5669280"/>
+            <a:ext cx="73152" cy="713232"/>
+          </a:xfrm>
+          <a:prstGeom prst="rect">
+            <a:avLst/>
+          </a:prstGeom>
+          <a:solidFill>
+            <a:srgbClr val="1E3A8A"/>
+          </a:solidFill>
+          <a:ln>
+            <a:noFill/>
+          </a:ln>
+        </p:spPr>
+        <p:style>
+          <a:lnRef idx="1">
+            <a:schemeClr val="accent1"/>
+          </a:lnRef>
+          <a:fillRef idx="3">
+            <a:schemeClr val="accent1"/>
+          </a:fillRef>
+          <a:effectRef idx="2">
+            <a:schemeClr val="accent1"/>
+          </a:effectRef>
+          <a:fontRef idx="minor">
+            <a:schemeClr val="lt1"/>
+          </a:fontRef>
+        </p:style>
+        <p:txBody>
+          <a:bodyPr rtlCol="0" anchor="ctr"/>
+          <a:lstStyle/>
+          <a:p>
+            <a:pPr algn="ctr"/>
+          </a:p>
+        </p:txBody>
+      </p:sp>
+      <p:sp>
+        <p:nvSpPr>
+          <p:cNvPr id="17" name="TextBox 16"/>
+          <p:cNvSpPr txBox="1"/>
+          <p:nvPr/>
+        </p:nvSpPr>
+        <p:spPr>
+          <a:xfrm>
+            <a:off x="731520" y="5779008"/>
+            <a:ext cx="10820095" cy="530352"/>
+          </a:xfrm>
+          <a:prstGeom prst="rect">
+            <a:avLst/>
+          </a:prstGeom>
+          <a:noFill/>
+        </p:spPr>
+        <p:txBody>
+          <a:bodyPr wrap="square" lIns="0" tIns="0" rIns="0" bIns="0">
+            <a:spAutoFit/>
+          </a:bodyPr>
+          <a:lstStyle/>
+          <a:p>
+            <a:pPr algn="ctr"/>
             <a:r>
               <a:rPr sz="1300" b="1">
                 <a:solidFill>
@@ -11627,7 +13085,7 @@
                 </a:solidFill>
                 <a:latin typeface="Microsoft YaHei"/>
               </a:rPr>
-              <a:t>提前验证方案设计与部署打流套件已就绪，接下来将全面开展 10 PVT + 1 CVT 真实打流对账工作。</a:t>
+              <a:t>提前验证方案设计与部署打流套件已就绪，接下来将全面开展 11 PVT + 1 CVT 真实打流对账工作。</a:t>
             </a:r>
           </a:p>
         </p:txBody>
@@ -11689,7 +13147,7 @@
               </a:defRPr>
             </a:pPr>
             <a:r>
-              <a:t>提前验证总体目标、10 PVT + 1 CVT 体系与验证准则</a:t>
+              <a:t>提前验证总体目标、11 PVT + 1 CVT 体系与验证准则</a:t>
             </a:r>
           </a:p>
           <a:p>
@@ -11741,7 +13199,7 @@
               </a:defRPr>
             </a:pPr>
             <a:r>
-              <a:t>第 02 / 14 页</a:t>
+              <a:t>第 02 / 15 页</a:t>
             </a:r>
           </a:p>
         </p:txBody>
@@ -11874,7 +13332,7 @@
                 </a:solidFill>
                 <a:latin typeface="Microsoft YaHei"/>
               </a:rPr>
-              <a:t>  [10 PVT + 1 CVT]</a:t>
+              <a:t>  [11 PVT + 1 CVT]</a:t>
             </a:r>
           </a:p>
         </p:txBody>
@@ -11925,7 +13383,7 @@
                 </a:solidFill>
                 <a:latin typeface="Microsoft YaHei"/>
               </a:rPr>
-              <a:t>测定 DeepSeek MLA (~35KB/tok) 与 Qwen MHA (320KB/tok) 在各复用率下的 Saved-Prefill 净收益（</a:t>
+              <a:t>测定 MLA 与 MHA 在各复用率下的 Saved-Prefill 净收益（</a:t>
             </a:r>
             <a:r>
               <a:rPr sz="1100" b="1">
@@ -11980,7 +13438,7 @@
                 </a:solidFill>
                 <a:latin typeface="Microsoft YaHei"/>
               </a:rPr>
-              <a:t>【阶段 E1 通路与多卡同步】 P0 PVT-02/06 | P1 PVT-01/09 | P2 PVT-08：</a:t>
+              <a:t>【阶段 E1 通路与多卡同步】 P0 PVT-02/06/10 | P1 PVT-01/09 | P2 PVT-08：</a:t>
             </a:r>
             <a:r>
               <a:rPr sz="1100">
@@ -12007,7 +13465,7 @@
                 </a:solidFill>
                 <a:latin typeface="Microsoft YaHei"/>
               </a:rPr>
-              <a:t>；C++ 描述符开销降低 ≥40%、异步重叠 ≥60%；6 维语义校验 0 错误消费；TP=8 多卡同步 P99&lt;100µs；DPU 双轨 500µs 降级；软件组播带宽节省 ≥60%。</a:t>
+              <a:t>；C++ 描述符开销降 ≥40%；6 维语义 0 错误消费；TP=8 多卡同步 P99&lt;100µs；Incast 动力学与 Coflow 偏斜 &lt;1.15；DPU 500µs 降级；软件组播节省 ≥60%。</a:t>
             </a:r>
           </a:p>
           <a:p>
@@ -12035,7 +13493,7 @@
                 </a:solidFill>
                 <a:latin typeface="Microsoft YaHei"/>
               </a:rPr>
-              <a:t>测定远端直读边界；</a:t>
+              <a:t>测定直读边界；</a:t>
             </a:r>
             <a:r>
               <a:rPr sz="1100" b="1">
@@ -12053,7 +13511,7 @@
                 </a:solidFill>
                 <a:latin typeface="Microsoft YaHei"/>
               </a:rPr>
-              <a:t>；io_uring 裸盘直达在 150% 超载下服务容量提升 ≥30%、OOM 降低 ≥50%。</a:t>
+              <a:t>；io_uring 裸盘直达在 150% 超载下容量提升 ≥30%、OOM 降低 ≥50%。</a:t>
             </a:r>
           </a:p>
           <a:p>
@@ -12090,7 +13548,7 @@
                 </a:solidFill>
                 <a:latin typeface="Microsoft YaHei"/>
               </a:rPr>
-              <a:t>P99 TTFT 降低 ≥20%</a:t>
+              <a:t>P99 TTFT 降 ≥20%</a:t>
             </a:r>
             <a:r>
               <a:rPr sz="1100">
@@ -12145,7 +13603,7 @@
                 </a:solidFill>
                 <a:latin typeface="Microsoft YaHei"/>
               </a:rPr>
-              <a:t>验证软件 RCU 机制显存整理读停顿 &lt; 1ms、TPOT 抖动 &lt; 3%，成功证伪专有硬件 AtomicRemap 芯片依赖。</a:t>
+              <a:t>验证软件 RCU 显存整理读停顿 &lt; 1ms (TPOT 抖动 &lt; 3%)，证伪硬件 AtomicRemap 依赖。</a:t>
             </a:r>
           </a:p>
         </p:txBody>
@@ -12569,7 +14027,7 @@
                 </a:solidFill>
                 <a:latin typeface="Microsoft YaHei"/>
               </a:rPr>
-              <a:t>基于 Mooncake Master + vLLM-Ascend 2 节点真实集群，运行官方 benchmark_serving 发送在线多并发流量。</a:t>
+              <a:t>在 Mooncake+vLLM 2 节点集群上运行 benchmark_serving 发送在线多并发流量。</a:t>
             </a:r>
           </a:p>
           <a:p>
@@ -12625,7 +14083,7 @@
                 </a:solidFill>
                 <a:latin typeface="Microsoft YaHei"/>
               </a:rPr>
-              <a:t>聚焦 5 大 P0 核心决胜项（描述符编译、微秒决策、裸盘直达、多卡同步、混压门禁），彻底攻克技术瓶颈。</a:t>
+              <a:t>聚焦 6 大 P0 核心决胜项（描述符编译、微秒决策、裸盘直达、多卡同步、混压门禁、Incast/Coflow），彻底攻克技术瓶颈。</a:t>
             </a:r>
           </a:p>
         </p:txBody>
@@ -12770,7 +14228,7 @@
                 </a:solidFill>
                 <a:latin typeface="Microsoft YaHei"/>
               </a:rPr>
-              <a:t>围绕四个核心验证阶段，通过 10 PVT + 1 CVT 摸清软硬件性能边界，</a:t>
+              <a:t>围绕四个核心验证阶段，通过 11 PVT + 1 CVT 摸清软硬件性能边界，</a:t>
             </a:r>
             <a:r>
               <a:rPr sz="1150" b="1">
@@ -12902,7 +14360,7 @@
               </a:defRPr>
             </a:pPr>
             <a:r>
-              <a:t>第 03 / 14 页</a:t>
+              <a:t>第 03 / 15 页</a:t>
             </a:r>
           </a:p>
         </p:txBody>
@@ -14337,7 +15795,7 @@
               </a:defRPr>
             </a:pPr>
             <a:r>
-              <a:t>第 04 / 14 页</a:t>
+              <a:t>第 04 / 15 页</a:t>
             </a:r>
           </a:p>
         </p:txBody>
@@ -15746,7 +17204,7 @@
               </a:defRPr>
             </a:pPr>
             <a:r>
-              <a:t>第 05 / 14 页</a:t>
+              <a:t>第 05 / 15 页</a:t>
             </a:r>
           </a:p>
         </p:txBody>
@@ -17137,7 +18595,7 @@
               </a:defRPr>
             </a:pPr>
             <a:r>
-              <a:t>第 06 / 14 页</a:t>
+              <a:t>第 06 / 15 页</a:t>
             </a:r>
           </a:p>
         </p:txBody>
@@ -18427,7 +19885,7 @@
               </a:defRPr>
             </a:pPr>
             <a:r>
-              <a:t>第 07 / 14 页</a:t>
+              <a:t>第 07 / 15 页</a:t>
             </a:r>
           </a:p>
         </p:txBody>
@@ -19764,7 +21222,7 @@
               </a:defRPr>
             </a:pPr>
             <a:r>
-              <a:t>第 08 / 14 页</a:t>
+              <a:t>第 08 / 15 页</a:t>
             </a:r>
           </a:p>
         </p:txBody>
@@ -21119,7 +22577,7 @@
               </a:defRPr>
             </a:pPr>
             <a:r>
-              <a:t>第 09 / 14 页</a:t>
+              <a:t>第 09 / 15 页</a:t>
             </a:r>
           </a:p>
         </p:txBody>
